--- a/source/Instructor Progress Test 1 Grams/Instructor Progress Test 1 Grams.pptx
+++ b/source/Instructor Progress Test 1 Grams/Instructor Progress Test 1 Grams.pptx
@@ -3142,11 +3142,11 @@
       </p:sp>
       <p:sp>
         <p:nvSpPr>
-          <p:cNvPr id="3" name="Rounded Rectangle 2"/>
+          <p:cNvPr id="3" name="Rounded Rectangle 2">
+            <a:hlinkClick r:id="rId2"/>
+          </p:cNvPr>
           <p:cNvSpPr/>
-          <p:nvPr>
-            <a:hlinkClick r:id="rId2"/>
-          </p:nvPr>
+          <p:nvPr/>
         </p:nvSpPr>
         <p:spPr>
           <a:xfrm>
@@ -3236,11 +3236,11 @@
       </p:sp>
       <p:sp>
         <p:nvSpPr>
-          <p:cNvPr id="5" name="Rounded Rectangle 4"/>
+          <p:cNvPr id="5" name="Rounded Rectangle 4">
+            <a:hlinkClick r:id="rId5"/>
+          </p:cNvPr>
           <p:cNvSpPr/>
-          <p:nvPr>
-            <a:hlinkClick r:id="rId5"/>
-          </p:nvPr>
+          <p:nvPr/>
         </p:nvSpPr>
         <p:spPr>
           <a:xfrm>
@@ -3322,11 +3322,11 @@
       </p:sp>
       <p:sp>
         <p:nvSpPr>
-          <p:cNvPr id="7" name="Rounded Rectangle 6"/>
+          <p:cNvPr id="7" name="Rounded Rectangle 6">
+            <a:hlinkClick r:id="rId7"/>
+          </p:cNvPr>
           <p:cNvSpPr/>
-          <p:nvPr>
-            <a:hlinkClick r:id="rId7"/>
-          </p:nvPr>
+          <p:nvPr/>
         </p:nvSpPr>
         <p:spPr>
           <a:xfrm>
@@ -3408,11 +3408,11 @@
       </p:sp>
       <p:sp>
         <p:nvSpPr>
-          <p:cNvPr id="9" name="Rounded Rectangle 8"/>
+          <p:cNvPr id="9" name="Rounded Rectangle 8">
+            <a:hlinkClick r:id="rId9"/>
+          </p:cNvPr>
           <p:cNvSpPr/>
-          <p:nvPr>
-            <a:hlinkClick r:id="rId9"/>
-          </p:nvPr>
+          <p:nvPr/>
         </p:nvSpPr>
         <p:spPr>
           <a:xfrm>
@@ -3494,11 +3494,11 @@
       </p:sp>
       <p:sp>
         <p:nvSpPr>
-          <p:cNvPr id="11" name="Rounded Rectangle 10"/>
+          <p:cNvPr id="11" name="Rounded Rectangle 10">
+            <a:hlinkClick r:id="rId11"/>
+          </p:cNvPr>
           <p:cNvSpPr/>
-          <p:nvPr>
-            <a:hlinkClick r:id="rId11"/>
-          </p:nvPr>
+          <p:nvPr/>
         </p:nvSpPr>
         <p:spPr>
           <a:xfrm>
@@ -3580,11 +3580,11 @@
       </p:sp>
       <p:sp>
         <p:nvSpPr>
-          <p:cNvPr id="13" name="Rounded Rectangle 12"/>
+          <p:cNvPr id="13" name="Rounded Rectangle 12">
+            <a:hlinkClick r:id="rId13"/>
+          </p:cNvPr>
           <p:cNvSpPr/>
-          <p:nvPr>
-            <a:hlinkClick r:id="rId13"/>
-          </p:nvPr>
+          <p:nvPr/>
         </p:nvSpPr>
         <p:spPr>
           <a:xfrm>
@@ -3674,11 +3674,11 @@
       </p:sp>
       <p:sp>
         <p:nvSpPr>
-          <p:cNvPr id="15" name="Rounded Rectangle 14"/>
+          <p:cNvPr id="15" name="Rounded Rectangle 14">
+            <a:hlinkClick r:id="rId16"/>
+          </p:cNvPr>
           <p:cNvSpPr/>
-          <p:nvPr>
-            <a:hlinkClick r:id="rId16"/>
-          </p:nvPr>
+          <p:nvPr/>
         </p:nvSpPr>
         <p:spPr>
           <a:xfrm>
@@ -3760,11 +3760,11 @@
       </p:sp>
       <p:sp>
         <p:nvSpPr>
-          <p:cNvPr id="17" name="Rounded Rectangle 16"/>
+          <p:cNvPr id="17" name="Rounded Rectangle 16">
+            <a:hlinkClick r:id="rId18"/>
+          </p:cNvPr>
           <p:cNvSpPr/>
-          <p:nvPr>
-            <a:hlinkClick r:id="rId18"/>
-          </p:nvPr>
+          <p:nvPr/>
         </p:nvSpPr>
         <p:spPr>
           <a:xfrm>
@@ -3846,11 +3846,11 @@
       </p:sp>
       <p:sp>
         <p:nvSpPr>
-          <p:cNvPr id="19" name="Rounded Rectangle 18"/>
+          <p:cNvPr id="19" name="Rounded Rectangle 18">
+            <a:hlinkClick r:id="rId20"/>
+          </p:cNvPr>
           <p:cNvSpPr/>
-          <p:nvPr>
-            <a:hlinkClick r:id="rId20"/>
-          </p:nvPr>
+          <p:nvPr/>
         </p:nvSpPr>
         <p:spPr>
           <a:xfrm>
@@ -3956,11 +3956,11 @@
       </p:sp>
       <p:sp>
         <p:nvSpPr>
-          <p:cNvPr id="21" name="Rounded Rectangle 20"/>
+          <p:cNvPr id="21" name="Rounded Rectangle 20">
+            <a:hlinkClick r:id="rId25"/>
+          </p:cNvPr>
           <p:cNvSpPr/>
-          <p:nvPr>
-            <a:hlinkClick r:id="rId25"/>
-          </p:nvPr>
+          <p:nvPr/>
         </p:nvSpPr>
         <p:spPr>
           <a:xfrm>
@@ -4050,11 +4050,11 @@
       </p:sp>
       <p:sp>
         <p:nvSpPr>
-          <p:cNvPr id="23" name="Rounded Rectangle 22"/>
+          <p:cNvPr id="23" name="Rounded Rectangle 22">
+            <a:hlinkClick r:id="rId28"/>
+          </p:cNvPr>
           <p:cNvSpPr/>
-          <p:nvPr>
-            <a:hlinkClick r:id="rId28"/>
-          </p:nvPr>
+          <p:nvPr/>
         </p:nvSpPr>
         <p:spPr>
           <a:xfrm>
@@ -4136,11 +4136,11 @@
       </p:sp>
       <p:sp>
         <p:nvSpPr>
-          <p:cNvPr id="25" name="Rounded Rectangle 24"/>
+          <p:cNvPr id="25" name="Rounded Rectangle 24">
+            <a:hlinkClick r:id="rId30"/>
+          </p:cNvPr>
           <p:cNvSpPr/>
-          <p:nvPr>
-            <a:hlinkClick r:id="rId30"/>
-          </p:nvPr>
+          <p:nvPr/>
         </p:nvSpPr>
         <p:spPr>
           <a:xfrm>
@@ -4246,11 +4246,11 @@
       </p:sp>
       <p:sp>
         <p:nvSpPr>
-          <p:cNvPr id="27" name="Rounded Rectangle 26"/>
+          <p:cNvPr id="27" name="Rounded Rectangle 26">
+            <a:hlinkClick r:id="rId35"/>
+          </p:cNvPr>
           <p:cNvSpPr/>
-          <p:nvPr>
-            <a:hlinkClick r:id="rId35"/>
-          </p:nvPr>
+          <p:nvPr/>
         </p:nvSpPr>
         <p:spPr>
           <a:xfrm>
@@ -4340,11 +4340,11 @@
       </p:sp>
       <p:sp>
         <p:nvSpPr>
-          <p:cNvPr id="29" name="Rounded Rectangle 28"/>
+          <p:cNvPr id="29" name="Rounded Rectangle 28">
+            <a:hlinkClick r:id="rId38"/>
+          </p:cNvPr>
           <p:cNvSpPr/>
-          <p:nvPr>
-            <a:hlinkClick r:id="rId38"/>
-          </p:nvPr>
+          <p:nvPr/>
         </p:nvSpPr>
         <p:spPr>
           <a:xfrm>
@@ -4450,11 +4450,11 @@
       </p:sp>
       <p:sp>
         <p:nvSpPr>
-          <p:cNvPr id="31" name="Rounded Rectangle 30"/>
+          <p:cNvPr id="31" name="Rounded Rectangle 30">
+            <a:hlinkClick r:id="rId43"/>
+          </p:cNvPr>
           <p:cNvSpPr/>
-          <p:nvPr>
-            <a:hlinkClick r:id="rId43"/>
-          </p:nvPr>
+          <p:nvPr/>
         </p:nvSpPr>
         <p:spPr>
           <a:xfrm>
@@ -4605,11 +4605,11 @@
       </p:sp>
       <p:sp>
         <p:nvSpPr>
-          <p:cNvPr id="3" name="Rounded Rectangle 2"/>
+          <p:cNvPr id="3" name="Rounded Rectangle 2">
+            <a:hlinkClick r:id="rId2"/>
+          </p:cNvPr>
           <p:cNvSpPr/>
-          <p:nvPr>
-            <a:hlinkClick r:id="rId2"/>
-          </p:nvPr>
+          <p:nvPr/>
         </p:nvSpPr>
         <p:spPr>
           <a:xfrm>
@@ -4691,11 +4691,11 @@
       </p:sp>
       <p:sp>
         <p:nvSpPr>
-          <p:cNvPr id="5" name="Rounded Rectangle 4"/>
+          <p:cNvPr id="5" name="Rounded Rectangle 4">
+            <a:hlinkClick r:id="rId4"/>
+          </p:cNvPr>
           <p:cNvSpPr/>
-          <p:nvPr>
-            <a:hlinkClick r:id="rId4"/>
-          </p:nvPr>
+          <p:nvPr/>
         </p:nvSpPr>
         <p:spPr>
           <a:xfrm>
@@ -4777,11 +4777,11 @@
       </p:sp>
       <p:sp>
         <p:nvSpPr>
-          <p:cNvPr id="7" name="Rounded Rectangle 6"/>
+          <p:cNvPr id="7" name="Rounded Rectangle 6">
+            <a:hlinkClick r:id="rId6"/>
+          </p:cNvPr>
           <p:cNvSpPr/>
-          <p:nvPr>
-            <a:hlinkClick r:id="rId6"/>
-          </p:nvPr>
+          <p:nvPr/>
         </p:nvSpPr>
         <p:spPr>
           <a:xfrm>
@@ -4863,11 +4863,11 @@
       </p:sp>
       <p:sp>
         <p:nvSpPr>
-          <p:cNvPr id="9" name="Rounded Rectangle 8"/>
+          <p:cNvPr id="9" name="Rounded Rectangle 8">
+            <a:hlinkClick r:id="rId8"/>
+          </p:cNvPr>
           <p:cNvSpPr/>
-          <p:nvPr>
-            <a:hlinkClick r:id="rId8"/>
-          </p:nvPr>
+          <p:nvPr/>
         </p:nvSpPr>
         <p:spPr>
           <a:xfrm>
@@ -4949,11 +4949,11 @@
       </p:sp>
       <p:sp>
         <p:nvSpPr>
-          <p:cNvPr id="11" name="Rounded Rectangle 10"/>
+          <p:cNvPr id="11" name="Rounded Rectangle 10">
+            <a:hlinkClick r:id="rId10"/>
+          </p:cNvPr>
           <p:cNvSpPr/>
-          <p:nvPr>
-            <a:hlinkClick r:id="rId10"/>
-          </p:nvPr>
+          <p:nvPr/>
         </p:nvSpPr>
         <p:spPr>
           <a:xfrm>
@@ -5051,11 +5051,11 @@
       </p:sp>
       <p:sp>
         <p:nvSpPr>
-          <p:cNvPr id="13" name="Rounded Rectangle 12"/>
+          <p:cNvPr id="13" name="Rounded Rectangle 12">
+            <a:hlinkClick r:id="rId14"/>
+          </p:cNvPr>
           <p:cNvSpPr/>
-          <p:nvPr>
-            <a:hlinkClick r:id="rId14"/>
-          </p:nvPr>
+          <p:nvPr/>
         </p:nvSpPr>
         <p:spPr>
           <a:xfrm>
@@ -5145,11 +5145,11 @@
       </p:sp>
       <p:sp>
         <p:nvSpPr>
-          <p:cNvPr id="15" name="Rounded Rectangle 14"/>
+          <p:cNvPr id="15" name="Rounded Rectangle 14">
+            <a:hlinkClick r:id="rId17"/>
+          </p:cNvPr>
           <p:cNvSpPr/>
-          <p:nvPr>
-            <a:hlinkClick r:id="rId17"/>
-          </p:nvPr>
+          <p:nvPr/>
         </p:nvSpPr>
         <p:spPr>
           <a:xfrm>
@@ -5255,11 +5255,11 @@
       </p:sp>
       <p:sp>
         <p:nvSpPr>
-          <p:cNvPr id="17" name="Rounded Rectangle 16"/>
+          <p:cNvPr id="17" name="Rounded Rectangle 16">
+            <a:hlinkClick r:id="rId22"/>
+          </p:cNvPr>
           <p:cNvSpPr/>
-          <p:nvPr>
-            <a:hlinkClick r:id="rId22"/>
-          </p:nvPr>
+          <p:nvPr/>
         </p:nvSpPr>
         <p:spPr>
           <a:xfrm>
@@ -5357,11 +5357,11 @@
       </p:sp>
       <p:sp>
         <p:nvSpPr>
-          <p:cNvPr id="19" name="Rounded Rectangle 18"/>
+          <p:cNvPr id="19" name="Rounded Rectangle 18">
+            <a:hlinkClick r:id="rId26"/>
+          </p:cNvPr>
           <p:cNvSpPr/>
-          <p:nvPr>
-            <a:hlinkClick r:id="rId26"/>
-          </p:nvPr>
+          <p:nvPr/>
         </p:nvSpPr>
         <p:spPr>
           <a:xfrm>
@@ -5467,11 +5467,11 @@
       </p:sp>
       <p:sp>
         <p:nvSpPr>
-          <p:cNvPr id="21" name="Rounded Rectangle 20"/>
+          <p:cNvPr id="21" name="Rounded Rectangle 20">
+            <a:hlinkClick r:id="rId31"/>
+          </p:cNvPr>
           <p:cNvSpPr/>
-          <p:nvPr>
-            <a:hlinkClick r:id="rId31"/>
-          </p:nvPr>
+          <p:nvPr/>
         </p:nvSpPr>
         <p:spPr>
           <a:xfrm>
@@ -5569,11 +5569,11 @@
       </p:sp>
       <p:sp>
         <p:nvSpPr>
-          <p:cNvPr id="23" name="Rounded Rectangle 22"/>
+          <p:cNvPr id="23" name="Rounded Rectangle 22">
+            <a:hlinkClick r:id="rId35"/>
+          </p:cNvPr>
           <p:cNvSpPr/>
-          <p:nvPr>
-            <a:hlinkClick r:id="rId35"/>
-          </p:nvPr>
+          <p:nvPr/>
         </p:nvSpPr>
         <p:spPr>
           <a:xfrm>
@@ -5679,11 +5679,11 @@
       </p:sp>
       <p:sp>
         <p:nvSpPr>
-          <p:cNvPr id="25" name="Rounded Rectangle 24"/>
+          <p:cNvPr id="25" name="Rounded Rectangle 24">
+            <a:hlinkClick r:id="rId40"/>
+          </p:cNvPr>
           <p:cNvSpPr/>
-          <p:nvPr>
-            <a:hlinkClick r:id="rId40"/>
-          </p:nvPr>
+          <p:nvPr/>
         </p:nvSpPr>
         <p:spPr>
           <a:xfrm>
@@ -5773,11 +5773,11 @@
       </p:sp>
       <p:sp>
         <p:nvSpPr>
-          <p:cNvPr id="27" name="Rounded Rectangle 26"/>
+          <p:cNvPr id="27" name="Rounded Rectangle 26">
+            <a:hlinkClick r:id="rId43"/>
+          </p:cNvPr>
           <p:cNvSpPr/>
-          <p:nvPr>
-            <a:hlinkClick r:id="rId43"/>
-          </p:nvPr>
+          <p:nvPr/>
         </p:nvSpPr>
         <p:spPr>
           <a:xfrm>
@@ -5867,11 +5867,11 @@
       </p:sp>
       <p:sp>
         <p:nvSpPr>
-          <p:cNvPr id="29" name="Rounded Rectangle 28"/>
+          <p:cNvPr id="29" name="Rounded Rectangle 28">
+            <a:hlinkClick r:id="rId46"/>
+          </p:cNvPr>
           <p:cNvSpPr/>
-          <p:nvPr>
-            <a:hlinkClick r:id="rId46"/>
-          </p:nvPr>
+          <p:nvPr/>
         </p:nvSpPr>
         <p:spPr>
           <a:xfrm>
@@ -5969,11 +5969,11 @@
       </p:sp>
       <p:sp>
         <p:nvSpPr>
-          <p:cNvPr id="31" name="Rounded Rectangle 30"/>
+          <p:cNvPr id="31" name="Rounded Rectangle 30">
+            <a:hlinkClick r:id="rId50"/>
+          </p:cNvPr>
           <p:cNvSpPr/>
-          <p:nvPr>
-            <a:hlinkClick r:id="rId50"/>
-          </p:nvPr>
+          <p:nvPr/>
         </p:nvSpPr>
         <p:spPr>
           <a:xfrm>

--- a/source/Instructor Progress Test 1 Grams/Instructor Progress Test 1 Grams.pptx
+++ b/source/Instructor Progress Test 1 Grams/Instructor Progress Test 1 Grams.pptx
@@ -7,6 +7,8 @@
   <p:sldIdLst>
     <p:sldId id="256" r:id="rId7"/>
     <p:sldId id="257" r:id="rId8"/>
+    <p:sldId id="258" r:id="rId9"/>
+    <p:sldId id="259" r:id="rId10"/>
   </p:sldIdLst>
   <p:sldSz cx="12188952" cy="6858000" type="screen4x3"/>
   <p:notesSz cx="6858000" cy="9144000"/>
@@ -3091,120 +3093,48 @@
       <p:grpSpPr/>
       <p:sp>
         <p:nvSpPr>
-          <p:cNvPr id="2" name="Rectangle 1"/>
-          <p:cNvSpPr/>
+          <p:cNvPr id="2" name="TextBox 1"/>
+          <p:cNvSpPr txBox="1"/>
           <p:nvPr/>
         </p:nvSpPr>
         <p:spPr>
           <a:xfrm>
-            <a:off x="0" y="0"/>
-            <a:ext cx="12188952" cy="548640"/>
+            <a:off x="914400" y="2377440"/>
+            <a:ext cx="10360152" cy="1280160"/>
           </a:xfrm>
           <a:prstGeom prst="rect">
             <a:avLst/>
           </a:prstGeom>
-          <a:solidFill>
-            <a:srgbClr val="1F3A5F"/>
-          </a:solidFill>
-          <a:ln>
-            <a:noFill/>
-          </a:ln>
-        </p:spPr>
-        <p:style>
-          <a:lnRef idx="1">
-            <a:schemeClr val="accent1"/>
-          </a:lnRef>
-          <a:fillRef idx="3">
-            <a:schemeClr val="accent1"/>
-          </a:fillRef>
-          <a:effectRef idx="2">
-            <a:schemeClr val="accent1"/>
-          </a:effectRef>
-          <a:fontRef idx="minor">
-            <a:schemeClr val="lt1"/>
-          </a:fontRef>
-        </p:style>
-        <p:txBody>
-          <a:bodyPr rtlCol="0" anchor="ctr" lIns="182880" rIns="182880"/>
+          <a:noFill/>
+        </p:spPr>
+        <p:txBody>
+          <a:bodyPr wrap="square">
+            <a:spAutoFit/>
+          </a:bodyPr>
           <a:lstStyle/>
           <a:p>
             <a:pPr algn="ctr"/>
             <a:r>
-              <a:rPr sz="2000" b="1">
-                <a:solidFill>
-                  <a:srgbClr val="FFFFFF"/>
-                </a:solidFill>
-              </a:rPr>
-              <a:t>Instructor Progress Test 1 Grams — Page 1 of 2</a:t>
-            </a:r>
-          </a:p>
-        </p:txBody>
-      </p:sp>
-      <p:sp>
-        <p:nvSpPr>
-          <p:cNvPr id="3" name="Rounded Rectangle 2"/>
-          <p:cNvSpPr/>
-          <p:nvPr>
-            <a:hlinkClick r:id="rId2"/>
-          </p:nvPr>
-        </p:nvSpPr>
-        <p:spPr>
-          <a:xfrm>
-            <a:off x="365760" y="731520"/>
-            <a:ext cx="2200046" cy="365760"/>
-          </a:xfrm>
-          <a:prstGeom prst="roundRect">
-            <a:avLst/>
-          </a:prstGeom>
-          <a:solidFill>
-            <a:srgbClr val="E8EEF7"/>
-          </a:solidFill>
-          <a:ln>
-            <a:solidFill>
-              <a:srgbClr val="1F3A5F"/>
-            </a:solidFill>
-          </a:ln>
-        </p:spPr>
-        <p:style>
-          <a:lnRef idx="1">
-            <a:schemeClr val="accent1"/>
-          </a:lnRef>
-          <a:fillRef idx="3">
-            <a:schemeClr val="accent1"/>
-          </a:fillRef>
-          <a:effectRef idx="2">
-            <a:schemeClr val="accent1"/>
-          </a:effectRef>
-          <a:fontRef idx="minor">
-            <a:schemeClr val="lt1"/>
-          </a:fontRef>
-        </p:style>
-        <p:txBody>
-          <a:bodyPr rtlCol="0" anchor="ctr" lIns="45720" rIns="45720"/>
-          <a:lstStyle/>
-          <a:p>
-            <a:pPr algn="ctr"/>
-            <a:r>
-              <a:rPr sz="900">
+              <a:rPr sz="4000" b="1">
                 <a:solidFill>
                   <a:srgbClr val="1F3A5F"/>
                 </a:solidFill>
               </a:rPr>
-              <a:t>Gram 1: FR Prometheus, Category 1, Bespin</a:t>
-            </a:r>
-          </a:p>
-        </p:txBody>
-      </p:sp>
-      <p:sp>
-        <p:nvSpPr>
-          <p:cNvPr id="4" name="TextBox 3"/>
+              <a:t>Welcome to Instructor Progress Test 1 Grams</a:t>
+            </a:r>
+          </a:p>
+        </p:txBody>
+      </p:sp>
+      <p:sp>
+        <p:nvSpPr>
+          <p:cNvPr id="3" name="TextBox 2"/>
           <p:cNvSpPr txBox="1"/>
           <p:nvPr/>
         </p:nvSpPr>
         <p:spPr>
           <a:xfrm>
-            <a:off x="365760" y="1115568"/>
-            <a:ext cx="2200046" cy="1447800"/>
+            <a:off x="914400" y="3840480"/>
+            <a:ext cx="10360152" cy="731520"/>
           </a:xfrm>
           <a:prstGeom prst="rect">
             <a:avLst/>
@@ -3212,1324 +3142,19 @@
           <a:noFill/>
         </p:spPr>
         <p:txBody>
-          <a:bodyPr wrap="square">
+          <a:bodyPr wrap="none">
             <a:spAutoFit/>
           </a:bodyPr>
           <a:lstStyle/>
           <a:p>
-            <a:r>
-              <a:rPr sz="800">
-                <a:hlinkClick r:id="rId3"/>
-              </a:rPr>
-              <a:t>Lofar 1</a:t>
-            </a:r>
-          </a:p>
-          <a:p>
-            <a:r>
-              <a:rPr sz="800">
-                <a:hlinkClick r:id="rId4"/>
-              </a:rPr>
-              <a:t>Lofar 2</a:t>
-            </a:r>
-          </a:p>
-        </p:txBody>
-      </p:sp>
-      <p:sp>
-        <p:nvSpPr>
-          <p:cNvPr id="5" name="Rounded Rectangle 4"/>
-          <p:cNvSpPr/>
-          <p:nvPr>
-            <a:hlinkClick r:id="rId5"/>
-          </p:nvPr>
-        </p:nvSpPr>
-        <p:spPr>
-          <a:xfrm>
-            <a:off x="2657246" y="731520"/>
-            <a:ext cx="2200046" cy="365760"/>
-          </a:xfrm>
-          <a:prstGeom prst="roundRect">
-            <a:avLst/>
-          </a:prstGeom>
-          <a:solidFill>
-            <a:srgbClr val="E8EEF7"/>
-          </a:solidFill>
-          <a:ln>
-            <a:solidFill>
-              <a:srgbClr val="1F3A5F"/>
-            </a:solidFill>
-          </a:ln>
-        </p:spPr>
-        <p:style>
-          <a:lnRef idx="1">
-            <a:schemeClr val="accent1"/>
-          </a:lnRef>
-          <a:fillRef idx="3">
-            <a:schemeClr val="accent1"/>
-          </a:fillRef>
-          <a:effectRef idx="2">
-            <a:schemeClr val="accent1"/>
-          </a:effectRef>
-          <a:fontRef idx="minor">
-            <a:schemeClr val="lt1"/>
-          </a:fontRef>
-        </p:style>
-        <p:txBody>
-          <a:bodyPr rtlCol="0" anchor="ctr" lIns="45720" rIns="45720"/>
-          <a:lstStyle/>
-          <a:p>
             <a:pPr algn="ctr"/>
             <a:r>
-              <a:rPr sz="900">
+              <a:rPr sz="2400">
                 <a:solidFill>
                   <a:srgbClr val="1F3A5F"/>
                 </a:solidFill>
               </a:rPr>
-              <a:t>Gram 3: FR Ghost, Category 1, Tantive</a:t>
-            </a:r>
-          </a:p>
-        </p:txBody>
-      </p:sp>
-      <p:sp>
-        <p:nvSpPr>
-          <p:cNvPr id="6" name="TextBox 5"/>
-          <p:cNvSpPr txBox="1"/>
-          <p:nvPr/>
-        </p:nvSpPr>
-        <p:spPr>
-          <a:xfrm>
-            <a:off x="2657246" y="1115568"/>
-            <a:ext cx="2200046" cy="1447800"/>
-          </a:xfrm>
-          <a:prstGeom prst="rect">
-            <a:avLst/>
-          </a:prstGeom>
-          <a:noFill/>
-        </p:spPr>
-        <p:txBody>
-          <a:bodyPr wrap="square">
-            <a:spAutoFit/>
-          </a:bodyPr>
-          <a:lstStyle/>
-          <a:p>
-            <a:r>
-              <a:rPr sz="800">
-                <a:hlinkClick r:id="rId6"/>
-              </a:rPr>
-              <a:t>Lofar 1</a:t>
-            </a:r>
-          </a:p>
-        </p:txBody>
-      </p:sp>
-      <p:sp>
-        <p:nvSpPr>
-          <p:cNvPr id="7" name="Rounded Rectangle 6"/>
-          <p:cNvSpPr/>
-          <p:nvPr>
-            <a:hlinkClick r:id="rId7"/>
-          </p:nvPr>
-        </p:nvSpPr>
-        <p:spPr>
-          <a:xfrm>
-            <a:off x="4948732" y="731520"/>
-            <a:ext cx="2200046" cy="365760"/>
-          </a:xfrm>
-          <a:prstGeom prst="roundRect">
-            <a:avLst/>
-          </a:prstGeom>
-          <a:solidFill>
-            <a:srgbClr val="E8EEF7"/>
-          </a:solidFill>
-          <a:ln>
-            <a:solidFill>
-              <a:srgbClr val="1F3A5F"/>
-            </a:solidFill>
-          </a:ln>
-        </p:spPr>
-        <p:style>
-          <a:lnRef idx="1">
-            <a:schemeClr val="accent1"/>
-          </a:lnRef>
-          <a:fillRef idx="3">
-            <a:schemeClr val="accent1"/>
-          </a:fillRef>
-          <a:effectRef idx="2">
-            <a:schemeClr val="accent1"/>
-          </a:effectRef>
-          <a:fontRef idx="minor">
-            <a:schemeClr val="lt1"/>
-          </a:fontRef>
-        </p:style>
-        <p:txBody>
-          <a:bodyPr rtlCol="0" anchor="ctr" lIns="45720" rIns="45720"/>
-          <a:lstStyle/>
-          <a:p>
-            <a:pPr algn="ctr"/>
-            <a:r>
-              <a:rPr sz="900">
-                <a:solidFill>
-                  <a:srgbClr val="1F3A5F"/>
-                </a:solidFill>
-              </a:rPr>
-              <a:t>Gram 4: Enterprise contact bearing 291, codename Hoth</a:t>
-            </a:r>
-          </a:p>
-        </p:txBody>
-      </p:sp>
-      <p:sp>
-        <p:nvSpPr>
-          <p:cNvPr id="8" name="TextBox 7"/>
-          <p:cNvSpPr txBox="1"/>
-          <p:nvPr/>
-        </p:nvSpPr>
-        <p:spPr>
-          <a:xfrm>
-            <a:off x="4948732" y="1115568"/>
-            <a:ext cx="2200046" cy="1447800"/>
-          </a:xfrm>
-          <a:prstGeom prst="rect">
-            <a:avLst/>
-          </a:prstGeom>
-          <a:noFill/>
-        </p:spPr>
-        <p:txBody>
-          <a:bodyPr wrap="square">
-            <a:spAutoFit/>
-          </a:bodyPr>
-          <a:lstStyle/>
-          <a:p>
-            <a:r>
-              <a:rPr sz="800">
-                <a:hlinkClick r:id="rId8"/>
-              </a:rPr>
-              <a:t>Lofar 1</a:t>
-            </a:r>
-          </a:p>
-        </p:txBody>
-      </p:sp>
-      <p:sp>
-        <p:nvSpPr>
-          <p:cNvPr id="9" name="Rounded Rectangle 8"/>
-          <p:cNvSpPr/>
-          <p:nvPr>
-            <a:hlinkClick r:id="rId9"/>
-          </p:nvPr>
-        </p:nvSpPr>
-        <p:spPr>
-          <a:xfrm>
-            <a:off x="7240219" y="731520"/>
-            <a:ext cx="2200046" cy="365760"/>
-          </a:xfrm>
-          <a:prstGeom prst="roundRect">
-            <a:avLst/>
-          </a:prstGeom>
-          <a:solidFill>
-            <a:srgbClr val="E8EEF7"/>
-          </a:solidFill>
-          <a:ln>
-            <a:solidFill>
-              <a:srgbClr val="1F3A5F"/>
-            </a:solidFill>
-          </a:ln>
-        </p:spPr>
-        <p:style>
-          <a:lnRef idx="1">
-            <a:schemeClr val="accent1"/>
-          </a:lnRef>
-          <a:fillRef idx="3">
-            <a:schemeClr val="accent1"/>
-          </a:fillRef>
-          <a:effectRef idx="2">
-            <a:schemeClr val="accent1"/>
-          </a:effectRef>
-          <a:fontRef idx="minor">
-            <a:schemeClr val="lt1"/>
-          </a:fontRef>
-        </p:style>
-        <p:txBody>
-          <a:bodyPr rtlCol="0" anchor="ctr" lIns="45720" rIns="45720"/>
-          <a:lstStyle/>
-          <a:p>
-            <a:pPr algn="ctr"/>
-            <a:r>
-              <a:rPr sz="900">
-                <a:solidFill>
-                  <a:srgbClr val="1F3A5F"/>
-                </a:solidFill>
-              </a:rPr>
-              <a:t>Gram 5: FR Enterprise, Category 4, Bespin</a:t>
-            </a:r>
-          </a:p>
-        </p:txBody>
-      </p:sp>
-      <p:sp>
-        <p:nvSpPr>
-          <p:cNvPr id="10" name="TextBox 9"/>
-          <p:cNvSpPr txBox="1"/>
-          <p:nvPr/>
-        </p:nvSpPr>
-        <p:spPr>
-          <a:xfrm>
-            <a:off x="7240219" y="1115568"/>
-            <a:ext cx="2200046" cy="1447800"/>
-          </a:xfrm>
-          <a:prstGeom prst="rect">
-            <a:avLst/>
-          </a:prstGeom>
-          <a:noFill/>
-        </p:spPr>
-        <p:txBody>
-          <a:bodyPr wrap="square">
-            <a:spAutoFit/>
-          </a:bodyPr>
-          <a:lstStyle/>
-          <a:p>
-            <a:r>
-              <a:rPr sz="800">
-                <a:hlinkClick r:id="rId10"/>
-              </a:rPr>
-              <a:t>Lofar 1</a:t>
-            </a:r>
-          </a:p>
-        </p:txBody>
-      </p:sp>
-      <p:sp>
-        <p:nvSpPr>
-          <p:cNvPr id="11" name="Rounded Rectangle 10"/>
-          <p:cNvSpPr/>
-          <p:nvPr>
-            <a:hlinkClick r:id="rId11"/>
-          </p:nvPr>
-        </p:nvSpPr>
-        <p:spPr>
-          <a:xfrm>
-            <a:off x="9531705" y="731520"/>
-            <a:ext cx="2200046" cy="365760"/>
-          </a:xfrm>
-          <a:prstGeom prst="roundRect">
-            <a:avLst/>
-          </a:prstGeom>
-          <a:solidFill>
-            <a:srgbClr val="E8EEF7"/>
-          </a:solidFill>
-          <a:ln>
-            <a:solidFill>
-              <a:srgbClr val="1F3A5F"/>
-            </a:solidFill>
-          </a:ln>
-        </p:spPr>
-        <p:style>
-          <a:lnRef idx="1">
-            <a:schemeClr val="accent1"/>
-          </a:lnRef>
-          <a:fillRef idx="3">
-            <a:schemeClr val="accent1"/>
-          </a:fillRef>
-          <a:effectRef idx="2">
-            <a:schemeClr val="accent1"/>
-          </a:effectRef>
-          <a:fontRef idx="minor">
-            <a:schemeClr val="lt1"/>
-          </a:fontRef>
-        </p:style>
-        <p:txBody>
-          <a:bodyPr rtlCol="0" anchor="ctr" lIns="45720" rIns="45720"/>
-          <a:lstStyle/>
-          <a:p>
-            <a:pPr algn="ctr"/>
-            <a:r>
-              <a:rPr sz="900">
-                <a:solidFill>
-                  <a:srgbClr val="1F3A5F"/>
-                </a:solidFill>
-              </a:rPr>
-              <a:t>Gram 6: FR Akira-class, Category 4, Hoth</a:t>
-            </a:r>
-          </a:p>
-        </p:txBody>
-      </p:sp>
-      <p:sp>
-        <p:nvSpPr>
-          <p:cNvPr id="12" name="TextBox 11"/>
-          <p:cNvSpPr txBox="1"/>
-          <p:nvPr/>
-        </p:nvSpPr>
-        <p:spPr>
-          <a:xfrm>
-            <a:off x="9531705" y="1115568"/>
-            <a:ext cx="2200046" cy="1447800"/>
-          </a:xfrm>
-          <a:prstGeom prst="rect">
-            <a:avLst/>
-          </a:prstGeom>
-          <a:noFill/>
-        </p:spPr>
-        <p:txBody>
-          <a:bodyPr wrap="square">
-            <a:spAutoFit/>
-          </a:bodyPr>
-          <a:lstStyle/>
-          <a:p>
-            <a:r>
-              <a:rPr sz="800">
-                <a:hlinkClick r:id="rId12"/>
-              </a:rPr>
-              <a:t>Lofar 1</a:t>
-            </a:r>
-          </a:p>
-        </p:txBody>
-      </p:sp>
-      <p:sp>
-        <p:nvSpPr>
-          <p:cNvPr id="13" name="Rounded Rectangle 12"/>
-          <p:cNvSpPr/>
-          <p:nvPr>
-            <a:hlinkClick r:id="rId13"/>
-          </p:nvPr>
-        </p:nvSpPr>
-        <p:spPr>
-          <a:xfrm>
-            <a:off x="365760" y="2682240"/>
-            <a:ext cx="2200046" cy="365760"/>
-          </a:xfrm>
-          <a:prstGeom prst="roundRect">
-            <a:avLst/>
-          </a:prstGeom>
-          <a:solidFill>
-            <a:srgbClr val="E8EEF7"/>
-          </a:solidFill>
-          <a:ln>
-            <a:solidFill>
-              <a:srgbClr val="1F3A5F"/>
-            </a:solidFill>
-          </a:ln>
-        </p:spPr>
-        <p:style>
-          <a:lnRef idx="1">
-            <a:schemeClr val="accent1"/>
-          </a:lnRef>
-          <a:fillRef idx="3">
-            <a:schemeClr val="accent1"/>
-          </a:fillRef>
-          <a:effectRef idx="2">
-            <a:schemeClr val="accent1"/>
-          </a:effectRef>
-          <a:fontRef idx="minor">
-            <a:schemeClr val="lt1"/>
-          </a:fontRef>
-        </p:style>
-        <p:txBody>
-          <a:bodyPr rtlCol="0" anchor="ctr" lIns="45720" rIns="45720"/>
-          <a:lstStyle/>
-          <a:p>
-            <a:pPr algn="ctr"/>
-            <a:r>
-              <a:rPr sz="900">
-                <a:solidFill>
-                  <a:srgbClr val="1F3A5F"/>
-                </a:solidFill>
-              </a:rPr>
-              <a:t>Gram 7: FR Rebel One, Category 1, Naboo</a:t>
-            </a:r>
-          </a:p>
-        </p:txBody>
-      </p:sp>
-      <p:sp>
-        <p:nvSpPr>
-          <p:cNvPr id="14" name="TextBox 13"/>
-          <p:cNvSpPr txBox="1"/>
-          <p:nvPr/>
-        </p:nvSpPr>
-        <p:spPr>
-          <a:xfrm>
-            <a:off x="365760" y="3066288"/>
-            <a:ext cx="2200046" cy="1447800"/>
-          </a:xfrm>
-          <a:prstGeom prst="rect">
-            <a:avLst/>
-          </a:prstGeom>
-          <a:noFill/>
-        </p:spPr>
-        <p:txBody>
-          <a:bodyPr wrap="square">
-            <a:spAutoFit/>
-          </a:bodyPr>
-          <a:lstStyle/>
-          <a:p>
-            <a:r>
-              <a:rPr sz="800">
-                <a:hlinkClick r:id="rId14"/>
-              </a:rPr>
-              <a:t>Lofar 1</a:t>
-            </a:r>
-          </a:p>
-          <a:p>
-            <a:r>
-              <a:rPr sz="800">
-                <a:hlinkClick r:id="rId15"/>
-              </a:rPr>
-              <a:t>Lofar 2</a:t>
-            </a:r>
-          </a:p>
-        </p:txBody>
-      </p:sp>
-      <p:sp>
-        <p:nvSpPr>
-          <p:cNvPr id="15" name="Rounded Rectangle 14"/>
-          <p:cNvSpPr/>
-          <p:nvPr>
-            <a:hlinkClick r:id="rId16"/>
-          </p:nvPr>
-        </p:nvSpPr>
-        <p:spPr>
-          <a:xfrm>
-            <a:off x="2657246" y="2682240"/>
-            <a:ext cx="2200046" cy="365760"/>
-          </a:xfrm>
-          <a:prstGeom prst="roundRect">
-            <a:avLst/>
-          </a:prstGeom>
-          <a:solidFill>
-            <a:srgbClr val="E8EEF7"/>
-          </a:solidFill>
-          <a:ln>
-            <a:solidFill>
-              <a:srgbClr val="1F3A5F"/>
-            </a:solidFill>
-          </a:ln>
-        </p:spPr>
-        <p:style>
-          <a:lnRef idx="1">
-            <a:schemeClr val="accent1"/>
-          </a:lnRef>
-          <a:fillRef idx="3">
-            <a:schemeClr val="accent1"/>
-          </a:fillRef>
-          <a:effectRef idx="2">
-            <a:schemeClr val="accent1"/>
-          </a:effectRef>
-          <a:fontRef idx="minor">
-            <a:schemeClr val="lt1"/>
-          </a:fontRef>
-        </p:style>
-        <p:txBody>
-          <a:bodyPr rtlCol="0" anchor="ctr" lIns="45720" rIns="45720"/>
-          <a:lstStyle/>
-          <a:p>
-            <a:pPr algn="ctr"/>
-            <a:r>
-              <a:rPr sz="900">
-                <a:solidFill>
-                  <a:srgbClr val="1F3A5F"/>
-                </a:solidFill>
-              </a:rPr>
-              <a:t>Gram 8: FR TIE Bomber, Category 4, Kronos</a:t>
-            </a:r>
-          </a:p>
-        </p:txBody>
-      </p:sp>
-      <p:sp>
-        <p:nvSpPr>
-          <p:cNvPr id="16" name="TextBox 15"/>
-          <p:cNvSpPr txBox="1"/>
-          <p:nvPr/>
-        </p:nvSpPr>
-        <p:spPr>
-          <a:xfrm>
-            <a:off x="2657246" y="3066288"/>
-            <a:ext cx="2200046" cy="1447800"/>
-          </a:xfrm>
-          <a:prstGeom prst="rect">
-            <a:avLst/>
-          </a:prstGeom>
-          <a:noFill/>
-        </p:spPr>
-        <p:txBody>
-          <a:bodyPr wrap="square">
-            <a:spAutoFit/>
-          </a:bodyPr>
-          <a:lstStyle/>
-          <a:p>
-            <a:r>
-              <a:rPr sz="800">
-                <a:hlinkClick r:id="rId17"/>
-              </a:rPr>
-              <a:t>Lofar 1</a:t>
-            </a:r>
-          </a:p>
-        </p:txBody>
-      </p:sp>
-      <p:sp>
-        <p:nvSpPr>
-          <p:cNvPr id="17" name="Rounded Rectangle 16"/>
-          <p:cNvSpPr/>
-          <p:nvPr>
-            <a:hlinkClick r:id="rId18"/>
-          </p:nvPr>
-        </p:nvSpPr>
-        <p:spPr>
-          <a:xfrm>
-            <a:off x="4948732" y="2682240"/>
-            <a:ext cx="2200046" cy="365760"/>
-          </a:xfrm>
-          <a:prstGeom prst="roundRect">
-            <a:avLst/>
-          </a:prstGeom>
-          <a:solidFill>
-            <a:srgbClr val="E8EEF7"/>
-          </a:solidFill>
-          <a:ln>
-            <a:solidFill>
-              <a:srgbClr val="1F3A5F"/>
-            </a:solidFill>
-          </a:ln>
-        </p:spPr>
-        <p:style>
-          <a:lnRef idx="1">
-            <a:schemeClr val="accent1"/>
-          </a:lnRef>
-          <a:fillRef idx="3">
-            <a:schemeClr val="accent1"/>
-          </a:fillRef>
-          <a:effectRef idx="2">
-            <a:schemeClr val="accent1"/>
-          </a:effectRef>
-          <a:fontRef idx="minor">
-            <a:schemeClr val="lt1"/>
-          </a:fontRef>
-        </p:style>
-        <p:txBody>
-          <a:bodyPr rtlCol="0" anchor="ctr" lIns="45720" rIns="45720"/>
-          <a:lstStyle/>
-          <a:p>
-            <a:pPr algn="ctr"/>
-            <a:r>
-              <a:rPr sz="900">
-                <a:solidFill>
-                  <a:srgbClr val="1F3A5F"/>
-                </a:solidFill>
-              </a:rPr>
-              <a:t>Gram 9: FR Star Destroyer, Category 1, Tatooine</a:t>
-            </a:r>
-          </a:p>
-        </p:txBody>
-      </p:sp>
-      <p:sp>
-        <p:nvSpPr>
-          <p:cNvPr id="18" name="TextBox 17"/>
-          <p:cNvSpPr txBox="1"/>
-          <p:nvPr/>
-        </p:nvSpPr>
-        <p:spPr>
-          <a:xfrm>
-            <a:off x="4948732" y="3066288"/>
-            <a:ext cx="2200046" cy="1447800"/>
-          </a:xfrm>
-          <a:prstGeom prst="rect">
-            <a:avLst/>
-          </a:prstGeom>
-          <a:noFill/>
-        </p:spPr>
-        <p:txBody>
-          <a:bodyPr wrap="square">
-            <a:spAutoFit/>
-          </a:bodyPr>
-          <a:lstStyle/>
-          <a:p>
-            <a:r>
-              <a:rPr sz="800">
-                <a:hlinkClick r:id="rId19"/>
-              </a:rPr>
-              <a:t>Lofar 1</a:t>
-            </a:r>
-          </a:p>
-        </p:txBody>
-      </p:sp>
-      <p:sp>
-        <p:nvSpPr>
-          <p:cNvPr id="19" name="Rounded Rectangle 18"/>
-          <p:cNvSpPr/>
-          <p:nvPr>
-            <a:hlinkClick r:id="rId20"/>
-          </p:nvPr>
-        </p:nvSpPr>
-        <p:spPr>
-          <a:xfrm>
-            <a:off x="7240219" y="2682240"/>
-            <a:ext cx="2200046" cy="365760"/>
-          </a:xfrm>
-          <a:prstGeom prst="roundRect">
-            <a:avLst/>
-          </a:prstGeom>
-          <a:solidFill>
-            <a:srgbClr val="E8EEF7"/>
-          </a:solidFill>
-          <a:ln>
-            <a:solidFill>
-              <a:srgbClr val="1F3A5F"/>
-            </a:solidFill>
-          </a:ln>
-        </p:spPr>
-        <p:style>
-          <a:lnRef idx="1">
-            <a:schemeClr val="accent1"/>
-          </a:lnRef>
-          <a:fillRef idx="3">
-            <a:schemeClr val="accent1"/>
-          </a:fillRef>
-          <a:effectRef idx="2">
-            <a:schemeClr val="accent1"/>
-          </a:effectRef>
-          <a:fontRef idx="minor">
-            <a:schemeClr val="lt1"/>
-          </a:fontRef>
-        </p:style>
-        <p:txBody>
-          <a:bodyPr rtlCol="0" anchor="ctr" lIns="45720" rIns="45720"/>
-          <a:lstStyle/>
-          <a:p>
-            <a:pPr algn="ctr"/>
-            <a:r>
-              <a:rPr sz="900">
-                <a:solidFill>
-                  <a:srgbClr val="1F3A5F"/>
-                </a:solidFill>
-              </a:rPr>
-              <a:t>Gram 10: FR Stargazer, Category 3, Risa</a:t>
-            </a:r>
-          </a:p>
-        </p:txBody>
-      </p:sp>
-      <p:sp>
-        <p:nvSpPr>
-          <p:cNvPr id="20" name="TextBox 19"/>
-          <p:cNvSpPr txBox="1"/>
-          <p:nvPr/>
-        </p:nvSpPr>
-        <p:spPr>
-          <a:xfrm>
-            <a:off x="7240219" y="3066288"/>
-            <a:ext cx="2200046" cy="1447800"/>
-          </a:xfrm>
-          <a:prstGeom prst="rect">
-            <a:avLst/>
-          </a:prstGeom>
-          <a:noFill/>
-        </p:spPr>
-        <p:txBody>
-          <a:bodyPr wrap="square">
-            <a:spAutoFit/>
-          </a:bodyPr>
-          <a:lstStyle/>
-          <a:p>
-            <a:r>
-              <a:rPr sz="800">
-                <a:hlinkClick r:id="rId21"/>
-              </a:rPr>
-              <a:t>Lofar 1</a:t>
-            </a:r>
-          </a:p>
-          <a:p>
-            <a:r>
-              <a:rPr sz="800">
-                <a:hlinkClick r:id="rId22"/>
-              </a:rPr>
-              <a:t>Lofar 2</a:t>
-            </a:r>
-          </a:p>
-          <a:p>
-            <a:r>
-              <a:rPr sz="800">
-                <a:hlinkClick r:id="rId23"/>
-              </a:rPr>
-              <a:t>Lofar 3</a:t>
-            </a:r>
-          </a:p>
-          <a:p>
-            <a:r>
-              <a:rPr sz="800">
-                <a:hlinkClick r:id="rId24"/>
-              </a:rPr>
-              <a:t>Lofar 4</a:t>
-            </a:r>
-          </a:p>
-        </p:txBody>
-      </p:sp>
-      <p:sp>
-        <p:nvSpPr>
-          <p:cNvPr id="21" name="Rounded Rectangle 20"/>
-          <p:cNvSpPr/>
-          <p:nvPr>
-            <a:hlinkClick r:id="rId25"/>
-          </p:nvPr>
-        </p:nvSpPr>
-        <p:spPr>
-          <a:xfrm>
-            <a:off x="9531705" y="2682240"/>
-            <a:ext cx="2200046" cy="365760"/>
-          </a:xfrm>
-          <a:prstGeom prst="roundRect">
-            <a:avLst/>
-          </a:prstGeom>
-          <a:solidFill>
-            <a:srgbClr val="E8EEF7"/>
-          </a:solidFill>
-          <a:ln>
-            <a:solidFill>
-              <a:srgbClr val="1F3A5F"/>
-            </a:solidFill>
-          </a:ln>
-        </p:spPr>
-        <p:style>
-          <a:lnRef idx="1">
-            <a:schemeClr val="accent1"/>
-          </a:lnRef>
-          <a:fillRef idx="3">
-            <a:schemeClr val="accent1"/>
-          </a:fillRef>
-          <a:effectRef idx="2">
-            <a:schemeClr val="accent1"/>
-          </a:effectRef>
-          <a:fontRef idx="minor">
-            <a:schemeClr val="lt1"/>
-          </a:fontRef>
-        </p:style>
-        <p:txBody>
-          <a:bodyPr rtlCol="0" anchor="ctr" lIns="45720" rIns="45720"/>
-          <a:lstStyle/>
-          <a:p>
-            <a:pPr algn="ctr"/>
-            <a:r>
-              <a:rPr sz="900">
-                <a:solidFill>
-                  <a:srgbClr val="1F3A5F"/>
-                </a:solidFill>
-              </a:rPr>
-              <a:t>Gram 11: FR Imperial-class, Category 2, Caprica</a:t>
-            </a:r>
-          </a:p>
-        </p:txBody>
-      </p:sp>
-      <p:sp>
-        <p:nvSpPr>
-          <p:cNvPr id="22" name="TextBox 21"/>
-          <p:cNvSpPr txBox="1"/>
-          <p:nvPr/>
-        </p:nvSpPr>
-        <p:spPr>
-          <a:xfrm>
-            <a:off x="9531705" y="3066288"/>
-            <a:ext cx="2200046" cy="1447800"/>
-          </a:xfrm>
-          <a:prstGeom prst="rect">
-            <a:avLst/>
-          </a:prstGeom>
-          <a:noFill/>
-        </p:spPr>
-        <p:txBody>
-          <a:bodyPr wrap="square">
-            <a:spAutoFit/>
-          </a:bodyPr>
-          <a:lstStyle/>
-          <a:p>
-            <a:r>
-              <a:rPr sz="800">
-                <a:hlinkClick r:id="rId26"/>
-              </a:rPr>
-              <a:t>Lofar 1</a:t>
-            </a:r>
-          </a:p>
-          <a:p>
-            <a:r>
-              <a:rPr sz="800">
-                <a:hlinkClick r:id="rId27"/>
-              </a:rPr>
-              <a:t>Lofar 2</a:t>
-            </a:r>
-          </a:p>
-        </p:txBody>
-      </p:sp>
-      <p:sp>
-        <p:nvSpPr>
-          <p:cNvPr id="23" name="Rounded Rectangle 22"/>
-          <p:cNvSpPr/>
-          <p:nvPr>
-            <a:hlinkClick r:id="rId28"/>
-          </p:nvPr>
-        </p:nvSpPr>
-        <p:spPr>
-          <a:xfrm>
-            <a:off x="365760" y="4632960"/>
-            <a:ext cx="2200046" cy="365760"/>
-          </a:xfrm>
-          <a:prstGeom prst="roundRect">
-            <a:avLst/>
-          </a:prstGeom>
-          <a:solidFill>
-            <a:srgbClr val="E8EEF7"/>
-          </a:solidFill>
-          <a:ln>
-            <a:solidFill>
-              <a:srgbClr val="1F3A5F"/>
-            </a:solidFill>
-          </a:ln>
-        </p:spPr>
-        <p:style>
-          <a:lnRef idx="1">
-            <a:schemeClr val="accent1"/>
-          </a:lnRef>
-          <a:fillRef idx="3">
-            <a:schemeClr val="accent1"/>
-          </a:fillRef>
-          <a:effectRef idx="2">
-            <a:schemeClr val="accent1"/>
-          </a:effectRef>
-          <a:fontRef idx="minor">
-            <a:schemeClr val="lt1"/>
-          </a:fontRef>
-        </p:style>
-        <p:txBody>
-          <a:bodyPr rtlCol="0" anchor="ctr" lIns="45720" rIns="45720"/>
-          <a:lstStyle/>
-          <a:p>
-            <a:pPr algn="ctr"/>
-            <a:r>
-              <a:rPr sz="900">
-                <a:solidFill>
-                  <a:srgbClr val="1F3A5F"/>
-                </a:solidFill>
-              </a:rPr>
-              <a:t>Gram 14: FR Tantive IV, Category 4, Trill</a:t>
-            </a:r>
-          </a:p>
-        </p:txBody>
-      </p:sp>
-      <p:sp>
-        <p:nvSpPr>
-          <p:cNvPr id="24" name="TextBox 23"/>
-          <p:cNvSpPr txBox="1"/>
-          <p:nvPr/>
-        </p:nvSpPr>
-        <p:spPr>
-          <a:xfrm>
-            <a:off x="365760" y="5017008"/>
-            <a:ext cx="2200046" cy="1447800"/>
-          </a:xfrm>
-          <a:prstGeom prst="rect">
-            <a:avLst/>
-          </a:prstGeom>
-          <a:noFill/>
-        </p:spPr>
-        <p:txBody>
-          <a:bodyPr wrap="square">
-            <a:spAutoFit/>
-          </a:bodyPr>
-          <a:lstStyle/>
-          <a:p>
-            <a:r>
-              <a:rPr sz="800">
-                <a:hlinkClick r:id="rId29"/>
-              </a:rPr>
-              <a:t>Lofar 1</a:t>
-            </a:r>
-          </a:p>
-        </p:txBody>
-      </p:sp>
-      <p:sp>
-        <p:nvSpPr>
-          <p:cNvPr id="25" name="Rounded Rectangle 24"/>
-          <p:cNvSpPr/>
-          <p:nvPr>
-            <a:hlinkClick r:id="rId30"/>
-          </p:nvPr>
-        </p:nvSpPr>
-        <p:spPr>
-          <a:xfrm>
-            <a:off x="2657246" y="4632960"/>
-            <a:ext cx="2200046" cy="365760"/>
-          </a:xfrm>
-          <a:prstGeom prst="roundRect">
-            <a:avLst/>
-          </a:prstGeom>
-          <a:solidFill>
-            <a:srgbClr val="E8EEF7"/>
-          </a:solidFill>
-          <a:ln>
-            <a:solidFill>
-              <a:srgbClr val="1F3A5F"/>
-            </a:solidFill>
-          </a:ln>
-        </p:spPr>
-        <p:style>
-          <a:lnRef idx="1">
-            <a:schemeClr val="accent1"/>
-          </a:lnRef>
-          <a:fillRef idx="3">
-            <a:schemeClr val="accent1"/>
-          </a:fillRef>
-          <a:effectRef idx="2">
-            <a:schemeClr val="accent1"/>
-          </a:effectRef>
-          <a:fontRef idx="minor">
-            <a:schemeClr val="lt1"/>
-          </a:fontRef>
-        </p:style>
-        <p:txBody>
-          <a:bodyPr rtlCol="0" anchor="ctr" lIns="45720" rIns="45720"/>
-          <a:lstStyle/>
-          <a:p>
-            <a:pPr algn="ctr"/>
-            <a:r>
-              <a:rPr sz="900">
-                <a:solidFill>
-                  <a:srgbClr val="1F3A5F"/>
-                </a:solidFill>
-              </a:rPr>
-              <a:t>Gram 16: Corellian Corvette contact bearing 224, codename Vulcan</a:t>
-            </a:r>
-          </a:p>
-        </p:txBody>
-      </p:sp>
-      <p:sp>
-        <p:nvSpPr>
-          <p:cNvPr id="26" name="TextBox 25"/>
-          <p:cNvSpPr txBox="1"/>
-          <p:nvPr/>
-        </p:nvSpPr>
-        <p:spPr>
-          <a:xfrm>
-            <a:off x="2657246" y="5017008"/>
-            <a:ext cx="2200046" cy="1447800"/>
-          </a:xfrm>
-          <a:prstGeom prst="rect">
-            <a:avLst/>
-          </a:prstGeom>
-          <a:noFill/>
-        </p:spPr>
-        <p:txBody>
-          <a:bodyPr wrap="square">
-            <a:spAutoFit/>
-          </a:bodyPr>
-          <a:lstStyle/>
-          <a:p>
-            <a:r>
-              <a:rPr sz="800">
-                <a:hlinkClick r:id="rId31"/>
-              </a:rPr>
-              <a:t>Lofar 1</a:t>
-            </a:r>
-          </a:p>
-          <a:p>
-            <a:r>
-              <a:rPr sz="800">
-                <a:hlinkClick r:id="rId32"/>
-              </a:rPr>
-              <a:t>Lofar 2</a:t>
-            </a:r>
-          </a:p>
-          <a:p>
-            <a:r>
-              <a:rPr sz="800">
-                <a:hlinkClick r:id="rId33"/>
-              </a:rPr>
-              <a:t>Lofar 3</a:t>
-            </a:r>
-          </a:p>
-          <a:p>
-            <a:r>
-              <a:rPr sz="800">
-                <a:hlinkClick r:id="rId34"/>
-              </a:rPr>
-              <a:t>Lofar 4</a:t>
-            </a:r>
-          </a:p>
-        </p:txBody>
-      </p:sp>
-      <p:sp>
-        <p:nvSpPr>
-          <p:cNvPr id="27" name="Rounded Rectangle 26"/>
-          <p:cNvSpPr/>
-          <p:nvPr>
-            <a:hlinkClick r:id="rId35"/>
-          </p:nvPr>
-        </p:nvSpPr>
-        <p:spPr>
-          <a:xfrm>
-            <a:off x="4948732" y="4632960"/>
-            <a:ext cx="2200046" cy="365760"/>
-          </a:xfrm>
-          <a:prstGeom prst="roundRect">
-            <a:avLst/>
-          </a:prstGeom>
-          <a:solidFill>
-            <a:srgbClr val="E8EEF7"/>
-          </a:solidFill>
-          <a:ln>
-            <a:solidFill>
-              <a:srgbClr val="1F3A5F"/>
-            </a:solidFill>
-          </a:ln>
-        </p:spPr>
-        <p:style>
-          <a:lnRef idx="1">
-            <a:schemeClr val="accent1"/>
-          </a:lnRef>
-          <a:fillRef idx="3">
-            <a:schemeClr val="accent1"/>
-          </a:fillRef>
-          <a:effectRef idx="2">
-            <a:schemeClr val="accent1"/>
-          </a:effectRef>
-          <a:fontRef idx="minor">
-            <a:schemeClr val="lt1"/>
-          </a:fontRef>
-        </p:style>
-        <p:txBody>
-          <a:bodyPr rtlCol="0" anchor="ctr" lIns="45720" rIns="45720"/>
-          <a:lstStyle/>
-          <a:p>
-            <a:pPr algn="ctr"/>
-            <a:r>
-              <a:rPr sz="900">
-                <a:solidFill>
-                  <a:srgbClr val="1F3A5F"/>
-                </a:solidFill>
-              </a:rPr>
-              <a:t>Gram 17: FR Outrider, Category 3, Cardassia</a:t>
-            </a:r>
-          </a:p>
-        </p:txBody>
-      </p:sp>
-      <p:sp>
-        <p:nvSpPr>
-          <p:cNvPr id="28" name="TextBox 27"/>
-          <p:cNvSpPr txBox="1"/>
-          <p:nvPr/>
-        </p:nvSpPr>
-        <p:spPr>
-          <a:xfrm>
-            <a:off x="4948732" y="5017008"/>
-            <a:ext cx="2200046" cy="1447800"/>
-          </a:xfrm>
-          <a:prstGeom prst="rect">
-            <a:avLst/>
-          </a:prstGeom>
-          <a:noFill/>
-        </p:spPr>
-        <p:txBody>
-          <a:bodyPr wrap="square">
-            <a:spAutoFit/>
-          </a:bodyPr>
-          <a:lstStyle/>
-          <a:p>
-            <a:r>
-              <a:rPr sz="800">
-                <a:hlinkClick r:id="rId36"/>
-              </a:rPr>
-              <a:t>Lofar 1</a:t>
-            </a:r>
-          </a:p>
-          <a:p>
-            <a:r>
-              <a:rPr sz="800">
-                <a:hlinkClick r:id="rId37"/>
-              </a:rPr>
-              <a:t>Lofar 2</a:t>
-            </a:r>
-          </a:p>
-        </p:txBody>
-      </p:sp>
-      <p:sp>
-        <p:nvSpPr>
-          <p:cNvPr id="29" name="Rounded Rectangle 28"/>
-          <p:cNvSpPr/>
-          <p:nvPr>
-            <a:hlinkClick r:id="rId38"/>
-          </p:nvPr>
-        </p:nvSpPr>
-        <p:spPr>
-          <a:xfrm>
-            <a:off x="7240219" y="4632960"/>
-            <a:ext cx="2200046" cy="365760"/>
-          </a:xfrm>
-          <a:prstGeom prst="roundRect">
-            <a:avLst/>
-          </a:prstGeom>
-          <a:solidFill>
-            <a:srgbClr val="E8EEF7"/>
-          </a:solidFill>
-          <a:ln>
-            <a:solidFill>
-              <a:srgbClr val="1F3A5F"/>
-            </a:solidFill>
-          </a:ln>
-        </p:spPr>
-        <p:style>
-          <a:lnRef idx="1">
-            <a:schemeClr val="accent1"/>
-          </a:lnRef>
-          <a:fillRef idx="3">
-            <a:schemeClr val="accent1"/>
-          </a:fillRef>
-          <a:effectRef idx="2">
-            <a:schemeClr val="accent1"/>
-          </a:effectRef>
-          <a:fontRef idx="minor">
-            <a:schemeClr val="lt1"/>
-          </a:fontRef>
-        </p:style>
-        <p:txBody>
-          <a:bodyPr rtlCol="0" anchor="ctr" lIns="45720" rIns="45720"/>
-          <a:lstStyle/>
-          <a:p>
-            <a:pPr algn="ctr"/>
-            <a:r>
-              <a:rPr sz="900">
-                <a:solidFill>
-                  <a:srgbClr val="1F3A5F"/>
-                </a:solidFill>
-              </a:rPr>
-              <a:t>Gram 18: FR Razor Crest, Category 2, Gandalf</a:t>
-            </a:r>
-          </a:p>
-        </p:txBody>
-      </p:sp>
-      <p:sp>
-        <p:nvSpPr>
-          <p:cNvPr id="30" name="TextBox 29"/>
-          <p:cNvSpPr txBox="1"/>
-          <p:nvPr/>
-        </p:nvSpPr>
-        <p:spPr>
-          <a:xfrm>
-            <a:off x="7240219" y="5017008"/>
-            <a:ext cx="2200046" cy="1447800"/>
-          </a:xfrm>
-          <a:prstGeom prst="rect">
-            <a:avLst/>
-          </a:prstGeom>
-          <a:noFill/>
-        </p:spPr>
-        <p:txBody>
-          <a:bodyPr wrap="square">
-            <a:spAutoFit/>
-          </a:bodyPr>
-          <a:lstStyle/>
-          <a:p>
-            <a:r>
-              <a:rPr sz="800">
-                <a:hlinkClick r:id="rId39"/>
-              </a:rPr>
-              <a:t>Lofar 1</a:t>
-            </a:r>
-          </a:p>
-          <a:p>
-            <a:r>
-              <a:rPr sz="800">
-                <a:hlinkClick r:id="rId40"/>
-              </a:rPr>
-              <a:t>Lofar 2</a:t>
-            </a:r>
-          </a:p>
-          <a:p>
-            <a:r>
-              <a:rPr sz="800">
-                <a:hlinkClick r:id="rId41"/>
-              </a:rPr>
-              <a:t>Lofar 3</a:t>
-            </a:r>
-          </a:p>
-          <a:p>
-            <a:r>
-              <a:rPr sz="800">
-                <a:hlinkClick r:id="rId42"/>
-              </a:rPr>
-              <a:t>Lofar 4</a:t>
-            </a:r>
-          </a:p>
-        </p:txBody>
-      </p:sp>
-      <p:sp>
-        <p:nvSpPr>
-          <p:cNvPr id="31" name="Rounded Rectangle 30"/>
-          <p:cNvSpPr/>
-          <p:nvPr>
-            <a:hlinkClick r:id="rId43"/>
-          </p:nvPr>
-        </p:nvSpPr>
-        <p:spPr>
-          <a:xfrm>
-            <a:off x="9531705" y="4632960"/>
-            <a:ext cx="2200046" cy="365760"/>
-          </a:xfrm>
-          <a:prstGeom prst="roundRect">
-            <a:avLst/>
-          </a:prstGeom>
-          <a:solidFill>
-            <a:srgbClr val="E8EEF7"/>
-          </a:solidFill>
-          <a:ln>
-            <a:solidFill>
-              <a:srgbClr val="1F3A5F"/>
-            </a:solidFill>
-          </a:ln>
-        </p:spPr>
-        <p:style>
-          <a:lnRef idx="1">
-            <a:schemeClr val="accent1"/>
-          </a:lnRef>
-          <a:fillRef idx="3">
-            <a:schemeClr val="accent1"/>
-          </a:fillRef>
-          <a:effectRef idx="2">
-            <a:schemeClr val="accent1"/>
-          </a:effectRef>
-          <a:fontRef idx="minor">
-            <a:schemeClr val="lt1"/>
-          </a:fontRef>
-        </p:style>
-        <p:txBody>
-          <a:bodyPr rtlCol="0" anchor="ctr" lIns="45720" rIns="45720"/>
-          <a:lstStyle/>
-          <a:p>
-            <a:pPr algn="ctr"/>
-            <a:r>
-              <a:rPr sz="900">
-                <a:solidFill>
-                  <a:srgbClr val="1F3A5F"/>
-                </a:solidFill>
-              </a:rPr>
-              <a:t>Gram 19: FR Ghost, Category 1, Romulus</a:t>
-            </a:r>
-          </a:p>
-        </p:txBody>
-      </p:sp>
-      <p:sp>
-        <p:nvSpPr>
-          <p:cNvPr id="32" name="TextBox 31"/>
-          <p:cNvSpPr txBox="1"/>
-          <p:nvPr/>
-        </p:nvSpPr>
-        <p:spPr>
-          <a:xfrm>
-            <a:off x="9531705" y="5017008"/>
-            <a:ext cx="2200046" cy="1447800"/>
-          </a:xfrm>
-          <a:prstGeom prst="rect">
-            <a:avLst/>
-          </a:prstGeom>
-          <a:noFill/>
-        </p:spPr>
-        <p:txBody>
-          <a:bodyPr wrap="square">
-            <a:spAutoFit/>
-          </a:bodyPr>
-          <a:lstStyle/>
-          <a:p>
-            <a:r>
-              <a:rPr sz="800">
-                <a:hlinkClick r:id="rId44"/>
-              </a:rPr>
-              <a:t>Lofar 1</a:t>
+              <a:t>Instructor Version</a:t>
             </a:r>
           </a:p>
         </p:txBody>
@@ -4598,7 +3223,7 @@
                   <a:srgbClr val="FFFFFF"/>
                 </a:solidFill>
               </a:rPr>
-              <a:t>Instructor Progress Test 1 Grams — Page 2 of 2</a:t>
+              <a:t>Instructor Progress Test 1 Grams — Page 1 of 2</a:t>
             </a:r>
           </a:p>
         </p:txBody>
@@ -4653,7 +3278,7 @@
                   <a:srgbClr val="1F3A5F"/>
                 </a:solidFill>
               </a:rPr>
-              <a:t>Gram 20: FR Nebulon-B, Category 3, Mustafar</a:t>
+              <a:t>Gram 1: FR Prometheus, Category 1, Bespin</a:t>
             </a:r>
           </a:p>
         </p:txBody>
@@ -4687,6 +3312,14 @@
               <a:t>Lofar 1</a:t>
             </a:r>
           </a:p>
+          <a:p>
+            <a:r>
+              <a:rPr sz="800">
+                <a:hlinkClick r:id="rId4"/>
+              </a:rPr>
+              <a:t>Lofar 2</a:t>
+            </a:r>
+          </a:p>
         </p:txBody>
       </p:sp>
       <p:sp>
@@ -4694,7 +3327,7 @@
           <p:cNvPr id="5" name="Rounded Rectangle 4"/>
           <p:cNvSpPr/>
           <p:nvPr>
-            <a:hlinkClick r:id="rId4"/>
+            <a:hlinkClick r:id="rId5"/>
           </p:nvPr>
         </p:nvSpPr>
         <p:spPr>
@@ -4739,7 +3372,7 @@
                   <a:srgbClr val="1F3A5F"/>
                 </a:solidFill>
               </a:rPr>
-              <a:t>Gram 21: Outrider contact bearing 131, codename Yavin</a:t>
+              <a:t>Gram 3: FR Ghost, Category 1, Tantive</a:t>
             </a:r>
           </a:p>
         </p:txBody>
@@ -4768,7 +3401,7 @@
           <a:p>
             <a:r>
               <a:rPr sz="800">
-                <a:hlinkClick r:id="rId5"/>
+                <a:hlinkClick r:id="rId6"/>
               </a:rPr>
               <a:t>Lofar 1</a:t>
             </a:r>
@@ -4780,7 +3413,7 @@
           <p:cNvPr id="7" name="Rounded Rectangle 6"/>
           <p:cNvSpPr/>
           <p:nvPr>
-            <a:hlinkClick r:id="rId6"/>
+            <a:hlinkClick r:id="rId7"/>
           </p:nvPr>
         </p:nvSpPr>
         <p:spPr>
@@ -4825,7 +3458,7 @@
                   <a:srgbClr val="1F3A5F"/>
                 </a:solidFill>
               </a:rPr>
-              <a:t>Gram 22: FR Venator-class, Category 4, Coruscant</a:t>
+              <a:t>Gram 4: Enterprise contact bearing 291, codename Hoth</a:t>
             </a:r>
           </a:p>
         </p:txBody>
@@ -4854,7 +3487,7 @@
           <a:p>
             <a:r>
               <a:rPr sz="800">
-                <a:hlinkClick r:id="rId7"/>
+                <a:hlinkClick r:id="rId8"/>
               </a:rPr>
               <a:t>Lofar 1</a:t>
             </a:r>
@@ -4866,7 +3499,7 @@
           <p:cNvPr id="9" name="Rounded Rectangle 8"/>
           <p:cNvSpPr/>
           <p:nvPr>
-            <a:hlinkClick r:id="rId8"/>
+            <a:hlinkClick r:id="rId9"/>
           </p:nvPr>
         </p:nvSpPr>
         <p:spPr>
@@ -4911,7 +3544,7 @@
                   <a:srgbClr val="1F3A5F"/>
                 </a:solidFill>
               </a:rPr>
-              <a:t>Gram 23: X-wing contact bearing 097, codename Tantive</a:t>
+              <a:t>Gram 5: FR Enterprise, Category 4, Bespin</a:t>
             </a:r>
           </a:p>
         </p:txBody>
@@ -4940,7 +3573,7 @@
           <a:p>
             <a:r>
               <a:rPr sz="800">
-                <a:hlinkClick r:id="rId9"/>
+                <a:hlinkClick r:id="rId10"/>
               </a:rPr>
               <a:t>Lofar 1</a:t>
             </a:r>
@@ -4952,7 +3585,7 @@
           <p:cNvPr id="11" name="Rounded Rectangle 10"/>
           <p:cNvSpPr/>
           <p:nvPr>
-            <a:hlinkClick r:id="rId10"/>
+            <a:hlinkClick r:id="rId11"/>
           </p:nvPr>
         </p:nvSpPr>
         <p:spPr>
@@ -4997,7 +3630,7 @@
                   <a:srgbClr val="1F3A5F"/>
                 </a:solidFill>
               </a:rPr>
-              <a:t>Gram 24: FR X-wing, Category 4, Naboo</a:t>
+              <a:t>Gram 6: FR Akira-class, Category 4, Hoth</a:t>
             </a:r>
           </a:p>
         </p:txBody>
@@ -5026,25 +3659,9 @@
           <a:p>
             <a:r>
               <a:rPr sz="800">
-                <a:hlinkClick r:id="rId11"/>
+                <a:hlinkClick r:id="rId12"/>
               </a:rPr>
               <a:t>Lofar 1</a:t>
-            </a:r>
-          </a:p>
-          <a:p>
-            <a:r>
-              <a:rPr sz="800">
-                <a:hlinkClick r:id="rId12"/>
-              </a:rPr>
-              <a:t>Lofar 2</a:t>
-            </a:r>
-          </a:p>
-          <a:p>
-            <a:r>
-              <a:rPr sz="800">
-                <a:hlinkClick r:id="rId13"/>
-              </a:rPr>
-              <a:t>Lofar 3</a:t>
             </a:r>
           </a:p>
         </p:txBody>
@@ -5054,7 +3671,7 @@
           <p:cNvPr id="13" name="Rounded Rectangle 12"/>
           <p:cNvSpPr/>
           <p:nvPr>
-            <a:hlinkClick r:id="rId14"/>
+            <a:hlinkClick r:id="rId13"/>
           </p:nvPr>
         </p:nvSpPr>
         <p:spPr>
@@ -5099,7 +3716,7 @@
                   <a:srgbClr val="1F3A5F"/>
                 </a:solidFill>
               </a:rPr>
-              <a:t>Gram 25: FR Defiant, Category 2, Endor</a:t>
+              <a:t>Gram 7: FR Rebel One, Category 1, Naboo</a:t>
             </a:r>
           </a:p>
         </p:txBody>
@@ -5128,15 +3745,15 @@
           <a:p>
             <a:r>
               <a:rPr sz="800">
+                <a:hlinkClick r:id="rId14"/>
+              </a:rPr>
+              <a:t>Lofar 1</a:t>
+            </a:r>
+          </a:p>
+          <a:p>
+            <a:r>
+              <a:rPr sz="800">
                 <a:hlinkClick r:id="rId15"/>
-              </a:rPr>
-              <a:t>Lofar 1</a:t>
-            </a:r>
-          </a:p>
-          <a:p>
-            <a:r>
-              <a:rPr sz="800">
-                <a:hlinkClick r:id="rId16"/>
               </a:rPr>
               <a:t>Lofar 2</a:t>
             </a:r>
@@ -5148,7 +3765,7 @@
           <p:cNvPr id="15" name="Rounded Rectangle 14"/>
           <p:cNvSpPr/>
           <p:nvPr>
-            <a:hlinkClick r:id="rId17"/>
+            <a:hlinkClick r:id="rId16"/>
           </p:nvPr>
         </p:nvSpPr>
         <p:spPr>
@@ -5193,7 +3810,7 @@
                   <a:srgbClr val="1F3A5F"/>
                 </a:solidFill>
               </a:rPr>
-              <a:t>Gram 26: FR Defiant, Category 2, Naboo</a:t>
+              <a:t>Gram 8: FR TIE Bomber, Category 4, Kronos</a:t>
             </a:r>
           </a:p>
         </p:txBody>
@@ -5222,33 +3839,9 @@
           <a:p>
             <a:r>
               <a:rPr sz="800">
-                <a:hlinkClick r:id="rId18"/>
+                <a:hlinkClick r:id="rId17"/>
               </a:rPr>
               <a:t>Lofar 1</a:t>
-            </a:r>
-          </a:p>
-          <a:p>
-            <a:r>
-              <a:rPr sz="800">
-                <a:hlinkClick r:id="rId19"/>
-              </a:rPr>
-              <a:t>Lofar 2</a:t>
-            </a:r>
-          </a:p>
-          <a:p>
-            <a:r>
-              <a:rPr sz="800">
-                <a:hlinkClick r:id="rId20"/>
-              </a:rPr>
-              <a:t>Lofar 3</a:t>
-            </a:r>
-          </a:p>
-          <a:p>
-            <a:r>
-              <a:rPr sz="800">
-                <a:hlinkClick r:id="rId21"/>
-              </a:rPr>
-              <a:t>Lofar 4</a:t>
             </a:r>
           </a:p>
         </p:txBody>
@@ -5258,7 +3851,7 @@
           <p:cNvPr id="17" name="Rounded Rectangle 16"/>
           <p:cNvSpPr/>
           <p:nvPr>
-            <a:hlinkClick r:id="rId22"/>
+            <a:hlinkClick r:id="rId18"/>
           </p:nvPr>
         </p:nvSpPr>
         <p:spPr>
@@ -5303,7 +3896,7 @@
                   <a:srgbClr val="1F3A5F"/>
                 </a:solidFill>
               </a:rPr>
-              <a:t>Gram 27: Y-wing contact bearing 197, codename Dagobah</a:t>
+              <a:t>Gram 9: FR Star Destroyer, Category 1, Tatooine</a:t>
             </a:r>
           </a:p>
         </p:txBody>
@@ -5332,25 +3925,9 @@
           <a:p>
             <a:r>
               <a:rPr sz="800">
-                <a:hlinkClick r:id="rId23"/>
+                <a:hlinkClick r:id="rId19"/>
               </a:rPr>
               <a:t>Lofar 1</a:t>
-            </a:r>
-          </a:p>
-          <a:p>
-            <a:r>
-              <a:rPr sz="800">
-                <a:hlinkClick r:id="rId24"/>
-              </a:rPr>
-              <a:t>Lofar 2</a:t>
-            </a:r>
-          </a:p>
-          <a:p>
-            <a:r>
-              <a:rPr sz="800">
-                <a:hlinkClick r:id="rId25"/>
-              </a:rPr>
-              <a:t>Lofar 3</a:t>
             </a:r>
           </a:p>
         </p:txBody>
@@ -5360,7 +3937,7 @@
           <p:cNvPr id="19" name="Rounded Rectangle 18"/>
           <p:cNvSpPr/>
           <p:nvPr>
-            <a:hlinkClick r:id="rId26"/>
+            <a:hlinkClick r:id="rId20"/>
           </p:nvPr>
         </p:nvSpPr>
         <p:spPr>
@@ -5405,7 +3982,7 @@
                   <a:srgbClr val="1F3A5F"/>
                 </a:solidFill>
               </a:rPr>
-              <a:t>Gram 28: FR Nebula-class, Category 1, Tantive</a:t>
+              <a:t>Gram 10: FR Stargazer, Category 3, Risa</a:t>
             </a:r>
           </a:p>
         </p:txBody>
@@ -5434,7 +4011,7 @@
           <a:p>
             <a:r>
               <a:rPr sz="800">
-                <a:hlinkClick r:id="rId27"/>
+                <a:hlinkClick r:id="rId21"/>
               </a:rPr>
               <a:t>Lofar 1</a:t>
             </a:r>
@@ -5442,7 +4019,7 @@
           <a:p>
             <a:r>
               <a:rPr sz="800">
-                <a:hlinkClick r:id="rId28"/>
+                <a:hlinkClick r:id="rId22"/>
               </a:rPr>
               <a:t>Lofar 2</a:t>
             </a:r>
@@ -5450,7 +4027,7 @@
           <a:p>
             <a:r>
               <a:rPr sz="800">
-                <a:hlinkClick r:id="rId29"/>
+                <a:hlinkClick r:id="rId23"/>
               </a:rPr>
               <a:t>Lofar 3</a:t>
             </a:r>
@@ -5458,7 +4035,7 @@
           <a:p>
             <a:r>
               <a:rPr sz="800">
-                <a:hlinkClick r:id="rId30"/>
+                <a:hlinkClick r:id="rId24"/>
               </a:rPr>
               <a:t>Lofar 4</a:t>
             </a:r>
@@ -5470,7 +4047,7 @@
           <p:cNvPr id="21" name="Rounded Rectangle 20"/>
           <p:cNvSpPr/>
           <p:nvPr>
-            <a:hlinkClick r:id="rId31"/>
+            <a:hlinkClick r:id="rId25"/>
           </p:nvPr>
         </p:nvSpPr>
         <p:spPr>
@@ -5515,7 +4092,7 @@
                   <a:srgbClr val="1F3A5F"/>
                 </a:solidFill>
               </a:rPr>
-              <a:t>Gram 29: FR Akira-class, Category 2, Romulus</a:t>
+              <a:t>Gram 11: FR Imperial-class, Category 2, Caprica</a:t>
             </a:r>
           </a:p>
         </p:txBody>
@@ -5544,7 +4121,7 @@
           <a:p>
             <a:r>
               <a:rPr sz="800">
-                <a:hlinkClick r:id="rId32"/>
+                <a:hlinkClick r:id="rId26"/>
               </a:rPr>
               <a:t>Lofar 1</a:t>
             </a:r>
@@ -5552,17 +4129,9 @@
           <a:p>
             <a:r>
               <a:rPr sz="800">
-                <a:hlinkClick r:id="rId33"/>
+                <a:hlinkClick r:id="rId27"/>
               </a:rPr>
               <a:t>Lofar 2</a:t>
-            </a:r>
-          </a:p>
-          <a:p>
-            <a:r>
-              <a:rPr sz="800">
-                <a:hlinkClick r:id="rId34"/>
-              </a:rPr>
-              <a:t>Lofar 3</a:t>
             </a:r>
           </a:p>
         </p:txBody>
@@ -5572,7 +4141,7 @@
           <p:cNvPr id="23" name="Rounded Rectangle 22"/>
           <p:cNvSpPr/>
           <p:nvPr>
-            <a:hlinkClick r:id="rId35"/>
+            <a:hlinkClick r:id="rId28"/>
           </p:nvPr>
         </p:nvSpPr>
         <p:spPr>
@@ -5617,7 +4186,7 @@
                   <a:srgbClr val="1F3A5F"/>
                 </a:solidFill>
               </a:rPr>
-              <a:t>Gram 30: Defiant-class contact bearing 058, codename Naboo</a:t>
+              <a:t>Gram 14: FR Tantive IV, Category 4, Trill</a:t>
             </a:r>
           </a:p>
         </p:txBody>
@@ -5646,33 +4215,9 @@
           <a:p>
             <a:r>
               <a:rPr sz="800">
-                <a:hlinkClick r:id="rId36"/>
+                <a:hlinkClick r:id="rId29"/>
               </a:rPr>
               <a:t>Lofar 1</a:t>
-            </a:r>
-          </a:p>
-          <a:p>
-            <a:r>
-              <a:rPr sz="800">
-                <a:hlinkClick r:id="rId37"/>
-              </a:rPr>
-              <a:t>Lofar 2</a:t>
-            </a:r>
-          </a:p>
-          <a:p>
-            <a:r>
-              <a:rPr sz="800">
-                <a:hlinkClick r:id="rId38"/>
-              </a:rPr>
-              <a:t>Lofar 3</a:t>
-            </a:r>
-          </a:p>
-          <a:p>
-            <a:r>
-              <a:rPr sz="800">
-                <a:hlinkClick r:id="rId39"/>
-              </a:rPr>
-              <a:t>Lofar 4</a:t>
             </a:r>
           </a:p>
         </p:txBody>
@@ -5682,7 +4227,7 @@
           <p:cNvPr id="25" name="Rounded Rectangle 24"/>
           <p:cNvSpPr/>
           <p:nvPr>
-            <a:hlinkClick r:id="rId40"/>
+            <a:hlinkClick r:id="rId30"/>
           </p:nvPr>
         </p:nvSpPr>
         <p:spPr>
@@ -5727,7 +4272,7 @@
                   <a:srgbClr val="1F3A5F"/>
                 </a:solidFill>
               </a:rPr>
-              <a:t>Gram 31: Imperial-class contact bearing 170, codename Tantive</a:t>
+              <a:t>Gram 16: Corellian Corvette contact bearing 224, codename Vulcan</a:t>
             </a:r>
           </a:p>
         </p:txBody>
@@ -5756,7 +4301,7 @@
           <a:p>
             <a:r>
               <a:rPr sz="800">
-                <a:hlinkClick r:id="rId41"/>
+                <a:hlinkClick r:id="rId31"/>
               </a:rPr>
               <a:t>Lofar 1</a:t>
             </a:r>
@@ -5764,9 +4309,25 @@
           <a:p>
             <a:r>
               <a:rPr sz="800">
-                <a:hlinkClick r:id="rId42"/>
+                <a:hlinkClick r:id="rId32"/>
               </a:rPr>
               <a:t>Lofar 2</a:t>
+            </a:r>
+          </a:p>
+          <a:p>
+            <a:r>
+              <a:rPr sz="800">
+                <a:hlinkClick r:id="rId33"/>
+              </a:rPr>
+              <a:t>Lofar 3</a:t>
+            </a:r>
+          </a:p>
+          <a:p>
+            <a:r>
+              <a:rPr sz="800">
+                <a:hlinkClick r:id="rId34"/>
+              </a:rPr>
+              <a:t>Lofar 4</a:t>
             </a:r>
           </a:p>
         </p:txBody>
@@ -5776,7 +4337,7 @@
           <p:cNvPr id="27" name="Rounded Rectangle 26"/>
           <p:cNvSpPr/>
           <p:nvPr>
-            <a:hlinkClick r:id="rId43"/>
+            <a:hlinkClick r:id="rId35"/>
           </p:nvPr>
         </p:nvSpPr>
         <p:spPr>
@@ -5821,7 +4382,7 @@
                   <a:srgbClr val="1F3A5F"/>
                 </a:solidFill>
               </a:rPr>
-              <a:t>Gram 32: FR A-wing, Category 4, Naboo</a:t>
+              <a:t>Gram 17: FR Outrider, Category 3, Cardassia</a:t>
             </a:r>
           </a:p>
         </p:txBody>
@@ -5850,7 +4411,7 @@
           <a:p>
             <a:r>
               <a:rPr sz="800">
-                <a:hlinkClick r:id="rId44"/>
+                <a:hlinkClick r:id="rId36"/>
               </a:rPr>
               <a:t>Lofar 1</a:t>
             </a:r>
@@ -5858,7 +4419,7 @@
           <a:p>
             <a:r>
               <a:rPr sz="800">
-                <a:hlinkClick r:id="rId45"/>
+                <a:hlinkClick r:id="rId37"/>
               </a:rPr>
               <a:t>Lofar 2</a:t>
             </a:r>
@@ -5870,7 +4431,7 @@
           <p:cNvPr id="29" name="Rounded Rectangle 28"/>
           <p:cNvSpPr/>
           <p:nvPr>
-            <a:hlinkClick r:id="rId46"/>
+            <a:hlinkClick r:id="rId38"/>
           </p:nvPr>
         </p:nvSpPr>
         <p:spPr>
@@ -5915,7 +4476,7 @@
                   <a:srgbClr val="1F3A5F"/>
                 </a:solidFill>
               </a:rPr>
-              <a:t>Gram 33: FR Rebel One, Category 3, Tatooine</a:t>
+              <a:t>Gram 18: FR Razor Crest, Category 2, Gandalf</a:t>
             </a:r>
           </a:p>
         </p:txBody>
@@ -5944,7 +4505,7 @@
           <a:p>
             <a:r>
               <a:rPr sz="800">
-                <a:hlinkClick r:id="rId47"/>
+                <a:hlinkClick r:id="rId39"/>
               </a:rPr>
               <a:t>Lofar 1</a:t>
             </a:r>
@@ -5952,7 +4513,7 @@
           <a:p>
             <a:r>
               <a:rPr sz="800">
-                <a:hlinkClick r:id="rId48"/>
+                <a:hlinkClick r:id="rId40"/>
               </a:rPr>
               <a:t>Lofar 2</a:t>
             </a:r>
@@ -5960,9 +4521,17 @@
           <a:p>
             <a:r>
               <a:rPr sz="800">
-                <a:hlinkClick r:id="rId49"/>
+                <a:hlinkClick r:id="rId41"/>
               </a:rPr>
               <a:t>Lofar 3</a:t>
+            </a:r>
+          </a:p>
+          <a:p>
+            <a:r>
+              <a:rPr sz="800">
+                <a:hlinkClick r:id="rId42"/>
+              </a:rPr>
+              <a:t>Lofar 4</a:t>
             </a:r>
           </a:p>
         </p:txBody>
@@ -5972,7 +4541,7 @@
           <p:cNvPr id="31" name="Rounded Rectangle 30"/>
           <p:cNvSpPr/>
           <p:nvPr>
-            <a:hlinkClick r:id="rId50"/>
+            <a:hlinkClick r:id="rId43"/>
           </p:nvPr>
         </p:nvSpPr>
         <p:spPr>
@@ -6017,7 +4586,7 @@
                   <a:srgbClr val="1F3A5F"/>
                 </a:solidFill>
               </a:rPr>
-              <a:t>Gram 36: Rebel One contact bearing 103, codename Tatooine</a:t>
+              <a:t>Gram 19: FR Ghost, Category 1, Romulus</a:t>
             </a:r>
           </a:p>
         </p:txBody>
@@ -6046,6 +4615,1525 @@
           <a:p>
             <a:r>
               <a:rPr sz="800">
+                <a:hlinkClick r:id="rId44"/>
+              </a:rPr>
+              <a:t>Lofar 1</a:t>
+            </a:r>
+          </a:p>
+        </p:txBody>
+      </p:sp>
+    </p:spTree>
+  </p:cSld>
+  <p:clrMapOvr>
+    <a:masterClrMapping/>
+  </p:clrMapOvr>
+</p:sld>
+</file>
+
+<file path=ppt/slides/slide3.xml><?xml version="1.0" encoding="utf-8"?>
+<p:sld xmlns:a="http://schemas.openxmlformats.org/drawingml/2006/main" xmlns:p="http://schemas.openxmlformats.org/presentationml/2006/main" xmlns:r="http://schemas.openxmlformats.org/officeDocument/2006/relationships">
+  <p:cSld>
+    <p:spTree>
+      <p:nvGrpSpPr>
+        <p:cNvPr id="1" name=""/>
+        <p:cNvGrpSpPr/>
+        <p:nvPr/>
+      </p:nvGrpSpPr>
+      <p:grpSpPr/>
+      <p:sp>
+        <p:nvSpPr>
+          <p:cNvPr id="2" name="Rectangle 1"/>
+          <p:cNvSpPr/>
+          <p:nvPr/>
+        </p:nvSpPr>
+        <p:spPr>
+          <a:xfrm>
+            <a:off x="0" y="0"/>
+            <a:ext cx="12188952" cy="548640"/>
+          </a:xfrm>
+          <a:prstGeom prst="rect">
+            <a:avLst/>
+          </a:prstGeom>
+          <a:solidFill>
+            <a:srgbClr val="1F3A5F"/>
+          </a:solidFill>
+          <a:ln>
+            <a:noFill/>
+          </a:ln>
+        </p:spPr>
+        <p:style>
+          <a:lnRef idx="1">
+            <a:schemeClr val="accent1"/>
+          </a:lnRef>
+          <a:fillRef idx="3">
+            <a:schemeClr val="accent1"/>
+          </a:fillRef>
+          <a:effectRef idx="2">
+            <a:schemeClr val="accent1"/>
+          </a:effectRef>
+          <a:fontRef idx="minor">
+            <a:schemeClr val="lt1"/>
+          </a:fontRef>
+        </p:style>
+        <p:txBody>
+          <a:bodyPr rtlCol="0" anchor="ctr" lIns="182880" rIns="182880"/>
+          <a:lstStyle/>
+          <a:p>
+            <a:pPr algn="ctr"/>
+            <a:r>
+              <a:rPr sz="2000" b="1">
+                <a:solidFill>
+                  <a:srgbClr val="FFFFFF"/>
+                </a:solidFill>
+              </a:rPr>
+              <a:t>Instructor Progress Test 1 Grams — Page 2 of 2</a:t>
+            </a:r>
+          </a:p>
+        </p:txBody>
+      </p:sp>
+      <p:sp>
+        <p:nvSpPr>
+          <p:cNvPr id="3" name="Rounded Rectangle 2"/>
+          <p:cNvSpPr/>
+          <p:nvPr>
+            <a:hlinkClick r:id="rId2"/>
+          </p:nvPr>
+        </p:nvSpPr>
+        <p:spPr>
+          <a:xfrm>
+            <a:off x="365760" y="731520"/>
+            <a:ext cx="2200046" cy="365760"/>
+          </a:xfrm>
+          <a:prstGeom prst="roundRect">
+            <a:avLst/>
+          </a:prstGeom>
+          <a:solidFill>
+            <a:srgbClr val="E8EEF7"/>
+          </a:solidFill>
+          <a:ln>
+            <a:solidFill>
+              <a:srgbClr val="1F3A5F"/>
+            </a:solidFill>
+          </a:ln>
+        </p:spPr>
+        <p:style>
+          <a:lnRef idx="1">
+            <a:schemeClr val="accent1"/>
+          </a:lnRef>
+          <a:fillRef idx="3">
+            <a:schemeClr val="accent1"/>
+          </a:fillRef>
+          <a:effectRef idx="2">
+            <a:schemeClr val="accent1"/>
+          </a:effectRef>
+          <a:fontRef idx="minor">
+            <a:schemeClr val="lt1"/>
+          </a:fontRef>
+        </p:style>
+        <p:txBody>
+          <a:bodyPr rtlCol="0" anchor="ctr" lIns="45720" rIns="45720"/>
+          <a:lstStyle/>
+          <a:p>
+            <a:pPr algn="ctr"/>
+            <a:r>
+              <a:rPr sz="900">
+                <a:solidFill>
+                  <a:srgbClr val="1F3A5F"/>
+                </a:solidFill>
+              </a:rPr>
+              <a:t>Gram 20: FR Nebulon-B, Category 3, Mustafar</a:t>
+            </a:r>
+          </a:p>
+        </p:txBody>
+      </p:sp>
+      <p:sp>
+        <p:nvSpPr>
+          <p:cNvPr id="4" name="TextBox 3"/>
+          <p:cNvSpPr txBox="1"/>
+          <p:nvPr/>
+        </p:nvSpPr>
+        <p:spPr>
+          <a:xfrm>
+            <a:off x="365760" y="1115568"/>
+            <a:ext cx="2200046" cy="1447800"/>
+          </a:xfrm>
+          <a:prstGeom prst="rect">
+            <a:avLst/>
+          </a:prstGeom>
+          <a:noFill/>
+        </p:spPr>
+        <p:txBody>
+          <a:bodyPr wrap="square">
+            <a:spAutoFit/>
+          </a:bodyPr>
+          <a:lstStyle/>
+          <a:p>
+            <a:r>
+              <a:rPr sz="800">
+                <a:hlinkClick r:id="rId3"/>
+              </a:rPr>
+              <a:t>Lofar 1</a:t>
+            </a:r>
+          </a:p>
+        </p:txBody>
+      </p:sp>
+      <p:sp>
+        <p:nvSpPr>
+          <p:cNvPr id="5" name="Rounded Rectangle 4"/>
+          <p:cNvSpPr/>
+          <p:nvPr>
+            <a:hlinkClick r:id="rId4"/>
+          </p:nvPr>
+        </p:nvSpPr>
+        <p:spPr>
+          <a:xfrm>
+            <a:off x="2657246" y="731520"/>
+            <a:ext cx="2200046" cy="365760"/>
+          </a:xfrm>
+          <a:prstGeom prst="roundRect">
+            <a:avLst/>
+          </a:prstGeom>
+          <a:solidFill>
+            <a:srgbClr val="E8EEF7"/>
+          </a:solidFill>
+          <a:ln>
+            <a:solidFill>
+              <a:srgbClr val="1F3A5F"/>
+            </a:solidFill>
+          </a:ln>
+        </p:spPr>
+        <p:style>
+          <a:lnRef idx="1">
+            <a:schemeClr val="accent1"/>
+          </a:lnRef>
+          <a:fillRef idx="3">
+            <a:schemeClr val="accent1"/>
+          </a:fillRef>
+          <a:effectRef idx="2">
+            <a:schemeClr val="accent1"/>
+          </a:effectRef>
+          <a:fontRef idx="minor">
+            <a:schemeClr val="lt1"/>
+          </a:fontRef>
+        </p:style>
+        <p:txBody>
+          <a:bodyPr rtlCol="0" anchor="ctr" lIns="45720" rIns="45720"/>
+          <a:lstStyle/>
+          <a:p>
+            <a:pPr algn="ctr"/>
+            <a:r>
+              <a:rPr sz="900">
+                <a:solidFill>
+                  <a:srgbClr val="1F3A5F"/>
+                </a:solidFill>
+              </a:rPr>
+              <a:t>Gram 21: Outrider contact bearing 131, codename Yavin</a:t>
+            </a:r>
+          </a:p>
+        </p:txBody>
+      </p:sp>
+      <p:sp>
+        <p:nvSpPr>
+          <p:cNvPr id="6" name="TextBox 5"/>
+          <p:cNvSpPr txBox="1"/>
+          <p:nvPr/>
+        </p:nvSpPr>
+        <p:spPr>
+          <a:xfrm>
+            <a:off x="2657246" y="1115568"/>
+            <a:ext cx="2200046" cy="1447800"/>
+          </a:xfrm>
+          <a:prstGeom prst="rect">
+            <a:avLst/>
+          </a:prstGeom>
+          <a:noFill/>
+        </p:spPr>
+        <p:txBody>
+          <a:bodyPr wrap="square">
+            <a:spAutoFit/>
+          </a:bodyPr>
+          <a:lstStyle/>
+          <a:p>
+            <a:r>
+              <a:rPr sz="800">
+                <a:hlinkClick r:id="rId5"/>
+              </a:rPr>
+              <a:t>Lofar 1</a:t>
+            </a:r>
+          </a:p>
+        </p:txBody>
+      </p:sp>
+      <p:sp>
+        <p:nvSpPr>
+          <p:cNvPr id="7" name="Rounded Rectangle 6"/>
+          <p:cNvSpPr/>
+          <p:nvPr>
+            <a:hlinkClick r:id="rId6"/>
+          </p:nvPr>
+        </p:nvSpPr>
+        <p:spPr>
+          <a:xfrm>
+            <a:off x="4948732" y="731520"/>
+            <a:ext cx="2200046" cy="365760"/>
+          </a:xfrm>
+          <a:prstGeom prst="roundRect">
+            <a:avLst/>
+          </a:prstGeom>
+          <a:solidFill>
+            <a:srgbClr val="E8EEF7"/>
+          </a:solidFill>
+          <a:ln>
+            <a:solidFill>
+              <a:srgbClr val="1F3A5F"/>
+            </a:solidFill>
+          </a:ln>
+        </p:spPr>
+        <p:style>
+          <a:lnRef idx="1">
+            <a:schemeClr val="accent1"/>
+          </a:lnRef>
+          <a:fillRef idx="3">
+            <a:schemeClr val="accent1"/>
+          </a:fillRef>
+          <a:effectRef idx="2">
+            <a:schemeClr val="accent1"/>
+          </a:effectRef>
+          <a:fontRef idx="minor">
+            <a:schemeClr val="lt1"/>
+          </a:fontRef>
+        </p:style>
+        <p:txBody>
+          <a:bodyPr rtlCol="0" anchor="ctr" lIns="45720" rIns="45720"/>
+          <a:lstStyle/>
+          <a:p>
+            <a:pPr algn="ctr"/>
+            <a:r>
+              <a:rPr sz="900">
+                <a:solidFill>
+                  <a:srgbClr val="1F3A5F"/>
+                </a:solidFill>
+              </a:rPr>
+              <a:t>Gram 22: FR Venator-class, Category 4, Coruscant</a:t>
+            </a:r>
+          </a:p>
+        </p:txBody>
+      </p:sp>
+      <p:sp>
+        <p:nvSpPr>
+          <p:cNvPr id="8" name="TextBox 7"/>
+          <p:cNvSpPr txBox="1"/>
+          <p:nvPr/>
+        </p:nvSpPr>
+        <p:spPr>
+          <a:xfrm>
+            <a:off x="4948732" y="1115568"/>
+            <a:ext cx="2200046" cy="1447800"/>
+          </a:xfrm>
+          <a:prstGeom prst="rect">
+            <a:avLst/>
+          </a:prstGeom>
+          <a:noFill/>
+        </p:spPr>
+        <p:txBody>
+          <a:bodyPr wrap="square">
+            <a:spAutoFit/>
+          </a:bodyPr>
+          <a:lstStyle/>
+          <a:p>
+            <a:r>
+              <a:rPr sz="800">
+                <a:hlinkClick r:id="rId7"/>
+              </a:rPr>
+              <a:t>Lofar 1</a:t>
+            </a:r>
+          </a:p>
+        </p:txBody>
+      </p:sp>
+      <p:sp>
+        <p:nvSpPr>
+          <p:cNvPr id="9" name="Rounded Rectangle 8"/>
+          <p:cNvSpPr/>
+          <p:nvPr>
+            <a:hlinkClick r:id="rId8"/>
+          </p:nvPr>
+        </p:nvSpPr>
+        <p:spPr>
+          <a:xfrm>
+            <a:off x="7240219" y="731520"/>
+            <a:ext cx="2200046" cy="365760"/>
+          </a:xfrm>
+          <a:prstGeom prst="roundRect">
+            <a:avLst/>
+          </a:prstGeom>
+          <a:solidFill>
+            <a:srgbClr val="E8EEF7"/>
+          </a:solidFill>
+          <a:ln>
+            <a:solidFill>
+              <a:srgbClr val="1F3A5F"/>
+            </a:solidFill>
+          </a:ln>
+        </p:spPr>
+        <p:style>
+          <a:lnRef idx="1">
+            <a:schemeClr val="accent1"/>
+          </a:lnRef>
+          <a:fillRef idx="3">
+            <a:schemeClr val="accent1"/>
+          </a:fillRef>
+          <a:effectRef idx="2">
+            <a:schemeClr val="accent1"/>
+          </a:effectRef>
+          <a:fontRef idx="minor">
+            <a:schemeClr val="lt1"/>
+          </a:fontRef>
+        </p:style>
+        <p:txBody>
+          <a:bodyPr rtlCol="0" anchor="ctr" lIns="45720" rIns="45720"/>
+          <a:lstStyle/>
+          <a:p>
+            <a:pPr algn="ctr"/>
+            <a:r>
+              <a:rPr sz="900">
+                <a:solidFill>
+                  <a:srgbClr val="1F3A5F"/>
+                </a:solidFill>
+              </a:rPr>
+              <a:t>Gram 23: X-wing contact bearing 097, codename Tantive</a:t>
+            </a:r>
+          </a:p>
+        </p:txBody>
+      </p:sp>
+      <p:sp>
+        <p:nvSpPr>
+          <p:cNvPr id="10" name="TextBox 9"/>
+          <p:cNvSpPr txBox="1"/>
+          <p:nvPr/>
+        </p:nvSpPr>
+        <p:spPr>
+          <a:xfrm>
+            <a:off x="7240219" y="1115568"/>
+            <a:ext cx="2200046" cy="1447800"/>
+          </a:xfrm>
+          <a:prstGeom prst="rect">
+            <a:avLst/>
+          </a:prstGeom>
+          <a:noFill/>
+        </p:spPr>
+        <p:txBody>
+          <a:bodyPr wrap="square">
+            <a:spAutoFit/>
+          </a:bodyPr>
+          <a:lstStyle/>
+          <a:p>
+            <a:r>
+              <a:rPr sz="800">
+                <a:hlinkClick r:id="rId9"/>
+              </a:rPr>
+              <a:t>Lofar 1</a:t>
+            </a:r>
+          </a:p>
+        </p:txBody>
+      </p:sp>
+      <p:sp>
+        <p:nvSpPr>
+          <p:cNvPr id="11" name="Rounded Rectangle 10"/>
+          <p:cNvSpPr/>
+          <p:nvPr>
+            <a:hlinkClick r:id="rId10"/>
+          </p:nvPr>
+        </p:nvSpPr>
+        <p:spPr>
+          <a:xfrm>
+            <a:off x="9531705" y="731520"/>
+            <a:ext cx="2200046" cy="365760"/>
+          </a:xfrm>
+          <a:prstGeom prst="roundRect">
+            <a:avLst/>
+          </a:prstGeom>
+          <a:solidFill>
+            <a:srgbClr val="E8EEF7"/>
+          </a:solidFill>
+          <a:ln>
+            <a:solidFill>
+              <a:srgbClr val="1F3A5F"/>
+            </a:solidFill>
+          </a:ln>
+        </p:spPr>
+        <p:style>
+          <a:lnRef idx="1">
+            <a:schemeClr val="accent1"/>
+          </a:lnRef>
+          <a:fillRef idx="3">
+            <a:schemeClr val="accent1"/>
+          </a:fillRef>
+          <a:effectRef idx="2">
+            <a:schemeClr val="accent1"/>
+          </a:effectRef>
+          <a:fontRef idx="minor">
+            <a:schemeClr val="lt1"/>
+          </a:fontRef>
+        </p:style>
+        <p:txBody>
+          <a:bodyPr rtlCol="0" anchor="ctr" lIns="45720" rIns="45720"/>
+          <a:lstStyle/>
+          <a:p>
+            <a:pPr algn="ctr"/>
+            <a:r>
+              <a:rPr sz="900">
+                <a:solidFill>
+                  <a:srgbClr val="1F3A5F"/>
+                </a:solidFill>
+              </a:rPr>
+              <a:t>Gram 24: FR X-wing, Category 4, Naboo</a:t>
+            </a:r>
+          </a:p>
+        </p:txBody>
+      </p:sp>
+      <p:sp>
+        <p:nvSpPr>
+          <p:cNvPr id="12" name="TextBox 11"/>
+          <p:cNvSpPr txBox="1"/>
+          <p:nvPr/>
+        </p:nvSpPr>
+        <p:spPr>
+          <a:xfrm>
+            <a:off x="9531705" y="1115568"/>
+            <a:ext cx="2200046" cy="1447800"/>
+          </a:xfrm>
+          <a:prstGeom prst="rect">
+            <a:avLst/>
+          </a:prstGeom>
+          <a:noFill/>
+        </p:spPr>
+        <p:txBody>
+          <a:bodyPr wrap="square">
+            <a:spAutoFit/>
+          </a:bodyPr>
+          <a:lstStyle/>
+          <a:p>
+            <a:r>
+              <a:rPr sz="800">
+                <a:hlinkClick r:id="rId11"/>
+              </a:rPr>
+              <a:t>Lofar 1</a:t>
+            </a:r>
+          </a:p>
+          <a:p>
+            <a:r>
+              <a:rPr sz="800">
+                <a:hlinkClick r:id="rId12"/>
+              </a:rPr>
+              <a:t>Lofar 2</a:t>
+            </a:r>
+          </a:p>
+          <a:p>
+            <a:r>
+              <a:rPr sz="800">
+                <a:hlinkClick r:id="rId13"/>
+              </a:rPr>
+              <a:t>Lofar 3</a:t>
+            </a:r>
+          </a:p>
+        </p:txBody>
+      </p:sp>
+      <p:sp>
+        <p:nvSpPr>
+          <p:cNvPr id="13" name="Rounded Rectangle 12"/>
+          <p:cNvSpPr/>
+          <p:nvPr>
+            <a:hlinkClick r:id="rId14"/>
+          </p:nvPr>
+        </p:nvSpPr>
+        <p:spPr>
+          <a:xfrm>
+            <a:off x="365760" y="2682240"/>
+            <a:ext cx="2200046" cy="365760"/>
+          </a:xfrm>
+          <a:prstGeom prst="roundRect">
+            <a:avLst/>
+          </a:prstGeom>
+          <a:solidFill>
+            <a:srgbClr val="E8EEF7"/>
+          </a:solidFill>
+          <a:ln>
+            <a:solidFill>
+              <a:srgbClr val="1F3A5F"/>
+            </a:solidFill>
+          </a:ln>
+        </p:spPr>
+        <p:style>
+          <a:lnRef idx="1">
+            <a:schemeClr val="accent1"/>
+          </a:lnRef>
+          <a:fillRef idx="3">
+            <a:schemeClr val="accent1"/>
+          </a:fillRef>
+          <a:effectRef idx="2">
+            <a:schemeClr val="accent1"/>
+          </a:effectRef>
+          <a:fontRef idx="minor">
+            <a:schemeClr val="lt1"/>
+          </a:fontRef>
+        </p:style>
+        <p:txBody>
+          <a:bodyPr rtlCol="0" anchor="ctr" lIns="45720" rIns="45720"/>
+          <a:lstStyle/>
+          <a:p>
+            <a:pPr algn="ctr"/>
+            <a:r>
+              <a:rPr sz="900">
+                <a:solidFill>
+                  <a:srgbClr val="1F3A5F"/>
+                </a:solidFill>
+              </a:rPr>
+              <a:t>Gram 25: FR Defiant, Category 2, Endor</a:t>
+            </a:r>
+          </a:p>
+        </p:txBody>
+      </p:sp>
+      <p:sp>
+        <p:nvSpPr>
+          <p:cNvPr id="14" name="TextBox 13"/>
+          <p:cNvSpPr txBox="1"/>
+          <p:nvPr/>
+        </p:nvSpPr>
+        <p:spPr>
+          <a:xfrm>
+            <a:off x="365760" y="3066288"/>
+            <a:ext cx="2200046" cy="1447800"/>
+          </a:xfrm>
+          <a:prstGeom prst="rect">
+            <a:avLst/>
+          </a:prstGeom>
+          <a:noFill/>
+        </p:spPr>
+        <p:txBody>
+          <a:bodyPr wrap="square">
+            <a:spAutoFit/>
+          </a:bodyPr>
+          <a:lstStyle/>
+          <a:p>
+            <a:r>
+              <a:rPr sz="800">
+                <a:hlinkClick r:id="rId15"/>
+              </a:rPr>
+              <a:t>Lofar 1</a:t>
+            </a:r>
+          </a:p>
+          <a:p>
+            <a:r>
+              <a:rPr sz="800">
+                <a:hlinkClick r:id="rId16"/>
+              </a:rPr>
+              <a:t>Lofar 2</a:t>
+            </a:r>
+          </a:p>
+        </p:txBody>
+      </p:sp>
+      <p:sp>
+        <p:nvSpPr>
+          <p:cNvPr id="15" name="Rounded Rectangle 14"/>
+          <p:cNvSpPr/>
+          <p:nvPr>
+            <a:hlinkClick r:id="rId17"/>
+          </p:nvPr>
+        </p:nvSpPr>
+        <p:spPr>
+          <a:xfrm>
+            <a:off x="2657246" y="2682240"/>
+            <a:ext cx="2200046" cy="365760"/>
+          </a:xfrm>
+          <a:prstGeom prst="roundRect">
+            <a:avLst/>
+          </a:prstGeom>
+          <a:solidFill>
+            <a:srgbClr val="E8EEF7"/>
+          </a:solidFill>
+          <a:ln>
+            <a:solidFill>
+              <a:srgbClr val="1F3A5F"/>
+            </a:solidFill>
+          </a:ln>
+        </p:spPr>
+        <p:style>
+          <a:lnRef idx="1">
+            <a:schemeClr val="accent1"/>
+          </a:lnRef>
+          <a:fillRef idx="3">
+            <a:schemeClr val="accent1"/>
+          </a:fillRef>
+          <a:effectRef idx="2">
+            <a:schemeClr val="accent1"/>
+          </a:effectRef>
+          <a:fontRef idx="minor">
+            <a:schemeClr val="lt1"/>
+          </a:fontRef>
+        </p:style>
+        <p:txBody>
+          <a:bodyPr rtlCol="0" anchor="ctr" lIns="45720" rIns="45720"/>
+          <a:lstStyle/>
+          <a:p>
+            <a:pPr algn="ctr"/>
+            <a:r>
+              <a:rPr sz="900">
+                <a:solidFill>
+                  <a:srgbClr val="1F3A5F"/>
+                </a:solidFill>
+              </a:rPr>
+              <a:t>Gram 26: FR Defiant, Category 2, Naboo</a:t>
+            </a:r>
+          </a:p>
+        </p:txBody>
+      </p:sp>
+      <p:sp>
+        <p:nvSpPr>
+          <p:cNvPr id="16" name="TextBox 15"/>
+          <p:cNvSpPr txBox="1"/>
+          <p:nvPr/>
+        </p:nvSpPr>
+        <p:spPr>
+          <a:xfrm>
+            <a:off x="2657246" y="3066288"/>
+            <a:ext cx="2200046" cy="1447800"/>
+          </a:xfrm>
+          <a:prstGeom prst="rect">
+            <a:avLst/>
+          </a:prstGeom>
+          <a:noFill/>
+        </p:spPr>
+        <p:txBody>
+          <a:bodyPr wrap="square">
+            <a:spAutoFit/>
+          </a:bodyPr>
+          <a:lstStyle/>
+          <a:p>
+            <a:r>
+              <a:rPr sz="800">
+                <a:hlinkClick r:id="rId18"/>
+              </a:rPr>
+              <a:t>Lofar 1</a:t>
+            </a:r>
+          </a:p>
+          <a:p>
+            <a:r>
+              <a:rPr sz="800">
+                <a:hlinkClick r:id="rId19"/>
+              </a:rPr>
+              <a:t>Lofar 2</a:t>
+            </a:r>
+          </a:p>
+          <a:p>
+            <a:r>
+              <a:rPr sz="800">
+                <a:hlinkClick r:id="rId20"/>
+              </a:rPr>
+              <a:t>Lofar 3</a:t>
+            </a:r>
+          </a:p>
+          <a:p>
+            <a:r>
+              <a:rPr sz="800">
+                <a:hlinkClick r:id="rId21"/>
+              </a:rPr>
+              <a:t>Lofar 4</a:t>
+            </a:r>
+          </a:p>
+        </p:txBody>
+      </p:sp>
+      <p:sp>
+        <p:nvSpPr>
+          <p:cNvPr id="17" name="Rounded Rectangle 16"/>
+          <p:cNvSpPr/>
+          <p:nvPr>
+            <a:hlinkClick r:id="rId22"/>
+          </p:nvPr>
+        </p:nvSpPr>
+        <p:spPr>
+          <a:xfrm>
+            <a:off x="4948732" y="2682240"/>
+            <a:ext cx="2200046" cy="365760"/>
+          </a:xfrm>
+          <a:prstGeom prst="roundRect">
+            <a:avLst/>
+          </a:prstGeom>
+          <a:solidFill>
+            <a:srgbClr val="E8EEF7"/>
+          </a:solidFill>
+          <a:ln>
+            <a:solidFill>
+              <a:srgbClr val="1F3A5F"/>
+            </a:solidFill>
+          </a:ln>
+        </p:spPr>
+        <p:style>
+          <a:lnRef idx="1">
+            <a:schemeClr val="accent1"/>
+          </a:lnRef>
+          <a:fillRef idx="3">
+            <a:schemeClr val="accent1"/>
+          </a:fillRef>
+          <a:effectRef idx="2">
+            <a:schemeClr val="accent1"/>
+          </a:effectRef>
+          <a:fontRef idx="minor">
+            <a:schemeClr val="lt1"/>
+          </a:fontRef>
+        </p:style>
+        <p:txBody>
+          <a:bodyPr rtlCol="0" anchor="ctr" lIns="45720" rIns="45720"/>
+          <a:lstStyle/>
+          <a:p>
+            <a:pPr algn="ctr"/>
+            <a:r>
+              <a:rPr sz="900">
+                <a:solidFill>
+                  <a:srgbClr val="1F3A5F"/>
+                </a:solidFill>
+              </a:rPr>
+              <a:t>Gram 27: Y-wing contact bearing 197, codename Dagobah</a:t>
+            </a:r>
+          </a:p>
+        </p:txBody>
+      </p:sp>
+      <p:sp>
+        <p:nvSpPr>
+          <p:cNvPr id="18" name="TextBox 17"/>
+          <p:cNvSpPr txBox="1"/>
+          <p:nvPr/>
+        </p:nvSpPr>
+        <p:spPr>
+          <a:xfrm>
+            <a:off x="4948732" y="3066288"/>
+            <a:ext cx="2200046" cy="1447800"/>
+          </a:xfrm>
+          <a:prstGeom prst="rect">
+            <a:avLst/>
+          </a:prstGeom>
+          <a:noFill/>
+        </p:spPr>
+        <p:txBody>
+          <a:bodyPr wrap="square">
+            <a:spAutoFit/>
+          </a:bodyPr>
+          <a:lstStyle/>
+          <a:p>
+            <a:r>
+              <a:rPr sz="800">
+                <a:hlinkClick r:id="rId23"/>
+              </a:rPr>
+              <a:t>Lofar 1</a:t>
+            </a:r>
+          </a:p>
+          <a:p>
+            <a:r>
+              <a:rPr sz="800">
+                <a:hlinkClick r:id="rId24"/>
+              </a:rPr>
+              <a:t>Lofar 2</a:t>
+            </a:r>
+          </a:p>
+          <a:p>
+            <a:r>
+              <a:rPr sz="800">
+                <a:hlinkClick r:id="rId25"/>
+              </a:rPr>
+              <a:t>Lofar 3</a:t>
+            </a:r>
+          </a:p>
+        </p:txBody>
+      </p:sp>
+      <p:sp>
+        <p:nvSpPr>
+          <p:cNvPr id="19" name="Rounded Rectangle 18"/>
+          <p:cNvSpPr/>
+          <p:nvPr>
+            <a:hlinkClick r:id="rId26"/>
+          </p:nvPr>
+        </p:nvSpPr>
+        <p:spPr>
+          <a:xfrm>
+            <a:off x="7240219" y="2682240"/>
+            <a:ext cx="2200046" cy="365760"/>
+          </a:xfrm>
+          <a:prstGeom prst="roundRect">
+            <a:avLst/>
+          </a:prstGeom>
+          <a:solidFill>
+            <a:srgbClr val="E8EEF7"/>
+          </a:solidFill>
+          <a:ln>
+            <a:solidFill>
+              <a:srgbClr val="1F3A5F"/>
+            </a:solidFill>
+          </a:ln>
+        </p:spPr>
+        <p:style>
+          <a:lnRef idx="1">
+            <a:schemeClr val="accent1"/>
+          </a:lnRef>
+          <a:fillRef idx="3">
+            <a:schemeClr val="accent1"/>
+          </a:fillRef>
+          <a:effectRef idx="2">
+            <a:schemeClr val="accent1"/>
+          </a:effectRef>
+          <a:fontRef idx="minor">
+            <a:schemeClr val="lt1"/>
+          </a:fontRef>
+        </p:style>
+        <p:txBody>
+          <a:bodyPr rtlCol="0" anchor="ctr" lIns="45720" rIns="45720"/>
+          <a:lstStyle/>
+          <a:p>
+            <a:pPr algn="ctr"/>
+            <a:r>
+              <a:rPr sz="900">
+                <a:solidFill>
+                  <a:srgbClr val="1F3A5F"/>
+                </a:solidFill>
+              </a:rPr>
+              <a:t>Gram 28: FR Nebula-class, Category 1, Tantive</a:t>
+            </a:r>
+          </a:p>
+        </p:txBody>
+      </p:sp>
+      <p:sp>
+        <p:nvSpPr>
+          <p:cNvPr id="20" name="TextBox 19"/>
+          <p:cNvSpPr txBox="1"/>
+          <p:nvPr/>
+        </p:nvSpPr>
+        <p:spPr>
+          <a:xfrm>
+            <a:off x="7240219" y="3066288"/>
+            <a:ext cx="2200046" cy="1447800"/>
+          </a:xfrm>
+          <a:prstGeom prst="rect">
+            <a:avLst/>
+          </a:prstGeom>
+          <a:noFill/>
+        </p:spPr>
+        <p:txBody>
+          <a:bodyPr wrap="square">
+            <a:spAutoFit/>
+          </a:bodyPr>
+          <a:lstStyle/>
+          <a:p>
+            <a:r>
+              <a:rPr sz="800">
+                <a:hlinkClick r:id="rId27"/>
+              </a:rPr>
+              <a:t>Lofar 1</a:t>
+            </a:r>
+          </a:p>
+          <a:p>
+            <a:r>
+              <a:rPr sz="800">
+                <a:hlinkClick r:id="rId28"/>
+              </a:rPr>
+              <a:t>Lofar 2</a:t>
+            </a:r>
+          </a:p>
+          <a:p>
+            <a:r>
+              <a:rPr sz="800">
+                <a:hlinkClick r:id="rId29"/>
+              </a:rPr>
+              <a:t>Lofar 3</a:t>
+            </a:r>
+          </a:p>
+          <a:p>
+            <a:r>
+              <a:rPr sz="800">
+                <a:hlinkClick r:id="rId30"/>
+              </a:rPr>
+              <a:t>Lofar 4</a:t>
+            </a:r>
+          </a:p>
+        </p:txBody>
+      </p:sp>
+      <p:sp>
+        <p:nvSpPr>
+          <p:cNvPr id="21" name="Rounded Rectangle 20"/>
+          <p:cNvSpPr/>
+          <p:nvPr>
+            <a:hlinkClick r:id="rId31"/>
+          </p:nvPr>
+        </p:nvSpPr>
+        <p:spPr>
+          <a:xfrm>
+            <a:off x="9531705" y="2682240"/>
+            <a:ext cx="2200046" cy="365760"/>
+          </a:xfrm>
+          <a:prstGeom prst="roundRect">
+            <a:avLst/>
+          </a:prstGeom>
+          <a:solidFill>
+            <a:srgbClr val="E8EEF7"/>
+          </a:solidFill>
+          <a:ln>
+            <a:solidFill>
+              <a:srgbClr val="1F3A5F"/>
+            </a:solidFill>
+          </a:ln>
+        </p:spPr>
+        <p:style>
+          <a:lnRef idx="1">
+            <a:schemeClr val="accent1"/>
+          </a:lnRef>
+          <a:fillRef idx="3">
+            <a:schemeClr val="accent1"/>
+          </a:fillRef>
+          <a:effectRef idx="2">
+            <a:schemeClr val="accent1"/>
+          </a:effectRef>
+          <a:fontRef idx="minor">
+            <a:schemeClr val="lt1"/>
+          </a:fontRef>
+        </p:style>
+        <p:txBody>
+          <a:bodyPr rtlCol="0" anchor="ctr" lIns="45720" rIns="45720"/>
+          <a:lstStyle/>
+          <a:p>
+            <a:pPr algn="ctr"/>
+            <a:r>
+              <a:rPr sz="900">
+                <a:solidFill>
+                  <a:srgbClr val="1F3A5F"/>
+                </a:solidFill>
+              </a:rPr>
+              <a:t>Gram 29: FR Akira-class, Category 2, Romulus</a:t>
+            </a:r>
+          </a:p>
+        </p:txBody>
+      </p:sp>
+      <p:sp>
+        <p:nvSpPr>
+          <p:cNvPr id="22" name="TextBox 21"/>
+          <p:cNvSpPr txBox="1"/>
+          <p:nvPr/>
+        </p:nvSpPr>
+        <p:spPr>
+          <a:xfrm>
+            <a:off x="9531705" y="3066288"/>
+            <a:ext cx="2200046" cy="1447800"/>
+          </a:xfrm>
+          <a:prstGeom prst="rect">
+            <a:avLst/>
+          </a:prstGeom>
+          <a:noFill/>
+        </p:spPr>
+        <p:txBody>
+          <a:bodyPr wrap="square">
+            <a:spAutoFit/>
+          </a:bodyPr>
+          <a:lstStyle/>
+          <a:p>
+            <a:r>
+              <a:rPr sz="800">
+                <a:hlinkClick r:id="rId32"/>
+              </a:rPr>
+              <a:t>Lofar 1</a:t>
+            </a:r>
+          </a:p>
+          <a:p>
+            <a:r>
+              <a:rPr sz="800">
+                <a:hlinkClick r:id="rId33"/>
+              </a:rPr>
+              <a:t>Lofar 2</a:t>
+            </a:r>
+          </a:p>
+          <a:p>
+            <a:r>
+              <a:rPr sz="800">
+                <a:hlinkClick r:id="rId34"/>
+              </a:rPr>
+              <a:t>Lofar 3</a:t>
+            </a:r>
+          </a:p>
+        </p:txBody>
+      </p:sp>
+      <p:sp>
+        <p:nvSpPr>
+          <p:cNvPr id="23" name="Rounded Rectangle 22"/>
+          <p:cNvSpPr/>
+          <p:nvPr>
+            <a:hlinkClick r:id="rId35"/>
+          </p:nvPr>
+        </p:nvSpPr>
+        <p:spPr>
+          <a:xfrm>
+            <a:off x="365760" y="4632960"/>
+            <a:ext cx="2200046" cy="365760"/>
+          </a:xfrm>
+          <a:prstGeom prst="roundRect">
+            <a:avLst/>
+          </a:prstGeom>
+          <a:solidFill>
+            <a:srgbClr val="E8EEF7"/>
+          </a:solidFill>
+          <a:ln>
+            <a:solidFill>
+              <a:srgbClr val="1F3A5F"/>
+            </a:solidFill>
+          </a:ln>
+        </p:spPr>
+        <p:style>
+          <a:lnRef idx="1">
+            <a:schemeClr val="accent1"/>
+          </a:lnRef>
+          <a:fillRef idx="3">
+            <a:schemeClr val="accent1"/>
+          </a:fillRef>
+          <a:effectRef idx="2">
+            <a:schemeClr val="accent1"/>
+          </a:effectRef>
+          <a:fontRef idx="minor">
+            <a:schemeClr val="lt1"/>
+          </a:fontRef>
+        </p:style>
+        <p:txBody>
+          <a:bodyPr rtlCol="0" anchor="ctr" lIns="45720" rIns="45720"/>
+          <a:lstStyle/>
+          <a:p>
+            <a:pPr algn="ctr"/>
+            <a:r>
+              <a:rPr sz="900">
+                <a:solidFill>
+                  <a:srgbClr val="1F3A5F"/>
+                </a:solidFill>
+              </a:rPr>
+              <a:t>Gram 30: Defiant-class contact bearing 058, codename Naboo</a:t>
+            </a:r>
+          </a:p>
+        </p:txBody>
+      </p:sp>
+      <p:sp>
+        <p:nvSpPr>
+          <p:cNvPr id="24" name="TextBox 23"/>
+          <p:cNvSpPr txBox="1"/>
+          <p:nvPr/>
+        </p:nvSpPr>
+        <p:spPr>
+          <a:xfrm>
+            <a:off x="365760" y="5017008"/>
+            <a:ext cx="2200046" cy="1447800"/>
+          </a:xfrm>
+          <a:prstGeom prst="rect">
+            <a:avLst/>
+          </a:prstGeom>
+          <a:noFill/>
+        </p:spPr>
+        <p:txBody>
+          <a:bodyPr wrap="square">
+            <a:spAutoFit/>
+          </a:bodyPr>
+          <a:lstStyle/>
+          <a:p>
+            <a:r>
+              <a:rPr sz="800">
+                <a:hlinkClick r:id="rId36"/>
+              </a:rPr>
+              <a:t>Lofar 1</a:t>
+            </a:r>
+          </a:p>
+          <a:p>
+            <a:r>
+              <a:rPr sz="800">
+                <a:hlinkClick r:id="rId37"/>
+              </a:rPr>
+              <a:t>Lofar 2</a:t>
+            </a:r>
+          </a:p>
+          <a:p>
+            <a:r>
+              <a:rPr sz="800">
+                <a:hlinkClick r:id="rId38"/>
+              </a:rPr>
+              <a:t>Lofar 3</a:t>
+            </a:r>
+          </a:p>
+          <a:p>
+            <a:r>
+              <a:rPr sz="800">
+                <a:hlinkClick r:id="rId39"/>
+              </a:rPr>
+              <a:t>Lofar 4</a:t>
+            </a:r>
+          </a:p>
+        </p:txBody>
+      </p:sp>
+      <p:sp>
+        <p:nvSpPr>
+          <p:cNvPr id="25" name="Rounded Rectangle 24"/>
+          <p:cNvSpPr/>
+          <p:nvPr>
+            <a:hlinkClick r:id="rId40"/>
+          </p:nvPr>
+        </p:nvSpPr>
+        <p:spPr>
+          <a:xfrm>
+            <a:off x="2657246" y="4632960"/>
+            <a:ext cx="2200046" cy="365760"/>
+          </a:xfrm>
+          <a:prstGeom prst="roundRect">
+            <a:avLst/>
+          </a:prstGeom>
+          <a:solidFill>
+            <a:srgbClr val="E8EEF7"/>
+          </a:solidFill>
+          <a:ln>
+            <a:solidFill>
+              <a:srgbClr val="1F3A5F"/>
+            </a:solidFill>
+          </a:ln>
+        </p:spPr>
+        <p:style>
+          <a:lnRef idx="1">
+            <a:schemeClr val="accent1"/>
+          </a:lnRef>
+          <a:fillRef idx="3">
+            <a:schemeClr val="accent1"/>
+          </a:fillRef>
+          <a:effectRef idx="2">
+            <a:schemeClr val="accent1"/>
+          </a:effectRef>
+          <a:fontRef idx="minor">
+            <a:schemeClr val="lt1"/>
+          </a:fontRef>
+        </p:style>
+        <p:txBody>
+          <a:bodyPr rtlCol="0" anchor="ctr" lIns="45720" rIns="45720"/>
+          <a:lstStyle/>
+          <a:p>
+            <a:pPr algn="ctr"/>
+            <a:r>
+              <a:rPr sz="900">
+                <a:solidFill>
+                  <a:srgbClr val="1F3A5F"/>
+                </a:solidFill>
+              </a:rPr>
+              <a:t>Gram 31: Imperial-class contact bearing 170, codename Tantive</a:t>
+            </a:r>
+          </a:p>
+        </p:txBody>
+      </p:sp>
+      <p:sp>
+        <p:nvSpPr>
+          <p:cNvPr id="26" name="TextBox 25"/>
+          <p:cNvSpPr txBox="1"/>
+          <p:nvPr/>
+        </p:nvSpPr>
+        <p:spPr>
+          <a:xfrm>
+            <a:off x="2657246" y="5017008"/>
+            <a:ext cx="2200046" cy="1447800"/>
+          </a:xfrm>
+          <a:prstGeom prst="rect">
+            <a:avLst/>
+          </a:prstGeom>
+          <a:noFill/>
+        </p:spPr>
+        <p:txBody>
+          <a:bodyPr wrap="square">
+            <a:spAutoFit/>
+          </a:bodyPr>
+          <a:lstStyle/>
+          <a:p>
+            <a:r>
+              <a:rPr sz="800">
+                <a:hlinkClick r:id="rId41"/>
+              </a:rPr>
+              <a:t>Lofar 1</a:t>
+            </a:r>
+          </a:p>
+          <a:p>
+            <a:r>
+              <a:rPr sz="800">
+                <a:hlinkClick r:id="rId42"/>
+              </a:rPr>
+              <a:t>Lofar 2</a:t>
+            </a:r>
+          </a:p>
+        </p:txBody>
+      </p:sp>
+      <p:sp>
+        <p:nvSpPr>
+          <p:cNvPr id="27" name="Rounded Rectangle 26"/>
+          <p:cNvSpPr/>
+          <p:nvPr>
+            <a:hlinkClick r:id="rId43"/>
+          </p:nvPr>
+        </p:nvSpPr>
+        <p:spPr>
+          <a:xfrm>
+            <a:off x="4948732" y="4632960"/>
+            <a:ext cx="2200046" cy="365760"/>
+          </a:xfrm>
+          <a:prstGeom prst="roundRect">
+            <a:avLst/>
+          </a:prstGeom>
+          <a:solidFill>
+            <a:srgbClr val="E8EEF7"/>
+          </a:solidFill>
+          <a:ln>
+            <a:solidFill>
+              <a:srgbClr val="1F3A5F"/>
+            </a:solidFill>
+          </a:ln>
+        </p:spPr>
+        <p:style>
+          <a:lnRef idx="1">
+            <a:schemeClr val="accent1"/>
+          </a:lnRef>
+          <a:fillRef idx="3">
+            <a:schemeClr val="accent1"/>
+          </a:fillRef>
+          <a:effectRef idx="2">
+            <a:schemeClr val="accent1"/>
+          </a:effectRef>
+          <a:fontRef idx="minor">
+            <a:schemeClr val="lt1"/>
+          </a:fontRef>
+        </p:style>
+        <p:txBody>
+          <a:bodyPr rtlCol="0" anchor="ctr" lIns="45720" rIns="45720"/>
+          <a:lstStyle/>
+          <a:p>
+            <a:pPr algn="ctr"/>
+            <a:r>
+              <a:rPr sz="900">
+                <a:solidFill>
+                  <a:srgbClr val="1F3A5F"/>
+                </a:solidFill>
+              </a:rPr>
+              <a:t>Gram 32: FR A-wing, Category 4, Naboo</a:t>
+            </a:r>
+          </a:p>
+        </p:txBody>
+      </p:sp>
+      <p:sp>
+        <p:nvSpPr>
+          <p:cNvPr id="28" name="TextBox 27"/>
+          <p:cNvSpPr txBox="1"/>
+          <p:nvPr/>
+        </p:nvSpPr>
+        <p:spPr>
+          <a:xfrm>
+            <a:off x="4948732" y="5017008"/>
+            <a:ext cx="2200046" cy="1447800"/>
+          </a:xfrm>
+          <a:prstGeom prst="rect">
+            <a:avLst/>
+          </a:prstGeom>
+          <a:noFill/>
+        </p:spPr>
+        <p:txBody>
+          <a:bodyPr wrap="square">
+            <a:spAutoFit/>
+          </a:bodyPr>
+          <a:lstStyle/>
+          <a:p>
+            <a:r>
+              <a:rPr sz="800">
+                <a:hlinkClick r:id="rId44"/>
+              </a:rPr>
+              <a:t>Lofar 1</a:t>
+            </a:r>
+          </a:p>
+          <a:p>
+            <a:r>
+              <a:rPr sz="800">
+                <a:hlinkClick r:id="rId45"/>
+              </a:rPr>
+              <a:t>Lofar 2</a:t>
+            </a:r>
+          </a:p>
+        </p:txBody>
+      </p:sp>
+      <p:sp>
+        <p:nvSpPr>
+          <p:cNvPr id="29" name="Rounded Rectangle 28"/>
+          <p:cNvSpPr/>
+          <p:nvPr>
+            <a:hlinkClick r:id="rId46"/>
+          </p:nvPr>
+        </p:nvSpPr>
+        <p:spPr>
+          <a:xfrm>
+            <a:off x="7240219" y="4632960"/>
+            <a:ext cx="2200046" cy="365760"/>
+          </a:xfrm>
+          <a:prstGeom prst="roundRect">
+            <a:avLst/>
+          </a:prstGeom>
+          <a:solidFill>
+            <a:srgbClr val="E8EEF7"/>
+          </a:solidFill>
+          <a:ln>
+            <a:solidFill>
+              <a:srgbClr val="1F3A5F"/>
+            </a:solidFill>
+          </a:ln>
+        </p:spPr>
+        <p:style>
+          <a:lnRef idx="1">
+            <a:schemeClr val="accent1"/>
+          </a:lnRef>
+          <a:fillRef idx="3">
+            <a:schemeClr val="accent1"/>
+          </a:fillRef>
+          <a:effectRef idx="2">
+            <a:schemeClr val="accent1"/>
+          </a:effectRef>
+          <a:fontRef idx="minor">
+            <a:schemeClr val="lt1"/>
+          </a:fontRef>
+        </p:style>
+        <p:txBody>
+          <a:bodyPr rtlCol="0" anchor="ctr" lIns="45720" rIns="45720"/>
+          <a:lstStyle/>
+          <a:p>
+            <a:pPr algn="ctr"/>
+            <a:r>
+              <a:rPr sz="900">
+                <a:solidFill>
+                  <a:srgbClr val="1F3A5F"/>
+                </a:solidFill>
+              </a:rPr>
+              <a:t>Gram 33: FR Rebel One, Category 3, Tatooine</a:t>
+            </a:r>
+          </a:p>
+        </p:txBody>
+      </p:sp>
+      <p:sp>
+        <p:nvSpPr>
+          <p:cNvPr id="30" name="TextBox 29"/>
+          <p:cNvSpPr txBox="1"/>
+          <p:nvPr/>
+        </p:nvSpPr>
+        <p:spPr>
+          <a:xfrm>
+            <a:off x="7240219" y="5017008"/>
+            <a:ext cx="2200046" cy="1447800"/>
+          </a:xfrm>
+          <a:prstGeom prst="rect">
+            <a:avLst/>
+          </a:prstGeom>
+          <a:noFill/>
+        </p:spPr>
+        <p:txBody>
+          <a:bodyPr wrap="square">
+            <a:spAutoFit/>
+          </a:bodyPr>
+          <a:lstStyle/>
+          <a:p>
+            <a:r>
+              <a:rPr sz="800">
+                <a:hlinkClick r:id="rId47"/>
+              </a:rPr>
+              <a:t>Lofar 1</a:t>
+            </a:r>
+          </a:p>
+          <a:p>
+            <a:r>
+              <a:rPr sz="800">
+                <a:hlinkClick r:id="rId48"/>
+              </a:rPr>
+              <a:t>Lofar 2</a:t>
+            </a:r>
+          </a:p>
+          <a:p>
+            <a:r>
+              <a:rPr sz="800">
+                <a:hlinkClick r:id="rId49"/>
+              </a:rPr>
+              <a:t>Lofar 3</a:t>
+            </a:r>
+          </a:p>
+        </p:txBody>
+      </p:sp>
+      <p:sp>
+        <p:nvSpPr>
+          <p:cNvPr id="31" name="Rounded Rectangle 30"/>
+          <p:cNvSpPr/>
+          <p:nvPr>
+            <a:hlinkClick r:id="rId50"/>
+          </p:nvPr>
+        </p:nvSpPr>
+        <p:spPr>
+          <a:xfrm>
+            <a:off x="9531705" y="4632960"/>
+            <a:ext cx="2200046" cy="365760"/>
+          </a:xfrm>
+          <a:prstGeom prst="roundRect">
+            <a:avLst/>
+          </a:prstGeom>
+          <a:solidFill>
+            <a:srgbClr val="E8EEF7"/>
+          </a:solidFill>
+          <a:ln>
+            <a:solidFill>
+              <a:srgbClr val="1F3A5F"/>
+            </a:solidFill>
+          </a:ln>
+        </p:spPr>
+        <p:style>
+          <a:lnRef idx="1">
+            <a:schemeClr val="accent1"/>
+          </a:lnRef>
+          <a:fillRef idx="3">
+            <a:schemeClr val="accent1"/>
+          </a:fillRef>
+          <a:effectRef idx="2">
+            <a:schemeClr val="accent1"/>
+          </a:effectRef>
+          <a:fontRef idx="minor">
+            <a:schemeClr val="lt1"/>
+          </a:fontRef>
+        </p:style>
+        <p:txBody>
+          <a:bodyPr rtlCol="0" anchor="ctr" lIns="45720" rIns="45720"/>
+          <a:lstStyle/>
+          <a:p>
+            <a:pPr algn="ctr"/>
+            <a:r>
+              <a:rPr sz="900">
+                <a:solidFill>
+                  <a:srgbClr val="1F3A5F"/>
+                </a:solidFill>
+              </a:rPr>
+              <a:t>Gram 36: Rebel One contact bearing 103, codename Tatooine</a:t>
+            </a:r>
+          </a:p>
+        </p:txBody>
+      </p:sp>
+      <p:sp>
+        <p:nvSpPr>
+          <p:cNvPr id="32" name="TextBox 31"/>
+          <p:cNvSpPr txBox="1"/>
+          <p:nvPr/>
+        </p:nvSpPr>
+        <p:spPr>
+          <a:xfrm>
+            <a:off x="9531705" y="5017008"/>
+            <a:ext cx="2200046" cy="1447800"/>
+          </a:xfrm>
+          <a:prstGeom prst="rect">
+            <a:avLst/>
+          </a:prstGeom>
+          <a:noFill/>
+        </p:spPr>
+        <p:txBody>
+          <a:bodyPr wrap="square">
+            <a:spAutoFit/>
+          </a:bodyPr>
+          <a:lstStyle/>
+          <a:p>
+            <a:r>
+              <a:rPr sz="800">
                 <a:hlinkClick r:id="rId51"/>
               </a:rPr>
               <a:t>Lofar 1</a:t>
@@ -6057,6 +6145,92 @@
                 <a:hlinkClick r:id="rId52"/>
               </a:rPr>
               <a:t>Lofar 2</a:t>
+            </a:r>
+          </a:p>
+        </p:txBody>
+      </p:sp>
+    </p:spTree>
+  </p:cSld>
+  <p:clrMapOvr>
+    <a:masterClrMapping/>
+  </p:clrMapOvr>
+</p:sld>
+</file>
+
+<file path=ppt/slides/slide4.xml><?xml version="1.0" encoding="utf-8"?>
+<p:sld xmlns:a="http://schemas.openxmlformats.org/drawingml/2006/main" xmlns:p="http://schemas.openxmlformats.org/presentationml/2006/main" xmlns:r="http://schemas.openxmlformats.org/officeDocument/2006/relationships">
+  <p:cSld>
+    <p:spTree>
+      <p:nvGrpSpPr>
+        <p:cNvPr id="1" name=""/>
+        <p:cNvGrpSpPr/>
+        <p:nvPr/>
+      </p:nvGrpSpPr>
+      <p:grpSpPr/>
+      <p:sp>
+        <p:nvSpPr>
+          <p:cNvPr id="2" name="TextBox 1"/>
+          <p:cNvSpPr txBox="1"/>
+          <p:nvPr/>
+        </p:nvSpPr>
+        <p:spPr>
+          <a:xfrm>
+            <a:off x="914400" y="2377440"/>
+            <a:ext cx="10360152" cy="1280160"/>
+          </a:xfrm>
+          <a:prstGeom prst="rect">
+            <a:avLst/>
+          </a:prstGeom>
+          <a:noFill/>
+        </p:spPr>
+        <p:txBody>
+          <a:bodyPr wrap="square">
+            <a:spAutoFit/>
+          </a:bodyPr>
+          <a:lstStyle/>
+          <a:p>
+            <a:pPr algn="ctr"/>
+            <a:r>
+              <a:rPr sz="4000" b="1">
+                <a:solidFill>
+                  <a:srgbClr val="1F3A5F"/>
+                </a:solidFill>
+              </a:rPr>
+              <a:t>End of Instructor Progress Test 1 Grams</a:t>
+            </a:r>
+          </a:p>
+        </p:txBody>
+      </p:sp>
+      <p:sp>
+        <p:nvSpPr>
+          <p:cNvPr id="3" name="TextBox 2"/>
+          <p:cNvSpPr txBox="1"/>
+          <p:nvPr/>
+        </p:nvSpPr>
+        <p:spPr>
+          <a:xfrm>
+            <a:off x="914400" y="3840480"/>
+            <a:ext cx="10360152" cy="731520"/>
+          </a:xfrm>
+          <a:prstGeom prst="rect">
+            <a:avLst/>
+          </a:prstGeom>
+          <a:noFill/>
+        </p:spPr>
+        <p:txBody>
+          <a:bodyPr wrap="none">
+            <a:spAutoFit/>
+          </a:bodyPr>
+          <a:lstStyle/>
+          <a:p>
+            <a:pPr algn="ctr"/>
+            <a:r>
+              <a:rPr sz="2400">
+                <a:solidFill>
+                  <a:srgbClr val="1F3A5F"/>
+                </a:solidFill>
+              </a:rPr>
+              <a:t>Instructor Version</a:t>
             </a:r>
           </a:p>
         </p:txBody>

--- a/source/Instructor Progress Test 1 Grams/Instructor Progress Test 1 Grams.pptx
+++ b/source/Instructor Progress Test 1 Grams/Instructor Progress Test 1 Grams.pptx
@@ -7,8 +7,6 @@
   <p:sldIdLst>
     <p:sldId id="256" r:id="rId7"/>
     <p:sldId id="257" r:id="rId8"/>
-    <p:sldId id="258" r:id="rId9"/>
-    <p:sldId id="259" r:id="rId10"/>
   </p:sldIdLst>
   <p:sldSz cx="12188952" cy="6858000" type="screen4x3"/>
   <p:notesSz cx="6858000" cy="9144000"/>
@@ -3093,14 +3091,120 @@
       <p:grpSpPr/>
       <p:sp>
         <p:nvSpPr>
-          <p:cNvPr id="2" name="TextBox 1"/>
+          <p:cNvPr id="2" name="Rectangle 1"/>
+          <p:cNvSpPr/>
+          <p:nvPr/>
+        </p:nvSpPr>
+        <p:spPr>
+          <a:xfrm>
+            <a:off x="0" y="0"/>
+            <a:ext cx="12188952" cy="548640"/>
+          </a:xfrm>
+          <a:prstGeom prst="rect">
+            <a:avLst/>
+          </a:prstGeom>
+          <a:solidFill>
+            <a:srgbClr val="1F3A5F"/>
+          </a:solidFill>
+          <a:ln>
+            <a:noFill/>
+          </a:ln>
+        </p:spPr>
+        <p:style>
+          <a:lnRef idx="1">
+            <a:schemeClr val="accent1"/>
+          </a:lnRef>
+          <a:fillRef idx="3">
+            <a:schemeClr val="accent1"/>
+          </a:fillRef>
+          <a:effectRef idx="2">
+            <a:schemeClr val="accent1"/>
+          </a:effectRef>
+          <a:fontRef idx="minor">
+            <a:schemeClr val="lt1"/>
+          </a:fontRef>
+        </p:style>
+        <p:txBody>
+          <a:bodyPr rtlCol="0" anchor="ctr" lIns="182880" rIns="182880"/>
+          <a:lstStyle/>
+          <a:p>
+            <a:pPr algn="ctr"/>
+            <a:r>
+              <a:rPr sz="2000" b="1">
+                <a:solidFill>
+                  <a:srgbClr val="FFFFFF"/>
+                </a:solidFill>
+              </a:rPr>
+              <a:t>Instructor Progress Test 1 Grams — Page 1 of 2</a:t>
+            </a:r>
+          </a:p>
+        </p:txBody>
+      </p:sp>
+      <p:sp>
+        <p:nvSpPr>
+          <p:cNvPr id="3" name="Rounded Rectangle 2">
+            <a:hlinkClick r:id="rId2"/>
+          </p:cNvPr>
+          <p:cNvSpPr/>
+          <p:nvPr/>
+        </p:nvSpPr>
+        <p:spPr>
+          <a:xfrm>
+            <a:off x="365760" y="731520"/>
+            <a:ext cx="2200046" cy="365760"/>
+          </a:xfrm>
+          <a:prstGeom prst="roundRect">
+            <a:avLst/>
+          </a:prstGeom>
+          <a:solidFill>
+            <a:srgbClr val="E8EEF7"/>
+          </a:solidFill>
+          <a:ln>
+            <a:solidFill>
+              <a:srgbClr val="1F3A5F"/>
+            </a:solidFill>
+          </a:ln>
+        </p:spPr>
+        <p:style>
+          <a:lnRef idx="1">
+            <a:schemeClr val="accent1"/>
+          </a:lnRef>
+          <a:fillRef idx="3">
+            <a:schemeClr val="accent1"/>
+          </a:fillRef>
+          <a:effectRef idx="2">
+            <a:schemeClr val="accent1"/>
+          </a:effectRef>
+          <a:fontRef idx="minor">
+            <a:schemeClr val="lt1"/>
+          </a:fontRef>
+        </p:style>
+        <p:txBody>
+          <a:bodyPr rtlCol="0" anchor="ctr" lIns="45720" rIns="45720"/>
+          <a:lstStyle/>
+          <a:p>
+            <a:pPr algn="ctr"/>
+            <a:r>
+              <a:rPr sz="900">
+                <a:solidFill>
+                  <a:srgbClr val="1F3A5F"/>
+                </a:solidFill>
+              </a:rPr>
+              <a:t>Gram 1: FR Prometheus, Category 1, Bespin</a:t>
+            </a:r>
+          </a:p>
+        </p:txBody>
+      </p:sp>
+      <p:sp>
+        <p:nvSpPr>
+          <p:cNvPr id="4" name="TextBox 3"/>
           <p:cNvSpPr txBox="1"/>
           <p:nvPr/>
         </p:nvSpPr>
         <p:spPr>
           <a:xfrm>
-            <a:off x="914400" y="2377440"/>
-            <a:ext cx="10360152" cy="1280160"/>
+            <a:off x="365760" y="1115568"/>
+            <a:ext cx="2200046" cy="1447800"/>
           </a:xfrm>
           <a:prstGeom prst="rect">
             <a:avLst/>
@@ -3113,28 +3217,88 @@
           </a:bodyPr>
           <a:lstStyle/>
           <a:p>
+            <a:r>
+              <a:rPr sz="800">
+                <a:hlinkClick r:id="rId3"/>
+              </a:rPr>
+              <a:t>Lofar 1</a:t>
+            </a:r>
+          </a:p>
+          <a:p>
+            <a:r>
+              <a:rPr sz="800">
+                <a:hlinkClick r:id="rId4"/>
+              </a:rPr>
+              <a:t>Lofar 2</a:t>
+            </a:r>
+          </a:p>
+        </p:txBody>
+      </p:sp>
+      <p:sp>
+        <p:nvSpPr>
+          <p:cNvPr id="5" name="Rounded Rectangle 4">
+            <a:hlinkClick r:id="rId5"/>
+          </p:cNvPr>
+          <p:cNvSpPr/>
+          <p:nvPr/>
+        </p:nvSpPr>
+        <p:spPr>
+          <a:xfrm>
+            <a:off x="2657246" y="731520"/>
+            <a:ext cx="2200046" cy="365760"/>
+          </a:xfrm>
+          <a:prstGeom prst="roundRect">
+            <a:avLst/>
+          </a:prstGeom>
+          <a:solidFill>
+            <a:srgbClr val="E8EEF7"/>
+          </a:solidFill>
+          <a:ln>
+            <a:solidFill>
+              <a:srgbClr val="1F3A5F"/>
+            </a:solidFill>
+          </a:ln>
+        </p:spPr>
+        <p:style>
+          <a:lnRef idx="1">
+            <a:schemeClr val="accent1"/>
+          </a:lnRef>
+          <a:fillRef idx="3">
+            <a:schemeClr val="accent1"/>
+          </a:fillRef>
+          <a:effectRef idx="2">
+            <a:schemeClr val="accent1"/>
+          </a:effectRef>
+          <a:fontRef idx="minor">
+            <a:schemeClr val="lt1"/>
+          </a:fontRef>
+        </p:style>
+        <p:txBody>
+          <a:bodyPr rtlCol="0" anchor="ctr" lIns="45720" rIns="45720"/>
+          <a:lstStyle/>
+          <a:p>
             <a:pPr algn="ctr"/>
             <a:r>
-              <a:rPr sz="4000" b="1">
+              <a:rPr sz="900">
                 <a:solidFill>
                   <a:srgbClr val="1F3A5F"/>
                 </a:solidFill>
               </a:rPr>
-              <a:t>Welcome to Instructor Progress Test 1 Grams</a:t>
-            </a:r>
-          </a:p>
-        </p:txBody>
-      </p:sp>
-      <p:sp>
-        <p:nvSpPr>
-          <p:cNvPr id="3" name="TextBox 2"/>
+              <a:t>Gram 3: FR Ghost, Category 1, Tantive</a:t>
+            </a:r>
+          </a:p>
+        </p:txBody>
+      </p:sp>
+      <p:sp>
+        <p:nvSpPr>
+          <p:cNvPr id="6" name="TextBox 5"/>
           <p:cNvSpPr txBox="1"/>
           <p:nvPr/>
         </p:nvSpPr>
         <p:spPr>
           <a:xfrm>
-            <a:off x="914400" y="3840480"/>
-            <a:ext cx="10360152" cy="731520"/>
+            <a:off x="2657246" y="1115568"/>
+            <a:ext cx="2200046" cy="1447800"/>
           </a:xfrm>
           <a:prstGeom prst="rect">
             <a:avLst/>
@@ -3142,19 +3306,1230 @@
           <a:noFill/>
         </p:spPr>
         <p:txBody>
-          <a:bodyPr wrap="none">
+          <a:bodyPr wrap="square">
             <a:spAutoFit/>
           </a:bodyPr>
           <a:lstStyle/>
           <a:p>
+            <a:r>
+              <a:rPr sz="800">
+                <a:hlinkClick r:id="rId6"/>
+              </a:rPr>
+              <a:t>Lofar 1</a:t>
+            </a:r>
+          </a:p>
+        </p:txBody>
+      </p:sp>
+      <p:sp>
+        <p:nvSpPr>
+          <p:cNvPr id="7" name="Rounded Rectangle 6">
+            <a:hlinkClick r:id="rId7"/>
+          </p:cNvPr>
+          <p:cNvSpPr/>
+          <p:nvPr/>
+        </p:nvSpPr>
+        <p:spPr>
+          <a:xfrm>
+            <a:off x="4948732" y="731520"/>
+            <a:ext cx="2200046" cy="365760"/>
+          </a:xfrm>
+          <a:prstGeom prst="roundRect">
+            <a:avLst/>
+          </a:prstGeom>
+          <a:solidFill>
+            <a:srgbClr val="E8EEF7"/>
+          </a:solidFill>
+          <a:ln>
+            <a:solidFill>
+              <a:srgbClr val="1F3A5F"/>
+            </a:solidFill>
+          </a:ln>
+        </p:spPr>
+        <p:style>
+          <a:lnRef idx="1">
+            <a:schemeClr val="accent1"/>
+          </a:lnRef>
+          <a:fillRef idx="3">
+            <a:schemeClr val="accent1"/>
+          </a:fillRef>
+          <a:effectRef idx="2">
+            <a:schemeClr val="accent1"/>
+          </a:effectRef>
+          <a:fontRef idx="minor">
+            <a:schemeClr val="lt1"/>
+          </a:fontRef>
+        </p:style>
+        <p:txBody>
+          <a:bodyPr rtlCol="0" anchor="ctr" lIns="45720" rIns="45720"/>
+          <a:lstStyle/>
+          <a:p>
             <a:pPr algn="ctr"/>
             <a:r>
-              <a:rPr sz="2400">
+              <a:rPr sz="900">
                 <a:solidFill>
                   <a:srgbClr val="1F3A5F"/>
                 </a:solidFill>
               </a:rPr>
-              <a:t>Instructor Version</a:t>
+              <a:t>Gram 4: Enterprise contact bearing 291, codename Hoth</a:t>
+            </a:r>
+          </a:p>
+        </p:txBody>
+      </p:sp>
+      <p:sp>
+        <p:nvSpPr>
+          <p:cNvPr id="8" name="TextBox 7"/>
+          <p:cNvSpPr txBox="1"/>
+          <p:nvPr/>
+        </p:nvSpPr>
+        <p:spPr>
+          <a:xfrm>
+            <a:off x="4948732" y="1115568"/>
+            <a:ext cx="2200046" cy="1447800"/>
+          </a:xfrm>
+          <a:prstGeom prst="rect">
+            <a:avLst/>
+          </a:prstGeom>
+          <a:noFill/>
+        </p:spPr>
+        <p:txBody>
+          <a:bodyPr wrap="square">
+            <a:spAutoFit/>
+          </a:bodyPr>
+          <a:lstStyle/>
+          <a:p>
+            <a:r>
+              <a:rPr sz="800">
+                <a:hlinkClick r:id="rId8"/>
+              </a:rPr>
+              <a:t>Lofar 1</a:t>
+            </a:r>
+          </a:p>
+        </p:txBody>
+      </p:sp>
+      <p:sp>
+        <p:nvSpPr>
+          <p:cNvPr id="9" name="Rounded Rectangle 8">
+            <a:hlinkClick r:id="rId9"/>
+          </p:cNvPr>
+          <p:cNvSpPr/>
+          <p:nvPr/>
+        </p:nvSpPr>
+        <p:spPr>
+          <a:xfrm>
+            <a:off x="7240219" y="731520"/>
+            <a:ext cx="2200046" cy="365760"/>
+          </a:xfrm>
+          <a:prstGeom prst="roundRect">
+            <a:avLst/>
+          </a:prstGeom>
+          <a:solidFill>
+            <a:srgbClr val="E8EEF7"/>
+          </a:solidFill>
+          <a:ln>
+            <a:solidFill>
+              <a:srgbClr val="1F3A5F"/>
+            </a:solidFill>
+          </a:ln>
+        </p:spPr>
+        <p:style>
+          <a:lnRef idx="1">
+            <a:schemeClr val="accent1"/>
+          </a:lnRef>
+          <a:fillRef idx="3">
+            <a:schemeClr val="accent1"/>
+          </a:fillRef>
+          <a:effectRef idx="2">
+            <a:schemeClr val="accent1"/>
+          </a:effectRef>
+          <a:fontRef idx="minor">
+            <a:schemeClr val="lt1"/>
+          </a:fontRef>
+        </p:style>
+        <p:txBody>
+          <a:bodyPr rtlCol="0" anchor="ctr" lIns="45720" rIns="45720"/>
+          <a:lstStyle/>
+          <a:p>
+            <a:pPr algn="ctr"/>
+            <a:r>
+              <a:rPr sz="900">
+                <a:solidFill>
+                  <a:srgbClr val="1F3A5F"/>
+                </a:solidFill>
+              </a:rPr>
+              <a:t>Gram 5: FR Enterprise, Category 4, Bespin</a:t>
+            </a:r>
+          </a:p>
+        </p:txBody>
+      </p:sp>
+      <p:sp>
+        <p:nvSpPr>
+          <p:cNvPr id="10" name="TextBox 9"/>
+          <p:cNvSpPr txBox="1"/>
+          <p:nvPr/>
+        </p:nvSpPr>
+        <p:spPr>
+          <a:xfrm>
+            <a:off x="7240219" y="1115568"/>
+            <a:ext cx="2200046" cy="1447800"/>
+          </a:xfrm>
+          <a:prstGeom prst="rect">
+            <a:avLst/>
+          </a:prstGeom>
+          <a:noFill/>
+        </p:spPr>
+        <p:txBody>
+          <a:bodyPr wrap="square">
+            <a:spAutoFit/>
+          </a:bodyPr>
+          <a:lstStyle/>
+          <a:p>
+            <a:r>
+              <a:rPr sz="800">
+                <a:hlinkClick r:id="rId10"/>
+              </a:rPr>
+              <a:t>Lofar 1</a:t>
+            </a:r>
+          </a:p>
+        </p:txBody>
+      </p:sp>
+      <p:sp>
+        <p:nvSpPr>
+          <p:cNvPr id="11" name="Rounded Rectangle 10">
+            <a:hlinkClick r:id="rId11"/>
+          </p:cNvPr>
+          <p:cNvSpPr/>
+          <p:nvPr/>
+        </p:nvSpPr>
+        <p:spPr>
+          <a:xfrm>
+            <a:off x="9531705" y="731520"/>
+            <a:ext cx="2200046" cy="365760"/>
+          </a:xfrm>
+          <a:prstGeom prst="roundRect">
+            <a:avLst/>
+          </a:prstGeom>
+          <a:solidFill>
+            <a:srgbClr val="E8EEF7"/>
+          </a:solidFill>
+          <a:ln>
+            <a:solidFill>
+              <a:srgbClr val="1F3A5F"/>
+            </a:solidFill>
+          </a:ln>
+        </p:spPr>
+        <p:style>
+          <a:lnRef idx="1">
+            <a:schemeClr val="accent1"/>
+          </a:lnRef>
+          <a:fillRef idx="3">
+            <a:schemeClr val="accent1"/>
+          </a:fillRef>
+          <a:effectRef idx="2">
+            <a:schemeClr val="accent1"/>
+          </a:effectRef>
+          <a:fontRef idx="minor">
+            <a:schemeClr val="lt1"/>
+          </a:fontRef>
+        </p:style>
+        <p:txBody>
+          <a:bodyPr rtlCol="0" anchor="ctr" lIns="45720" rIns="45720"/>
+          <a:lstStyle/>
+          <a:p>
+            <a:pPr algn="ctr"/>
+            <a:r>
+              <a:rPr sz="900">
+                <a:solidFill>
+                  <a:srgbClr val="1F3A5F"/>
+                </a:solidFill>
+              </a:rPr>
+              <a:t>Gram 6: FR Akira-class, Category 4, Hoth</a:t>
+            </a:r>
+          </a:p>
+        </p:txBody>
+      </p:sp>
+      <p:sp>
+        <p:nvSpPr>
+          <p:cNvPr id="12" name="TextBox 11"/>
+          <p:cNvSpPr txBox="1"/>
+          <p:nvPr/>
+        </p:nvSpPr>
+        <p:spPr>
+          <a:xfrm>
+            <a:off x="9531705" y="1115568"/>
+            <a:ext cx="2200046" cy="1447800"/>
+          </a:xfrm>
+          <a:prstGeom prst="rect">
+            <a:avLst/>
+          </a:prstGeom>
+          <a:noFill/>
+        </p:spPr>
+        <p:txBody>
+          <a:bodyPr wrap="square">
+            <a:spAutoFit/>
+          </a:bodyPr>
+          <a:lstStyle/>
+          <a:p>
+            <a:r>
+              <a:rPr sz="800">
+                <a:hlinkClick r:id="rId12"/>
+              </a:rPr>
+              <a:t>Lofar 1</a:t>
+            </a:r>
+          </a:p>
+        </p:txBody>
+      </p:sp>
+      <p:sp>
+        <p:nvSpPr>
+          <p:cNvPr id="13" name="Rounded Rectangle 12">
+            <a:hlinkClick r:id="rId13"/>
+          </p:cNvPr>
+          <p:cNvSpPr/>
+          <p:nvPr/>
+        </p:nvSpPr>
+        <p:spPr>
+          <a:xfrm>
+            <a:off x="365760" y="2682240"/>
+            <a:ext cx="2200046" cy="365760"/>
+          </a:xfrm>
+          <a:prstGeom prst="roundRect">
+            <a:avLst/>
+          </a:prstGeom>
+          <a:solidFill>
+            <a:srgbClr val="E8EEF7"/>
+          </a:solidFill>
+          <a:ln>
+            <a:solidFill>
+              <a:srgbClr val="1F3A5F"/>
+            </a:solidFill>
+          </a:ln>
+        </p:spPr>
+        <p:style>
+          <a:lnRef idx="1">
+            <a:schemeClr val="accent1"/>
+          </a:lnRef>
+          <a:fillRef idx="3">
+            <a:schemeClr val="accent1"/>
+          </a:fillRef>
+          <a:effectRef idx="2">
+            <a:schemeClr val="accent1"/>
+          </a:effectRef>
+          <a:fontRef idx="minor">
+            <a:schemeClr val="lt1"/>
+          </a:fontRef>
+        </p:style>
+        <p:txBody>
+          <a:bodyPr rtlCol="0" anchor="ctr" lIns="45720" rIns="45720"/>
+          <a:lstStyle/>
+          <a:p>
+            <a:pPr algn="ctr"/>
+            <a:r>
+              <a:rPr sz="900">
+                <a:solidFill>
+                  <a:srgbClr val="1F3A5F"/>
+                </a:solidFill>
+              </a:rPr>
+              <a:t>Gram 7: FR Rebel One, Category 1, Naboo</a:t>
+            </a:r>
+          </a:p>
+        </p:txBody>
+      </p:sp>
+      <p:sp>
+        <p:nvSpPr>
+          <p:cNvPr id="14" name="TextBox 13"/>
+          <p:cNvSpPr txBox="1"/>
+          <p:nvPr/>
+        </p:nvSpPr>
+        <p:spPr>
+          <a:xfrm>
+            <a:off x="365760" y="3066288"/>
+            <a:ext cx="2200046" cy="1447800"/>
+          </a:xfrm>
+          <a:prstGeom prst="rect">
+            <a:avLst/>
+          </a:prstGeom>
+          <a:noFill/>
+        </p:spPr>
+        <p:txBody>
+          <a:bodyPr wrap="square">
+            <a:spAutoFit/>
+          </a:bodyPr>
+          <a:lstStyle/>
+          <a:p>
+            <a:r>
+              <a:rPr sz="800">
+                <a:hlinkClick r:id="rId14"/>
+              </a:rPr>
+              <a:t>Lofar 1</a:t>
+            </a:r>
+          </a:p>
+          <a:p>
+            <a:r>
+              <a:rPr sz="800">
+                <a:hlinkClick r:id="rId15"/>
+              </a:rPr>
+              <a:t>Lofar 2</a:t>
+            </a:r>
+          </a:p>
+        </p:txBody>
+      </p:sp>
+      <p:sp>
+        <p:nvSpPr>
+          <p:cNvPr id="15" name="Rounded Rectangle 14">
+            <a:hlinkClick r:id="rId16"/>
+          </p:cNvPr>
+          <p:cNvSpPr/>
+          <p:nvPr/>
+        </p:nvSpPr>
+        <p:spPr>
+          <a:xfrm>
+            <a:off x="2657246" y="2682240"/>
+            <a:ext cx="2200046" cy="365760"/>
+          </a:xfrm>
+          <a:prstGeom prst="roundRect">
+            <a:avLst/>
+          </a:prstGeom>
+          <a:solidFill>
+            <a:srgbClr val="E8EEF7"/>
+          </a:solidFill>
+          <a:ln>
+            <a:solidFill>
+              <a:srgbClr val="1F3A5F"/>
+            </a:solidFill>
+          </a:ln>
+        </p:spPr>
+        <p:style>
+          <a:lnRef idx="1">
+            <a:schemeClr val="accent1"/>
+          </a:lnRef>
+          <a:fillRef idx="3">
+            <a:schemeClr val="accent1"/>
+          </a:fillRef>
+          <a:effectRef idx="2">
+            <a:schemeClr val="accent1"/>
+          </a:effectRef>
+          <a:fontRef idx="minor">
+            <a:schemeClr val="lt1"/>
+          </a:fontRef>
+        </p:style>
+        <p:txBody>
+          <a:bodyPr rtlCol="0" anchor="ctr" lIns="45720" rIns="45720"/>
+          <a:lstStyle/>
+          <a:p>
+            <a:pPr algn="ctr"/>
+            <a:r>
+              <a:rPr sz="900">
+                <a:solidFill>
+                  <a:srgbClr val="1F3A5F"/>
+                </a:solidFill>
+              </a:rPr>
+              <a:t>Gram 8: FR TIE Bomber, Category 4, Kronos</a:t>
+            </a:r>
+          </a:p>
+        </p:txBody>
+      </p:sp>
+      <p:sp>
+        <p:nvSpPr>
+          <p:cNvPr id="16" name="TextBox 15"/>
+          <p:cNvSpPr txBox="1"/>
+          <p:nvPr/>
+        </p:nvSpPr>
+        <p:spPr>
+          <a:xfrm>
+            <a:off x="2657246" y="3066288"/>
+            <a:ext cx="2200046" cy="1447800"/>
+          </a:xfrm>
+          <a:prstGeom prst="rect">
+            <a:avLst/>
+          </a:prstGeom>
+          <a:noFill/>
+        </p:spPr>
+        <p:txBody>
+          <a:bodyPr wrap="square">
+            <a:spAutoFit/>
+          </a:bodyPr>
+          <a:lstStyle/>
+          <a:p>
+            <a:r>
+              <a:rPr sz="800">
+                <a:hlinkClick r:id="rId17"/>
+              </a:rPr>
+              <a:t>Lofar 1</a:t>
+            </a:r>
+          </a:p>
+        </p:txBody>
+      </p:sp>
+      <p:sp>
+        <p:nvSpPr>
+          <p:cNvPr id="17" name="Rounded Rectangle 16">
+            <a:hlinkClick r:id="rId18"/>
+          </p:cNvPr>
+          <p:cNvSpPr/>
+          <p:nvPr/>
+        </p:nvSpPr>
+        <p:spPr>
+          <a:xfrm>
+            <a:off x="4948732" y="2682240"/>
+            <a:ext cx="2200046" cy="365760"/>
+          </a:xfrm>
+          <a:prstGeom prst="roundRect">
+            <a:avLst/>
+          </a:prstGeom>
+          <a:solidFill>
+            <a:srgbClr val="E8EEF7"/>
+          </a:solidFill>
+          <a:ln>
+            <a:solidFill>
+              <a:srgbClr val="1F3A5F"/>
+            </a:solidFill>
+          </a:ln>
+        </p:spPr>
+        <p:style>
+          <a:lnRef idx="1">
+            <a:schemeClr val="accent1"/>
+          </a:lnRef>
+          <a:fillRef idx="3">
+            <a:schemeClr val="accent1"/>
+          </a:fillRef>
+          <a:effectRef idx="2">
+            <a:schemeClr val="accent1"/>
+          </a:effectRef>
+          <a:fontRef idx="minor">
+            <a:schemeClr val="lt1"/>
+          </a:fontRef>
+        </p:style>
+        <p:txBody>
+          <a:bodyPr rtlCol="0" anchor="ctr" lIns="45720" rIns="45720"/>
+          <a:lstStyle/>
+          <a:p>
+            <a:pPr algn="ctr"/>
+            <a:r>
+              <a:rPr sz="900">
+                <a:solidFill>
+                  <a:srgbClr val="1F3A5F"/>
+                </a:solidFill>
+              </a:rPr>
+              <a:t>Gram 9: FR Star Destroyer, Category 1, Tatooine</a:t>
+            </a:r>
+          </a:p>
+        </p:txBody>
+      </p:sp>
+      <p:sp>
+        <p:nvSpPr>
+          <p:cNvPr id="18" name="TextBox 17"/>
+          <p:cNvSpPr txBox="1"/>
+          <p:nvPr/>
+        </p:nvSpPr>
+        <p:spPr>
+          <a:xfrm>
+            <a:off x="4948732" y="3066288"/>
+            <a:ext cx="2200046" cy="1447800"/>
+          </a:xfrm>
+          <a:prstGeom prst="rect">
+            <a:avLst/>
+          </a:prstGeom>
+          <a:noFill/>
+        </p:spPr>
+        <p:txBody>
+          <a:bodyPr wrap="square">
+            <a:spAutoFit/>
+          </a:bodyPr>
+          <a:lstStyle/>
+          <a:p>
+            <a:r>
+              <a:rPr sz="800">
+                <a:hlinkClick r:id="rId19"/>
+              </a:rPr>
+              <a:t>Lofar 1</a:t>
+            </a:r>
+          </a:p>
+        </p:txBody>
+      </p:sp>
+      <p:sp>
+        <p:nvSpPr>
+          <p:cNvPr id="19" name="Rounded Rectangle 18">
+            <a:hlinkClick r:id="rId20"/>
+          </p:cNvPr>
+          <p:cNvSpPr/>
+          <p:nvPr/>
+        </p:nvSpPr>
+        <p:spPr>
+          <a:xfrm>
+            <a:off x="7240219" y="2682240"/>
+            <a:ext cx="2200046" cy="365760"/>
+          </a:xfrm>
+          <a:prstGeom prst="roundRect">
+            <a:avLst/>
+          </a:prstGeom>
+          <a:solidFill>
+            <a:srgbClr val="E8EEF7"/>
+          </a:solidFill>
+          <a:ln>
+            <a:solidFill>
+              <a:srgbClr val="1F3A5F"/>
+            </a:solidFill>
+          </a:ln>
+        </p:spPr>
+        <p:style>
+          <a:lnRef idx="1">
+            <a:schemeClr val="accent1"/>
+          </a:lnRef>
+          <a:fillRef idx="3">
+            <a:schemeClr val="accent1"/>
+          </a:fillRef>
+          <a:effectRef idx="2">
+            <a:schemeClr val="accent1"/>
+          </a:effectRef>
+          <a:fontRef idx="minor">
+            <a:schemeClr val="lt1"/>
+          </a:fontRef>
+        </p:style>
+        <p:txBody>
+          <a:bodyPr rtlCol="0" anchor="ctr" lIns="45720" rIns="45720"/>
+          <a:lstStyle/>
+          <a:p>
+            <a:pPr algn="ctr"/>
+            <a:r>
+              <a:rPr sz="900">
+                <a:solidFill>
+                  <a:srgbClr val="1F3A5F"/>
+                </a:solidFill>
+              </a:rPr>
+              <a:t>Gram 10: FR Stargazer, Category 3, Risa</a:t>
+            </a:r>
+          </a:p>
+        </p:txBody>
+      </p:sp>
+      <p:sp>
+        <p:nvSpPr>
+          <p:cNvPr id="20" name="TextBox 19"/>
+          <p:cNvSpPr txBox="1"/>
+          <p:nvPr/>
+        </p:nvSpPr>
+        <p:spPr>
+          <a:xfrm>
+            <a:off x="7240219" y="3066288"/>
+            <a:ext cx="2200046" cy="1447800"/>
+          </a:xfrm>
+          <a:prstGeom prst="rect">
+            <a:avLst/>
+          </a:prstGeom>
+          <a:noFill/>
+        </p:spPr>
+        <p:txBody>
+          <a:bodyPr wrap="square">
+            <a:spAutoFit/>
+          </a:bodyPr>
+          <a:lstStyle/>
+          <a:p>
+            <a:r>
+              <a:rPr sz="800">
+                <a:hlinkClick r:id="rId21"/>
+              </a:rPr>
+              <a:t>Lofar 1</a:t>
+            </a:r>
+          </a:p>
+          <a:p>
+            <a:r>
+              <a:rPr sz="800">
+                <a:hlinkClick r:id="rId22"/>
+              </a:rPr>
+              <a:t>Lofar 2</a:t>
+            </a:r>
+          </a:p>
+          <a:p>
+            <a:r>
+              <a:rPr sz="800">
+                <a:hlinkClick r:id="rId23"/>
+              </a:rPr>
+              <a:t>Lofar 3</a:t>
+            </a:r>
+          </a:p>
+          <a:p>
+            <a:r>
+              <a:rPr sz="800">
+                <a:hlinkClick r:id="rId24"/>
+              </a:rPr>
+              <a:t>Lofar 4</a:t>
+            </a:r>
+          </a:p>
+        </p:txBody>
+      </p:sp>
+      <p:sp>
+        <p:nvSpPr>
+          <p:cNvPr id="21" name="Rounded Rectangle 20">
+            <a:hlinkClick r:id="rId25"/>
+          </p:cNvPr>
+          <p:cNvSpPr/>
+          <p:nvPr/>
+        </p:nvSpPr>
+        <p:spPr>
+          <a:xfrm>
+            <a:off x="9531705" y="2682240"/>
+            <a:ext cx="2200046" cy="365760"/>
+          </a:xfrm>
+          <a:prstGeom prst="roundRect">
+            <a:avLst/>
+          </a:prstGeom>
+          <a:solidFill>
+            <a:srgbClr val="E8EEF7"/>
+          </a:solidFill>
+          <a:ln>
+            <a:solidFill>
+              <a:srgbClr val="1F3A5F"/>
+            </a:solidFill>
+          </a:ln>
+        </p:spPr>
+        <p:style>
+          <a:lnRef idx="1">
+            <a:schemeClr val="accent1"/>
+          </a:lnRef>
+          <a:fillRef idx="3">
+            <a:schemeClr val="accent1"/>
+          </a:fillRef>
+          <a:effectRef idx="2">
+            <a:schemeClr val="accent1"/>
+          </a:effectRef>
+          <a:fontRef idx="minor">
+            <a:schemeClr val="lt1"/>
+          </a:fontRef>
+        </p:style>
+        <p:txBody>
+          <a:bodyPr rtlCol="0" anchor="ctr" lIns="45720" rIns="45720"/>
+          <a:lstStyle/>
+          <a:p>
+            <a:pPr algn="ctr"/>
+            <a:r>
+              <a:rPr sz="900">
+                <a:solidFill>
+                  <a:srgbClr val="1F3A5F"/>
+                </a:solidFill>
+              </a:rPr>
+              <a:t>Gram 11: FR Imperial-class, Category 2, Caprica</a:t>
+            </a:r>
+          </a:p>
+        </p:txBody>
+      </p:sp>
+      <p:sp>
+        <p:nvSpPr>
+          <p:cNvPr id="22" name="TextBox 21"/>
+          <p:cNvSpPr txBox="1"/>
+          <p:nvPr/>
+        </p:nvSpPr>
+        <p:spPr>
+          <a:xfrm>
+            <a:off x="9531705" y="3066288"/>
+            <a:ext cx="2200046" cy="1447800"/>
+          </a:xfrm>
+          <a:prstGeom prst="rect">
+            <a:avLst/>
+          </a:prstGeom>
+          <a:noFill/>
+        </p:spPr>
+        <p:txBody>
+          <a:bodyPr wrap="square">
+            <a:spAutoFit/>
+          </a:bodyPr>
+          <a:lstStyle/>
+          <a:p>
+            <a:r>
+              <a:rPr sz="800">
+                <a:hlinkClick r:id="rId26"/>
+              </a:rPr>
+              <a:t>Lofar 1</a:t>
+            </a:r>
+          </a:p>
+          <a:p>
+            <a:r>
+              <a:rPr sz="800">
+                <a:hlinkClick r:id="rId27"/>
+              </a:rPr>
+              <a:t>Lofar 2</a:t>
+            </a:r>
+          </a:p>
+        </p:txBody>
+      </p:sp>
+      <p:sp>
+        <p:nvSpPr>
+          <p:cNvPr id="23" name="Rounded Rectangle 22">
+            <a:hlinkClick r:id="rId28"/>
+          </p:cNvPr>
+          <p:cNvSpPr/>
+          <p:nvPr/>
+        </p:nvSpPr>
+        <p:spPr>
+          <a:xfrm>
+            <a:off x="365760" y="4632960"/>
+            <a:ext cx="2200046" cy="365760"/>
+          </a:xfrm>
+          <a:prstGeom prst="roundRect">
+            <a:avLst/>
+          </a:prstGeom>
+          <a:solidFill>
+            <a:srgbClr val="E8EEF7"/>
+          </a:solidFill>
+          <a:ln>
+            <a:solidFill>
+              <a:srgbClr val="1F3A5F"/>
+            </a:solidFill>
+          </a:ln>
+        </p:spPr>
+        <p:style>
+          <a:lnRef idx="1">
+            <a:schemeClr val="accent1"/>
+          </a:lnRef>
+          <a:fillRef idx="3">
+            <a:schemeClr val="accent1"/>
+          </a:fillRef>
+          <a:effectRef idx="2">
+            <a:schemeClr val="accent1"/>
+          </a:effectRef>
+          <a:fontRef idx="minor">
+            <a:schemeClr val="lt1"/>
+          </a:fontRef>
+        </p:style>
+        <p:txBody>
+          <a:bodyPr rtlCol="0" anchor="ctr" lIns="45720" rIns="45720"/>
+          <a:lstStyle/>
+          <a:p>
+            <a:pPr algn="ctr"/>
+            <a:r>
+              <a:rPr sz="900">
+                <a:solidFill>
+                  <a:srgbClr val="1F3A5F"/>
+                </a:solidFill>
+              </a:rPr>
+              <a:t>Gram 14: FR Tantive IV, Category 4, Trill</a:t>
+            </a:r>
+          </a:p>
+        </p:txBody>
+      </p:sp>
+      <p:sp>
+        <p:nvSpPr>
+          <p:cNvPr id="24" name="TextBox 23"/>
+          <p:cNvSpPr txBox="1"/>
+          <p:nvPr/>
+        </p:nvSpPr>
+        <p:spPr>
+          <a:xfrm>
+            <a:off x="365760" y="5017008"/>
+            <a:ext cx="2200046" cy="1447800"/>
+          </a:xfrm>
+          <a:prstGeom prst="rect">
+            <a:avLst/>
+          </a:prstGeom>
+          <a:noFill/>
+        </p:spPr>
+        <p:txBody>
+          <a:bodyPr wrap="square">
+            <a:spAutoFit/>
+          </a:bodyPr>
+          <a:lstStyle/>
+          <a:p>
+            <a:r>
+              <a:rPr sz="800">
+                <a:hlinkClick r:id="rId29"/>
+              </a:rPr>
+              <a:t>Lofar 1</a:t>
+            </a:r>
+          </a:p>
+        </p:txBody>
+      </p:sp>
+      <p:sp>
+        <p:nvSpPr>
+          <p:cNvPr id="25" name="Rounded Rectangle 24">
+            <a:hlinkClick r:id="rId30"/>
+          </p:cNvPr>
+          <p:cNvSpPr/>
+          <p:nvPr/>
+        </p:nvSpPr>
+        <p:spPr>
+          <a:xfrm>
+            <a:off x="2657246" y="4632960"/>
+            <a:ext cx="2200046" cy="365760"/>
+          </a:xfrm>
+          <a:prstGeom prst="roundRect">
+            <a:avLst/>
+          </a:prstGeom>
+          <a:solidFill>
+            <a:srgbClr val="E8EEF7"/>
+          </a:solidFill>
+          <a:ln>
+            <a:solidFill>
+              <a:srgbClr val="1F3A5F"/>
+            </a:solidFill>
+          </a:ln>
+        </p:spPr>
+        <p:style>
+          <a:lnRef idx="1">
+            <a:schemeClr val="accent1"/>
+          </a:lnRef>
+          <a:fillRef idx="3">
+            <a:schemeClr val="accent1"/>
+          </a:fillRef>
+          <a:effectRef idx="2">
+            <a:schemeClr val="accent1"/>
+          </a:effectRef>
+          <a:fontRef idx="minor">
+            <a:schemeClr val="lt1"/>
+          </a:fontRef>
+        </p:style>
+        <p:txBody>
+          <a:bodyPr rtlCol="0" anchor="ctr" lIns="45720" rIns="45720"/>
+          <a:lstStyle/>
+          <a:p>
+            <a:pPr algn="ctr"/>
+            <a:r>
+              <a:rPr sz="900">
+                <a:solidFill>
+                  <a:srgbClr val="1F3A5F"/>
+                </a:solidFill>
+              </a:rPr>
+              <a:t>Gram 16: Corellian Corvette contact bearing 224, codename Vulcan</a:t>
+            </a:r>
+          </a:p>
+        </p:txBody>
+      </p:sp>
+      <p:sp>
+        <p:nvSpPr>
+          <p:cNvPr id="26" name="TextBox 25"/>
+          <p:cNvSpPr txBox="1"/>
+          <p:nvPr/>
+        </p:nvSpPr>
+        <p:spPr>
+          <a:xfrm>
+            <a:off x="2657246" y="5017008"/>
+            <a:ext cx="2200046" cy="1447800"/>
+          </a:xfrm>
+          <a:prstGeom prst="rect">
+            <a:avLst/>
+          </a:prstGeom>
+          <a:noFill/>
+        </p:spPr>
+        <p:txBody>
+          <a:bodyPr wrap="square">
+            <a:spAutoFit/>
+          </a:bodyPr>
+          <a:lstStyle/>
+          <a:p>
+            <a:r>
+              <a:rPr sz="800">
+                <a:hlinkClick r:id="rId31"/>
+              </a:rPr>
+              <a:t>Lofar 1</a:t>
+            </a:r>
+          </a:p>
+          <a:p>
+            <a:r>
+              <a:rPr sz="800">
+                <a:hlinkClick r:id="rId32"/>
+              </a:rPr>
+              <a:t>Lofar 2</a:t>
+            </a:r>
+          </a:p>
+          <a:p>
+            <a:r>
+              <a:rPr sz="800">
+                <a:hlinkClick r:id="rId33"/>
+              </a:rPr>
+              <a:t>Lofar 3</a:t>
+            </a:r>
+          </a:p>
+          <a:p>
+            <a:r>
+              <a:rPr sz="800">
+                <a:hlinkClick r:id="rId34"/>
+              </a:rPr>
+              <a:t>Lofar 4</a:t>
+            </a:r>
+          </a:p>
+        </p:txBody>
+      </p:sp>
+      <p:sp>
+        <p:nvSpPr>
+          <p:cNvPr id="27" name="Rounded Rectangle 26">
+            <a:hlinkClick r:id="rId35"/>
+          </p:cNvPr>
+          <p:cNvSpPr/>
+          <p:nvPr/>
+        </p:nvSpPr>
+        <p:spPr>
+          <a:xfrm>
+            <a:off x="4948732" y="4632960"/>
+            <a:ext cx="2200046" cy="365760"/>
+          </a:xfrm>
+          <a:prstGeom prst="roundRect">
+            <a:avLst/>
+          </a:prstGeom>
+          <a:solidFill>
+            <a:srgbClr val="E8EEF7"/>
+          </a:solidFill>
+          <a:ln>
+            <a:solidFill>
+              <a:srgbClr val="1F3A5F"/>
+            </a:solidFill>
+          </a:ln>
+        </p:spPr>
+        <p:style>
+          <a:lnRef idx="1">
+            <a:schemeClr val="accent1"/>
+          </a:lnRef>
+          <a:fillRef idx="3">
+            <a:schemeClr val="accent1"/>
+          </a:fillRef>
+          <a:effectRef idx="2">
+            <a:schemeClr val="accent1"/>
+          </a:effectRef>
+          <a:fontRef idx="minor">
+            <a:schemeClr val="lt1"/>
+          </a:fontRef>
+        </p:style>
+        <p:txBody>
+          <a:bodyPr rtlCol="0" anchor="ctr" lIns="45720" rIns="45720"/>
+          <a:lstStyle/>
+          <a:p>
+            <a:pPr algn="ctr"/>
+            <a:r>
+              <a:rPr sz="900">
+                <a:solidFill>
+                  <a:srgbClr val="1F3A5F"/>
+                </a:solidFill>
+              </a:rPr>
+              <a:t>Gram 17: FR Outrider, Category 3, Cardassia</a:t>
+            </a:r>
+          </a:p>
+        </p:txBody>
+      </p:sp>
+      <p:sp>
+        <p:nvSpPr>
+          <p:cNvPr id="28" name="TextBox 27"/>
+          <p:cNvSpPr txBox="1"/>
+          <p:nvPr/>
+        </p:nvSpPr>
+        <p:spPr>
+          <a:xfrm>
+            <a:off x="4948732" y="5017008"/>
+            <a:ext cx="2200046" cy="1447800"/>
+          </a:xfrm>
+          <a:prstGeom prst="rect">
+            <a:avLst/>
+          </a:prstGeom>
+          <a:noFill/>
+        </p:spPr>
+        <p:txBody>
+          <a:bodyPr wrap="square">
+            <a:spAutoFit/>
+          </a:bodyPr>
+          <a:lstStyle/>
+          <a:p>
+            <a:r>
+              <a:rPr sz="800">
+                <a:hlinkClick r:id="rId36"/>
+              </a:rPr>
+              <a:t>Lofar 1</a:t>
+            </a:r>
+          </a:p>
+          <a:p>
+            <a:r>
+              <a:rPr sz="800">
+                <a:hlinkClick r:id="rId37"/>
+              </a:rPr>
+              <a:t>Lofar 2</a:t>
+            </a:r>
+          </a:p>
+        </p:txBody>
+      </p:sp>
+      <p:sp>
+        <p:nvSpPr>
+          <p:cNvPr id="29" name="Rounded Rectangle 28">
+            <a:hlinkClick r:id="rId38"/>
+          </p:cNvPr>
+          <p:cNvSpPr/>
+          <p:nvPr/>
+        </p:nvSpPr>
+        <p:spPr>
+          <a:xfrm>
+            <a:off x="7240219" y="4632960"/>
+            <a:ext cx="2200046" cy="365760"/>
+          </a:xfrm>
+          <a:prstGeom prst="roundRect">
+            <a:avLst/>
+          </a:prstGeom>
+          <a:solidFill>
+            <a:srgbClr val="E8EEF7"/>
+          </a:solidFill>
+          <a:ln>
+            <a:solidFill>
+              <a:srgbClr val="1F3A5F"/>
+            </a:solidFill>
+          </a:ln>
+        </p:spPr>
+        <p:style>
+          <a:lnRef idx="1">
+            <a:schemeClr val="accent1"/>
+          </a:lnRef>
+          <a:fillRef idx="3">
+            <a:schemeClr val="accent1"/>
+          </a:fillRef>
+          <a:effectRef idx="2">
+            <a:schemeClr val="accent1"/>
+          </a:effectRef>
+          <a:fontRef idx="minor">
+            <a:schemeClr val="lt1"/>
+          </a:fontRef>
+        </p:style>
+        <p:txBody>
+          <a:bodyPr rtlCol="0" anchor="ctr" lIns="45720" rIns="45720"/>
+          <a:lstStyle/>
+          <a:p>
+            <a:pPr algn="ctr"/>
+            <a:r>
+              <a:rPr sz="900">
+                <a:solidFill>
+                  <a:srgbClr val="1F3A5F"/>
+                </a:solidFill>
+              </a:rPr>
+              <a:t>Gram 18: FR Razor Crest, Category 2, Gandalf</a:t>
+            </a:r>
+          </a:p>
+        </p:txBody>
+      </p:sp>
+      <p:sp>
+        <p:nvSpPr>
+          <p:cNvPr id="30" name="TextBox 29"/>
+          <p:cNvSpPr txBox="1"/>
+          <p:nvPr/>
+        </p:nvSpPr>
+        <p:spPr>
+          <a:xfrm>
+            <a:off x="7240219" y="5017008"/>
+            <a:ext cx="2200046" cy="1447800"/>
+          </a:xfrm>
+          <a:prstGeom prst="rect">
+            <a:avLst/>
+          </a:prstGeom>
+          <a:noFill/>
+        </p:spPr>
+        <p:txBody>
+          <a:bodyPr wrap="square">
+            <a:spAutoFit/>
+          </a:bodyPr>
+          <a:lstStyle/>
+          <a:p>
+            <a:r>
+              <a:rPr sz="800">
+                <a:hlinkClick r:id="rId39"/>
+              </a:rPr>
+              <a:t>Lofar 1</a:t>
+            </a:r>
+          </a:p>
+          <a:p>
+            <a:r>
+              <a:rPr sz="800">
+                <a:hlinkClick r:id="rId40"/>
+              </a:rPr>
+              <a:t>Lofar 2</a:t>
+            </a:r>
+          </a:p>
+          <a:p>
+            <a:r>
+              <a:rPr sz="800">
+                <a:hlinkClick r:id="rId41"/>
+              </a:rPr>
+              <a:t>Lofar 3</a:t>
+            </a:r>
+          </a:p>
+          <a:p>
+            <a:r>
+              <a:rPr sz="800">
+                <a:hlinkClick r:id="rId42"/>
+              </a:rPr>
+              <a:t>Lofar 4</a:t>
+            </a:r>
+          </a:p>
+        </p:txBody>
+      </p:sp>
+      <p:sp>
+        <p:nvSpPr>
+          <p:cNvPr id="31" name="Rounded Rectangle 30">
+            <a:hlinkClick r:id="rId43"/>
+          </p:cNvPr>
+          <p:cNvSpPr/>
+          <p:nvPr/>
+        </p:nvSpPr>
+        <p:spPr>
+          <a:xfrm>
+            <a:off x="9531705" y="4632960"/>
+            <a:ext cx="2200046" cy="365760"/>
+          </a:xfrm>
+          <a:prstGeom prst="roundRect">
+            <a:avLst/>
+          </a:prstGeom>
+          <a:solidFill>
+            <a:srgbClr val="E8EEF7"/>
+          </a:solidFill>
+          <a:ln>
+            <a:solidFill>
+              <a:srgbClr val="1F3A5F"/>
+            </a:solidFill>
+          </a:ln>
+        </p:spPr>
+        <p:style>
+          <a:lnRef idx="1">
+            <a:schemeClr val="accent1"/>
+          </a:lnRef>
+          <a:fillRef idx="3">
+            <a:schemeClr val="accent1"/>
+          </a:fillRef>
+          <a:effectRef idx="2">
+            <a:schemeClr val="accent1"/>
+          </a:effectRef>
+          <a:fontRef idx="minor">
+            <a:schemeClr val="lt1"/>
+          </a:fontRef>
+        </p:style>
+        <p:txBody>
+          <a:bodyPr rtlCol="0" anchor="ctr" lIns="45720" rIns="45720"/>
+          <a:lstStyle/>
+          <a:p>
+            <a:pPr algn="ctr"/>
+            <a:r>
+              <a:rPr sz="900">
+                <a:solidFill>
+                  <a:srgbClr val="1F3A5F"/>
+                </a:solidFill>
+              </a:rPr>
+              <a:t>Gram 19: FR Ghost, Category 1, Romulus</a:t>
+            </a:r>
+          </a:p>
+        </p:txBody>
+      </p:sp>
+      <p:sp>
+        <p:nvSpPr>
+          <p:cNvPr id="32" name="TextBox 31"/>
+          <p:cNvSpPr txBox="1"/>
+          <p:nvPr/>
+        </p:nvSpPr>
+        <p:spPr>
+          <a:xfrm>
+            <a:off x="9531705" y="5017008"/>
+            <a:ext cx="2200046" cy="1447800"/>
+          </a:xfrm>
+          <a:prstGeom prst="rect">
+            <a:avLst/>
+          </a:prstGeom>
+          <a:noFill/>
+        </p:spPr>
+        <p:txBody>
+          <a:bodyPr wrap="square">
+            <a:spAutoFit/>
+          </a:bodyPr>
+          <a:lstStyle/>
+          <a:p>
+            <a:r>
+              <a:rPr sz="800">
+                <a:hlinkClick r:id="rId44"/>
+              </a:rPr>
+              <a:t>Lofar 1</a:t>
             </a:r>
           </a:p>
         </p:txBody>
@@ -3223,18 +4598,18 @@
                   <a:srgbClr val="FFFFFF"/>
                 </a:solidFill>
               </a:rPr>
-              <a:t>Instructor Progress Test 1 Grams — Page 1 of 2</a:t>
-            </a:r>
-          </a:p>
-        </p:txBody>
-      </p:sp>
-      <p:sp>
-        <p:nvSpPr>
-          <p:cNvPr id="3" name="Rounded Rectangle 2"/>
+              <a:t>Instructor Progress Test 1 Grams — Page 2 of 2</a:t>
+            </a:r>
+          </a:p>
+        </p:txBody>
+      </p:sp>
+      <p:sp>
+        <p:nvSpPr>
+          <p:cNvPr id="3" name="Rounded Rectangle 2">
+            <a:hlinkClick r:id="rId2"/>
+          </p:cNvPr>
           <p:cNvSpPr/>
-          <p:nvPr>
-            <a:hlinkClick r:id="rId2"/>
-          </p:nvPr>
+          <p:nvPr/>
         </p:nvSpPr>
         <p:spPr>
           <a:xfrm>
@@ -3278,7 +4653,7 @@
                   <a:srgbClr val="1F3A5F"/>
                 </a:solidFill>
               </a:rPr>
-              <a:t>Gram 1: FR Prometheus, Category 1, Bespin</a:t>
+              <a:t>Gram 20: FR Nebulon-B, Category 3, Mustafar</a:t>
             </a:r>
           </a:p>
         </p:txBody>
@@ -3312,23 +4687,15 @@
               <a:t>Lofar 1</a:t>
             </a:r>
           </a:p>
-          <a:p>
-            <a:r>
-              <a:rPr sz="800">
-                <a:hlinkClick r:id="rId4"/>
-              </a:rPr>
-              <a:t>Lofar 2</a:t>
-            </a:r>
-          </a:p>
-        </p:txBody>
-      </p:sp>
-      <p:sp>
-        <p:nvSpPr>
-          <p:cNvPr id="5" name="Rounded Rectangle 4"/>
+        </p:txBody>
+      </p:sp>
+      <p:sp>
+        <p:nvSpPr>
+          <p:cNvPr id="5" name="Rounded Rectangle 4">
+            <a:hlinkClick r:id="rId4"/>
+          </p:cNvPr>
           <p:cNvSpPr/>
-          <p:nvPr>
-            <a:hlinkClick r:id="rId5"/>
-          </p:nvPr>
+          <p:nvPr/>
         </p:nvSpPr>
         <p:spPr>
           <a:xfrm>
@@ -3372,7 +4739,7 @@
                   <a:srgbClr val="1F3A5F"/>
                 </a:solidFill>
               </a:rPr>
-              <a:t>Gram 3: FR Ghost, Category 1, Tantive</a:t>
+              <a:t>Gram 21: Outrider contact bearing 131, codename Yavin</a:t>
             </a:r>
           </a:p>
         </p:txBody>
@@ -3401,7 +4768,7 @@
           <a:p>
             <a:r>
               <a:rPr sz="800">
-                <a:hlinkClick r:id="rId6"/>
+                <a:hlinkClick r:id="rId5"/>
               </a:rPr>
               <a:t>Lofar 1</a:t>
             </a:r>
@@ -3410,11 +4777,11 @@
       </p:sp>
       <p:sp>
         <p:nvSpPr>
-          <p:cNvPr id="7" name="Rounded Rectangle 6"/>
+          <p:cNvPr id="7" name="Rounded Rectangle 6">
+            <a:hlinkClick r:id="rId6"/>
+          </p:cNvPr>
           <p:cNvSpPr/>
-          <p:nvPr>
-            <a:hlinkClick r:id="rId7"/>
-          </p:nvPr>
+          <p:nvPr/>
         </p:nvSpPr>
         <p:spPr>
           <a:xfrm>
@@ -3458,7 +4825,7 @@
                   <a:srgbClr val="1F3A5F"/>
                 </a:solidFill>
               </a:rPr>
-              <a:t>Gram 4: Enterprise contact bearing 291, codename Hoth</a:t>
+              <a:t>Gram 22: FR Venator-class, Category 4, Coruscant</a:t>
             </a:r>
           </a:p>
         </p:txBody>
@@ -3487,7 +4854,7 @@
           <a:p>
             <a:r>
               <a:rPr sz="800">
-                <a:hlinkClick r:id="rId8"/>
+                <a:hlinkClick r:id="rId7"/>
               </a:rPr>
               <a:t>Lofar 1</a:t>
             </a:r>
@@ -3496,11 +4863,11 @@
       </p:sp>
       <p:sp>
         <p:nvSpPr>
-          <p:cNvPr id="9" name="Rounded Rectangle 8"/>
+          <p:cNvPr id="9" name="Rounded Rectangle 8">
+            <a:hlinkClick r:id="rId8"/>
+          </p:cNvPr>
           <p:cNvSpPr/>
-          <p:nvPr>
-            <a:hlinkClick r:id="rId9"/>
-          </p:nvPr>
+          <p:nvPr/>
         </p:nvSpPr>
         <p:spPr>
           <a:xfrm>
@@ -3544,7 +4911,7 @@
                   <a:srgbClr val="1F3A5F"/>
                 </a:solidFill>
               </a:rPr>
-              <a:t>Gram 5: FR Enterprise, Category 4, Bespin</a:t>
+              <a:t>Gram 23: X-wing contact bearing 097, codename Tantive</a:t>
             </a:r>
           </a:p>
         </p:txBody>
@@ -3573,7 +4940,7 @@
           <a:p>
             <a:r>
               <a:rPr sz="800">
-                <a:hlinkClick r:id="rId10"/>
+                <a:hlinkClick r:id="rId9"/>
               </a:rPr>
               <a:t>Lofar 1</a:t>
             </a:r>
@@ -3582,11 +4949,11 @@
       </p:sp>
       <p:sp>
         <p:nvSpPr>
-          <p:cNvPr id="11" name="Rounded Rectangle 10"/>
+          <p:cNvPr id="11" name="Rounded Rectangle 10">
+            <a:hlinkClick r:id="rId10"/>
+          </p:cNvPr>
           <p:cNvSpPr/>
-          <p:nvPr>
-            <a:hlinkClick r:id="rId11"/>
-          </p:nvPr>
+          <p:nvPr/>
         </p:nvSpPr>
         <p:spPr>
           <a:xfrm>
@@ -3630,7 +4997,7 @@
                   <a:srgbClr val="1F3A5F"/>
                 </a:solidFill>
               </a:rPr>
-              <a:t>Gram 6: FR Akira-class, Category 4, Hoth</a:t>
+              <a:t>Gram 24: FR X-wing, Category 4, Naboo</a:t>
             </a:r>
           </a:p>
         </p:txBody>
@@ -3659,20 +5026,36 @@
           <a:p>
             <a:r>
               <a:rPr sz="800">
+                <a:hlinkClick r:id="rId11"/>
+              </a:rPr>
+              <a:t>Lofar 1</a:t>
+            </a:r>
+          </a:p>
+          <a:p>
+            <a:r>
+              <a:rPr sz="800">
                 <a:hlinkClick r:id="rId12"/>
               </a:rPr>
-              <a:t>Lofar 1</a:t>
-            </a:r>
-          </a:p>
-        </p:txBody>
-      </p:sp>
-      <p:sp>
-        <p:nvSpPr>
-          <p:cNvPr id="13" name="Rounded Rectangle 12"/>
+              <a:t>Lofar 2</a:t>
+            </a:r>
+          </a:p>
+          <a:p>
+            <a:r>
+              <a:rPr sz="800">
+                <a:hlinkClick r:id="rId13"/>
+              </a:rPr>
+              <a:t>Lofar 3</a:t>
+            </a:r>
+          </a:p>
+        </p:txBody>
+      </p:sp>
+      <p:sp>
+        <p:nvSpPr>
+          <p:cNvPr id="13" name="Rounded Rectangle 12">
+            <a:hlinkClick r:id="rId14"/>
+          </p:cNvPr>
           <p:cNvSpPr/>
-          <p:nvPr>
-            <a:hlinkClick r:id="rId13"/>
-          </p:nvPr>
+          <p:nvPr/>
         </p:nvSpPr>
         <p:spPr>
           <a:xfrm>
@@ -3716,7 +5099,7 @@
                   <a:srgbClr val="1F3A5F"/>
                 </a:solidFill>
               </a:rPr>
-              <a:t>Gram 7: FR Rebel One, Category 1, Naboo</a:t>
+              <a:t>Gram 25: FR Defiant, Category 2, Endor</a:t>
             </a:r>
           </a:p>
         </p:txBody>
@@ -3745,7 +5128,7 @@
           <a:p>
             <a:r>
               <a:rPr sz="800">
-                <a:hlinkClick r:id="rId14"/>
+                <a:hlinkClick r:id="rId15"/>
               </a:rPr>
               <a:t>Lofar 1</a:t>
             </a:r>
@@ -3753,7 +5136,7 @@
           <a:p>
             <a:r>
               <a:rPr sz="800">
-                <a:hlinkClick r:id="rId15"/>
+                <a:hlinkClick r:id="rId16"/>
               </a:rPr>
               <a:t>Lofar 2</a:t>
             </a:r>
@@ -3762,11 +5145,11 @@
       </p:sp>
       <p:sp>
         <p:nvSpPr>
-          <p:cNvPr id="15" name="Rounded Rectangle 14"/>
+          <p:cNvPr id="15" name="Rounded Rectangle 14">
+            <a:hlinkClick r:id="rId17"/>
+          </p:cNvPr>
           <p:cNvSpPr/>
-          <p:nvPr>
-            <a:hlinkClick r:id="rId16"/>
-          </p:nvPr>
+          <p:nvPr/>
         </p:nvSpPr>
         <p:spPr>
           <a:xfrm>
@@ -3810,7 +5193,7 @@
                   <a:srgbClr val="1F3A5F"/>
                 </a:solidFill>
               </a:rPr>
-              <a:t>Gram 8: FR TIE Bomber, Category 4, Kronos</a:t>
+              <a:t>Gram 26: FR Defiant, Category 2, Naboo</a:t>
             </a:r>
           </a:p>
         </p:txBody>
@@ -3839,20 +5222,44 @@
           <a:p>
             <a:r>
               <a:rPr sz="800">
-                <a:hlinkClick r:id="rId17"/>
+                <a:hlinkClick r:id="rId18"/>
               </a:rPr>
               <a:t>Lofar 1</a:t>
             </a:r>
           </a:p>
-        </p:txBody>
-      </p:sp>
-      <p:sp>
-        <p:nvSpPr>
-          <p:cNvPr id="17" name="Rounded Rectangle 16"/>
+          <a:p>
+            <a:r>
+              <a:rPr sz="800">
+                <a:hlinkClick r:id="rId19"/>
+              </a:rPr>
+              <a:t>Lofar 2</a:t>
+            </a:r>
+          </a:p>
+          <a:p>
+            <a:r>
+              <a:rPr sz="800">
+                <a:hlinkClick r:id="rId20"/>
+              </a:rPr>
+              <a:t>Lofar 3</a:t>
+            </a:r>
+          </a:p>
+          <a:p>
+            <a:r>
+              <a:rPr sz="800">
+                <a:hlinkClick r:id="rId21"/>
+              </a:rPr>
+              <a:t>Lofar 4</a:t>
+            </a:r>
+          </a:p>
+        </p:txBody>
+      </p:sp>
+      <p:sp>
+        <p:nvSpPr>
+          <p:cNvPr id="17" name="Rounded Rectangle 16">
+            <a:hlinkClick r:id="rId22"/>
+          </p:cNvPr>
           <p:cNvSpPr/>
-          <p:nvPr>
-            <a:hlinkClick r:id="rId18"/>
-          </p:nvPr>
+          <p:nvPr/>
         </p:nvSpPr>
         <p:spPr>
           <a:xfrm>
@@ -3896,7 +5303,7 @@
                   <a:srgbClr val="1F3A5F"/>
                 </a:solidFill>
               </a:rPr>
-              <a:t>Gram 9: FR Star Destroyer, Category 1, Tatooine</a:t>
+              <a:t>Gram 27: Y-wing contact bearing 197, codename Dagobah</a:t>
             </a:r>
           </a:p>
         </p:txBody>
@@ -3925,20 +5332,36 @@
           <a:p>
             <a:r>
               <a:rPr sz="800">
-                <a:hlinkClick r:id="rId19"/>
+                <a:hlinkClick r:id="rId23"/>
               </a:rPr>
               <a:t>Lofar 1</a:t>
             </a:r>
           </a:p>
-        </p:txBody>
-      </p:sp>
-      <p:sp>
-        <p:nvSpPr>
-          <p:cNvPr id="19" name="Rounded Rectangle 18"/>
+          <a:p>
+            <a:r>
+              <a:rPr sz="800">
+                <a:hlinkClick r:id="rId24"/>
+              </a:rPr>
+              <a:t>Lofar 2</a:t>
+            </a:r>
+          </a:p>
+          <a:p>
+            <a:r>
+              <a:rPr sz="800">
+                <a:hlinkClick r:id="rId25"/>
+              </a:rPr>
+              <a:t>Lofar 3</a:t>
+            </a:r>
+          </a:p>
+        </p:txBody>
+      </p:sp>
+      <p:sp>
+        <p:nvSpPr>
+          <p:cNvPr id="19" name="Rounded Rectangle 18">
+            <a:hlinkClick r:id="rId26"/>
+          </p:cNvPr>
           <p:cNvSpPr/>
-          <p:nvPr>
-            <a:hlinkClick r:id="rId20"/>
-          </p:nvPr>
+          <p:nvPr/>
         </p:nvSpPr>
         <p:spPr>
           <a:xfrm>
@@ -3982,7 +5405,7 @@
                   <a:srgbClr val="1F3A5F"/>
                 </a:solidFill>
               </a:rPr>
-              <a:t>Gram 10: FR Stargazer, Category 3, Risa</a:t>
+              <a:t>Gram 28: FR Nebula-class, Category 1, Tantive</a:t>
             </a:r>
           </a:p>
         </p:txBody>
@@ -4011,7 +5434,7 @@
           <a:p>
             <a:r>
               <a:rPr sz="800">
-                <a:hlinkClick r:id="rId21"/>
+                <a:hlinkClick r:id="rId27"/>
               </a:rPr>
               <a:t>Lofar 1</a:t>
             </a:r>
@@ -4019,7 +5442,7 @@
           <a:p>
             <a:r>
               <a:rPr sz="800">
-                <a:hlinkClick r:id="rId22"/>
+                <a:hlinkClick r:id="rId28"/>
               </a:rPr>
               <a:t>Lofar 2</a:t>
             </a:r>
@@ -4027,7 +5450,7 @@
           <a:p>
             <a:r>
               <a:rPr sz="800">
-                <a:hlinkClick r:id="rId23"/>
+                <a:hlinkClick r:id="rId29"/>
               </a:rPr>
               <a:t>Lofar 3</a:t>
             </a:r>
@@ -4035,7 +5458,7 @@
           <a:p>
             <a:r>
               <a:rPr sz="800">
-                <a:hlinkClick r:id="rId24"/>
+                <a:hlinkClick r:id="rId30"/>
               </a:rPr>
               <a:t>Lofar 4</a:t>
             </a:r>
@@ -4044,11 +5467,11 @@
       </p:sp>
       <p:sp>
         <p:nvSpPr>
-          <p:cNvPr id="21" name="Rounded Rectangle 20"/>
+          <p:cNvPr id="21" name="Rounded Rectangle 20">
+            <a:hlinkClick r:id="rId31"/>
+          </p:cNvPr>
           <p:cNvSpPr/>
-          <p:nvPr>
-            <a:hlinkClick r:id="rId25"/>
-          </p:nvPr>
+          <p:nvPr/>
         </p:nvSpPr>
         <p:spPr>
           <a:xfrm>
@@ -4092,7 +5515,7 @@
                   <a:srgbClr val="1F3A5F"/>
                 </a:solidFill>
               </a:rPr>
-              <a:t>Gram 11: FR Imperial-class, Category 2, Caprica</a:t>
+              <a:t>Gram 29: FR Akira-class, Category 2, Romulus</a:t>
             </a:r>
           </a:p>
         </p:txBody>
@@ -4121,7 +5544,7 @@
           <a:p>
             <a:r>
               <a:rPr sz="800">
-                <a:hlinkClick r:id="rId26"/>
+                <a:hlinkClick r:id="rId32"/>
               </a:rPr>
               <a:t>Lofar 1</a:t>
             </a:r>
@@ -4129,20 +5552,28 @@
           <a:p>
             <a:r>
               <a:rPr sz="800">
-                <a:hlinkClick r:id="rId27"/>
+                <a:hlinkClick r:id="rId33"/>
               </a:rPr>
               <a:t>Lofar 2</a:t>
             </a:r>
           </a:p>
-        </p:txBody>
-      </p:sp>
-      <p:sp>
-        <p:nvSpPr>
-          <p:cNvPr id="23" name="Rounded Rectangle 22"/>
+          <a:p>
+            <a:r>
+              <a:rPr sz="800">
+                <a:hlinkClick r:id="rId34"/>
+              </a:rPr>
+              <a:t>Lofar 3</a:t>
+            </a:r>
+          </a:p>
+        </p:txBody>
+      </p:sp>
+      <p:sp>
+        <p:nvSpPr>
+          <p:cNvPr id="23" name="Rounded Rectangle 22">
+            <a:hlinkClick r:id="rId35"/>
+          </p:cNvPr>
           <p:cNvSpPr/>
-          <p:nvPr>
-            <a:hlinkClick r:id="rId28"/>
-          </p:nvPr>
+          <p:nvPr/>
         </p:nvSpPr>
         <p:spPr>
           <a:xfrm>
@@ -4186,7 +5617,7 @@
                   <a:srgbClr val="1F3A5F"/>
                 </a:solidFill>
               </a:rPr>
-              <a:t>Gram 14: FR Tantive IV, Category 4, Trill</a:t>
+              <a:t>Gram 30: Defiant-class contact bearing 058, codename Naboo</a:t>
             </a:r>
           </a:p>
         </p:txBody>
@@ -4215,20 +5646,44 @@
           <a:p>
             <a:r>
               <a:rPr sz="800">
-                <a:hlinkClick r:id="rId29"/>
+                <a:hlinkClick r:id="rId36"/>
               </a:rPr>
               <a:t>Lofar 1</a:t>
             </a:r>
           </a:p>
-        </p:txBody>
-      </p:sp>
-      <p:sp>
-        <p:nvSpPr>
-          <p:cNvPr id="25" name="Rounded Rectangle 24"/>
+          <a:p>
+            <a:r>
+              <a:rPr sz="800">
+                <a:hlinkClick r:id="rId37"/>
+              </a:rPr>
+              <a:t>Lofar 2</a:t>
+            </a:r>
+          </a:p>
+          <a:p>
+            <a:r>
+              <a:rPr sz="800">
+                <a:hlinkClick r:id="rId38"/>
+              </a:rPr>
+              <a:t>Lofar 3</a:t>
+            </a:r>
+          </a:p>
+          <a:p>
+            <a:r>
+              <a:rPr sz="800">
+                <a:hlinkClick r:id="rId39"/>
+              </a:rPr>
+              <a:t>Lofar 4</a:t>
+            </a:r>
+          </a:p>
+        </p:txBody>
+      </p:sp>
+      <p:sp>
+        <p:nvSpPr>
+          <p:cNvPr id="25" name="Rounded Rectangle 24">
+            <a:hlinkClick r:id="rId40"/>
+          </p:cNvPr>
           <p:cNvSpPr/>
-          <p:nvPr>
-            <a:hlinkClick r:id="rId30"/>
-          </p:nvPr>
+          <p:nvPr/>
         </p:nvSpPr>
         <p:spPr>
           <a:xfrm>
@@ -4272,7 +5727,7 @@
                   <a:srgbClr val="1F3A5F"/>
                 </a:solidFill>
               </a:rPr>
-              <a:t>Gram 16: Corellian Corvette contact bearing 224, codename Vulcan</a:t>
+              <a:t>Gram 31: Imperial-class contact bearing 170, codename Tantive</a:t>
             </a:r>
           </a:p>
         </p:txBody>
@@ -4301,7 +5756,7 @@
           <a:p>
             <a:r>
               <a:rPr sz="800">
-                <a:hlinkClick r:id="rId31"/>
+                <a:hlinkClick r:id="rId41"/>
               </a:rPr>
               <a:t>Lofar 1</a:t>
             </a:r>
@@ -4309,36 +5764,20 @@
           <a:p>
             <a:r>
               <a:rPr sz="800">
-                <a:hlinkClick r:id="rId32"/>
+                <a:hlinkClick r:id="rId42"/>
               </a:rPr>
               <a:t>Lofar 2</a:t>
             </a:r>
           </a:p>
-          <a:p>
-            <a:r>
-              <a:rPr sz="800">
-                <a:hlinkClick r:id="rId33"/>
-              </a:rPr>
-              <a:t>Lofar 3</a:t>
-            </a:r>
-          </a:p>
-          <a:p>
-            <a:r>
-              <a:rPr sz="800">
-                <a:hlinkClick r:id="rId34"/>
-              </a:rPr>
-              <a:t>Lofar 4</a:t>
-            </a:r>
-          </a:p>
-        </p:txBody>
-      </p:sp>
-      <p:sp>
-        <p:nvSpPr>
-          <p:cNvPr id="27" name="Rounded Rectangle 26"/>
+        </p:txBody>
+      </p:sp>
+      <p:sp>
+        <p:nvSpPr>
+          <p:cNvPr id="27" name="Rounded Rectangle 26">
+            <a:hlinkClick r:id="rId43"/>
+          </p:cNvPr>
           <p:cNvSpPr/>
-          <p:nvPr>
-            <a:hlinkClick r:id="rId35"/>
-          </p:nvPr>
+          <p:nvPr/>
         </p:nvSpPr>
         <p:spPr>
           <a:xfrm>
@@ -4382,7 +5821,7 @@
                   <a:srgbClr val="1F3A5F"/>
                 </a:solidFill>
               </a:rPr>
-              <a:t>Gram 17: FR Outrider, Category 3, Cardassia</a:t>
+              <a:t>Gram 32: FR A-wing, Category 4, Naboo</a:t>
             </a:r>
           </a:p>
         </p:txBody>
@@ -4411,7 +5850,7 @@
           <a:p>
             <a:r>
               <a:rPr sz="800">
-                <a:hlinkClick r:id="rId36"/>
+                <a:hlinkClick r:id="rId44"/>
               </a:rPr>
               <a:t>Lofar 1</a:t>
             </a:r>
@@ -4419,7 +5858,7 @@
           <a:p>
             <a:r>
               <a:rPr sz="800">
-                <a:hlinkClick r:id="rId37"/>
+                <a:hlinkClick r:id="rId45"/>
               </a:rPr>
               <a:t>Lofar 2</a:t>
             </a:r>
@@ -4428,11 +5867,11 @@
       </p:sp>
       <p:sp>
         <p:nvSpPr>
-          <p:cNvPr id="29" name="Rounded Rectangle 28"/>
+          <p:cNvPr id="29" name="Rounded Rectangle 28">
+            <a:hlinkClick r:id="rId46"/>
+          </p:cNvPr>
           <p:cNvSpPr/>
-          <p:nvPr>
-            <a:hlinkClick r:id="rId38"/>
-          </p:nvPr>
+          <p:nvPr/>
         </p:nvSpPr>
         <p:spPr>
           <a:xfrm>
@@ -4476,7 +5915,7 @@
                   <a:srgbClr val="1F3A5F"/>
                 </a:solidFill>
               </a:rPr>
-              <a:t>Gram 18: FR Razor Crest, Category 2, Gandalf</a:t>
+              <a:t>Gram 33: FR Rebel One, Category 3, Tatooine</a:t>
             </a:r>
           </a:p>
         </p:txBody>
@@ -4505,7 +5944,7 @@
           <a:p>
             <a:r>
               <a:rPr sz="800">
-                <a:hlinkClick r:id="rId39"/>
+                <a:hlinkClick r:id="rId47"/>
               </a:rPr>
               <a:t>Lofar 1</a:t>
             </a:r>
@@ -4513,7 +5952,7 @@
           <a:p>
             <a:r>
               <a:rPr sz="800">
-                <a:hlinkClick r:id="rId40"/>
+                <a:hlinkClick r:id="rId48"/>
               </a:rPr>
               <a:t>Lofar 2</a:t>
             </a:r>
@@ -4521,28 +5960,20 @@
           <a:p>
             <a:r>
               <a:rPr sz="800">
-                <a:hlinkClick r:id="rId41"/>
+                <a:hlinkClick r:id="rId49"/>
               </a:rPr>
               <a:t>Lofar 3</a:t>
             </a:r>
           </a:p>
-          <a:p>
-            <a:r>
-              <a:rPr sz="800">
-                <a:hlinkClick r:id="rId42"/>
-              </a:rPr>
-              <a:t>Lofar 4</a:t>
-            </a:r>
-          </a:p>
-        </p:txBody>
-      </p:sp>
-      <p:sp>
-        <p:nvSpPr>
-          <p:cNvPr id="31" name="Rounded Rectangle 30"/>
+        </p:txBody>
+      </p:sp>
+      <p:sp>
+        <p:nvSpPr>
+          <p:cNvPr id="31" name="Rounded Rectangle 30">
+            <a:hlinkClick r:id="rId50"/>
+          </p:cNvPr>
           <p:cNvSpPr/>
-          <p:nvPr>
-            <a:hlinkClick r:id="rId43"/>
-          </p:nvPr>
+          <p:nvPr/>
         </p:nvSpPr>
         <p:spPr>
           <a:xfrm>
@@ -4586,7 +6017,7 @@
                   <a:srgbClr val="1F3A5F"/>
                 </a:solidFill>
               </a:rPr>
-              <a:t>Gram 19: FR Ghost, Category 1, Romulus</a:t>
+              <a:t>Gram 36: Rebel One contact bearing 103, codename Tatooine</a:t>
             </a:r>
           </a:p>
         </p:txBody>
@@ -4615,1525 +6046,6 @@
           <a:p>
             <a:r>
               <a:rPr sz="800">
-                <a:hlinkClick r:id="rId44"/>
-              </a:rPr>
-              <a:t>Lofar 1</a:t>
-            </a:r>
-          </a:p>
-        </p:txBody>
-      </p:sp>
-    </p:spTree>
-  </p:cSld>
-  <p:clrMapOvr>
-    <a:masterClrMapping/>
-  </p:clrMapOvr>
-</p:sld>
-</file>
-
-<file path=ppt/slides/slide3.xml><?xml version="1.0" encoding="utf-8"?>
-<p:sld xmlns:a="http://schemas.openxmlformats.org/drawingml/2006/main" xmlns:p="http://schemas.openxmlformats.org/presentationml/2006/main" xmlns:r="http://schemas.openxmlformats.org/officeDocument/2006/relationships">
-  <p:cSld>
-    <p:spTree>
-      <p:nvGrpSpPr>
-        <p:cNvPr id="1" name=""/>
-        <p:cNvGrpSpPr/>
-        <p:nvPr/>
-      </p:nvGrpSpPr>
-      <p:grpSpPr/>
-      <p:sp>
-        <p:nvSpPr>
-          <p:cNvPr id="2" name="Rectangle 1"/>
-          <p:cNvSpPr/>
-          <p:nvPr/>
-        </p:nvSpPr>
-        <p:spPr>
-          <a:xfrm>
-            <a:off x="0" y="0"/>
-            <a:ext cx="12188952" cy="548640"/>
-          </a:xfrm>
-          <a:prstGeom prst="rect">
-            <a:avLst/>
-          </a:prstGeom>
-          <a:solidFill>
-            <a:srgbClr val="1F3A5F"/>
-          </a:solidFill>
-          <a:ln>
-            <a:noFill/>
-          </a:ln>
-        </p:spPr>
-        <p:style>
-          <a:lnRef idx="1">
-            <a:schemeClr val="accent1"/>
-          </a:lnRef>
-          <a:fillRef idx="3">
-            <a:schemeClr val="accent1"/>
-          </a:fillRef>
-          <a:effectRef idx="2">
-            <a:schemeClr val="accent1"/>
-          </a:effectRef>
-          <a:fontRef idx="minor">
-            <a:schemeClr val="lt1"/>
-          </a:fontRef>
-        </p:style>
-        <p:txBody>
-          <a:bodyPr rtlCol="0" anchor="ctr" lIns="182880" rIns="182880"/>
-          <a:lstStyle/>
-          <a:p>
-            <a:pPr algn="ctr"/>
-            <a:r>
-              <a:rPr sz="2000" b="1">
-                <a:solidFill>
-                  <a:srgbClr val="FFFFFF"/>
-                </a:solidFill>
-              </a:rPr>
-              <a:t>Instructor Progress Test 1 Grams — Page 2 of 2</a:t>
-            </a:r>
-          </a:p>
-        </p:txBody>
-      </p:sp>
-      <p:sp>
-        <p:nvSpPr>
-          <p:cNvPr id="3" name="Rounded Rectangle 2"/>
-          <p:cNvSpPr/>
-          <p:nvPr>
-            <a:hlinkClick r:id="rId2"/>
-          </p:nvPr>
-        </p:nvSpPr>
-        <p:spPr>
-          <a:xfrm>
-            <a:off x="365760" y="731520"/>
-            <a:ext cx="2200046" cy="365760"/>
-          </a:xfrm>
-          <a:prstGeom prst="roundRect">
-            <a:avLst/>
-          </a:prstGeom>
-          <a:solidFill>
-            <a:srgbClr val="E8EEF7"/>
-          </a:solidFill>
-          <a:ln>
-            <a:solidFill>
-              <a:srgbClr val="1F3A5F"/>
-            </a:solidFill>
-          </a:ln>
-        </p:spPr>
-        <p:style>
-          <a:lnRef idx="1">
-            <a:schemeClr val="accent1"/>
-          </a:lnRef>
-          <a:fillRef idx="3">
-            <a:schemeClr val="accent1"/>
-          </a:fillRef>
-          <a:effectRef idx="2">
-            <a:schemeClr val="accent1"/>
-          </a:effectRef>
-          <a:fontRef idx="minor">
-            <a:schemeClr val="lt1"/>
-          </a:fontRef>
-        </p:style>
-        <p:txBody>
-          <a:bodyPr rtlCol="0" anchor="ctr" lIns="45720" rIns="45720"/>
-          <a:lstStyle/>
-          <a:p>
-            <a:pPr algn="ctr"/>
-            <a:r>
-              <a:rPr sz="900">
-                <a:solidFill>
-                  <a:srgbClr val="1F3A5F"/>
-                </a:solidFill>
-              </a:rPr>
-              <a:t>Gram 20: FR Nebulon-B, Category 3, Mustafar</a:t>
-            </a:r>
-          </a:p>
-        </p:txBody>
-      </p:sp>
-      <p:sp>
-        <p:nvSpPr>
-          <p:cNvPr id="4" name="TextBox 3"/>
-          <p:cNvSpPr txBox="1"/>
-          <p:nvPr/>
-        </p:nvSpPr>
-        <p:spPr>
-          <a:xfrm>
-            <a:off x="365760" y="1115568"/>
-            <a:ext cx="2200046" cy="1447800"/>
-          </a:xfrm>
-          <a:prstGeom prst="rect">
-            <a:avLst/>
-          </a:prstGeom>
-          <a:noFill/>
-        </p:spPr>
-        <p:txBody>
-          <a:bodyPr wrap="square">
-            <a:spAutoFit/>
-          </a:bodyPr>
-          <a:lstStyle/>
-          <a:p>
-            <a:r>
-              <a:rPr sz="800">
-                <a:hlinkClick r:id="rId3"/>
-              </a:rPr>
-              <a:t>Lofar 1</a:t>
-            </a:r>
-          </a:p>
-        </p:txBody>
-      </p:sp>
-      <p:sp>
-        <p:nvSpPr>
-          <p:cNvPr id="5" name="Rounded Rectangle 4"/>
-          <p:cNvSpPr/>
-          <p:nvPr>
-            <a:hlinkClick r:id="rId4"/>
-          </p:nvPr>
-        </p:nvSpPr>
-        <p:spPr>
-          <a:xfrm>
-            <a:off x="2657246" y="731520"/>
-            <a:ext cx="2200046" cy="365760"/>
-          </a:xfrm>
-          <a:prstGeom prst="roundRect">
-            <a:avLst/>
-          </a:prstGeom>
-          <a:solidFill>
-            <a:srgbClr val="E8EEF7"/>
-          </a:solidFill>
-          <a:ln>
-            <a:solidFill>
-              <a:srgbClr val="1F3A5F"/>
-            </a:solidFill>
-          </a:ln>
-        </p:spPr>
-        <p:style>
-          <a:lnRef idx="1">
-            <a:schemeClr val="accent1"/>
-          </a:lnRef>
-          <a:fillRef idx="3">
-            <a:schemeClr val="accent1"/>
-          </a:fillRef>
-          <a:effectRef idx="2">
-            <a:schemeClr val="accent1"/>
-          </a:effectRef>
-          <a:fontRef idx="minor">
-            <a:schemeClr val="lt1"/>
-          </a:fontRef>
-        </p:style>
-        <p:txBody>
-          <a:bodyPr rtlCol="0" anchor="ctr" lIns="45720" rIns="45720"/>
-          <a:lstStyle/>
-          <a:p>
-            <a:pPr algn="ctr"/>
-            <a:r>
-              <a:rPr sz="900">
-                <a:solidFill>
-                  <a:srgbClr val="1F3A5F"/>
-                </a:solidFill>
-              </a:rPr>
-              <a:t>Gram 21: Outrider contact bearing 131, codename Yavin</a:t>
-            </a:r>
-          </a:p>
-        </p:txBody>
-      </p:sp>
-      <p:sp>
-        <p:nvSpPr>
-          <p:cNvPr id="6" name="TextBox 5"/>
-          <p:cNvSpPr txBox="1"/>
-          <p:nvPr/>
-        </p:nvSpPr>
-        <p:spPr>
-          <a:xfrm>
-            <a:off x="2657246" y="1115568"/>
-            <a:ext cx="2200046" cy="1447800"/>
-          </a:xfrm>
-          <a:prstGeom prst="rect">
-            <a:avLst/>
-          </a:prstGeom>
-          <a:noFill/>
-        </p:spPr>
-        <p:txBody>
-          <a:bodyPr wrap="square">
-            <a:spAutoFit/>
-          </a:bodyPr>
-          <a:lstStyle/>
-          <a:p>
-            <a:r>
-              <a:rPr sz="800">
-                <a:hlinkClick r:id="rId5"/>
-              </a:rPr>
-              <a:t>Lofar 1</a:t>
-            </a:r>
-          </a:p>
-        </p:txBody>
-      </p:sp>
-      <p:sp>
-        <p:nvSpPr>
-          <p:cNvPr id="7" name="Rounded Rectangle 6"/>
-          <p:cNvSpPr/>
-          <p:nvPr>
-            <a:hlinkClick r:id="rId6"/>
-          </p:nvPr>
-        </p:nvSpPr>
-        <p:spPr>
-          <a:xfrm>
-            <a:off x="4948732" y="731520"/>
-            <a:ext cx="2200046" cy="365760"/>
-          </a:xfrm>
-          <a:prstGeom prst="roundRect">
-            <a:avLst/>
-          </a:prstGeom>
-          <a:solidFill>
-            <a:srgbClr val="E8EEF7"/>
-          </a:solidFill>
-          <a:ln>
-            <a:solidFill>
-              <a:srgbClr val="1F3A5F"/>
-            </a:solidFill>
-          </a:ln>
-        </p:spPr>
-        <p:style>
-          <a:lnRef idx="1">
-            <a:schemeClr val="accent1"/>
-          </a:lnRef>
-          <a:fillRef idx="3">
-            <a:schemeClr val="accent1"/>
-          </a:fillRef>
-          <a:effectRef idx="2">
-            <a:schemeClr val="accent1"/>
-          </a:effectRef>
-          <a:fontRef idx="minor">
-            <a:schemeClr val="lt1"/>
-          </a:fontRef>
-        </p:style>
-        <p:txBody>
-          <a:bodyPr rtlCol="0" anchor="ctr" lIns="45720" rIns="45720"/>
-          <a:lstStyle/>
-          <a:p>
-            <a:pPr algn="ctr"/>
-            <a:r>
-              <a:rPr sz="900">
-                <a:solidFill>
-                  <a:srgbClr val="1F3A5F"/>
-                </a:solidFill>
-              </a:rPr>
-              <a:t>Gram 22: FR Venator-class, Category 4, Coruscant</a:t>
-            </a:r>
-          </a:p>
-        </p:txBody>
-      </p:sp>
-      <p:sp>
-        <p:nvSpPr>
-          <p:cNvPr id="8" name="TextBox 7"/>
-          <p:cNvSpPr txBox="1"/>
-          <p:nvPr/>
-        </p:nvSpPr>
-        <p:spPr>
-          <a:xfrm>
-            <a:off x="4948732" y="1115568"/>
-            <a:ext cx="2200046" cy="1447800"/>
-          </a:xfrm>
-          <a:prstGeom prst="rect">
-            <a:avLst/>
-          </a:prstGeom>
-          <a:noFill/>
-        </p:spPr>
-        <p:txBody>
-          <a:bodyPr wrap="square">
-            <a:spAutoFit/>
-          </a:bodyPr>
-          <a:lstStyle/>
-          <a:p>
-            <a:r>
-              <a:rPr sz="800">
-                <a:hlinkClick r:id="rId7"/>
-              </a:rPr>
-              <a:t>Lofar 1</a:t>
-            </a:r>
-          </a:p>
-        </p:txBody>
-      </p:sp>
-      <p:sp>
-        <p:nvSpPr>
-          <p:cNvPr id="9" name="Rounded Rectangle 8"/>
-          <p:cNvSpPr/>
-          <p:nvPr>
-            <a:hlinkClick r:id="rId8"/>
-          </p:nvPr>
-        </p:nvSpPr>
-        <p:spPr>
-          <a:xfrm>
-            <a:off x="7240219" y="731520"/>
-            <a:ext cx="2200046" cy="365760"/>
-          </a:xfrm>
-          <a:prstGeom prst="roundRect">
-            <a:avLst/>
-          </a:prstGeom>
-          <a:solidFill>
-            <a:srgbClr val="E8EEF7"/>
-          </a:solidFill>
-          <a:ln>
-            <a:solidFill>
-              <a:srgbClr val="1F3A5F"/>
-            </a:solidFill>
-          </a:ln>
-        </p:spPr>
-        <p:style>
-          <a:lnRef idx="1">
-            <a:schemeClr val="accent1"/>
-          </a:lnRef>
-          <a:fillRef idx="3">
-            <a:schemeClr val="accent1"/>
-          </a:fillRef>
-          <a:effectRef idx="2">
-            <a:schemeClr val="accent1"/>
-          </a:effectRef>
-          <a:fontRef idx="minor">
-            <a:schemeClr val="lt1"/>
-          </a:fontRef>
-        </p:style>
-        <p:txBody>
-          <a:bodyPr rtlCol="0" anchor="ctr" lIns="45720" rIns="45720"/>
-          <a:lstStyle/>
-          <a:p>
-            <a:pPr algn="ctr"/>
-            <a:r>
-              <a:rPr sz="900">
-                <a:solidFill>
-                  <a:srgbClr val="1F3A5F"/>
-                </a:solidFill>
-              </a:rPr>
-              <a:t>Gram 23: X-wing contact bearing 097, codename Tantive</a:t>
-            </a:r>
-          </a:p>
-        </p:txBody>
-      </p:sp>
-      <p:sp>
-        <p:nvSpPr>
-          <p:cNvPr id="10" name="TextBox 9"/>
-          <p:cNvSpPr txBox="1"/>
-          <p:nvPr/>
-        </p:nvSpPr>
-        <p:spPr>
-          <a:xfrm>
-            <a:off x="7240219" y="1115568"/>
-            <a:ext cx="2200046" cy="1447800"/>
-          </a:xfrm>
-          <a:prstGeom prst="rect">
-            <a:avLst/>
-          </a:prstGeom>
-          <a:noFill/>
-        </p:spPr>
-        <p:txBody>
-          <a:bodyPr wrap="square">
-            <a:spAutoFit/>
-          </a:bodyPr>
-          <a:lstStyle/>
-          <a:p>
-            <a:r>
-              <a:rPr sz="800">
-                <a:hlinkClick r:id="rId9"/>
-              </a:rPr>
-              <a:t>Lofar 1</a:t>
-            </a:r>
-          </a:p>
-        </p:txBody>
-      </p:sp>
-      <p:sp>
-        <p:nvSpPr>
-          <p:cNvPr id="11" name="Rounded Rectangle 10"/>
-          <p:cNvSpPr/>
-          <p:nvPr>
-            <a:hlinkClick r:id="rId10"/>
-          </p:nvPr>
-        </p:nvSpPr>
-        <p:spPr>
-          <a:xfrm>
-            <a:off x="9531705" y="731520"/>
-            <a:ext cx="2200046" cy="365760"/>
-          </a:xfrm>
-          <a:prstGeom prst="roundRect">
-            <a:avLst/>
-          </a:prstGeom>
-          <a:solidFill>
-            <a:srgbClr val="E8EEF7"/>
-          </a:solidFill>
-          <a:ln>
-            <a:solidFill>
-              <a:srgbClr val="1F3A5F"/>
-            </a:solidFill>
-          </a:ln>
-        </p:spPr>
-        <p:style>
-          <a:lnRef idx="1">
-            <a:schemeClr val="accent1"/>
-          </a:lnRef>
-          <a:fillRef idx="3">
-            <a:schemeClr val="accent1"/>
-          </a:fillRef>
-          <a:effectRef idx="2">
-            <a:schemeClr val="accent1"/>
-          </a:effectRef>
-          <a:fontRef idx="minor">
-            <a:schemeClr val="lt1"/>
-          </a:fontRef>
-        </p:style>
-        <p:txBody>
-          <a:bodyPr rtlCol="0" anchor="ctr" lIns="45720" rIns="45720"/>
-          <a:lstStyle/>
-          <a:p>
-            <a:pPr algn="ctr"/>
-            <a:r>
-              <a:rPr sz="900">
-                <a:solidFill>
-                  <a:srgbClr val="1F3A5F"/>
-                </a:solidFill>
-              </a:rPr>
-              <a:t>Gram 24: FR X-wing, Category 4, Naboo</a:t>
-            </a:r>
-          </a:p>
-        </p:txBody>
-      </p:sp>
-      <p:sp>
-        <p:nvSpPr>
-          <p:cNvPr id="12" name="TextBox 11"/>
-          <p:cNvSpPr txBox="1"/>
-          <p:nvPr/>
-        </p:nvSpPr>
-        <p:spPr>
-          <a:xfrm>
-            <a:off x="9531705" y="1115568"/>
-            <a:ext cx="2200046" cy="1447800"/>
-          </a:xfrm>
-          <a:prstGeom prst="rect">
-            <a:avLst/>
-          </a:prstGeom>
-          <a:noFill/>
-        </p:spPr>
-        <p:txBody>
-          <a:bodyPr wrap="square">
-            <a:spAutoFit/>
-          </a:bodyPr>
-          <a:lstStyle/>
-          <a:p>
-            <a:r>
-              <a:rPr sz="800">
-                <a:hlinkClick r:id="rId11"/>
-              </a:rPr>
-              <a:t>Lofar 1</a:t>
-            </a:r>
-          </a:p>
-          <a:p>
-            <a:r>
-              <a:rPr sz="800">
-                <a:hlinkClick r:id="rId12"/>
-              </a:rPr>
-              <a:t>Lofar 2</a:t>
-            </a:r>
-          </a:p>
-          <a:p>
-            <a:r>
-              <a:rPr sz="800">
-                <a:hlinkClick r:id="rId13"/>
-              </a:rPr>
-              <a:t>Lofar 3</a:t>
-            </a:r>
-          </a:p>
-        </p:txBody>
-      </p:sp>
-      <p:sp>
-        <p:nvSpPr>
-          <p:cNvPr id="13" name="Rounded Rectangle 12"/>
-          <p:cNvSpPr/>
-          <p:nvPr>
-            <a:hlinkClick r:id="rId14"/>
-          </p:nvPr>
-        </p:nvSpPr>
-        <p:spPr>
-          <a:xfrm>
-            <a:off x="365760" y="2682240"/>
-            <a:ext cx="2200046" cy="365760"/>
-          </a:xfrm>
-          <a:prstGeom prst="roundRect">
-            <a:avLst/>
-          </a:prstGeom>
-          <a:solidFill>
-            <a:srgbClr val="E8EEF7"/>
-          </a:solidFill>
-          <a:ln>
-            <a:solidFill>
-              <a:srgbClr val="1F3A5F"/>
-            </a:solidFill>
-          </a:ln>
-        </p:spPr>
-        <p:style>
-          <a:lnRef idx="1">
-            <a:schemeClr val="accent1"/>
-          </a:lnRef>
-          <a:fillRef idx="3">
-            <a:schemeClr val="accent1"/>
-          </a:fillRef>
-          <a:effectRef idx="2">
-            <a:schemeClr val="accent1"/>
-          </a:effectRef>
-          <a:fontRef idx="minor">
-            <a:schemeClr val="lt1"/>
-          </a:fontRef>
-        </p:style>
-        <p:txBody>
-          <a:bodyPr rtlCol="0" anchor="ctr" lIns="45720" rIns="45720"/>
-          <a:lstStyle/>
-          <a:p>
-            <a:pPr algn="ctr"/>
-            <a:r>
-              <a:rPr sz="900">
-                <a:solidFill>
-                  <a:srgbClr val="1F3A5F"/>
-                </a:solidFill>
-              </a:rPr>
-              <a:t>Gram 25: FR Defiant, Category 2, Endor</a:t>
-            </a:r>
-          </a:p>
-        </p:txBody>
-      </p:sp>
-      <p:sp>
-        <p:nvSpPr>
-          <p:cNvPr id="14" name="TextBox 13"/>
-          <p:cNvSpPr txBox="1"/>
-          <p:nvPr/>
-        </p:nvSpPr>
-        <p:spPr>
-          <a:xfrm>
-            <a:off x="365760" y="3066288"/>
-            <a:ext cx="2200046" cy="1447800"/>
-          </a:xfrm>
-          <a:prstGeom prst="rect">
-            <a:avLst/>
-          </a:prstGeom>
-          <a:noFill/>
-        </p:spPr>
-        <p:txBody>
-          <a:bodyPr wrap="square">
-            <a:spAutoFit/>
-          </a:bodyPr>
-          <a:lstStyle/>
-          <a:p>
-            <a:r>
-              <a:rPr sz="800">
-                <a:hlinkClick r:id="rId15"/>
-              </a:rPr>
-              <a:t>Lofar 1</a:t>
-            </a:r>
-          </a:p>
-          <a:p>
-            <a:r>
-              <a:rPr sz="800">
-                <a:hlinkClick r:id="rId16"/>
-              </a:rPr>
-              <a:t>Lofar 2</a:t>
-            </a:r>
-          </a:p>
-        </p:txBody>
-      </p:sp>
-      <p:sp>
-        <p:nvSpPr>
-          <p:cNvPr id="15" name="Rounded Rectangle 14"/>
-          <p:cNvSpPr/>
-          <p:nvPr>
-            <a:hlinkClick r:id="rId17"/>
-          </p:nvPr>
-        </p:nvSpPr>
-        <p:spPr>
-          <a:xfrm>
-            <a:off x="2657246" y="2682240"/>
-            <a:ext cx="2200046" cy="365760"/>
-          </a:xfrm>
-          <a:prstGeom prst="roundRect">
-            <a:avLst/>
-          </a:prstGeom>
-          <a:solidFill>
-            <a:srgbClr val="E8EEF7"/>
-          </a:solidFill>
-          <a:ln>
-            <a:solidFill>
-              <a:srgbClr val="1F3A5F"/>
-            </a:solidFill>
-          </a:ln>
-        </p:spPr>
-        <p:style>
-          <a:lnRef idx="1">
-            <a:schemeClr val="accent1"/>
-          </a:lnRef>
-          <a:fillRef idx="3">
-            <a:schemeClr val="accent1"/>
-          </a:fillRef>
-          <a:effectRef idx="2">
-            <a:schemeClr val="accent1"/>
-          </a:effectRef>
-          <a:fontRef idx="minor">
-            <a:schemeClr val="lt1"/>
-          </a:fontRef>
-        </p:style>
-        <p:txBody>
-          <a:bodyPr rtlCol="0" anchor="ctr" lIns="45720" rIns="45720"/>
-          <a:lstStyle/>
-          <a:p>
-            <a:pPr algn="ctr"/>
-            <a:r>
-              <a:rPr sz="900">
-                <a:solidFill>
-                  <a:srgbClr val="1F3A5F"/>
-                </a:solidFill>
-              </a:rPr>
-              <a:t>Gram 26: FR Defiant, Category 2, Naboo</a:t>
-            </a:r>
-          </a:p>
-        </p:txBody>
-      </p:sp>
-      <p:sp>
-        <p:nvSpPr>
-          <p:cNvPr id="16" name="TextBox 15"/>
-          <p:cNvSpPr txBox="1"/>
-          <p:nvPr/>
-        </p:nvSpPr>
-        <p:spPr>
-          <a:xfrm>
-            <a:off x="2657246" y="3066288"/>
-            <a:ext cx="2200046" cy="1447800"/>
-          </a:xfrm>
-          <a:prstGeom prst="rect">
-            <a:avLst/>
-          </a:prstGeom>
-          <a:noFill/>
-        </p:spPr>
-        <p:txBody>
-          <a:bodyPr wrap="square">
-            <a:spAutoFit/>
-          </a:bodyPr>
-          <a:lstStyle/>
-          <a:p>
-            <a:r>
-              <a:rPr sz="800">
-                <a:hlinkClick r:id="rId18"/>
-              </a:rPr>
-              <a:t>Lofar 1</a:t>
-            </a:r>
-          </a:p>
-          <a:p>
-            <a:r>
-              <a:rPr sz="800">
-                <a:hlinkClick r:id="rId19"/>
-              </a:rPr>
-              <a:t>Lofar 2</a:t>
-            </a:r>
-          </a:p>
-          <a:p>
-            <a:r>
-              <a:rPr sz="800">
-                <a:hlinkClick r:id="rId20"/>
-              </a:rPr>
-              <a:t>Lofar 3</a:t>
-            </a:r>
-          </a:p>
-          <a:p>
-            <a:r>
-              <a:rPr sz="800">
-                <a:hlinkClick r:id="rId21"/>
-              </a:rPr>
-              <a:t>Lofar 4</a:t>
-            </a:r>
-          </a:p>
-        </p:txBody>
-      </p:sp>
-      <p:sp>
-        <p:nvSpPr>
-          <p:cNvPr id="17" name="Rounded Rectangle 16"/>
-          <p:cNvSpPr/>
-          <p:nvPr>
-            <a:hlinkClick r:id="rId22"/>
-          </p:nvPr>
-        </p:nvSpPr>
-        <p:spPr>
-          <a:xfrm>
-            <a:off x="4948732" y="2682240"/>
-            <a:ext cx="2200046" cy="365760"/>
-          </a:xfrm>
-          <a:prstGeom prst="roundRect">
-            <a:avLst/>
-          </a:prstGeom>
-          <a:solidFill>
-            <a:srgbClr val="E8EEF7"/>
-          </a:solidFill>
-          <a:ln>
-            <a:solidFill>
-              <a:srgbClr val="1F3A5F"/>
-            </a:solidFill>
-          </a:ln>
-        </p:spPr>
-        <p:style>
-          <a:lnRef idx="1">
-            <a:schemeClr val="accent1"/>
-          </a:lnRef>
-          <a:fillRef idx="3">
-            <a:schemeClr val="accent1"/>
-          </a:fillRef>
-          <a:effectRef idx="2">
-            <a:schemeClr val="accent1"/>
-          </a:effectRef>
-          <a:fontRef idx="minor">
-            <a:schemeClr val="lt1"/>
-          </a:fontRef>
-        </p:style>
-        <p:txBody>
-          <a:bodyPr rtlCol="0" anchor="ctr" lIns="45720" rIns="45720"/>
-          <a:lstStyle/>
-          <a:p>
-            <a:pPr algn="ctr"/>
-            <a:r>
-              <a:rPr sz="900">
-                <a:solidFill>
-                  <a:srgbClr val="1F3A5F"/>
-                </a:solidFill>
-              </a:rPr>
-              <a:t>Gram 27: Y-wing contact bearing 197, codename Dagobah</a:t>
-            </a:r>
-          </a:p>
-        </p:txBody>
-      </p:sp>
-      <p:sp>
-        <p:nvSpPr>
-          <p:cNvPr id="18" name="TextBox 17"/>
-          <p:cNvSpPr txBox="1"/>
-          <p:nvPr/>
-        </p:nvSpPr>
-        <p:spPr>
-          <a:xfrm>
-            <a:off x="4948732" y="3066288"/>
-            <a:ext cx="2200046" cy="1447800"/>
-          </a:xfrm>
-          <a:prstGeom prst="rect">
-            <a:avLst/>
-          </a:prstGeom>
-          <a:noFill/>
-        </p:spPr>
-        <p:txBody>
-          <a:bodyPr wrap="square">
-            <a:spAutoFit/>
-          </a:bodyPr>
-          <a:lstStyle/>
-          <a:p>
-            <a:r>
-              <a:rPr sz="800">
-                <a:hlinkClick r:id="rId23"/>
-              </a:rPr>
-              <a:t>Lofar 1</a:t>
-            </a:r>
-          </a:p>
-          <a:p>
-            <a:r>
-              <a:rPr sz="800">
-                <a:hlinkClick r:id="rId24"/>
-              </a:rPr>
-              <a:t>Lofar 2</a:t>
-            </a:r>
-          </a:p>
-          <a:p>
-            <a:r>
-              <a:rPr sz="800">
-                <a:hlinkClick r:id="rId25"/>
-              </a:rPr>
-              <a:t>Lofar 3</a:t>
-            </a:r>
-          </a:p>
-        </p:txBody>
-      </p:sp>
-      <p:sp>
-        <p:nvSpPr>
-          <p:cNvPr id="19" name="Rounded Rectangle 18"/>
-          <p:cNvSpPr/>
-          <p:nvPr>
-            <a:hlinkClick r:id="rId26"/>
-          </p:nvPr>
-        </p:nvSpPr>
-        <p:spPr>
-          <a:xfrm>
-            <a:off x="7240219" y="2682240"/>
-            <a:ext cx="2200046" cy="365760"/>
-          </a:xfrm>
-          <a:prstGeom prst="roundRect">
-            <a:avLst/>
-          </a:prstGeom>
-          <a:solidFill>
-            <a:srgbClr val="E8EEF7"/>
-          </a:solidFill>
-          <a:ln>
-            <a:solidFill>
-              <a:srgbClr val="1F3A5F"/>
-            </a:solidFill>
-          </a:ln>
-        </p:spPr>
-        <p:style>
-          <a:lnRef idx="1">
-            <a:schemeClr val="accent1"/>
-          </a:lnRef>
-          <a:fillRef idx="3">
-            <a:schemeClr val="accent1"/>
-          </a:fillRef>
-          <a:effectRef idx="2">
-            <a:schemeClr val="accent1"/>
-          </a:effectRef>
-          <a:fontRef idx="minor">
-            <a:schemeClr val="lt1"/>
-          </a:fontRef>
-        </p:style>
-        <p:txBody>
-          <a:bodyPr rtlCol="0" anchor="ctr" lIns="45720" rIns="45720"/>
-          <a:lstStyle/>
-          <a:p>
-            <a:pPr algn="ctr"/>
-            <a:r>
-              <a:rPr sz="900">
-                <a:solidFill>
-                  <a:srgbClr val="1F3A5F"/>
-                </a:solidFill>
-              </a:rPr>
-              <a:t>Gram 28: FR Nebula-class, Category 1, Tantive</a:t>
-            </a:r>
-          </a:p>
-        </p:txBody>
-      </p:sp>
-      <p:sp>
-        <p:nvSpPr>
-          <p:cNvPr id="20" name="TextBox 19"/>
-          <p:cNvSpPr txBox="1"/>
-          <p:nvPr/>
-        </p:nvSpPr>
-        <p:spPr>
-          <a:xfrm>
-            <a:off x="7240219" y="3066288"/>
-            <a:ext cx="2200046" cy="1447800"/>
-          </a:xfrm>
-          <a:prstGeom prst="rect">
-            <a:avLst/>
-          </a:prstGeom>
-          <a:noFill/>
-        </p:spPr>
-        <p:txBody>
-          <a:bodyPr wrap="square">
-            <a:spAutoFit/>
-          </a:bodyPr>
-          <a:lstStyle/>
-          <a:p>
-            <a:r>
-              <a:rPr sz="800">
-                <a:hlinkClick r:id="rId27"/>
-              </a:rPr>
-              <a:t>Lofar 1</a:t>
-            </a:r>
-          </a:p>
-          <a:p>
-            <a:r>
-              <a:rPr sz="800">
-                <a:hlinkClick r:id="rId28"/>
-              </a:rPr>
-              <a:t>Lofar 2</a:t>
-            </a:r>
-          </a:p>
-          <a:p>
-            <a:r>
-              <a:rPr sz="800">
-                <a:hlinkClick r:id="rId29"/>
-              </a:rPr>
-              <a:t>Lofar 3</a:t>
-            </a:r>
-          </a:p>
-          <a:p>
-            <a:r>
-              <a:rPr sz="800">
-                <a:hlinkClick r:id="rId30"/>
-              </a:rPr>
-              <a:t>Lofar 4</a:t>
-            </a:r>
-          </a:p>
-        </p:txBody>
-      </p:sp>
-      <p:sp>
-        <p:nvSpPr>
-          <p:cNvPr id="21" name="Rounded Rectangle 20"/>
-          <p:cNvSpPr/>
-          <p:nvPr>
-            <a:hlinkClick r:id="rId31"/>
-          </p:nvPr>
-        </p:nvSpPr>
-        <p:spPr>
-          <a:xfrm>
-            <a:off x="9531705" y="2682240"/>
-            <a:ext cx="2200046" cy="365760"/>
-          </a:xfrm>
-          <a:prstGeom prst="roundRect">
-            <a:avLst/>
-          </a:prstGeom>
-          <a:solidFill>
-            <a:srgbClr val="E8EEF7"/>
-          </a:solidFill>
-          <a:ln>
-            <a:solidFill>
-              <a:srgbClr val="1F3A5F"/>
-            </a:solidFill>
-          </a:ln>
-        </p:spPr>
-        <p:style>
-          <a:lnRef idx="1">
-            <a:schemeClr val="accent1"/>
-          </a:lnRef>
-          <a:fillRef idx="3">
-            <a:schemeClr val="accent1"/>
-          </a:fillRef>
-          <a:effectRef idx="2">
-            <a:schemeClr val="accent1"/>
-          </a:effectRef>
-          <a:fontRef idx="minor">
-            <a:schemeClr val="lt1"/>
-          </a:fontRef>
-        </p:style>
-        <p:txBody>
-          <a:bodyPr rtlCol="0" anchor="ctr" lIns="45720" rIns="45720"/>
-          <a:lstStyle/>
-          <a:p>
-            <a:pPr algn="ctr"/>
-            <a:r>
-              <a:rPr sz="900">
-                <a:solidFill>
-                  <a:srgbClr val="1F3A5F"/>
-                </a:solidFill>
-              </a:rPr>
-              <a:t>Gram 29: FR Akira-class, Category 2, Romulus</a:t>
-            </a:r>
-          </a:p>
-        </p:txBody>
-      </p:sp>
-      <p:sp>
-        <p:nvSpPr>
-          <p:cNvPr id="22" name="TextBox 21"/>
-          <p:cNvSpPr txBox="1"/>
-          <p:nvPr/>
-        </p:nvSpPr>
-        <p:spPr>
-          <a:xfrm>
-            <a:off x="9531705" y="3066288"/>
-            <a:ext cx="2200046" cy="1447800"/>
-          </a:xfrm>
-          <a:prstGeom prst="rect">
-            <a:avLst/>
-          </a:prstGeom>
-          <a:noFill/>
-        </p:spPr>
-        <p:txBody>
-          <a:bodyPr wrap="square">
-            <a:spAutoFit/>
-          </a:bodyPr>
-          <a:lstStyle/>
-          <a:p>
-            <a:r>
-              <a:rPr sz="800">
-                <a:hlinkClick r:id="rId32"/>
-              </a:rPr>
-              <a:t>Lofar 1</a:t>
-            </a:r>
-          </a:p>
-          <a:p>
-            <a:r>
-              <a:rPr sz="800">
-                <a:hlinkClick r:id="rId33"/>
-              </a:rPr>
-              <a:t>Lofar 2</a:t>
-            </a:r>
-          </a:p>
-          <a:p>
-            <a:r>
-              <a:rPr sz="800">
-                <a:hlinkClick r:id="rId34"/>
-              </a:rPr>
-              <a:t>Lofar 3</a:t>
-            </a:r>
-          </a:p>
-        </p:txBody>
-      </p:sp>
-      <p:sp>
-        <p:nvSpPr>
-          <p:cNvPr id="23" name="Rounded Rectangle 22"/>
-          <p:cNvSpPr/>
-          <p:nvPr>
-            <a:hlinkClick r:id="rId35"/>
-          </p:nvPr>
-        </p:nvSpPr>
-        <p:spPr>
-          <a:xfrm>
-            <a:off x="365760" y="4632960"/>
-            <a:ext cx="2200046" cy="365760"/>
-          </a:xfrm>
-          <a:prstGeom prst="roundRect">
-            <a:avLst/>
-          </a:prstGeom>
-          <a:solidFill>
-            <a:srgbClr val="E8EEF7"/>
-          </a:solidFill>
-          <a:ln>
-            <a:solidFill>
-              <a:srgbClr val="1F3A5F"/>
-            </a:solidFill>
-          </a:ln>
-        </p:spPr>
-        <p:style>
-          <a:lnRef idx="1">
-            <a:schemeClr val="accent1"/>
-          </a:lnRef>
-          <a:fillRef idx="3">
-            <a:schemeClr val="accent1"/>
-          </a:fillRef>
-          <a:effectRef idx="2">
-            <a:schemeClr val="accent1"/>
-          </a:effectRef>
-          <a:fontRef idx="minor">
-            <a:schemeClr val="lt1"/>
-          </a:fontRef>
-        </p:style>
-        <p:txBody>
-          <a:bodyPr rtlCol="0" anchor="ctr" lIns="45720" rIns="45720"/>
-          <a:lstStyle/>
-          <a:p>
-            <a:pPr algn="ctr"/>
-            <a:r>
-              <a:rPr sz="900">
-                <a:solidFill>
-                  <a:srgbClr val="1F3A5F"/>
-                </a:solidFill>
-              </a:rPr>
-              <a:t>Gram 30: Defiant-class contact bearing 058, codename Naboo</a:t>
-            </a:r>
-          </a:p>
-        </p:txBody>
-      </p:sp>
-      <p:sp>
-        <p:nvSpPr>
-          <p:cNvPr id="24" name="TextBox 23"/>
-          <p:cNvSpPr txBox="1"/>
-          <p:nvPr/>
-        </p:nvSpPr>
-        <p:spPr>
-          <a:xfrm>
-            <a:off x="365760" y="5017008"/>
-            <a:ext cx="2200046" cy="1447800"/>
-          </a:xfrm>
-          <a:prstGeom prst="rect">
-            <a:avLst/>
-          </a:prstGeom>
-          <a:noFill/>
-        </p:spPr>
-        <p:txBody>
-          <a:bodyPr wrap="square">
-            <a:spAutoFit/>
-          </a:bodyPr>
-          <a:lstStyle/>
-          <a:p>
-            <a:r>
-              <a:rPr sz="800">
-                <a:hlinkClick r:id="rId36"/>
-              </a:rPr>
-              <a:t>Lofar 1</a:t>
-            </a:r>
-          </a:p>
-          <a:p>
-            <a:r>
-              <a:rPr sz="800">
-                <a:hlinkClick r:id="rId37"/>
-              </a:rPr>
-              <a:t>Lofar 2</a:t>
-            </a:r>
-          </a:p>
-          <a:p>
-            <a:r>
-              <a:rPr sz="800">
-                <a:hlinkClick r:id="rId38"/>
-              </a:rPr>
-              <a:t>Lofar 3</a:t>
-            </a:r>
-          </a:p>
-          <a:p>
-            <a:r>
-              <a:rPr sz="800">
-                <a:hlinkClick r:id="rId39"/>
-              </a:rPr>
-              <a:t>Lofar 4</a:t>
-            </a:r>
-          </a:p>
-        </p:txBody>
-      </p:sp>
-      <p:sp>
-        <p:nvSpPr>
-          <p:cNvPr id="25" name="Rounded Rectangle 24"/>
-          <p:cNvSpPr/>
-          <p:nvPr>
-            <a:hlinkClick r:id="rId40"/>
-          </p:nvPr>
-        </p:nvSpPr>
-        <p:spPr>
-          <a:xfrm>
-            <a:off x="2657246" y="4632960"/>
-            <a:ext cx="2200046" cy="365760"/>
-          </a:xfrm>
-          <a:prstGeom prst="roundRect">
-            <a:avLst/>
-          </a:prstGeom>
-          <a:solidFill>
-            <a:srgbClr val="E8EEF7"/>
-          </a:solidFill>
-          <a:ln>
-            <a:solidFill>
-              <a:srgbClr val="1F3A5F"/>
-            </a:solidFill>
-          </a:ln>
-        </p:spPr>
-        <p:style>
-          <a:lnRef idx="1">
-            <a:schemeClr val="accent1"/>
-          </a:lnRef>
-          <a:fillRef idx="3">
-            <a:schemeClr val="accent1"/>
-          </a:fillRef>
-          <a:effectRef idx="2">
-            <a:schemeClr val="accent1"/>
-          </a:effectRef>
-          <a:fontRef idx="minor">
-            <a:schemeClr val="lt1"/>
-          </a:fontRef>
-        </p:style>
-        <p:txBody>
-          <a:bodyPr rtlCol="0" anchor="ctr" lIns="45720" rIns="45720"/>
-          <a:lstStyle/>
-          <a:p>
-            <a:pPr algn="ctr"/>
-            <a:r>
-              <a:rPr sz="900">
-                <a:solidFill>
-                  <a:srgbClr val="1F3A5F"/>
-                </a:solidFill>
-              </a:rPr>
-              <a:t>Gram 31: Imperial-class contact bearing 170, codename Tantive</a:t>
-            </a:r>
-          </a:p>
-        </p:txBody>
-      </p:sp>
-      <p:sp>
-        <p:nvSpPr>
-          <p:cNvPr id="26" name="TextBox 25"/>
-          <p:cNvSpPr txBox="1"/>
-          <p:nvPr/>
-        </p:nvSpPr>
-        <p:spPr>
-          <a:xfrm>
-            <a:off x="2657246" y="5017008"/>
-            <a:ext cx="2200046" cy="1447800"/>
-          </a:xfrm>
-          <a:prstGeom prst="rect">
-            <a:avLst/>
-          </a:prstGeom>
-          <a:noFill/>
-        </p:spPr>
-        <p:txBody>
-          <a:bodyPr wrap="square">
-            <a:spAutoFit/>
-          </a:bodyPr>
-          <a:lstStyle/>
-          <a:p>
-            <a:r>
-              <a:rPr sz="800">
-                <a:hlinkClick r:id="rId41"/>
-              </a:rPr>
-              <a:t>Lofar 1</a:t>
-            </a:r>
-          </a:p>
-          <a:p>
-            <a:r>
-              <a:rPr sz="800">
-                <a:hlinkClick r:id="rId42"/>
-              </a:rPr>
-              <a:t>Lofar 2</a:t>
-            </a:r>
-          </a:p>
-        </p:txBody>
-      </p:sp>
-      <p:sp>
-        <p:nvSpPr>
-          <p:cNvPr id="27" name="Rounded Rectangle 26"/>
-          <p:cNvSpPr/>
-          <p:nvPr>
-            <a:hlinkClick r:id="rId43"/>
-          </p:nvPr>
-        </p:nvSpPr>
-        <p:spPr>
-          <a:xfrm>
-            <a:off x="4948732" y="4632960"/>
-            <a:ext cx="2200046" cy="365760"/>
-          </a:xfrm>
-          <a:prstGeom prst="roundRect">
-            <a:avLst/>
-          </a:prstGeom>
-          <a:solidFill>
-            <a:srgbClr val="E8EEF7"/>
-          </a:solidFill>
-          <a:ln>
-            <a:solidFill>
-              <a:srgbClr val="1F3A5F"/>
-            </a:solidFill>
-          </a:ln>
-        </p:spPr>
-        <p:style>
-          <a:lnRef idx="1">
-            <a:schemeClr val="accent1"/>
-          </a:lnRef>
-          <a:fillRef idx="3">
-            <a:schemeClr val="accent1"/>
-          </a:fillRef>
-          <a:effectRef idx="2">
-            <a:schemeClr val="accent1"/>
-          </a:effectRef>
-          <a:fontRef idx="minor">
-            <a:schemeClr val="lt1"/>
-          </a:fontRef>
-        </p:style>
-        <p:txBody>
-          <a:bodyPr rtlCol="0" anchor="ctr" lIns="45720" rIns="45720"/>
-          <a:lstStyle/>
-          <a:p>
-            <a:pPr algn="ctr"/>
-            <a:r>
-              <a:rPr sz="900">
-                <a:solidFill>
-                  <a:srgbClr val="1F3A5F"/>
-                </a:solidFill>
-              </a:rPr>
-              <a:t>Gram 32: FR A-wing, Category 4, Naboo</a:t>
-            </a:r>
-          </a:p>
-        </p:txBody>
-      </p:sp>
-      <p:sp>
-        <p:nvSpPr>
-          <p:cNvPr id="28" name="TextBox 27"/>
-          <p:cNvSpPr txBox="1"/>
-          <p:nvPr/>
-        </p:nvSpPr>
-        <p:spPr>
-          <a:xfrm>
-            <a:off x="4948732" y="5017008"/>
-            <a:ext cx="2200046" cy="1447800"/>
-          </a:xfrm>
-          <a:prstGeom prst="rect">
-            <a:avLst/>
-          </a:prstGeom>
-          <a:noFill/>
-        </p:spPr>
-        <p:txBody>
-          <a:bodyPr wrap="square">
-            <a:spAutoFit/>
-          </a:bodyPr>
-          <a:lstStyle/>
-          <a:p>
-            <a:r>
-              <a:rPr sz="800">
-                <a:hlinkClick r:id="rId44"/>
-              </a:rPr>
-              <a:t>Lofar 1</a:t>
-            </a:r>
-          </a:p>
-          <a:p>
-            <a:r>
-              <a:rPr sz="800">
-                <a:hlinkClick r:id="rId45"/>
-              </a:rPr>
-              <a:t>Lofar 2</a:t>
-            </a:r>
-          </a:p>
-        </p:txBody>
-      </p:sp>
-      <p:sp>
-        <p:nvSpPr>
-          <p:cNvPr id="29" name="Rounded Rectangle 28"/>
-          <p:cNvSpPr/>
-          <p:nvPr>
-            <a:hlinkClick r:id="rId46"/>
-          </p:nvPr>
-        </p:nvSpPr>
-        <p:spPr>
-          <a:xfrm>
-            <a:off x="7240219" y="4632960"/>
-            <a:ext cx="2200046" cy="365760"/>
-          </a:xfrm>
-          <a:prstGeom prst="roundRect">
-            <a:avLst/>
-          </a:prstGeom>
-          <a:solidFill>
-            <a:srgbClr val="E8EEF7"/>
-          </a:solidFill>
-          <a:ln>
-            <a:solidFill>
-              <a:srgbClr val="1F3A5F"/>
-            </a:solidFill>
-          </a:ln>
-        </p:spPr>
-        <p:style>
-          <a:lnRef idx="1">
-            <a:schemeClr val="accent1"/>
-          </a:lnRef>
-          <a:fillRef idx="3">
-            <a:schemeClr val="accent1"/>
-          </a:fillRef>
-          <a:effectRef idx="2">
-            <a:schemeClr val="accent1"/>
-          </a:effectRef>
-          <a:fontRef idx="minor">
-            <a:schemeClr val="lt1"/>
-          </a:fontRef>
-        </p:style>
-        <p:txBody>
-          <a:bodyPr rtlCol="0" anchor="ctr" lIns="45720" rIns="45720"/>
-          <a:lstStyle/>
-          <a:p>
-            <a:pPr algn="ctr"/>
-            <a:r>
-              <a:rPr sz="900">
-                <a:solidFill>
-                  <a:srgbClr val="1F3A5F"/>
-                </a:solidFill>
-              </a:rPr>
-              <a:t>Gram 33: FR Rebel One, Category 3, Tatooine</a:t>
-            </a:r>
-          </a:p>
-        </p:txBody>
-      </p:sp>
-      <p:sp>
-        <p:nvSpPr>
-          <p:cNvPr id="30" name="TextBox 29"/>
-          <p:cNvSpPr txBox="1"/>
-          <p:nvPr/>
-        </p:nvSpPr>
-        <p:spPr>
-          <a:xfrm>
-            <a:off x="7240219" y="5017008"/>
-            <a:ext cx="2200046" cy="1447800"/>
-          </a:xfrm>
-          <a:prstGeom prst="rect">
-            <a:avLst/>
-          </a:prstGeom>
-          <a:noFill/>
-        </p:spPr>
-        <p:txBody>
-          <a:bodyPr wrap="square">
-            <a:spAutoFit/>
-          </a:bodyPr>
-          <a:lstStyle/>
-          <a:p>
-            <a:r>
-              <a:rPr sz="800">
-                <a:hlinkClick r:id="rId47"/>
-              </a:rPr>
-              <a:t>Lofar 1</a:t>
-            </a:r>
-          </a:p>
-          <a:p>
-            <a:r>
-              <a:rPr sz="800">
-                <a:hlinkClick r:id="rId48"/>
-              </a:rPr>
-              <a:t>Lofar 2</a:t>
-            </a:r>
-          </a:p>
-          <a:p>
-            <a:r>
-              <a:rPr sz="800">
-                <a:hlinkClick r:id="rId49"/>
-              </a:rPr>
-              <a:t>Lofar 3</a:t>
-            </a:r>
-          </a:p>
-        </p:txBody>
-      </p:sp>
-      <p:sp>
-        <p:nvSpPr>
-          <p:cNvPr id="31" name="Rounded Rectangle 30"/>
-          <p:cNvSpPr/>
-          <p:nvPr>
-            <a:hlinkClick r:id="rId50"/>
-          </p:nvPr>
-        </p:nvSpPr>
-        <p:spPr>
-          <a:xfrm>
-            <a:off x="9531705" y="4632960"/>
-            <a:ext cx="2200046" cy="365760"/>
-          </a:xfrm>
-          <a:prstGeom prst="roundRect">
-            <a:avLst/>
-          </a:prstGeom>
-          <a:solidFill>
-            <a:srgbClr val="E8EEF7"/>
-          </a:solidFill>
-          <a:ln>
-            <a:solidFill>
-              <a:srgbClr val="1F3A5F"/>
-            </a:solidFill>
-          </a:ln>
-        </p:spPr>
-        <p:style>
-          <a:lnRef idx="1">
-            <a:schemeClr val="accent1"/>
-          </a:lnRef>
-          <a:fillRef idx="3">
-            <a:schemeClr val="accent1"/>
-          </a:fillRef>
-          <a:effectRef idx="2">
-            <a:schemeClr val="accent1"/>
-          </a:effectRef>
-          <a:fontRef idx="minor">
-            <a:schemeClr val="lt1"/>
-          </a:fontRef>
-        </p:style>
-        <p:txBody>
-          <a:bodyPr rtlCol="0" anchor="ctr" lIns="45720" rIns="45720"/>
-          <a:lstStyle/>
-          <a:p>
-            <a:pPr algn="ctr"/>
-            <a:r>
-              <a:rPr sz="900">
-                <a:solidFill>
-                  <a:srgbClr val="1F3A5F"/>
-                </a:solidFill>
-              </a:rPr>
-              <a:t>Gram 36: Rebel One contact bearing 103, codename Tatooine</a:t>
-            </a:r>
-          </a:p>
-        </p:txBody>
-      </p:sp>
-      <p:sp>
-        <p:nvSpPr>
-          <p:cNvPr id="32" name="TextBox 31"/>
-          <p:cNvSpPr txBox="1"/>
-          <p:nvPr/>
-        </p:nvSpPr>
-        <p:spPr>
-          <a:xfrm>
-            <a:off x="9531705" y="5017008"/>
-            <a:ext cx="2200046" cy="1447800"/>
-          </a:xfrm>
-          <a:prstGeom prst="rect">
-            <a:avLst/>
-          </a:prstGeom>
-          <a:noFill/>
-        </p:spPr>
-        <p:txBody>
-          <a:bodyPr wrap="square">
-            <a:spAutoFit/>
-          </a:bodyPr>
-          <a:lstStyle/>
-          <a:p>
-            <a:r>
-              <a:rPr sz="800">
                 <a:hlinkClick r:id="rId51"/>
               </a:rPr>
               <a:t>Lofar 1</a:t>
@@ -6145,92 +6057,6 @@
                 <a:hlinkClick r:id="rId52"/>
               </a:rPr>
               <a:t>Lofar 2</a:t>
-            </a:r>
-          </a:p>
-        </p:txBody>
-      </p:sp>
-    </p:spTree>
-  </p:cSld>
-  <p:clrMapOvr>
-    <a:masterClrMapping/>
-  </p:clrMapOvr>
-</p:sld>
-</file>
-
-<file path=ppt/slides/slide4.xml><?xml version="1.0" encoding="utf-8"?>
-<p:sld xmlns:a="http://schemas.openxmlformats.org/drawingml/2006/main" xmlns:p="http://schemas.openxmlformats.org/presentationml/2006/main" xmlns:r="http://schemas.openxmlformats.org/officeDocument/2006/relationships">
-  <p:cSld>
-    <p:spTree>
-      <p:nvGrpSpPr>
-        <p:cNvPr id="1" name=""/>
-        <p:cNvGrpSpPr/>
-        <p:nvPr/>
-      </p:nvGrpSpPr>
-      <p:grpSpPr/>
-      <p:sp>
-        <p:nvSpPr>
-          <p:cNvPr id="2" name="TextBox 1"/>
-          <p:cNvSpPr txBox="1"/>
-          <p:nvPr/>
-        </p:nvSpPr>
-        <p:spPr>
-          <a:xfrm>
-            <a:off x="914400" y="2377440"/>
-            <a:ext cx="10360152" cy="1280160"/>
-          </a:xfrm>
-          <a:prstGeom prst="rect">
-            <a:avLst/>
-          </a:prstGeom>
-          <a:noFill/>
-        </p:spPr>
-        <p:txBody>
-          <a:bodyPr wrap="square">
-            <a:spAutoFit/>
-          </a:bodyPr>
-          <a:lstStyle/>
-          <a:p>
-            <a:pPr algn="ctr"/>
-            <a:r>
-              <a:rPr sz="4000" b="1">
-                <a:solidFill>
-                  <a:srgbClr val="1F3A5F"/>
-                </a:solidFill>
-              </a:rPr>
-              <a:t>End of Instructor Progress Test 1 Grams</a:t>
-            </a:r>
-          </a:p>
-        </p:txBody>
-      </p:sp>
-      <p:sp>
-        <p:nvSpPr>
-          <p:cNvPr id="3" name="TextBox 2"/>
-          <p:cNvSpPr txBox="1"/>
-          <p:nvPr/>
-        </p:nvSpPr>
-        <p:spPr>
-          <a:xfrm>
-            <a:off x="914400" y="3840480"/>
-            <a:ext cx="10360152" cy="731520"/>
-          </a:xfrm>
-          <a:prstGeom prst="rect">
-            <a:avLst/>
-          </a:prstGeom>
-          <a:noFill/>
-        </p:spPr>
-        <p:txBody>
-          <a:bodyPr wrap="none">
-            <a:spAutoFit/>
-          </a:bodyPr>
-          <a:lstStyle/>
-          <a:p>
-            <a:pPr algn="ctr"/>
-            <a:r>
-              <a:rPr sz="2400">
-                <a:solidFill>
-                  <a:srgbClr val="1F3A5F"/>
-                </a:solidFill>
-              </a:rPr>
-              <a:t>Instructor Version</a:t>
             </a:r>
           </a:p>
         </p:txBody>

--- a/source/Instructor Progress Test 1 Grams/Instructor Progress Test 1 Grams.pptx
+++ b/source/Instructor Progress Test 1 Grams/Instructor Progress Test 1 Grams.pptx
@@ -7,6 +7,8 @@
   <p:sldIdLst>
     <p:sldId id="256" r:id="rId7"/>
     <p:sldId id="257" r:id="rId8"/>
+    <p:sldId id="258" r:id="rId9"/>
+    <p:sldId id="259" r:id="rId10"/>
   </p:sldIdLst>
   <p:sldSz cx="12188952" cy="6858000" type="screen4x3"/>
   <p:notesSz cx="6858000" cy="9144000"/>
@@ -3091,120 +3093,48 @@
       <p:grpSpPr/>
       <p:sp>
         <p:nvSpPr>
-          <p:cNvPr id="2" name="Rectangle 1"/>
-          <p:cNvSpPr/>
+          <p:cNvPr id="2" name="TextBox 1"/>
+          <p:cNvSpPr txBox="1"/>
           <p:nvPr/>
         </p:nvSpPr>
         <p:spPr>
           <a:xfrm>
-            <a:off x="0" y="0"/>
-            <a:ext cx="12188952" cy="548640"/>
+            <a:off x="914400" y="2377440"/>
+            <a:ext cx="10360152" cy="1280160"/>
           </a:xfrm>
           <a:prstGeom prst="rect">
             <a:avLst/>
           </a:prstGeom>
-          <a:solidFill>
-            <a:srgbClr val="1F3A5F"/>
-          </a:solidFill>
-          <a:ln>
-            <a:noFill/>
-          </a:ln>
-        </p:spPr>
-        <p:style>
-          <a:lnRef idx="1">
-            <a:schemeClr val="accent1"/>
-          </a:lnRef>
-          <a:fillRef idx="3">
-            <a:schemeClr val="accent1"/>
-          </a:fillRef>
-          <a:effectRef idx="2">
-            <a:schemeClr val="accent1"/>
-          </a:effectRef>
-          <a:fontRef idx="minor">
-            <a:schemeClr val="lt1"/>
-          </a:fontRef>
-        </p:style>
-        <p:txBody>
-          <a:bodyPr rtlCol="0" anchor="ctr" lIns="182880" rIns="182880"/>
+          <a:noFill/>
+        </p:spPr>
+        <p:txBody>
+          <a:bodyPr wrap="square">
+            <a:spAutoFit/>
+          </a:bodyPr>
           <a:lstStyle/>
           <a:p>
             <a:pPr algn="ctr"/>
             <a:r>
-              <a:rPr sz="2000" b="1">
-                <a:solidFill>
-                  <a:srgbClr val="FFFFFF"/>
-                </a:solidFill>
-              </a:rPr>
-              <a:t>Instructor Progress Test 1 Grams — Page 1 of 2</a:t>
-            </a:r>
-          </a:p>
-        </p:txBody>
-      </p:sp>
-      <p:sp>
-        <p:nvSpPr>
-          <p:cNvPr id="3" name="Rounded Rectangle 2">
-            <a:hlinkClick r:id="rId2"/>
-          </p:cNvPr>
-          <p:cNvSpPr/>
-          <p:nvPr/>
-        </p:nvSpPr>
-        <p:spPr>
-          <a:xfrm>
-            <a:off x="365760" y="731520"/>
-            <a:ext cx="2200046" cy="365760"/>
-          </a:xfrm>
-          <a:prstGeom prst="roundRect">
-            <a:avLst/>
-          </a:prstGeom>
-          <a:solidFill>
-            <a:srgbClr val="E8EEF7"/>
-          </a:solidFill>
-          <a:ln>
-            <a:solidFill>
-              <a:srgbClr val="1F3A5F"/>
-            </a:solidFill>
-          </a:ln>
-        </p:spPr>
-        <p:style>
-          <a:lnRef idx="1">
-            <a:schemeClr val="accent1"/>
-          </a:lnRef>
-          <a:fillRef idx="3">
-            <a:schemeClr val="accent1"/>
-          </a:fillRef>
-          <a:effectRef idx="2">
-            <a:schemeClr val="accent1"/>
-          </a:effectRef>
-          <a:fontRef idx="minor">
-            <a:schemeClr val="lt1"/>
-          </a:fontRef>
-        </p:style>
-        <p:txBody>
-          <a:bodyPr rtlCol="0" anchor="ctr" lIns="45720" rIns="45720"/>
-          <a:lstStyle/>
-          <a:p>
-            <a:pPr algn="ctr"/>
-            <a:r>
-              <a:rPr sz="900">
+              <a:rPr sz="4000" b="1">
                 <a:solidFill>
                   <a:srgbClr val="1F3A5F"/>
                 </a:solidFill>
               </a:rPr>
-              <a:t>Gram 1: FR Prometheus, Category 1, Bespin</a:t>
-            </a:r>
-          </a:p>
-        </p:txBody>
-      </p:sp>
-      <p:sp>
-        <p:nvSpPr>
-          <p:cNvPr id="4" name="TextBox 3"/>
+              <a:t>Welcome to Instructor Progress Test 1 Grams</a:t>
+            </a:r>
+          </a:p>
+        </p:txBody>
+      </p:sp>
+      <p:sp>
+        <p:nvSpPr>
+          <p:cNvPr id="3" name="TextBox 2"/>
           <p:cNvSpPr txBox="1"/>
           <p:nvPr/>
         </p:nvSpPr>
         <p:spPr>
           <a:xfrm>
-            <a:off x="365760" y="1115568"/>
-            <a:ext cx="2200046" cy="1447800"/>
+            <a:off x="914400" y="3840480"/>
+            <a:ext cx="10360152" cy="731520"/>
           </a:xfrm>
           <a:prstGeom prst="rect">
             <a:avLst/>
@@ -3212,1324 +3142,19 @@
           <a:noFill/>
         </p:spPr>
         <p:txBody>
-          <a:bodyPr wrap="square">
+          <a:bodyPr wrap="none">
             <a:spAutoFit/>
           </a:bodyPr>
           <a:lstStyle/>
           <a:p>
-            <a:r>
-              <a:rPr sz="800">
-                <a:hlinkClick r:id="rId3"/>
-              </a:rPr>
-              <a:t>Lofar 1</a:t>
-            </a:r>
-          </a:p>
-          <a:p>
-            <a:r>
-              <a:rPr sz="800">
-                <a:hlinkClick r:id="rId4"/>
-              </a:rPr>
-              <a:t>Lofar 2</a:t>
-            </a:r>
-          </a:p>
-        </p:txBody>
-      </p:sp>
-      <p:sp>
-        <p:nvSpPr>
-          <p:cNvPr id="5" name="Rounded Rectangle 4">
-            <a:hlinkClick r:id="rId5"/>
-          </p:cNvPr>
-          <p:cNvSpPr/>
-          <p:nvPr/>
-        </p:nvSpPr>
-        <p:spPr>
-          <a:xfrm>
-            <a:off x="2657246" y="731520"/>
-            <a:ext cx="2200046" cy="365760"/>
-          </a:xfrm>
-          <a:prstGeom prst="roundRect">
-            <a:avLst/>
-          </a:prstGeom>
-          <a:solidFill>
-            <a:srgbClr val="E8EEF7"/>
-          </a:solidFill>
-          <a:ln>
-            <a:solidFill>
-              <a:srgbClr val="1F3A5F"/>
-            </a:solidFill>
-          </a:ln>
-        </p:spPr>
-        <p:style>
-          <a:lnRef idx="1">
-            <a:schemeClr val="accent1"/>
-          </a:lnRef>
-          <a:fillRef idx="3">
-            <a:schemeClr val="accent1"/>
-          </a:fillRef>
-          <a:effectRef idx="2">
-            <a:schemeClr val="accent1"/>
-          </a:effectRef>
-          <a:fontRef idx="minor">
-            <a:schemeClr val="lt1"/>
-          </a:fontRef>
-        </p:style>
-        <p:txBody>
-          <a:bodyPr rtlCol="0" anchor="ctr" lIns="45720" rIns="45720"/>
-          <a:lstStyle/>
-          <a:p>
             <a:pPr algn="ctr"/>
             <a:r>
-              <a:rPr sz="900">
+              <a:rPr sz="2400">
                 <a:solidFill>
                   <a:srgbClr val="1F3A5F"/>
                 </a:solidFill>
               </a:rPr>
-              <a:t>Gram 3: FR Ghost, Category 1, Tantive</a:t>
-            </a:r>
-          </a:p>
-        </p:txBody>
-      </p:sp>
-      <p:sp>
-        <p:nvSpPr>
-          <p:cNvPr id="6" name="TextBox 5"/>
-          <p:cNvSpPr txBox="1"/>
-          <p:nvPr/>
-        </p:nvSpPr>
-        <p:spPr>
-          <a:xfrm>
-            <a:off x="2657246" y="1115568"/>
-            <a:ext cx="2200046" cy="1447800"/>
-          </a:xfrm>
-          <a:prstGeom prst="rect">
-            <a:avLst/>
-          </a:prstGeom>
-          <a:noFill/>
-        </p:spPr>
-        <p:txBody>
-          <a:bodyPr wrap="square">
-            <a:spAutoFit/>
-          </a:bodyPr>
-          <a:lstStyle/>
-          <a:p>
-            <a:r>
-              <a:rPr sz="800">
-                <a:hlinkClick r:id="rId6"/>
-              </a:rPr>
-              <a:t>Lofar 1</a:t>
-            </a:r>
-          </a:p>
-        </p:txBody>
-      </p:sp>
-      <p:sp>
-        <p:nvSpPr>
-          <p:cNvPr id="7" name="Rounded Rectangle 6">
-            <a:hlinkClick r:id="rId7"/>
-          </p:cNvPr>
-          <p:cNvSpPr/>
-          <p:nvPr/>
-        </p:nvSpPr>
-        <p:spPr>
-          <a:xfrm>
-            <a:off x="4948732" y="731520"/>
-            <a:ext cx="2200046" cy="365760"/>
-          </a:xfrm>
-          <a:prstGeom prst="roundRect">
-            <a:avLst/>
-          </a:prstGeom>
-          <a:solidFill>
-            <a:srgbClr val="E8EEF7"/>
-          </a:solidFill>
-          <a:ln>
-            <a:solidFill>
-              <a:srgbClr val="1F3A5F"/>
-            </a:solidFill>
-          </a:ln>
-        </p:spPr>
-        <p:style>
-          <a:lnRef idx="1">
-            <a:schemeClr val="accent1"/>
-          </a:lnRef>
-          <a:fillRef idx="3">
-            <a:schemeClr val="accent1"/>
-          </a:fillRef>
-          <a:effectRef idx="2">
-            <a:schemeClr val="accent1"/>
-          </a:effectRef>
-          <a:fontRef idx="minor">
-            <a:schemeClr val="lt1"/>
-          </a:fontRef>
-        </p:style>
-        <p:txBody>
-          <a:bodyPr rtlCol="0" anchor="ctr" lIns="45720" rIns="45720"/>
-          <a:lstStyle/>
-          <a:p>
-            <a:pPr algn="ctr"/>
-            <a:r>
-              <a:rPr sz="900">
-                <a:solidFill>
-                  <a:srgbClr val="1F3A5F"/>
-                </a:solidFill>
-              </a:rPr>
-              <a:t>Gram 4: Enterprise contact bearing 291, codename Hoth</a:t>
-            </a:r>
-          </a:p>
-        </p:txBody>
-      </p:sp>
-      <p:sp>
-        <p:nvSpPr>
-          <p:cNvPr id="8" name="TextBox 7"/>
-          <p:cNvSpPr txBox="1"/>
-          <p:nvPr/>
-        </p:nvSpPr>
-        <p:spPr>
-          <a:xfrm>
-            <a:off x="4948732" y="1115568"/>
-            <a:ext cx="2200046" cy="1447800"/>
-          </a:xfrm>
-          <a:prstGeom prst="rect">
-            <a:avLst/>
-          </a:prstGeom>
-          <a:noFill/>
-        </p:spPr>
-        <p:txBody>
-          <a:bodyPr wrap="square">
-            <a:spAutoFit/>
-          </a:bodyPr>
-          <a:lstStyle/>
-          <a:p>
-            <a:r>
-              <a:rPr sz="800">
-                <a:hlinkClick r:id="rId8"/>
-              </a:rPr>
-              <a:t>Lofar 1</a:t>
-            </a:r>
-          </a:p>
-        </p:txBody>
-      </p:sp>
-      <p:sp>
-        <p:nvSpPr>
-          <p:cNvPr id="9" name="Rounded Rectangle 8">
-            <a:hlinkClick r:id="rId9"/>
-          </p:cNvPr>
-          <p:cNvSpPr/>
-          <p:nvPr/>
-        </p:nvSpPr>
-        <p:spPr>
-          <a:xfrm>
-            <a:off x="7240219" y="731520"/>
-            <a:ext cx="2200046" cy="365760"/>
-          </a:xfrm>
-          <a:prstGeom prst="roundRect">
-            <a:avLst/>
-          </a:prstGeom>
-          <a:solidFill>
-            <a:srgbClr val="E8EEF7"/>
-          </a:solidFill>
-          <a:ln>
-            <a:solidFill>
-              <a:srgbClr val="1F3A5F"/>
-            </a:solidFill>
-          </a:ln>
-        </p:spPr>
-        <p:style>
-          <a:lnRef idx="1">
-            <a:schemeClr val="accent1"/>
-          </a:lnRef>
-          <a:fillRef idx="3">
-            <a:schemeClr val="accent1"/>
-          </a:fillRef>
-          <a:effectRef idx="2">
-            <a:schemeClr val="accent1"/>
-          </a:effectRef>
-          <a:fontRef idx="minor">
-            <a:schemeClr val="lt1"/>
-          </a:fontRef>
-        </p:style>
-        <p:txBody>
-          <a:bodyPr rtlCol="0" anchor="ctr" lIns="45720" rIns="45720"/>
-          <a:lstStyle/>
-          <a:p>
-            <a:pPr algn="ctr"/>
-            <a:r>
-              <a:rPr sz="900">
-                <a:solidFill>
-                  <a:srgbClr val="1F3A5F"/>
-                </a:solidFill>
-              </a:rPr>
-              <a:t>Gram 5: FR Enterprise, Category 4, Bespin</a:t>
-            </a:r>
-          </a:p>
-        </p:txBody>
-      </p:sp>
-      <p:sp>
-        <p:nvSpPr>
-          <p:cNvPr id="10" name="TextBox 9"/>
-          <p:cNvSpPr txBox="1"/>
-          <p:nvPr/>
-        </p:nvSpPr>
-        <p:spPr>
-          <a:xfrm>
-            <a:off x="7240219" y="1115568"/>
-            <a:ext cx="2200046" cy="1447800"/>
-          </a:xfrm>
-          <a:prstGeom prst="rect">
-            <a:avLst/>
-          </a:prstGeom>
-          <a:noFill/>
-        </p:spPr>
-        <p:txBody>
-          <a:bodyPr wrap="square">
-            <a:spAutoFit/>
-          </a:bodyPr>
-          <a:lstStyle/>
-          <a:p>
-            <a:r>
-              <a:rPr sz="800">
-                <a:hlinkClick r:id="rId10"/>
-              </a:rPr>
-              <a:t>Lofar 1</a:t>
-            </a:r>
-          </a:p>
-        </p:txBody>
-      </p:sp>
-      <p:sp>
-        <p:nvSpPr>
-          <p:cNvPr id="11" name="Rounded Rectangle 10">
-            <a:hlinkClick r:id="rId11"/>
-          </p:cNvPr>
-          <p:cNvSpPr/>
-          <p:nvPr/>
-        </p:nvSpPr>
-        <p:spPr>
-          <a:xfrm>
-            <a:off x="9531705" y="731520"/>
-            <a:ext cx="2200046" cy="365760"/>
-          </a:xfrm>
-          <a:prstGeom prst="roundRect">
-            <a:avLst/>
-          </a:prstGeom>
-          <a:solidFill>
-            <a:srgbClr val="E8EEF7"/>
-          </a:solidFill>
-          <a:ln>
-            <a:solidFill>
-              <a:srgbClr val="1F3A5F"/>
-            </a:solidFill>
-          </a:ln>
-        </p:spPr>
-        <p:style>
-          <a:lnRef idx="1">
-            <a:schemeClr val="accent1"/>
-          </a:lnRef>
-          <a:fillRef idx="3">
-            <a:schemeClr val="accent1"/>
-          </a:fillRef>
-          <a:effectRef idx="2">
-            <a:schemeClr val="accent1"/>
-          </a:effectRef>
-          <a:fontRef idx="minor">
-            <a:schemeClr val="lt1"/>
-          </a:fontRef>
-        </p:style>
-        <p:txBody>
-          <a:bodyPr rtlCol="0" anchor="ctr" lIns="45720" rIns="45720"/>
-          <a:lstStyle/>
-          <a:p>
-            <a:pPr algn="ctr"/>
-            <a:r>
-              <a:rPr sz="900">
-                <a:solidFill>
-                  <a:srgbClr val="1F3A5F"/>
-                </a:solidFill>
-              </a:rPr>
-              <a:t>Gram 6: FR Akira-class, Category 4, Hoth</a:t>
-            </a:r>
-          </a:p>
-        </p:txBody>
-      </p:sp>
-      <p:sp>
-        <p:nvSpPr>
-          <p:cNvPr id="12" name="TextBox 11"/>
-          <p:cNvSpPr txBox="1"/>
-          <p:nvPr/>
-        </p:nvSpPr>
-        <p:spPr>
-          <a:xfrm>
-            <a:off x="9531705" y="1115568"/>
-            <a:ext cx="2200046" cy="1447800"/>
-          </a:xfrm>
-          <a:prstGeom prst="rect">
-            <a:avLst/>
-          </a:prstGeom>
-          <a:noFill/>
-        </p:spPr>
-        <p:txBody>
-          <a:bodyPr wrap="square">
-            <a:spAutoFit/>
-          </a:bodyPr>
-          <a:lstStyle/>
-          <a:p>
-            <a:r>
-              <a:rPr sz="800">
-                <a:hlinkClick r:id="rId12"/>
-              </a:rPr>
-              <a:t>Lofar 1</a:t>
-            </a:r>
-          </a:p>
-        </p:txBody>
-      </p:sp>
-      <p:sp>
-        <p:nvSpPr>
-          <p:cNvPr id="13" name="Rounded Rectangle 12">
-            <a:hlinkClick r:id="rId13"/>
-          </p:cNvPr>
-          <p:cNvSpPr/>
-          <p:nvPr/>
-        </p:nvSpPr>
-        <p:spPr>
-          <a:xfrm>
-            <a:off x="365760" y="2682240"/>
-            <a:ext cx="2200046" cy="365760"/>
-          </a:xfrm>
-          <a:prstGeom prst="roundRect">
-            <a:avLst/>
-          </a:prstGeom>
-          <a:solidFill>
-            <a:srgbClr val="E8EEF7"/>
-          </a:solidFill>
-          <a:ln>
-            <a:solidFill>
-              <a:srgbClr val="1F3A5F"/>
-            </a:solidFill>
-          </a:ln>
-        </p:spPr>
-        <p:style>
-          <a:lnRef idx="1">
-            <a:schemeClr val="accent1"/>
-          </a:lnRef>
-          <a:fillRef idx="3">
-            <a:schemeClr val="accent1"/>
-          </a:fillRef>
-          <a:effectRef idx="2">
-            <a:schemeClr val="accent1"/>
-          </a:effectRef>
-          <a:fontRef idx="minor">
-            <a:schemeClr val="lt1"/>
-          </a:fontRef>
-        </p:style>
-        <p:txBody>
-          <a:bodyPr rtlCol="0" anchor="ctr" lIns="45720" rIns="45720"/>
-          <a:lstStyle/>
-          <a:p>
-            <a:pPr algn="ctr"/>
-            <a:r>
-              <a:rPr sz="900">
-                <a:solidFill>
-                  <a:srgbClr val="1F3A5F"/>
-                </a:solidFill>
-              </a:rPr>
-              <a:t>Gram 7: FR Rebel One, Category 1, Naboo</a:t>
-            </a:r>
-          </a:p>
-        </p:txBody>
-      </p:sp>
-      <p:sp>
-        <p:nvSpPr>
-          <p:cNvPr id="14" name="TextBox 13"/>
-          <p:cNvSpPr txBox="1"/>
-          <p:nvPr/>
-        </p:nvSpPr>
-        <p:spPr>
-          <a:xfrm>
-            <a:off x="365760" y="3066288"/>
-            <a:ext cx="2200046" cy="1447800"/>
-          </a:xfrm>
-          <a:prstGeom prst="rect">
-            <a:avLst/>
-          </a:prstGeom>
-          <a:noFill/>
-        </p:spPr>
-        <p:txBody>
-          <a:bodyPr wrap="square">
-            <a:spAutoFit/>
-          </a:bodyPr>
-          <a:lstStyle/>
-          <a:p>
-            <a:r>
-              <a:rPr sz="800">
-                <a:hlinkClick r:id="rId14"/>
-              </a:rPr>
-              <a:t>Lofar 1</a:t>
-            </a:r>
-          </a:p>
-          <a:p>
-            <a:r>
-              <a:rPr sz="800">
-                <a:hlinkClick r:id="rId15"/>
-              </a:rPr>
-              <a:t>Lofar 2</a:t>
-            </a:r>
-          </a:p>
-        </p:txBody>
-      </p:sp>
-      <p:sp>
-        <p:nvSpPr>
-          <p:cNvPr id="15" name="Rounded Rectangle 14">
-            <a:hlinkClick r:id="rId16"/>
-          </p:cNvPr>
-          <p:cNvSpPr/>
-          <p:nvPr/>
-        </p:nvSpPr>
-        <p:spPr>
-          <a:xfrm>
-            <a:off x="2657246" y="2682240"/>
-            <a:ext cx="2200046" cy="365760"/>
-          </a:xfrm>
-          <a:prstGeom prst="roundRect">
-            <a:avLst/>
-          </a:prstGeom>
-          <a:solidFill>
-            <a:srgbClr val="E8EEF7"/>
-          </a:solidFill>
-          <a:ln>
-            <a:solidFill>
-              <a:srgbClr val="1F3A5F"/>
-            </a:solidFill>
-          </a:ln>
-        </p:spPr>
-        <p:style>
-          <a:lnRef idx="1">
-            <a:schemeClr val="accent1"/>
-          </a:lnRef>
-          <a:fillRef idx="3">
-            <a:schemeClr val="accent1"/>
-          </a:fillRef>
-          <a:effectRef idx="2">
-            <a:schemeClr val="accent1"/>
-          </a:effectRef>
-          <a:fontRef idx="minor">
-            <a:schemeClr val="lt1"/>
-          </a:fontRef>
-        </p:style>
-        <p:txBody>
-          <a:bodyPr rtlCol="0" anchor="ctr" lIns="45720" rIns="45720"/>
-          <a:lstStyle/>
-          <a:p>
-            <a:pPr algn="ctr"/>
-            <a:r>
-              <a:rPr sz="900">
-                <a:solidFill>
-                  <a:srgbClr val="1F3A5F"/>
-                </a:solidFill>
-              </a:rPr>
-              <a:t>Gram 8: FR TIE Bomber, Category 4, Kronos</a:t>
-            </a:r>
-          </a:p>
-        </p:txBody>
-      </p:sp>
-      <p:sp>
-        <p:nvSpPr>
-          <p:cNvPr id="16" name="TextBox 15"/>
-          <p:cNvSpPr txBox="1"/>
-          <p:nvPr/>
-        </p:nvSpPr>
-        <p:spPr>
-          <a:xfrm>
-            <a:off x="2657246" y="3066288"/>
-            <a:ext cx="2200046" cy="1447800"/>
-          </a:xfrm>
-          <a:prstGeom prst="rect">
-            <a:avLst/>
-          </a:prstGeom>
-          <a:noFill/>
-        </p:spPr>
-        <p:txBody>
-          <a:bodyPr wrap="square">
-            <a:spAutoFit/>
-          </a:bodyPr>
-          <a:lstStyle/>
-          <a:p>
-            <a:r>
-              <a:rPr sz="800">
-                <a:hlinkClick r:id="rId17"/>
-              </a:rPr>
-              <a:t>Lofar 1</a:t>
-            </a:r>
-          </a:p>
-        </p:txBody>
-      </p:sp>
-      <p:sp>
-        <p:nvSpPr>
-          <p:cNvPr id="17" name="Rounded Rectangle 16">
-            <a:hlinkClick r:id="rId18"/>
-          </p:cNvPr>
-          <p:cNvSpPr/>
-          <p:nvPr/>
-        </p:nvSpPr>
-        <p:spPr>
-          <a:xfrm>
-            <a:off x="4948732" y="2682240"/>
-            <a:ext cx="2200046" cy="365760"/>
-          </a:xfrm>
-          <a:prstGeom prst="roundRect">
-            <a:avLst/>
-          </a:prstGeom>
-          <a:solidFill>
-            <a:srgbClr val="E8EEF7"/>
-          </a:solidFill>
-          <a:ln>
-            <a:solidFill>
-              <a:srgbClr val="1F3A5F"/>
-            </a:solidFill>
-          </a:ln>
-        </p:spPr>
-        <p:style>
-          <a:lnRef idx="1">
-            <a:schemeClr val="accent1"/>
-          </a:lnRef>
-          <a:fillRef idx="3">
-            <a:schemeClr val="accent1"/>
-          </a:fillRef>
-          <a:effectRef idx="2">
-            <a:schemeClr val="accent1"/>
-          </a:effectRef>
-          <a:fontRef idx="minor">
-            <a:schemeClr val="lt1"/>
-          </a:fontRef>
-        </p:style>
-        <p:txBody>
-          <a:bodyPr rtlCol="0" anchor="ctr" lIns="45720" rIns="45720"/>
-          <a:lstStyle/>
-          <a:p>
-            <a:pPr algn="ctr"/>
-            <a:r>
-              <a:rPr sz="900">
-                <a:solidFill>
-                  <a:srgbClr val="1F3A5F"/>
-                </a:solidFill>
-              </a:rPr>
-              <a:t>Gram 9: FR Star Destroyer, Category 1, Tatooine</a:t>
-            </a:r>
-          </a:p>
-        </p:txBody>
-      </p:sp>
-      <p:sp>
-        <p:nvSpPr>
-          <p:cNvPr id="18" name="TextBox 17"/>
-          <p:cNvSpPr txBox="1"/>
-          <p:nvPr/>
-        </p:nvSpPr>
-        <p:spPr>
-          <a:xfrm>
-            <a:off x="4948732" y="3066288"/>
-            <a:ext cx="2200046" cy="1447800"/>
-          </a:xfrm>
-          <a:prstGeom prst="rect">
-            <a:avLst/>
-          </a:prstGeom>
-          <a:noFill/>
-        </p:spPr>
-        <p:txBody>
-          <a:bodyPr wrap="square">
-            <a:spAutoFit/>
-          </a:bodyPr>
-          <a:lstStyle/>
-          <a:p>
-            <a:r>
-              <a:rPr sz="800">
-                <a:hlinkClick r:id="rId19"/>
-              </a:rPr>
-              <a:t>Lofar 1</a:t>
-            </a:r>
-          </a:p>
-        </p:txBody>
-      </p:sp>
-      <p:sp>
-        <p:nvSpPr>
-          <p:cNvPr id="19" name="Rounded Rectangle 18">
-            <a:hlinkClick r:id="rId20"/>
-          </p:cNvPr>
-          <p:cNvSpPr/>
-          <p:nvPr/>
-        </p:nvSpPr>
-        <p:spPr>
-          <a:xfrm>
-            <a:off x="7240219" y="2682240"/>
-            <a:ext cx="2200046" cy="365760"/>
-          </a:xfrm>
-          <a:prstGeom prst="roundRect">
-            <a:avLst/>
-          </a:prstGeom>
-          <a:solidFill>
-            <a:srgbClr val="E8EEF7"/>
-          </a:solidFill>
-          <a:ln>
-            <a:solidFill>
-              <a:srgbClr val="1F3A5F"/>
-            </a:solidFill>
-          </a:ln>
-        </p:spPr>
-        <p:style>
-          <a:lnRef idx="1">
-            <a:schemeClr val="accent1"/>
-          </a:lnRef>
-          <a:fillRef idx="3">
-            <a:schemeClr val="accent1"/>
-          </a:fillRef>
-          <a:effectRef idx="2">
-            <a:schemeClr val="accent1"/>
-          </a:effectRef>
-          <a:fontRef idx="minor">
-            <a:schemeClr val="lt1"/>
-          </a:fontRef>
-        </p:style>
-        <p:txBody>
-          <a:bodyPr rtlCol="0" anchor="ctr" lIns="45720" rIns="45720"/>
-          <a:lstStyle/>
-          <a:p>
-            <a:pPr algn="ctr"/>
-            <a:r>
-              <a:rPr sz="900">
-                <a:solidFill>
-                  <a:srgbClr val="1F3A5F"/>
-                </a:solidFill>
-              </a:rPr>
-              <a:t>Gram 10: FR Stargazer, Category 3, Risa</a:t>
-            </a:r>
-          </a:p>
-        </p:txBody>
-      </p:sp>
-      <p:sp>
-        <p:nvSpPr>
-          <p:cNvPr id="20" name="TextBox 19"/>
-          <p:cNvSpPr txBox="1"/>
-          <p:nvPr/>
-        </p:nvSpPr>
-        <p:spPr>
-          <a:xfrm>
-            <a:off x="7240219" y="3066288"/>
-            <a:ext cx="2200046" cy="1447800"/>
-          </a:xfrm>
-          <a:prstGeom prst="rect">
-            <a:avLst/>
-          </a:prstGeom>
-          <a:noFill/>
-        </p:spPr>
-        <p:txBody>
-          <a:bodyPr wrap="square">
-            <a:spAutoFit/>
-          </a:bodyPr>
-          <a:lstStyle/>
-          <a:p>
-            <a:r>
-              <a:rPr sz="800">
-                <a:hlinkClick r:id="rId21"/>
-              </a:rPr>
-              <a:t>Lofar 1</a:t>
-            </a:r>
-          </a:p>
-          <a:p>
-            <a:r>
-              <a:rPr sz="800">
-                <a:hlinkClick r:id="rId22"/>
-              </a:rPr>
-              <a:t>Lofar 2</a:t>
-            </a:r>
-          </a:p>
-          <a:p>
-            <a:r>
-              <a:rPr sz="800">
-                <a:hlinkClick r:id="rId23"/>
-              </a:rPr>
-              <a:t>Lofar 3</a:t>
-            </a:r>
-          </a:p>
-          <a:p>
-            <a:r>
-              <a:rPr sz="800">
-                <a:hlinkClick r:id="rId24"/>
-              </a:rPr>
-              <a:t>Lofar 4</a:t>
-            </a:r>
-          </a:p>
-        </p:txBody>
-      </p:sp>
-      <p:sp>
-        <p:nvSpPr>
-          <p:cNvPr id="21" name="Rounded Rectangle 20">
-            <a:hlinkClick r:id="rId25"/>
-          </p:cNvPr>
-          <p:cNvSpPr/>
-          <p:nvPr/>
-        </p:nvSpPr>
-        <p:spPr>
-          <a:xfrm>
-            <a:off x="9531705" y="2682240"/>
-            <a:ext cx="2200046" cy="365760"/>
-          </a:xfrm>
-          <a:prstGeom prst="roundRect">
-            <a:avLst/>
-          </a:prstGeom>
-          <a:solidFill>
-            <a:srgbClr val="E8EEF7"/>
-          </a:solidFill>
-          <a:ln>
-            <a:solidFill>
-              <a:srgbClr val="1F3A5F"/>
-            </a:solidFill>
-          </a:ln>
-        </p:spPr>
-        <p:style>
-          <a:lnRef idx="1">
-            <a:schemeClr val="accent1"/>
-          </a:lnRef>
-          <a:fillRef idx="3">
-            <a:schemeClr val="accent1"/>
-          </a:fillRef>
-          <a:effectRef idx="2">
-            <a:schemeClr val="accent1"/>
-          </a:effectRef>
-          <a:fontRef idx="minor">
-            <a:schemeClr val="lt1"/>
-          </a:fontRef>
-        </p:style>
-        <p:txBody>
-          <a:bodyPr rtlCol="0" anchor="ctr" lIns="45720" rIns="45720"/>
-          <a:lstStyle/>
-          <a:p>
-            <a:pPr algn="ctr"/>
-            <a:r>
-              <a:rPr sz="900">
-                <a:solidFill>
-                  <a:srgbClr val="1F3A5F"/>
-                </a:solidFill>
-              </a:rPr>
-              <a:t>Gram 11: FR Imperial-class, Category 2, Caprica</a:t>
-            </a:r>
-          </a:p>
-        </p:txBody>
-      </p:sp>
-      <p:sp>
-        <p:nvSpPr>
-          <p:cNvPr id="22" name="TextBox 21"/>
-          <p:cNvSpPr txBox="1"/>
-          <p:nvPr/>
-        </p:nvSpPr>
-        <p:spPr>
-          <a:xfrm>
-            <a:off x="9531705" y="3066288"/>
-            <a:ext cx="2200046" cy="1447800"/>
-          </a:xfrm>
-          <a:prstGeom prst="rect">
-            <a:avLst/>
-          </a:prstGeom>
-          <a:noFill/>
-        </p:spPr>
-        <p:txBody>
-          <a:bodyPr wrap="square">
-            <a:spAutoFit/>
-          </a:bodyPr>
-          <a:lstStyle/>
-          <a:p>
-            <a:r>
-              <a:rPr sz="800">
-                <a:hlinkClick r:id="rId26"/>
-              </a:rPr>
-              <a:t>Lofar 1</a:t>
-            </a:r>
-          </a:p>
-          <a:p>
-            <a:r>
-              <a:rPr sz="800">
-                <a:hlinkClick r:id="rId27"/>
-              </a:rPr>
-              <a:t>Lofar 2</a:t>
-            </a:r>
-          </a:p>
-        </p:txBody>
-      </p:sp>
-      <p:sp>
-        <p:nvSpPr>
-          <p:cNvPr id="23" name="Rounded Rectangle 22">
-            <a:hlinkClick r:id="rId28"/>
-          </p:cNvPr>
-          <p:cNvSpPr/>
-          <p:nvPr/>
-        </p:nvSpPr>
-        <p:spPr>
-          <a:xfrm>
-            <a:off x="365760" y="4632960"/>
-            <a:ext cx="2200046" cy="365760"/>
-          </a:xfrm>
-          <a:prstGeom prst="roundRect">
-            <a:avLst/>
-          </a:prstGeom>
-          <a:solidFill>
-            <a:srgbClr val="E8EEF7"/>
-          </a:solidFill>
-          <a:ln>
-            <a:solidFill>
-              <a:srgbClr val="1F3A5F"/>
-            </a:solidFill>
-          </a:ln>
-        </p:spPr>
-        <p:style>
-          <a:lnRef idx="1">
-            <a:schemeClr val="accent1"/>
-          </a:lnRef>
-          <a:fillRef idx="3">
-            <a:schemeClr val="accent1"/>
-          </a:fillRef>
-          <a:effectRef idx="2">
-            <a:schemeClr val="accent1"/>
-          </a:effectRef>
-          <a:fontRef idx="minor">
-            <a:schemeClr val="lt1"/>
-          </a:fontRef>
-        </p:style>
-        <p:txBody>
-          <a:bodyPr rtlCol="0" anchor="ctr" lIns="45720" rIns="45720"/>
-          <a:lstStyle/>
-          <a:p>
-            <a:pPr algn="ctr"/>
-            <a:r>
-              <a:rPr sz="900">
-                <a:solidFill>
-                  <a:srgbClr val="1F3A5F"/>
-                </a:solidFill>
-              </a:rPr>
-              <a:t>Gram 14: FR Tantive IV, Category 4, Trill</a:t>
-            </a:r>
-          </a:p>
-        </p:txBody>
-      </p:sp>
-      <p:sp>
-        <p:nvSpPr>
-          <p:cNvPr id="24" name="TextBox 23"/>
-          <p:cNvSpPr txBox="1"/>
-          <p:nvPr/>
-        </p:nvSpPr>
-        <p:spPr>
-          <a:xfrm>
-            <a:off x="365760" y="5017008"/>
-            <a:ext cx="2200046" cy="1447800"/>
-          </a:xfrm>
-          <a:prstGeom prst="rect">
-            <a:avLst/>
-          </a:prstGeom>
-          <a:noFill/>
-        </p:spPr>
-        <p:txBody>
-          <a:bodyPr wrap="square">
-            <a:spAutoFit/>
-          </a:bodyPr>
-          <a:lstStyle/>
-          <a:p>
-            <a:r>
-              <a:rPr sz="800">
-                <a:hlinkClick r:id="rId29"/>
-              </a:rPr>
-              <a:t>Lofar 1</a:t>
-            </a:r>
-          </a:p>
-        </p:txBody>
-      </p:sp>
-      <p:sp>
-        <p:nvSpPr>
-          <p:cNvPr id="25" name="Rounded Rectangle 24">
-            <a:hlinkClick r:id="rId30"/>
-          </p:cNvPr>
-          <p:cNvSpPr/>
-          <p:nvPr/>
-        </p:nvSpPr>
-        <p:spPr>
-          <a:xfrm>
-            <a:off x="2657246" y="4632960"/>
-            <a:ext cx="2200046" cy="365760"/>
-          </a:xfrm>
-          <a:prstGeom prst="roundRect">
-            <a:avLst/>
-          </a:prstGeom>
-          <a:solidFill>
-            <a:srgbClr val="E8EEF7"/>
-          </a:solidFill>
-          <a:ln>
-            <a:solidFill>
-              <a:srgbClr val="1F3A5F"/>
-            </a:solidFill>
-          </a:ln>
-        </p:spPr>
-        <p:style>
-          <a:lnRef idx="1">
-            <a:schemeClr val="accent1"/>
-          </a:lnRef>
-          <a:fillRef idx="3">
-            <a:schemeClr val="accent1"/>
-          </a:fillRef>
-          <a:effectRef idx="2">
-            <a:schemeClr val="accent1"/>
-          </a:effectRef>
-          <a:fontRef idx="minor">
-            <a:schemeClr val="lt1"/>
-          </a:fontRef>
-        </p:style>
-        <p:txBody>
-          <a:bodyPr rtlCol="0" anchor="ctr" lIns="45720" rIns="45720"/>
-          <a:lstStyle/>
-          <a:p>
-            <a:pPr algn="ctr"/>
-            <a:r>
-              <a:rPr sz="900">
-                <a:solidFill>
-                  <a:srgbClr val="1F3A5F"/>
-                </a:solidFill>
-              </a:rPr>
-              <a:t>Gram 16: Corellian Corvette contact bearing 224, codename Vulcan</a:t>
-            </a:r>
-          </a:p>
-        </p:txBody>
-      </p:sp>
-      <p:sp>
-        <p:nvSpPr>
-          <p:cNvPr id="26" name="TextBox 25"/>
-          <p:cNvSpPr txBox="1"/>
-          <p:nvPr/>
-        </p:nvSpPr>
-        <p:spPr>
-          <a:xfrm>
-            <a:off x="2657246" y="5017008"/>
-            <a:ext cx="2200046" cy="1447800"/>
-          </a:xfrm>
-          <a:prstGeom prst="rect">
-            <a:avLst/>
-          </a:prstGeom>
-          <a:noFill/>
-        </p:spPr>
-        <p:txBody>
-          <a:bodyPr wrap="square">
-            <a:spAutoFit/>
-          </a:bodyPr>
-          <a:lstStyle/>
-          <a:p>
-            <a:r>
-              <a:rPr sz="800">
-                <a:hlinkClick r:id="rId31"/>
-              </a:rPr>
-              <a:t>Lofar 1</a:t>
-            </a:r>
-          </a:p>
-          <a:p>
-            <a:r>
-              <a:rPr sz="800">
-                <a:hlinkClick r:id="rId32"/>
-              </a:rPr>
-              <a:t>Lofar 2</a:t>
-            </a:r>
-          </a:p>
-          <a:p>
-            <a:r>
-              <a:rPr sz="800">
-                <a:hlinkClick r:id="rId33"/>
-              </a:rPr>
-              <a:t>Lofar 3</a:t>
-            </a:r>
-          </a:p>
-          <a:p>
-            <a:r>
-              <a:rPr sz="800">
-                <a:hlinkClick r:id="rId34"/>
-              </a:rPr>
-              <a:t>Lofar 4</a:t>
-            </a:r>
-          </a:p>
-        </p:txBody>
-      </p:sp>
-      <p:sp>
-        <p:nvSpPr>
-          <p:cNvPr id="27" name="Rounded Rectangle 26">
-            <a:hlinkClick r:id="rId35"/>
-          </p:cNvPr>
-          <p:cNvSpPr/>
-          <p:nvPr/>
-        </p:nvSpPr>
-        <p:spPr>
-          <a:xfrm>
-            <a:off x="4948732" y="4632960"/>
-            <a:ext cx="2200046" cy="365760"/>
-          </a:xfrm>
-          <a:prstGeom prst="roundRect">
-            <a:avLst/>
-          </a:prstGeom>
-          <a:solidFill>
-            <a:srgbClr val="E8EEF7"/>
-          </a:solidFill>
-          <a:ln>
-            <a:solidFill>
-              <a:srgbClr val="1F3A5F"/>
-            </a:solidFill>
-          </a:ln>
-        </p:spPr>
-        <p:style>
-          <a:lnRef idx="1">
-            <a:schemeClr val="accent1"/>
-          </a:lnRef>
-          <a:fillRef idx="3">
-            <a:schemeClr val="accent1"/>
-          </a:fillRef>
-          <a:effectRef idx="2">
-            <a:schemeClr val="accent1"/>
-          </a:effectRef>
-          <a:fontRef idx="minor">
-            <a:schemeClr val="lt1"/>
-          </a:fontRef>
-        </p:style>
-        <p:txBody>
-          <a:bodyPr rtlCol="0" anchor="ctr" lIns="45720" rIns="45720"/>
-          <a:lstStyle/>
-          <a:p>
-            <a:pPr algn="ctr"/>
-            <a:r>
-              <a:rPr sz="900">
-                <a:solidFill>
-                  <a:srgbClr val="1F3A5F"/>
-                </a:solidFill>
-              </a:rPr>
-              <a:t>Gram 17: FR Outrider, Category 3, Cardassia</a:t>
-            </a:r>
-          </a:p>
-        </p:txBody>
-      </p:sp>
-      <p:sp>
-        <p:nvSpPr>
-          <p:cNvPr id="28" name="TextBox 27"/>
-          <p:cNvSpPr txBox="1"/>
-          <p:nvPr/>
-        </p:nvSpPr>
-        <p:spPr>
-          <a:xfrm>
-            <a:off x="4948732" y="5017008"/>
-            <a:ext cx="2200046" cy="1447800"/>
-          </a:xfrm>
-          <a:prstGeom prst="rect">
-            <a:avLst/>
-          </a:prstGeom>
-          <a:noFill/>
-        </p:spPr>
-        <p:txBody>
-          <a:bodyPr wrap="square">
-            <a:spAutoFit/>
-          </a:bodyPr>
-          <a:lstStyle/>
-          <a:p>
-            <a:r>
-              <a:rPr sz="800">
-                <a:hlinkClick r:id="rId36"/>
-              </a:rPr>
-              <a:t>Lofar 1</a:t>
-            </a:r>
-          </a:p>
-          <a:p>
-            <a:r>
-              <a:rPr sz="800">
-                <a:hlinkClick r:id="rId37"/>
-              </a:rPr>
-              <a:t>Lofar 2</a:t>
-            </a:r>
-          </a:p>
-        </p:txBody>
-      </p:sp>
-      <p:sp>
-        <p:nvSpPr>
-          <p:cNvPr id="29" name="Rounded Rectangle 28">
-            <a:hlinkClick r:id="rId38"/>
-          </p:cNvPr>
-          <p:cNvSpPr/>
-          <p:nvPr/>
-        </p:nvSpPr>
-        <p:spPr>
-          <a:xfrm>
-            <a:off x="7240219" y="4632960"/>
-            <a:ext cx="2200046" cy="365760"/>
-          </a:xfrm>
-          <a:prstGeom prst="roundRect">
-            <a:avLst/>
-          </a:prstGeom>
-          <a:solidFill>
-            <a:srgbClr val="E8EEF7"/>
-          </a:solidFill>
-          <a:ln>
-            <a:solidFill>
-              <a:srgbClr val="1F3A5F"/>
-            </a:solidFill>
-          </a:ln>
-        </p:spPr>
-        <p:style>
-          <a:lnRef idx="1">
-            <a:schemeClr val="accent1"/>
-          </a:lnRef>
-          <a:fillRef idx="3">
-            <a:schemeClr val="accent1"/>
-          </a:fillRef>
-          <a:effectRef idx="2">
-            <a:schemeClr val="accent1"/>
-          </a:effectRef>
-          <a:fontRef idx="minor">
-            <a:schemeClr val="lt1"/>
-          </a:fontRef>
-        </p:style>
-        <p:txBody>
-          <a:bodyPr rtlCol="0" anchor="ctr" lIns="45720" rIns="45720"/>
-          <a:lstStyle/>
-          <a:p>
-            <a:pPr algn="ctr"/>
-            <a:r>
-              <a:rPr sz="900">
-                <a:solidFill>
-                  <a:srgbClr val="1F3A5F"/>
-                </a:solidFill>
-              </a:rPr>
-              <a:t>Gram 18: FR Razor Crest, Category 2, Gandalf</a:t>
-            </a:r>
-          </a:p>
-        </p:txBody>
-      </p:sp>
-      <p:sp>
-        <p:nvSpPr>
-          <p:cNvPr id="30" name="TextBox 29"/>
-          <p:cNvSpPr txBox="1"/>
-          <p:nvPr/>
-        </p:nvSpPr>
-        <p:spPr>
-          <a:xfrm>
-            <a:off x="7240219" y="5017008"/>
-            <a:ext cx="2200046" cy="1447800"/>
-          </a:xfrm>
-          <a:prstGeom prst="rect">
-            <a:avLst/>
-          </a:prstGeom>
-          <a:noFill/>
-        </p:spPr>
-        <p:txBody>
-          <a:bodyPr wrap="square">
-            <a:spAutoFit/>
-          </a:bodyPr>
-          <a:lstStyle/>
-          <a:p>
-            <a:r>
-              <a:rPr sz="800">
-                <a:hlinkClick r:id="rId39"/>
-              </a:rPr>
-              <a:t>Lofar 1</a:t>
-            </a:r>
-          </a:p>
-          <a:p>
-            <a:r>
-              <a:rPr sz="800">
-                <a:hlinkClick r:id="rId40"/>
-              </a:rPr>
-              <a:t>Lofar 2</a:t>
-            </a:r>
-          </a:p>
-          <a:p>
-            <a:r>
-              <a:rPr sz="800">
-                <a:hlinkClick r:id="rId41"/>
-              </a:rPr>
-              <a:t>Lofar 3</a:t>
-            </a:r>
-          </a:p>
-          <a:p>
-            <a:r>
-              <a:rPr sz="800">
-                <a:hlinkClick r:id="rId42"/>
-              </a:rPr>
-              <a:t>Lofar 4</a:t>
-            </a:r>
-          </a:p>
-        </p:txBody>
-      </p:sp>
-      <p:sp>
-        <p:nvSpPr>
-          <p:cNvPr id="31" name="Rounded Rectangle 30">
-            <a:hlinkClick r:id="rId43"/>
-          </p:cNvPr>
-          <p:cNvSpPr/>
-          <p:nvPr/>
-        </p:nvSpPr>
-        <p:spPr>
-          <a:xfrm>
-            <a:off x="9531705" y="4632960"/>
-            <a:ext cx="2200046" cy="365760"/>
-          </a:xfrm>
-          <a:prstGeom prst="roundRect">
-            <a:avLst/>
-          </a:prstGeom>
-          <a:solidFill>
-            <a:srgbClr val="E8EEF7"/>
-          </a:solidFill>
-          <a:ln>
-            <a:solidFill>
-              <a:srgbClr val="1F3A5F"/>
-            </a:solidFill>
-          </a:ln>
-        </p:spPr>
-        <p:style>
-          <a:lnRef idx="1">
-            <a:schemeClr val="accent1"/>
-          </a:lnRef>
-          <a:fillRef idx="3">
-            <a:schemeClr val="accent1"/>
-          </a:fillRef>
-          <a:effectRef idx="2">
-            <a:schemeClr val="accent1"/>
-          </a:effectRef>
-          <a:fontRef idx="minor">
-            <a:schemeClr val="lt1"/>
-          </a:fontRef>
-        </p:style>
-        <p:txBody>
-          <a:bodyPr rtlCol="0" anchor="ctr" lIns="45720" rIns="45720"/>
-          <a:lstStyle/>
-          <a:p>
-            <a:pPr algn="ctr"/>
-            <a:r>
-              <a:rPr sz="900">
-                <a:solidFill>
-                  <a:srgbClr val="1F3A5F"/>
-                </a:solidFill>
-              </a:rPr>
-              <a:t>Gram 19: FR Ghost, Category 1, Romulus</a:t>
-            </a:r>
-          </a:p>
-        </p:txBody>
-      </p:sp>
-      <p:sp>
-        <p:nvSpPr>
-          <p:cNvPr id="32" name="TextBox 31"/>
-          <p:cNvSpPr txBox="1"/>
-          <p:nvPr/>
-        </p:nvSpPr>
-        <p:spPr>
-          <a:xfrm>
-            <a:off x="9531705" y="5017008"/>
-            <a:ext cx="2200046" cy="1447800"/>
-          </a:xfrm>
-          <a:prstGeom prst="rect">
-            <a:avLst/>
-          </a:prstGeom>
-          <a:noFill/>
-        </p:spPr>
-        <p:txBody>
-          <a:bodyPr wrap="square">
-            <a:spAutoFit/>
-          </a:bodyPr>
-          <a:lstStyle/>
-          <a:p>
-            <a:r>
-              <a:rPr sz="800">
-                <a:hlinkClick r:id="rId44"/>
-              </a:rPr>
-              <a:t>Lofar 1</a:t>
+              <a:t>Instructor Version</a:t>
             </a:r>
           </a:p>
         </p:txBody>
@@ -4598,7 +3223,7 @@
                   <a:srgbClr val="FFFFFF"/>
                 </a:solidFill>
               </a:rPr>
-              <a:t>Instructor Progress Test 1 Grams — Page 2 of 2</a:t>
+              <a:t>Instructor Progress Test 1 Grams — Page 1 of 2</a:t>
             </a:r>
           </a:p>
         </p:txBody>
@@ -4653,7 +3278,7 @@
                   <a:srgbClr val="1F3A5F"/>
                 </a:solidFill>
               </a:rPr>
-              <a:t>Gram 20: FR Nebulon-B, Category 3, Mustafar</a:t>
+              <a:t>Gram 1: FR Prometheus, Category 1, Bespin</a:t>
             </a:r>
           </a:p>
         </p:txBody>
@@ -4687,12 +3312,20 @@
               <a:t>Lofar 1</a:t>
             </a:r>
           </a:p>
+          <a:p>
+            <a:r>
+              <a:rPr sz="800">
+                <a:hlinkClick r:id="rId4"/>
+              </a:rPr>
+              <a:t>Lofar 2</a:t>
+            </a:r>
+          </a:p>
         </p:txBody>
       </p:sp>
       <p:sp>
         <p:nvSpPr>
           <p:cNvPr id="5" name="Rounded Rectangle 4">
-            <a:hlinkClick r:id="rId4"/>
+            <a:hlinkClick r:id="rId5"/>
           </p:cNvPr>
           <p:cNvSpPr/>
           <p:nvPr/>
@@ -4739,7 +3372,7 @@
                   <a:srgbClr val="1F3A5F"/>
                 </a:solidFill>
               </a:rPr>
-              <a:t>Gram 21: Outrider contact bearing 131, codename Yavin</a:t>
+              <a:t>Gram 3: FR Ghost, Category 1, Tantive</a:t>
             </a:r>
           </a:p>
         </p:txBody>
@@ -4768,7 +3401,7 @@
           <a:p>
             <a:r>
               <a:rPr sz="800">
-                <a:hlinkClick r:id="rId5"/>
+                <a:hlinkClick r:id="rId6"/>
               </a:rPr>
               <a:t>Lofar 1</a:t>
             </a:r>
@@ -4778,7 +3411,7 @@
       <p:sp>
         <p:nvSpPr>
           <p:cNvPr id="7" name="Rounded Rectangle 6">
-            <a:hlinkClick r:id="rId6"/>
+            <a:hlinkClick r:id="rId7"/>
           </p:cNvPr>
           <p:cNvSpPr/>
           <p:nvPr/>
@@ -4825,7 +3458,7 @@
                   <a:srgbClr val="1F3A5F"/>
                 </a:solidFill>
               </a:rPr>
-              <a:t>Gram 22: FR Venator-class, Category 4, Coruscant</a:t>
+              <a:t>Gram 4: Enterprise contact bearing 291, codename Hoth</a:t>
             </a:r>
           </a:p>
         </p:txBody>
@@ -4854,7 +3487,7 @@
           <a:p>
             <a:r>
               <a:rPr sz="800">
-                <a:hlinkClick r:id="rId7"/>
+                <a:hlinkClick r:id="rId8"/>
               </a:rPr>
               <a:t>Lofar 1</a:t>
             </a:r>
@@ -4864,7 +3497,7 @@
       <p:sp>
         <p:nvSpPr>
           <p:cNvPr id="9" name="Rounded Rectangle 8">
-            <a:hlinkClick r:id="rId8"/>
+            <a:hlinkClick r:id="rId9"/>
           </p:cNvPr>
           <p:cNvSpPr/>
           <p:nvPr/>
@@ -4911,7 +3544,7 @@
                   <a:srgbClr val="1F3A5F"/>
                 </a:solidFill>
               </a:rPr>
-              <a:t>Gram 23: X-wing contact bearing 097, codename Tantive</a:t>
+              <a:t>Gram 5: FR Enterprise, Category 4, Bespin</a:t>
             </a:r>
           </a:p>
         </p:txBody>
@@ -4940,7 +3573,7 @@
           <a:p>
             <a:r>
               <a:rPr sz="800">
-                <a:hlinkClick r:id="rId9"/>
+                <a:hlinkClick r:id="rId10"/>
               </a:rPr>
               <a:t>Lofar 1</a:t>
             </a:r>
@@ -4950,7 +3583,7 @@
       <p:sp>
         <p:nvSpPr>
           <p:cNvPr id="11" name="Rounded Rectangle 10">
-            <a:hlinkClick r:id="rId10"/>
+            <a:hlinkClick r:id="rId11"/>
           </p:cNvPr>
           <p:cNvSpPr/>
           <p:nvPr/>
@@ -4997,7 +3630,7 @@
                   <a:srgbClr val="1F3A5F"/>
                 </a:solidFill>
               </a:rPr>
-              <a:t>Gram 24: FR X-wing, Category 4, Naboo</a:t>
+              <a:t>Gram 6: FR Akira-class, Category 4, Hoth</a:t>
             </a:r>
           </a:p>
         </p:txBody>
@@ -5026,33 +3659,17 @@
           <a:p>
             <a:r>
               <a:rPr sz="800">
-                <a:hlinkClick r:id="rId11"/>
+                <a:hlinkClick r:id="rId12"/>
               </a:rPr>
               <a:t>Lofar 1</a:t>
             </a:r>
           </a:p>
-          <a:p>
-            <a:r>
-              <a:rPr sz="800">
-                <a:hlinkClick r:id="rId12"/>
-              </a:rPr>
-              <a:t>Lofar 2</a:t>
-            </a:r>
-          </a:p>
-          <a:p>
-            <a:r>
-              <a:rPr sz="800">
-                <a:hlinkClick r:id="rId13"/>
-              </a:rPr>
-              <a:t>Lofar 3</a:t>
-            </a:r>
-          </a:p>
         </p:txBody>
       </p:sp>
       <p:sp>
         <p:nvSpPr>
           <p:cNvPr id="13" name="Rounded Rectangle 12">
-            <a:hlinkClick r:id="rId14"/>
+            <a:hlinkClick r:id="rId13"/>
           </p:cNvPr>
           <p:cNvSpPr/>
           <p:nvPr/>
@@ -5099,7 +3716,7 @@
                   <a:srgbClr val="1F3A5F"/>
                 </a:solidFill>
               </a:rPr>
-              <a:t>Gram 25: FR Defiant, Category 2, Endor</a:t>
+              <a:t>Gram 7: FR Rebel One, Category 1, Naboo</a:t>
             </a:r>
           </a:p>
         </p:txBody>
@@ -5128,16 +3745,16 @@
           <a:p>
             <a:r>
               <a:rPr sz="800">
+                <a:hlinkClick r:id="rId14"/>
+              </a:rPr>
+              <a:t>Lofar 1</a:t>
+            </a:r>
+          </a:p>
+          <a:p>
+            <a:r>
+              <a:rPr sz="800">
                 <a:hlinkClick r:id="rId15"/>
               </a:rPr>
-              <a:t>Lofar 1</a:t>
-            </a:r>
-          </a:p>
-          <a:p>
-            <a:r>
-              <a:rPr sz="800">
-                <a:hlinkClick r:id="rId16"/>
-              </a:rPr>
               <a:t>Lofar 2</a:t>
             </a:r>
           </a:p>
@@ -5146,7 +3763,7 @@
       <p:sp>
         <p:nvSpPr>
           <p:cNvPr id="15" name="Rounded Rectangle 14">
-            <a:hlinkClick r:id="rId17"/>
+            <a:hlinkClick r:id="rId16"/>
           </p:cNvPr>
           <p:cNvSpPr/>
           <p:nvPr/>
@@ -5193,7 +3810,7 @@
                   <a:srgbClr val="1F3A5F"/>
                 </a:solidFill>
               </a:rPr>
-              <a:t>Gram 26: FR Defiant, Category 2, Naboo</a:t>
+              <a:t>Gram 8: FR TIE Bomber, Category 4, Kronos</a:t>
             </a:r>
           </a:p>
         </p:txBody>
@@ -5222,41 +3839,17 @@
           <a:p>
             <a:r>
               <a:rPr sz="800">
-                <a:hlinkClick r:id="rId18"/>
+                <a:hlinkClick r:id="rId17"/>
               </a:rPr>
               <a:t>Lofar 1</a:t>
             </a:r>
           </a:p>
-          <a:p>
-            <a:r>
-              <a:rPr sz="800">
-                <a:hlinkClick r:id="rId19"/>
-              </a:rPr>
-              <a:t>Lofar 2</a:t>
-            </a:r>
-          </a:p>
-          <a:p>
-            <a:r>
-              <a:rPr sz="800">
-                <a:hlinkClick r:id="rId20"/>
-              </a:rPr>
-              <a:t>Lofar 3</a:t>
-            </a:r>
-          </a:p>
-          <a:p>
-            <a:r>
-              <a:rPr sz="800">
-                <a:hlinkClick r:id="rId21"/>
-              </a:rPr>
-              <a:t>Lofar 4</a:t>
-            </a:r>
-          </a:p>
         </p:txBody>
       </p:sp>
       <p:sp>
         <p:nvSpPr>
           <p:cNvPr id="17" name="Rounded Rectangle 16">
-            <a:hlinkClick r:id="rId22"/>
+            <a:hlinkClick r:id="rId18"/>
           </p:cNvPr>
           <p:cNvSpPr/>
           <p:nvPr/>
@@ -5303,7 +3896,7 @@
                   <a:srgbClr val="1F3A5F"/>
                 </a:solidFill>
               </a:rPr>
-              <a:t>Gram 27: Y-wing contact bearing 197, codename Dagobah</a:t>
+              <a:t>Gram 9: FR Star Destroyer, Category 1, Tatooine</a:t>
             </a:r>
           </a:p>
         </p:txBody>
@@ -5332,33 +3925,17 @@
           <a:p>
             <a:r>
               <a:rPr sz="800">
-                <a:hlinkClick r:id="rId23"/>
+                <a:hlinkClick r:id="rId19"/>
               </a:rPr>
               <a:t>Lofar 1</a:t>
             </a:r>
           </a:p>
-          <a:p>
-            <a:r>
-              <a:rPr sz="800">
-                <a:hlinkClick r:id="rId24"/>
-              </a:rPr>
-              <a:t>Lofar 2</a:t>
-            </a:r>
-          </a:p>
-          <a:p>
-            <a:r>
-              <a:rPr sz="800">
-                <a:hlinkClick r:id="rId25"/>
-              </a:rPr>
-              <a:t>Lofar 3</a:t>
-            </a:r>
-          </a:p>
         </p:txBody>
       </p:sp>
       <p:sp>
         <p:nvSpPr>
           <p:cNvPr id="19" name="Rounded Rectangle 18">
-            <a:hlinkClick r:id="rId26"/>
+            <a:hlinkClick r:id="rId20"/>
           </p:cNvPr>
           <p:cNvSpPr/>
           <p:nvPr/>
@@ -5405,7 +3982,7 @@
                   <a:srgbClr val="1F3A5F"/>
                 </a:solidFill>
               </a:rPr>
-              <a:t>Gram 28: FR Nebula-class, Category 1, Tantive</a:t>
+              <a:t>Gram 10: FR Stargazer, Category 3, Risa</a:t>
             </a:r>
           </a:p>
         </p:txBody>
@@ -5434,7 +4011,7 @@
           <a:p>
             <a:r>
               <a:rPr sz="800">
-                <a:hlinkClick r:id="rId27"/>
+                <a:hlinkClick r:id="rId21"/>
               </a:rPr>
               <a:t>Lofar 1</a:t>
             </a:r>
@@ -5442,7 +4019,7 @@
           <a:p>
             <a:r>
               <a:rPr sz="800">
-                <a:hlinkClick r:id="rId28"/>
+                <a:hlinkClick r:id="rId22"/>
               </a:rPr>
               <a:t>Lofar 2</a:t>
             </a:r>
@@ -5450,7 +4027,7 @@
           <a:p>
             <a:r>
               <a:rPr sz="800">
-                <a:hlinkClick r:id="rId29"/>
+                <a:hlinkClick r:id="rId23"/>
               </a:rPr>
               <a:t>Lofar 3</a:t>
             </a:r>
@@ -5458,7 +4035,7 @@
           <a:p>
             <a:r>
               <a:rPr sz="800">
-                <a:hlinkClick r:id="rId30"/>
+                <a:hlinkClick r:id="rId24"/>
               </a:rPr>
               <a:t>Lofar 4</a:t>
             </a:r>
@@ -5468,7 +4045,7 @@
       <p:sp>
         <p:nvSpPr>
           <p:cNvPr id="21" name="Rounded Rectangle 20">
-            <a:hlinkClick r:id="rId31"/>
+            <a:hlinkClick r:id="rId25"/>
           </p:cNvPr>
           <p:cNvSpPr/>
           <p:nvPr/>
@@ -5515,7 +4092,7 @@
                   <a:srgbClr val="1F3A5F"/>
                 </a:solidFill>
               </a:rPr>
-              <a:t>Gram 29: FR Akira-class, Category 2, Romulus</a:t>
+              <a:t>Gram 11: FR Imperial-class, Category 2, Caprica</a:t>
             </a:r>
           </a:p>
         </p:txBody>
@@ -5544,7 +4121,7 @@
           <a:p>
             <a:r>
               <a:rPr sz="800">
-                <a:hlinkClick r:id="rId32"/>
+                <a:hlinkClick r:id="rId26"/>
               </a:rPr>
               <a:t>Lofar 1</a:t>
             </a:r>
@@ -5552,25 +4129,17 @@
           <a:p>
             <a:r>
               <a:rPr sz="800">
-                <a:hlinkClick r:id="rId33"/>
+                <a:hlinkClick r:id="rId27"/>
               </a:rPr>
               <a:t>Lofar 2</a:t>
             </a:r>
           </a:p>
-          <a:p>
-            <a:r>
-              <a:rPr sz="800">
-                <a:hlinkClick r:id="rId34"/>
-              </a:rPr>
-              <a:t>Lofar 3</a:t>
-            </a:r>
-          </a:p>
         </p:txBody>
       </p:sp>
       <p:sp>
         <p:nvSpPr>
           <p:cNvPr id="23" name="Rounded Rectangle 22">
-            <a:hlinkClick r:id="rId35"/>
+            <a:hlinkClick r:id="rId28"/>
           </p:cNvPr>
           <p:cNvSpPr/>
           <p:nvPr/>
@@ -5617,7 +4186,7 @@
                   <a:srgbClr val="1F3A5F"/>
                 </a:solidFill>
               </a:rPr>
-              <a:t>Gram 30: Defiant-class contact bearing 058, codename Naboo</a:t>
+              <a:t>Gram 14: FR Tantive IV, Category 4, Trill</a:t>
             </a:r>
           </a:p>
         </p:txBody>
@@ -5646,41 +4215,17 @@
           <a:p>
             <a:r>
               <a:rPr sz="800">
-                <a:hlinkClick r:id="rId36"/>
+                <a:hlinkClick r:id="rId29"/>
               </a:rPr>
               <a:t>Lofar 1</a:t>
             </a:r>
           </a:p>
-          <a:p>
-            <a:r>
-              <a:rPr sz="800">
-                <a:hlinkClick r:id="rId37"/>
-              </a:rPr>
-              <a:t>Lofar 2</a:t>
-            </a:r>
-          </a:p>
-          <a:p>
-            <a:r>
-              <a:rPr sz="800">
-                <a:hlinkClick r:id="rId38"/>
-              </a:rPr>
-              <a:t>Lofar 3</a:t>
-            </a:r>
-          </a:p>
-          <a:p>
-            <a:r>
-              <a:rPr sz="800">
-                <a:hlinkClick r:id="rId39"/>
-              </a:rPr>
-              <a:t>Lofar 4</a:t>
-            </a:r>
-          </a:p>
         </p:txBody>
       </p:sp>
       <p:sp>
         <p:nvSpPr>
           <p:cNvPr id="25" name="Rounded Rectangle 24">
-            <a:hlinkClick r:id="rId40"/>
+            <a:hlinkClick r:id="rId30"/>
           </p:cNvPr>
           <p:cNvSpPr/>
           <p:nvPr/>
@@ -5727,7 +4272,7 @@
                   <a:srgbClr val="1F3A5F"/>
                 </a:solidFill>
               </a:rPr>
-              <a:t>Gram 31: Imperial-class contact bearing 170, codename Tantive</a:t>
+              <a:t>Gram 16: Corellian Corvette contact bearing 224, codename Vulcan</a:t>
             </a:r>
           </a:p>
         </p:txBody>
@@ -5756,7 +4301,7 @@
           <a:p>
             <a:r>
               <a:rPr sz="800">
-                <a:hlinkClick r:id="rId41"/>
+                <a:hlinkClick r:id="rId31"/>
               </a:rPr>
               <a:t>Lofar 1</a:t>
             </a:r>
@@ -5764,17 +4309,33 @@
           <a:p>
             <a:r>
               <a:rPr sz="800">
-                <a:hlinkClick r:id="rId42"/>
+                <a:hlinkClick r:id="rId32"/>
               </a:rPr>
               <a:t>Lofar 2</a:t>
             </a:r>
           </a:p>
+          <a:p>
+            <a:r>
+              <a:rPr sz="800">
+                <a:hlinkClick r:id="rId33"/>
+              </a:rPr>
+              <a:t>Lofar 3</a:t>
+            </a:r>
+          </a:p>
+          <a:p>
+            <a:r>
+              <a:rPr sz="800">
+                <a:hlinkClick r:id="rId34"/>
+              </a:rPr>
+              <a:t>Lofar 4</a:t>
+            </a:r>
+          </a:p>
         </p:txBody>
       </p:sp>
       <p:sp>
         <p:nvSpPr>
           <p:cNvPr id="27" name="Rounded Rectangle 26">
-            <a:hlinkClick r:id="rId43"/>
+            <a:hlinkClick r:id="rId35"/>
           </p:cNvPr>
           <p:cNvSpPr/>
           <p:nvPr/>
@@ -5821,7 +4382,7 @@
                   <a:srgbClr val="1F3A5F"/>
                 </a:solidFill>
               </a:rPr>
-              <a:t>Gram 32: FR A-wing, Category 4, Naboo</a:t>
+              <a:t>Gram 17: FR Outrider, Category 3, Cardassia</a:t>
             </a:r>
           </a:p>
         </p:txBody>
@@ -5850,7 +4411,7 @@
           <a:p>
             <a:r>
               <a:rPr sz="800">
-                <a:hlinkClick r:id="rId44"/>
+                <a:hlinkClick r:id="rId36"/>
               </a:rPr>
               <a:t>Lofar 1</a:t>
             </a:r>
@@ -5858,7 +4419,7 @@
           <a:p>
             <a:r>
               <a:rPr sz="800">
-                <a:hlinkClick r:id="rId45"/>
+                <a:hlinkClick r:id="rId37"/>
               </a:rPr>
               <a:t>Lofar 2</a:t>
             </a:r>
@@ -5868,7 +4429,7 @@
       <p:sp>
         <p:nvSpPr>
           <p:cNvPr id="29" name="Rounded Rectangle 28">
-            <a:hlinkClick r:id="rId46"/>
+            <a:hlinkClick r:id="rId38"/>
           </p:cNvPr>
           <p:cNvSpPr/>
           <p:nvPr/>
@@ -5915,7 +4476,7 @@
                   <a:srgbClr val="1F3A5F"/>
                 </a:solidFill>
               </a:rPr>
-              <a:t>Gram 33: FR Rebel One, Category 3, Tatooine</a:t>
+              <a:t>Gram 18: FR Razor Crest, Category 2, Gandalf</a:t>
             </a:r>
           </a:p>
         </p:txBody>
@@ -5944,7 +4505,7 @@
           <a:p>
             <a:r>
               <a:rPr sz="800">
-                <a:hlinkClick r:id="rId47"/>
+                <a:hlinkClick r:id="rId39"/>
               </a:rPr>
               <a:t>Lofar 1</a:t>
             </a:r>
@@ -5952,7 +4513,7 @@
           <a:p>
             <a:r>
               <a:rPr sz="800">
-                <a:hlinkClick r:id="rId48"/>
+                <a:hlinkClick r:id="rId40"/>
               </a:rPr>
               <a:t>Lofar 2</a:t>
             </a:r>
@@ -5960,17 +4521,25 @@
           <a:p>
             <a:r>
               <a:rPr sz="800">
-                <a:hlinkClick r:id="rId49"/>
+                <a:hlinkClick r:id="rId41"/>
               </a:rPr>
               <a:t>Lofar 3</a:t>
             </a:r>
           </a:p>
+          <a:p>
+            <a:r>
+              <a:rPr sz="800">
+                <a:hlinkClick r:id="rId42"/>
+              </a:rPr>
+              <a:t>Lofar 4</a:t>
+            </a:r>
+          </a:p>
         </p:txBody>
       </p:sp>
       <p:sp>
         <p:nvSpPr>
           <p:cNvPr id="31" name="Rounded Rectangle 30">
-            <a:hlinkClick r:id="rId50"/>
+            <a:hlinkClick r:id="rId43"/>
           </p:cNvPr>
           <p:cNvSpPr/>
           <p:nvPr/>
@@ -6017,7 +4586,7 @@
                   <a:srgbClr val="1F3A5F"/>
                 </a:solidFill>
               </a:rPr>
-              <a:t>Gram 36: Rebel One contact bearing 103, codename Tatooine</a:t>
+              <a:t>Gram 19: FR Ghost, Category 1, Romulus</a:t>
             </a:r>
           </a:p>
         </p:txBody>
@@ -6046,6 +4615,1525 @@
           <a:p>
             <a:r>
               <a:rPr sz="800">
+                <a:hlinkClick r:id="rId44"/>
+              </a:rPr>
+              <a:t>Lofar 1</a:t>
+            </a:r>
+          </a:p>
+        </p:txBody>
+      </p:sp>
+    </p:spTree>
+  </p:cSld>
+  <p:clrMapOvr>
+    <a:masterClrMapping/>
+  </p:clrMapOvr>
+</p:sld>
+</file>
+
+<file path=ppt/slides/slide3.xml><?xml version="1.0" encoding="utf-8"?>
+<p:sld xmlns:a="http://schemas.openxmlformats.org/drawingml/2006/main" xmlns:p="http://schemas.openxmlformats.org/presentationml/2006/main" xmlns:r="http://schemas.openxmlformats.org/officeDocument/2006/relationships">
+  <p:cSld>
+    <p:spTree>
+      <p:nvGrpSpPr>
+        <p:cNvPr id="1" name=""/>
+        <p:cNvGrpSpPr/>
+        <p:nvPr/>
+      </p:nvGrpSpPr>
+      <p:grpSpPr/>
+      <p:sp>
+        <p:nvSpPr>
+          <p:cNvPr id="2" name="Rectangle 1"/>
+          <p:cNvSpPr/>
+          <p:nvPr/>
+        </p:nvSpPr>
+        <p:spPr>
+          <a:xfrm>
+            <a:off x="0" y="0"/>
+            <a:ext cx="12188952" cy="548640"/>
+          </a:xfrm>
+          <a:prstGeom prst="rect">
+            <a:avLst/>
+          </a:prstGeom>
+          <a:solidFill>
+            <a:srgbClr val="1F3A5F"/>
+          </a:solidFill>
+          <a:ln>
+            <a:noFill/>
+          </a:ln>
+        </p:spPr>
+        <p:style>
+          <a:lnRef idx="1">
+            <a:schemeClr val="accent1"/>
+          </a:lnRef>
+          <a:fillRef idx="3">
+            <a:schemeClr val="accent1"/>
+          </a:fillRef>
+          <a:effectRef idx="2">
+            <a:schemeClr val="accent1"/>
+          </a:effectRef>
+          <a:fontRef idx="minor">
+            <a:schemeClr val="lt1"/>
+          </a:fontRef>
+        </p:style>
+        <p:txBody>
+          <a:bodyPr rtlCol="0" anchor="ctr" lIns="182880" rIns="182880"/>
+          <a:lstStyle/>
+          <a:p>
+            <a:pPr algn="ctr"/>
+            <a:r>
+              <a:rPr sz="2000" b="1">
+                <a:solidFill>
+                  <a:srgbClr val="FFFFFF"/>
+                </a:solidFill>
+              </a:rPr>
+              <a:t>Instructor Progress Test 1 Grams — Page 2 of 2</a:t>
+            </a:r>
+          </a:p>
+        </p:txBody>
+      </p:sp>
+      <p:sp>
+        <p:nvSpPr>
+          <p:cNvPr id="3" name="Rounded Rectangle 2">
+            <a:hlinkClick r:id="rId2"/>
+          </p:cNvPr>
+          <p:cNvSpPr/>
+          <p:nvPr/>
+        </p:nvSpPr>
+        <p:spPr>
+          <a:xfrm>
+            <a:off x="365760" y="731520"/>
+            <a:ext cx="2200046" cy="365760"/>
+          </a:xfrm>
+          <a:prstGeom prst="roundRect">
+            <a:avLst/>
+          </a:prstGeom>
+          <a:solidFill>
+            <a:srgbClr val="E8EEF7"/>
+          </a:solidFill>
+          <a:ln>
+            <a:solidFill>
+              <a:srgbClr val="1F3A5F"/>
+            </a:solidFill>
+          </a:ln>
+        </p:spPr>
+        <p:style>
+          <a:lnRef idx="1">
+            <a:schemeClr val="accent1"/>
+          </a:lnRef>
+          <a:fillRef idx="3">
+            <a:schemeClr val="accent1"/>
+          </a:fillRef>
+          <a:effectRef idx="2">
+            <a:schemeClr val="accent1"/>
+          </a:effectRef>
+          <a:fontRef idx="minor">
+            <a:schemeClr val="lt1"/>
+          </a:fontRef>
+        </p:style>
+        <p:txBody>
+          <a:bodyPr rtlCol="0" anchor="ctr" lIns="45720" rIns="45720"/>
+          <a:lstStyle/>
+          <a:p>
+            <a:pPr algn="ctr"/>
+            <a:r>
+              <a:rPr sz="900">
+                <a:solidFill>
+                  <a:srgbClr val="1F3A5F"/>
+                </a:solidFill>
+              </a:rPr>
+              <a:t>Gram 20: FR Nebulon-B, Category 3, Mustafar</a:t>
+            </a:r>
+          </a:p>
+        </p:txBody>
+      </p:sp>
+      <p:sp>
+        <p:nvSpPr>
+          <p:cNvPr id="4" name="TextBox 3"/>
+          <p:cNvSpPr txBox="1"/>
+          <p:nvPr/>
+        </p:nvSpPr>
+        <p:spPr>
+          <a:xfrm>
+            <a:off x="365760" y="1115568"/>
+            <a:ext cx="2200046" cy="1447800"/>
+          </a:xfrm>
+          <a:prstGeom prst="rect">
+            <a:avLst/>
+          </a:prstGeom>
+          <a:noFill/>
+        </p:spPr>
+        <p:txBody>
+          <a:bodyPr wrap="square">
+            <a:spAutoFit/>
+          </a:bodyPr>
+          <a:lstStyle/>
+          <a:p>
+            <a:r>
+              <a:rPr sz="800">
+                <a:hlinkClick r:id="rId3"/>
+              </a:rPr>
+              <a:t>Lofar 1</a:t>
+            </a:r>
+          </a:p>
+        </p:txBody>
+      </p:sp>
+      <p:sp>
+        <p:nvSpPr>
+          <p:cNvPr id="5" name="Rounded Rectangle 4">
+            <a:hlinkClick r:id="rId4"/>
+          </p:cNvPr>
+          <p:cNvSpPr/>
+          <p:nvPr/>
+        </p:nvSpPr>
+        <p:spPr>
+          <a:xfrm>
+            <a:off x="2657246" y="731520"/>
+            <a:ext cx="2200046" cy="365760"/>
+          </a:xfrm>
+          <a:prstGeom prst="roundRect">
+            <a:avLst/>
+          </a:prstGeom>
+          <a:solidFill>
+            <a:srgbClr val="E8EEF7"/>
+          </a:solidFill>
+          <a:ln>
+            <a:solidFill>
+              <a:srgbClr val="1F3A5F"/>
+            </a:solidFill>
+          </a:ln>
+        </p:spPr>
+        <p:style>
+          <a:lnRef idx="1">
+            <a:schemeClr val="accent1"/>
+          </a:lnRef>
+          <a:fillRef idx="3">
+            <a:schemeClr val="accent1"/>
+          </a:fillRef>
+          <a:effectRef idx="2">
+            <a:schemeClr val="accent1"/>
+          </a:effectRef>
+          <a:fontRef idx="minor">
+            <a:schemeClr val="lt1"/>
+          </a:fontRef>
+        </p:style>
+        <p:txBody>
+          <a:bodyPr rtlCol="0" anchor="ctr" lIns="45720" rIns="45720"/>
+          <a:lstStyle/>
+          <a:p>
+            <a:pPr algn="ctr"/>
+            <a:r>
+              <a:rPr sz="900">
+                <a:solidFill>
+                  <a:srgbClr val="1F3A5F"/>
+                </a:solidFill>
+              </a:rPr>
+              <a:t>Gram 21: Outrider contact bearing 131, codename Yavin</a:t>
+            </a:r>
+          </a:p>
+        </p:txBody>
+      </p:sp>
+      <p:sp>
+        <p:nvSpPr>
+          <p:cNvPr id="6" name="TextBox 5"/>
+          <p:cNvSpPr txBox="1"/>
+          <p:nvPr/>
+        </p:nvSpPr>
+        <p:spPr>
+          <a:xfrm>
+            <a:off x="2657246" y="1115568"/>
+            <a:ext cx="2200046" cy="1447800"/>
+          </a:xfrm>
+          <a:prstGeom prst="rect">
+            <a:avLst/>
+          </a:prstGeom>
+          <a:noFill/>
+        </p:spPr>
+        <p:txBody>
+          <a:bodyPr wrap="square">
+            <a:spAutoFit/>
+          </a:bodyPr>
+          <a:lstStyle/>
+          <a:p>
+            <a:r>
+              <a:rPr sz="800">
+                <a:hlinkClick r:id="rId5"/>
+              </a:rPr>
+              <a:t>Lofar 1</a:t>
+            </a:r>
+          </a:p>
+        </p:txBody>
+      </p:sp>
+      <p:sp>
+        <p:nvSpPr>
+          <p:cNvPr id="7" name="Rounded Rectangle 6">
+            <a:hlinkClick r:id="rId6"/>
+          </p:cNvPr>
+          <p:cNvSpPr/>
+          <p:nvPr/>
+        </p:nvSpPr>
+        <p:spPr>
+          <a:xfrm>
+            <a:off x="4948732" y="731520"/>
+            <a:ext cx="2200046" cy="365760"/>
+          </a:xfrm>
+          <a:prstGeom prst="roundRect">
+            <a:avLst/>
+          </a:prstGeom>
+          <a:solidFill>
+            <a:srgbClr val="E8EEF7"/>
+          </a:solidFill>
+          <a:ln>
+            <a:solidFill>
+              <a:srgbClr val="1F3A5F"/>
+            </a:solidFill>
+          </a:ln>
+        </p:spPr>
+        <p:style>
+          <a:lnRef idx="1">
+            <a:schemeClr val="accent1"/>
+          </a:lnRef>
+          <a:fillRef idx="3">
+            <a:schemeClr val="accent1"/>
+          </a:fillRef>
+          <a:effectRef idx="2">
+            <a:schemeClr val="accent1"/>
+          </a:effectRef>
+          <a:fontRef idx="minor">
+            <a:schemeClr val="lt1"/>
+          </a:fontRef>
+        </p:style>
+        <p:txBody>
+          <a:bodyPr rtlCol="0" anchor="ctr" lIns="45720" rIns="45720"/>
+          <a:lstStyle/>
+          <a:p>
+            <a:pPr algn="ctr"/>
+            <a:r>
+              <a:rPr sz="900">
+                <a:solidFill>
+                  <a:srgbClr val="1F3A5F"/>
+                </a:solidFill>
+              </a:rPr>
+              <a:t>Gram 22: FR Venator-class, Category 4, Coruscant</a:t>
+            </a:r>
+          </a:p>
+        </p:txBody>
+      </p:sp>
+      <p:sp>
+        <p:nvSpPr>
+          <p:cNvPr id="8" name="TextBox 7"/>
+          <p:cNvSpPr txBox="1"/>
+          <p:nvPr/>
+        </p:nvSpPr>
+        <p:spPr>
+          <a:xfrm>
+            <a:off x="4948732" y="1115568"/>
+            <a:ext cx="2200046" cy="1447800"/>
+          </a:xfrm>
+          <a:prstGeom prst="rect">
+            <a:avLst/>
+          </a:prstGeom>
+          <a:noFill/>
+        </p:spPr>
+        <p:txBody>
+          <a:bodyPr wrap="square">
+            <a:spAutoFit/>
+          </a:bodyPr>
+          <a:lstStyle/>
+          <a:p>
+            <a:r>
+              <a:rPr sz="800">
+                <a:hlinkClick r:id="rId7"/>
+              </a:rPr>
+              <a:t>Lofar 1</a:t>
+            </a:r>
+          </a:p>
+        </p:txBody>
+      </p:sp>
+      <p:sp>
+        <p:nvSpPr>
+          <p:cNvPr id="9" name="Rounded Rectangle 8">
+            <a:hlinkClick r:id="rId8"/>
+          </p:cNvPr>
+          <p:cNvSpPr/>
+          <p:nvPr/>
+        </p:nvSpPr>
+        <p:spPr>
+          <a:xfrm>
+            <a:off x="7240219" y="731520"/>
+            <a:ext cx="2200046" cy="365760"/>
+          </a:xfrm>
+          <a:prstGeom prst="roundRect">
+            <a:avLst/>
+          </a:prstGeom>
+          <a:solidFill>
+            <a:srgbClr val="E8EEF7"/>
+          </a:solidFill>
+          <a:ln>
+            <a:solidFill>
+              <a:srgbClr val="1F3A5F"/>
+            </a:solidFill>
+          </a:ln>
+        </p:spPr>
+        <p:style>
+          <a:lnRef idx="1">
+            <a:schemeClr val="accent1"/>
+          </a:lnRef>
+          <a:fillRef idx="3">
+            <a:schemeClr val="accent1"/>
+          </a:fillRef>
+          <a:effectRef idx="2">
+            <a:schemeClr val="accent1"/>
+          </a:effectRef>
+          <a:fontRef idx="minor">
+            <a:schemeClr val="lt1"/>
+          </a:fontRef>
+        </p:style>
+        <p:txBody>
+          <a:bodyPr rtlCol="0" anchor="ctr" lIns="45720" rIns="45720"/>
+          <a:lstStyle/>
+          <a:p>
+            <a:pPr algn="ctr"/>
+            <a:r>
+              <a:rPr sz="900">
+                <a:solidFill>
+                  <a:srgbClr val="1F3A5F"/>
+                </a:solidFill>
+              </a:rPr>
+              <a:t>Gram 23: X-wing contact bearing 097, codename Tantive</a:t>
+            </a:r>
+          </a:p>
+        </p:txBody>
+      </p:sp>
+      <p:sp>
+        <p:nvSpPr>
+          <p:cNvPr id="10" name="TextBox 9"/>
+          <p:cNvSpPr txBox="1"/>
+          <p:nvPr/>
+        </p:nvSpPr>
+        <p:spPr>
+          <a:xfrm>
+            <a:off x="7240219" y="1115568"/>
+            <a:ext cx="2200046" cy="1447800"/>
+          </a:xfrm>
+          <a:prstGeom prst="rect">
+            <a:avLst/>
+          </a:prstGeom>
+          <a:noFill/>
+        </p:spPr>
+        <p:txBody>
+          <a:bodyPr wrap="square">
+            <a:spAutoFit/>
+          </a:bodyPr>
+          <a:lstStyle/>
+          <a:p>
+            <a:r>
+              <a:rPr sz="800">
+                <a:hlinkClick r:id="rId9"/>
+              </a:rPr>
+              <a:t>Lofar 1</a:t>
+            </a:r>
+          </a:p>
+        </p:txBody>
+      </p:sp>
+      <p:sp>
+        <p:nvSpPr>
+          <p:cNvPr id="11" name="Rounded Rectangle 10">
+            <a:hlinkClick r:id="rId10"/>
+          </p:cNvPr>
+          <p:cNvSpPr/>
+          <p:nvPr/>
+        </p:nvSpPr>
+        <p:spPr>
+          <a:xfrm>
+            <a:off x="9531705" y="731520"/>
+            <a:ext cx="2200046" cy="365760"/>
+          </a:xfrm>
+          <a:prstGeom prst="roundRect">
+            <a:avLst/>
+          </a:prstGeom>
+          <a:solidFill>
+            <a:srgbClr val="E8EEF7"/>
+          </a:solidFill>
+          <a:ln>
+            <a:solidFill>
+              <a:srgbClr val="1F3A5F"/>
+            </a:solidFill>
+          </a:ln>
+        </p:spPr>
+        <p:style>
+          <a:lnRef idx="1">
+            <a:schemeClr val="accent1"/>
+          </a:lnRef>
+          <a:fillRef idx="3">
+            <a:schemeClr val="accent1"/>
+          </a:fillRef>
+          <a:effectRef idx="2">
+            <a:schemeClr val="accent1"/>
+          </a:effectRef>
+          <a:fontRef idx="minor">
+            <a:schemeClr val="lt1"/>
+          </a:fontRef>
+        </p:style>
+        <p:txBody>
+          <a:bodyPr rtlCol="0" anchor="ctr" lIns="45720" rIns="45720"/>
+          <a:lstStyle/>
+          <a:p>
+            <a:pPr algn="ctr"/>
+            <a:r>
+              <a:rPr sz="900">
+                <a:solidFill>
+                  <a:srgbClr val="1F3A5F"/>
+                </a:solidFill>
+              </a:rPr>
+              <a:t>Gram 24: FR X-wing, Category 4, Naboo</a:t>
+            </a:r>
+          </a:p>
+        </p:txBody>
+      </p:sp>
+      <p:sp>
+        <p:nvSpPr>
+          <p:cNvPr id="12" name="TextBox 11"/>
+          <p:cNvSpPr txBox="1"/>
+          <p:nvPr/>
+        </p:nvSpPr>
+        <p:spPr>
+          <a:xfrm>
+            <a:off x="9531705" y="1115568"/>
+            <a:ext cx="2200046" cy="1447800"/>
+          </a:xfrm>
+          <a:prstGeom prst="rect">
+            <a:avLst/>
+          </a:prstGeom>
+          <a:noFill/>
+        </p:spPr>
+        <p:txBody>
+          <a:bodyPr wrap="square">
+            <a:spAutoFit/>
+          </a:bodyPr>
+          <a:lstStyle/>
+          <a:p>
+            <a:r>
+              <a:rPr sz="800">
+                <a:hlinkClick r:id="rId11"/>
+              </a:rPr>
+              <a:t>Lofar 1</a:t>
+            </a:r>
+          </a:p>
+          <a:p>
+            <a:r>
+              <a:rPr sz="800">
+                <a:hlinkClick r:id="rId12"/>
+              </a:rPr>
+              <a:t>Lofar 2</a:t>
+            </a:r>
+          </a:p>
+          <a:p>
+            <a:r>
+              <a:rPr sz="800">
+                <a:hlinkClick r:id="rId13"/>
+              </a:rPr>
+              <a:t>Lofar 3</a:t>
+            </a:r>
+          </a:p>
+        </p:txBody>
+      </p:sp>
+      <p:sp>
+        <p:nvSpPr>
+          <p:cNvPr id="13" name="Rounded Rectangle 12">
+            <a:hlinkClick r:id="rId14"/>
+          </p:cNvPr>
+          <p:cNvSpPr/>
+          <p:nvPr/>
+        </p:nvSpPr>
+        <p:spPr>
+          <a:xfrm>
+            <a:off x="365760" y="2682240"/>
+            <a:ext cx="2200046" cy="365760"/>
+          </a:xfrm>
+          <a:prstGeom prst="roundRect">
+            <a:avLst/>
+          </a:prstGeom>
+          <a:solidFill>
+            <a:srgbClr val="E8EEF7"/>
+          </a:solidFill>
+          <a:ln>
+            <a:solidFill>
+              <a:srgbClr val="1F3A5F"/>
+            </a:solidFill>
+          </a:ln>
+        </p:spPr>
+        <p:style>
+          <a:lnRef idx="1">
+            <a:schemeClr val="accent1"/>
+          </a:lnRef>
+          <a:fillRef idx="3">
+            <a:schemeClr val="accent1"/>
+          </a:fillRef>
+          <a:effectRef idx="2">
+            <a:schemeClr val="accent1"/>
+          </a:effectRef>
+          <a:fontRef idx="minor">
+            <a:schemeClr val="lt1"/>
+          </a:fontRef>
+        </p:style>
+        <p:txBody>
+          <a:bodyPr rtlCol="0" anchor="ctr" lIns="45720" rIns="45720"/>
+          <a:lstStyle/>
+          <a:p>
+            <a:pPr algn="ctr"/>
+            <a:r>
+              <a:rPr sz="900">
+                <a:solidFill>
+                  <a:srgbClr val="1F3A5F"/>
+                </a:solidFill>
+              </a:rPr>
+              <a:t>Gram 25: FR Defiant, Category 2, Endor</a:t>
+            </a:r>
+          </a:p>
+        </p:txBody>
+      </p:sp>
+      <p:sp>
+        <p:nvSpPr>
+          <p:cNvPr id="14" name="TextBox 13"/>
+          <p:cNvSpPr txBox="1"/>
+          <p:nvPr/>
+        </p:nvSpPr>
+        <p:spPr>
+          <a:xfrm>
+            <a:off x="365760" y="3066288"/>
+            <a:ext cx="2200046" cy="1447800"/>
+          </a:xfrm>
+          <a:prstGeom prst="rect">
+            <a:avLst/>
+          </a:prstGeom>
+          <a:noFill/>
+        </p:spPr>
+        <p:txBody>
+          <a:bodyPr wrap="square">
+            <a:spAutoFit/>
+          </a:bodyPr>
+          <a:lstStyle/>
+          <a:p>
+            <a:r>
+              <a:rPr sz="800">
+                <a:hlinkClick r:id="rId15"/>
+              </a:rPr>
+              <a:t>Lofar 1</a:t>
+            </a:r>
+          </a:p>
+          <a:p>
+            <a:r>
+              <a:rPr sz="800">
+                <a:hlinkClick r:id="rId16"/>
+              </a:rPr>
+              <a:t>Lofar 2</a:t>
+            </a:r>
+          </a:p>
+        </p:txBody>
+      </p:sp>
+      <p:sp>
+        <p:nvSpPr>
+          <p:cNvPr id="15" name="Rounded Rectangle 14">
+            <a:hlinkClick r:id="rId17"/>
+          </p:cNvPr>
+          <p:cNvSpPr/>
+          <p:nvPr/>
+        </p:nvSpPr>
+        <p:spPr>
+          <a:xfrm>
+            <a:off x="2657246" y="2682240"/>
+            <a:ext cx="2200046" cy="365760"/>
+          </a:xfrm>
+          <a:prstGeom prst="roundRect">
+            <a:avLst/>
+          </a:prstGeom>
+          <a:solidFill>
+            <a:srgbClr val="E8EEF7"/>
+          </a:solidFill>
+          <a:ln>
+            <a:solidFill>
+              <a:srgbClr val="1F3A5F"/>
+            </a:solidFill>
+          </a:ln>
+        </p:spPr>
+        <p:style>
+          <a:lnRef idx="1">
+            <a:schemeClr val="accent1"/>
+          </a:lnRef>
+          <a:fillRef idx="3">
+            <a:schemeClr val="accent1"/>
+          </a:fillRef>
+          <a:effectRef idx="2">
+            <a:schemeClr val="accent1"/>
+          </a:effectRef>
+          <a:fontRef idx="minor">
+            <a:schemeClr val="lt1"/>
+          </a:fontRef>
+        </p:style>
+        <p:txBody>
+          <a:bodyPr rtlCol="0" anchor="ctr" lIns="45720" rIns="45720"/>
+          <a:lstStyle/>
+          <a:p>
+            <a:pPr algn="ctr"/>
+            <a:r>
+              <a:rPr sz="900">
+                <a:solidFill>
+                  <a:srgbClr val="1F3A5F"/>
+                </a:solidFill>
+              </a:rPr>
+              <a:t>Gram 26: FR Defiant, Category 2, Naboo</a:t>
+            </a:r>
+          </a:p>
+        </p:txBody>
+      </p:sp>
+      <p:sp>
+        <p:nvSpPr>
+          <p:cNvPr id="16" name="TextBox 15"/>
+          <p:cNvSpPr txBox="1"/>
+          <p:nvPr/>
+        </p:nvSpPr>
+        <p:spPr>
+          <a:xfrm>
+            <a:off x="2657246" y="3066288"/>
+            <a:ext cx="2200046" cy="1447800"/>
+          </a:xfrm>
+          <a:prstGeom prst="rect">
+            <a:avLst/>
+          </a:prstGeom>
+          <a:noFill/>
+        </p:spPr>
+        <p:txBody>
+          <a:bodyPr wrap="square">
+            <a:spAutoFit/>
+          </a:bodyPr>
+          <a:lstStyle/>
+          <a:p>
+            <a:r>
+              <a:rPr sz="800">
+                <a:hlinkClick r:id="rId18"/>
+              </a:rPr>
+              <a:t>Lofar 1</a:t>
+            </a:r>
+          </a:p>
+          <a:p>
+            <a:r>
+              <a:rPr sz="800">
+                <a:hlinkClick r:id="rId19"/>
+              </a:rPr>
+              <a:t>Lofar 2</a:t>
+            </a:r>
+          </a:p>
+          <a:p>
+            <a:r>
+              <a:rPr sz="800">
+                <a:hlinkClick r:id="rId20"/>
+              </a:rPr>
+              <a:t>Lofar 3</a:t>
+            </a:r>
+          </a:p>
+          <a:p>
+            <a:r>
+              <a:rPr sz="800">
+                <a:hlinkClick r:id="rId21"/>
+              </a:rPr>
+              <a:t>Lofar 4</a:t>
+            </a:r>
+          </a:p>
+        </p:txBody>
+      </p:sp>
+      <p:sp>
+        <p:nvSpPr>
+          <p:cNvPr id="17" name="Rounded Rectangle 16">
+            <a:hlinkClick r:id="rId22"/>
+          </p:cNvPr>
+          <p:cNvSpPr/>
+          <p:nvPr/>
+        </p:nvSpPr>
+        <p:spPr>
+          <a:xfrm>
+            <a:off x="4948732" y="2682240"/>
+            <a:ext cx="2200046" cy="365760"/>
+          </a:xfrm>
+          <a:prstGeom prst="roundRect">
+            <a:avLst/>
+          </a:prstGeom>
+          <a:solidFill>
+            <a:srgbClr val="E8EEF7"/>
+          </a:solidFill>
+          <a:ln>
+            <a:solidFill>
+              <a:srgbClr val="1F3A5F"/>
+            </a:solidFill>
+          </a:ln>
+        </p:spPr>
+        <p:style>
+          <a:lnRef idx="1">
+            <a:schemeClr val="accent1"/>
+          </a:lnRef>
+          <a:fillRef idx="3">
+            <a:schemeClr val="accent1"/>
+          </a:fillRef>
+          <a:effectRef idx="2">
+            <a:schemeClr val="accent1"/>
+          </a:effectRef>
+          <a:fontRef idx="minor">
+            <a:schemeClr val="lt1"/>
+          </a:fontRef>
+        </p:style>
+        <p:txBody>
+          <a:bodyPr rtlCol="0" anchor="ctr" lIns="45720" rIns="45720"/>
+          <a:lstStyle/>
+          <a:p>
+            <a:pPr algn="ctr"/>
+            <a:r>
+              <a:rPr sz="900">
+                <a:solidFill>
+                  <a:srgbClr val="1F3A5F"/>
+                </a:solidFill>
+              </a:rPr>
+              <a:t>Gram 27: Y-wing contact bearing 197, codename Dagobah</a:t>
+            </a:r>
+          </a:p>
+        </p:txBody>
+      </p:sp>
+      <p:sp>
+        <p:nvSpPr>
+          <p:cNvPr id="18" name="TextBox 17"/>
+          <p:cNvSpPr txBox="1"/>
+          <p:nvPr/>
+        </p:nvSpPr>
+        <p:spPr>
+          <a:xfrm>
+            <a:off x="4948732" y="3066288"/>
+            <a:ext cx="2200046" cy="1447800"/>
+          </a:xfrm>
+          <a:prstGeom prst="rect">
+            <a:avLst/>
+          </a:prstGeom>
+          <a:noFill/>
+        </p:spPr>
+        <p:txBody>
+          <a:bodyPr wrap="square">
+            <a:spAutoFit/>
+          </a:bodyPr>
+          <a:lstStyle/>
+          <a:p>
+            <a:r>
+              <a:rPr sz="800">
+                <a:hlinkClick r:id="rId23"/>
+              </a:rPr>
+              <a:t>Lofar 1</a:t>
+            </a:r>
+          </a:p>
+          <a:p>
+            <a:r>
+              <a:rPr sz="800">
+                <a:hlinkClick r:id="rId24"/>
+              </a:rPr>
+              <a:t>Lofar 2</a:t>
+            </a:r>
+          </a:p>
+          <a:p>
+            <a:r>
+              <a:rPr sz="800">
+                <a:hlinkClick r:id="rId25"/>
+              </a:rPr>
+              <a:t>Lofar 3</a:t>
+            </a:r>
+          </a:p>
+        </p:txBody>
+      </p:sp>
+      <p:sp>
+        <p:nvSpPr>
+          <p:cNvPr id="19" name="Rounded Rectangle 18">
+            <a:hlinkClick r:id="rId26"/>
+          </p:cNvPr>
+          <p:cNvSpPr/>
+          <p:nvPr/>
+        </p:nvSpPr>
+        <p:spPr>
+          <a:xfrm>
+            <a:off x="7240219" y="2682240"/>
+            <a:ext cx="2200046" cy="365760"/>
+          </a:xfrm>
+          <a:prstGeom prst="roundRect">
+            <a:avLst/>
+          </a:prstGeom>
+          <a:solidFill>
+            <a:srgbClr val="E8EEF7"/>
+          </a:solidFill>
+          <a:ln>
+            <a:solidFill>
+              <a:srgbClr val="1F3A5F"/>
+            </a:solidFill>
+          </a:ln>
+        </p:spPr>
+        <p:style>
+          <a:lnRef idx="1">
+            <a:schemeClr val="accent1"/>
+          </a:lnRef>
+          <a:fillRef idx="3">
+            <a:schemeClr val="accent1"/>
+          </a:fillRef>
+          <a:effectRef idx="2">
+            <a:schemeClr val="accent1"/>
+          </a:effectRef>
+          <a:fontRef idx="minor">
+            <a:schemeClr val="lt1"/>
+          </a:fontRef>
+        </p:style>
+        <p:txBody>
+          <a:bodyPr rtlCol="0" anchor="ctr" lIns="45720" rIns="45720"/>
+          <a:lstStyle/>
+          <a:p>
+            <a:pPr algn="ctr"/>
+            <a:r>
+              <a:rPr sz="900">
+                <a:solidFill>
+                  <a:srgbClr val="1F3A5F"/>
+                </a:solidFill>
+              </a:rPr>
+              <a:t>Gram 28: FR Nebula-class, Category 1, Tantive</a:t>
+            </a:r>
+          </a:p>
+        </p:txBody>
+      </p:sp>
+      <p:sp>
+        <p:nvSpPr>
+          <p:cNvPr id="20" name="TextBox 19"/>
+          <p:cNvSpPr txBox="1"/>
+          <p:nvPr/>
+        </p:nvSpPr>
+        <p:spPr>
+          <a:xfrm>
+            <a:off x="7240219" y="3066288"/>
+            <a:ext cx="2200046" cy="1447800"/>
+          </a:xfrm>
+          <a:prstGeom prst="rect">
+            <a:avLst/>
+          </a:prstGeom>
+          <a:noFill/>
+        </p:spPr>
+        <p:txBody>
+          <a:bodyPr wrap="square">
+            <a:spAutoFit/>
+          </a:bodyPr>
+          <a:lstStyle/>
+          <a:p>
+            <a:r>
+              <a:rPr sz="800">
+                <a:hlinkClick r:id="rId27"/>
+              </a:rPr>
+              <a:t>Lofar 1</a:t>
+            </a:r>
+          </a:p>
+          <a:p>
+            <a:r>
+              <a:rPr sz="800">
+                <a:hlinkClick r:id="rId28"/>
+              </a:rPr>
+              <a:t>Lofar 2</a:t>
+            </a:r>
+          </a:p>
+          <a:p>
+            <a:r>
+              <a:rPr sz="800">
+                <a:hlinkClick r:id="rId29"/>
+              </a:rPr>
+              <a:t>Lofar 3</a:t>
+            </a:r>
+          </a:p>
+          <a:p>
+            <a:r>
+              <a:rPr sz="800">
+                <a:hlinkClick r:id="rId30"/>
+              </a:rPr>
+              <a:t>Lofar 4</a:t>
+            </a:r>
+          </a:p>
+        </p:txBody>
+      </p:sp>
+      <p:sp>
+        <p:nvSpPr>
+          <p:cNvPr id="21" name="Rounded Rectangle 20">
+            <a:hlinkClick r:id="rId31"/>
+          </p:cNvPr>
+          <p:cNvSpPr/>
+          <p:nvPr/>
+        </p:nvSpPr>
+        <p:spPr>
+          <a:xfrm>
+            <a:off x="9531705" y="2682240"/>
+            <a:ext cx="2200046" cy="365760"/>
+          </a:xfrm>
+          <a:prstGeom prst="roundRect">
+            <a:avLst/>
+          </a:prstGeom>
+          <a:solidFill>
+            <a:srgbClr val="E8EEF7"/>
+          </a:solidFill>
+          <a:ln>
+            <a:solidFill>
+              <a:srgbClr val="1F3A5F"/>
+            </a:solidFill>
+          </a:ln>
+        </p:spPr>
+        <p:style>
+          <a:lnRef idx="1">
+            <a:schemeClr val="accent1"/>
+          </a:lnRef>
+          <a:fillRef idx="3">
+            <a:schemeClr val="accent1"/>
+          </a:fillRef>
+          <a:effectRef idx="2">
+            <a:schemeClr val="accent1"/>
+          </a:effectRef>
+          <a:fontRef idx="minor">
+            <a:schemeClr val="lt1"/>
+          </a:fontRef>
+        </p:style>
+        <p:txBody>
+          <a:bodyPr rtlCol="0" anchor="ctr" lIns="45720" rIns="45720"/>
+          <a:lstStyle/>
+          <a:p>
+            <a:pPr algn="ctr"/>
+            <a:r>
+              <a:rPr sz="900">
+                <a:solidFill>
+                  <a:srgbClr val="1F3A5F"/>
+                </a:solidFill>
+              </a:rPr>
+              <a:t>Gram 29: FR Akira-class, Category 2, Romulus</a:t>
+            </a:r>
+          </a:p>
+        </p:txBody>
+      </p:sp>
+      <p:sp>
+        <p:nvSpPr>
+          <p:cNvPr id="22" name="TextBox 21"/>
+          <p:cNvSpPr txBox="1"/>
+          <p:nvPr/>
+        </p:nvSpPr>
+        <p:spPr>
+          <a:xfrm>
+            <a:off x="9531705" y="3066288"/>
+            <a:ext cx="2200046" cy="1447800"/>
+          </a:xfrm>
+          <a:prstGeom prst="rect">
+            <a:avLst/>
+          </a:prstGeom>
+          <a:noFill/>
+        </p:spPr>
+        <p:txBody>
+          <a:bodyPr wrap="square">
+            <a:spAutoFit/>
+          </a:bodyPr>
+          <a:lstStyle/>
+          <a:p>
+            <a:r>
+              <a:rPr sz="800">
+                <a:hlinkClick r:id="rId32"/>
+              </a:rPr>
+              <a:t>Lofar 1</a:t>
+            </a:r>
+          </a:p>
+          <a:p>
+            <a:r>
+              <a:rPr sz="800">
+                <a:hlinkClick r:id="rId33"/>
+              </a:rPr>
+              <a:t>Lofar 2</a:t>
+            </a:r>
+          </a:p>
+          <a:p>
+            <a:r>
+              <a:rPr sz="800">
+                <a:hlinkClick r:id="rId34"/>
+              </a:rPr>
+              <a:t>Lofar 3</a:t>
+            </a:r>
+          </a:p>
+        </p:txBody>
+      </p:sp>
+      <p:sp>
+        <p:nvSpPr>
+          <p:cNvPr id="23" name="Rounded Rectangle 22">
+            <a:hlinkClick r:id="rId35"/>
+          </p:cNvPr>
+          <p:cNvSpPr/>
+          <p:nvPr/>
+        </p:nvSpPr>
+        <p:spPr>
+          <a:xfrm>
+            <a:off x="365760" y="4632960"/>
+            <a:ext cx="2200046" cy="365760"/>
+          </a:xfrm>
+          <a:prstGeom prst="roundRect">
+            <a:avLst/>
+          </a:prstGeom>
+          <a:solidFill>
+            <a:srgbClr val="E8EEF7"/>
+          </a:solidFill>
+          <a:ln>
+            <a:solidFill>
+              <a:srgbClr val="1F3A5F"/>
+            </a:solidFill>
+          </a:ln>
+        </p:spPr>
+        <p:style>
+          <a:lnRef idx="1">
+            <a:schemeClr val="accent1"/>
+          </a:lnRef>
+          <a:fillRef idx="3">
+            <a:schemeClr val="accent1"/>
+          </a:fillRef>
+          <a:effectRef idx="2">
+            <a:schemeClr val="accent1"/>
+          </a:effectRef>
+          <a:fontRef idx="minor">
+            <a:schemeClr val="lt1"/>
+          </a:fontRef>
+        </p:style>
+        <p:txBody>
+          <a:bodyPr rtlCol="0" anchor="ctr" lIns="45720" rIns="45720"/>
+          <a:lstStyle/>
+          <a:p>
+            <a:pPr algn="ctr"/>
+            <a:r>
+              <a:rPr sz="900">
+                <a:solidFill>
+                  <a:srgbClr val="1F3A5F"/>
+                </a:solidFill>
+              </a:rPr>
+              <a:t>Gram 30: Defiant-class contact bearing 058, codename Naboo</a:t>
+            </a:r>
+          </a:p>
+        </p:txBody>
+      </p:sp>
+      <p:sp>
+        <p:nvSpPr>
+          <p:cNvPr id="24" name="TextBox 23"/>
+          <p:cNvSpPr txBox="1"/>
+          <p:nvPr/>
+        </p:nvSpPr>
+        <p:spPr>
+          <a:xfrm>
+            <a:off x="365760" y="5017008"/>
+            <a:ext cx="2200046" cy="1447800"/>
+          </a:xfrm>
+          <a:prstGeom prst="rect">
+            <a:avLst/>
+          </a:prstGeom>
+          <a:noFill/>
+        </p:spPr>
+        <p:txBody>
+          <a:bodyPr wrap="square">
+            <a:spAutoFit/>
+          </a:bodyPr>
+          <a:lstStyle/>
+          <a:p>
+            <a:r>
+              <a:rPr sz="800">
+                <a:hlinkClick r:id="rId36"/>
+              </a:rPr>
+              <a:t>Lofar 1</a:t>
+            </a:r>
+          </a:p>
+          <a:p>
+            <a:r>
+              <a:rPr sz="800">
+                <a:hlinkClick r:id="rId37"/>
+              </a:rPr>
+              <a:t>Lofar 2</a:t>
+            </a:r>
+          </a:p>
+          <a:p>
+            <a:r>
+              <a:rPr sz="800">
+                <a:hlinkClick r:id="rId38"/>
+              </a:rPr>
+              <a:t>Lofar 3</a:t>
+            </a:r>
+          </a:p>
+          <a:p>
+            <a:r>
+              <a:rPr sz="800">
+                <a:hlinkClick r:id="rId39"/>
+              </a:rPr>
+              <a:t>Lofar 4</a:t>
+            </a:r>
+          </a:p>
+        </p:txBody>
+      </p:sp>
+      <p:sp>
+        <p:nvSpPr>
+          <p:cNvPr id="25" name="Rounded Rectangle 24">
+            <a:hlinkClick r:id="rId40"/>
+          </p:cNvPr>
+          <p:cNvSpPr/>
+          <p:nvPr/>
+        </p:nvSpPr>
+        <p:spPr>
+          <a:xfrm>
+            <a:off x="2657246" y="4632960"/>
+            <a:ext cx="2200046" cy="365760"/>
+          </a:xfrm>
+          <a:prstGeom prst="roundRect">
+            <a:avLst/>
+          </a:prstGeom>
+          <a:solidFill>
+            <a:srgbClr val="E8EEF7"/>
+          </a:solidFill>
+          <a:ln>
+            <a:solidFill>
+              <a:srgbClr val="1F3A5F"/>
+            </a:solidFill>
+          </a:ln>
+        </p:spPr>
+        <p:style>
+          <a:lnRef idx="1">
+            <a:schemeClr val="accent1"/>
+          </a:lnRef>
+          <a:fillRef idx="3">
+            <a:schemeClr val="accent1"/>
+          </a:fillRef>
+          <a:effectRef idx="2">
+            <a:schemeClr val="accent1"/>
+          </a:effectRef>
+          <a:fontRef idx="minor">
+            <a:schemeClr val="lt1"/>
+          </a:fontRef>
+        </p:style>
+        <p:txBody>
+          <a:bodyPr rtlCol="0" anchor="ctr" lIns="45720" rIns="45720"/>
+          <a:lstStyle/>
+          <a:p>
+            <a:pPr algn="ctr"/>
+            <a:r>
+              <a:rPr sz="900">
+                <a:solidFill>
+                  <a:srgbClr val="1F3A5F"/>
+                </a:solidFill>
+              </a:rPr>
+              <a:t>Gram 31: Imperial-class contact bearing 170, codename Tantive</a:t>
+            </a:r>
+          </a:p>
+        </p:txBody>
+      </p:sp>
+      <p:sp>
+        <p:nvSpPr>
+          <p:cNvPr id="26" name="TextBox 25"/>
+          <p:cNvSpPr txBox="1"/>
+          <p:nvPr/>
+        </p:nvSpPr>
+        <p:spPr>
+          <a:xfrm>
+            <a:off x="2657246" y="5017008"/>
+            <a:ext cx="2200046" cy="1447800"/>
+          </a:xfrm>
+          <a:prstGeom prst="rect">
+            <a:avLst/>
+          </a:prstGeom>
+          <a:noFill/>
+        </p:spPr>
+        <p:txBody>
+          <a:bodyPr wrap="square">
+            <a:spAutoFit/>
+          </a:bodyPr>
+          <a:lstStyle/>
+          <a:p>
+            <a:r>
+              <a:rPr sz="800">
+                <a:hlinkClick r:id="rId41"/>
+              </a:rPr>
+              <a:t>Lofar 1</a:t>
+            </a:r>
+          </a:p>
+          <a:p>
+            <a:r>
+              <a:rPr sz="800">
+                <a:hlinkClick r:id="rId42"/>
+              </a:rPr>
+              <a:t>Lofar 2</a:t>
+            </a:r>
+          </a:p>
+        </p:txBody>
+      </p:sp>
+      <p:sp>
+        <p:nvSpPr>
+          <p:cNvPr id="27" name="Rounded Rectangle 26">
+            <a:hlinkClick r:id="rId43"/>
+          </p:cNvPr>
+          <p:cNvSpPr/>
+          <p:nvPr/>
+        </p:nvSpPr>
+        <p:spPr>
+          <a:xfrm>
+            <a:off x="4948732" y="4632960"/>
+            <a:ext cx="2200046" cy="365760"/>
+          </a:xfrm>
+          <a:prstGeom prst="roundRect">
+            <a:avLst/>
+          </a:prstGeom>
+          <a:solidFill>
+            <a:srgbClr val="E8EEF7"/>
+          </a:solidFill>
+          <a:ln>
+            <a:solidFill>
+              <a:srgbClr val="1F3A5F"/>
+            </a:solidFill>
+          </a:ln>
+        </p:spPr>
+        <p:style>
+          <a:lnRef idx="1">
+            <a:schemeClr val="accent1"/>
+          </a:lnRef>
+          <a:fillRef idx="3">
+            <a:schemeClr val="accent1"/>
+          </a:fillRef>
+          <a:effectRef idx="2">
+            <a:schemeClr val="accent1"/>
+          </a:effectRef>
+          <a:fontRef idx="minor">
+            <a:schemeClr val="lt1"/>
+          </a:fontRef>
+        </p:style>
+        <p:txBody>
+          <a:bodyPr rtlCol="0" anchor="ctr" lIns="45720" rIns="45720"/>
+          <a:lstStyle/>
+          <a:p>
+            <a:pPr algn="ctr"/>
+            <a:r>
+              <a:rPr sz="900">
+                <a:solidFill>
+                  <a:srgbClr val="1F3A5F"/>
+                </a:solidFill>
+              </a:rPr>
+              <a:t>Gram 32: FR A-wing, Category 4, Naboo</a:t>
+            </a:r>
+          </a:p>
+        </p:txBody>
+      </p:sp>
+      <p:sp>
+        <p:nvSpPr>
+          <p:cNvPr id="28" name="TextBox 27"/>
+          <p:cNvSpPr txBox="1"/>
+          <p:nvPr/>
+        </p:nvSpPr>
+        <p:spPr>
+          <a:xfrm>
+            <a:off x="4948732" y="5017008"/>
+            <a:ext cx="2200046" cy="1447800"/>
+          </a:xfrm>
+          <a:prstGeom prst="rect">
+            <a:avLst/>
+          </a:prstGeom>
+          <a:noFill/>
+        </p:spPr>
+        <p:txBody>
+          <a:bodyPr wrap="square">
+            <a:spAutoFit/>
+          </a:bodyPr>
+          <a:lstStyle/>
+          <a:p>
+            <a:r>
+              <a:rPr sz="800">
+                <a:hlinkClick r:id="rId44"/>
+              </a:rPr>
+              <a:t>Lofar 1</a:t>
+            </a:r>
+          </a:p>
+          <a:p>
+            <a:r>
+              <a:rPr sz="800">
+                <a:hlinkClick r:id="rId45"/>
+              </a:rPr>
+              <a:t>Lofar 2</a:t>
+            </a:r>
+          </a:p>
+        </p:txBody>
+      </p:sp>
+      <p:sp>
+        <p:nvSpPr>
+          <p:cNvPr id="29" name="Rounded Rectangle 28">
+            <a:hlinkClick r:id="rId46"/>
+          </p:cNvPr>
+          <p:cNvSpPr/>
+          <p:nvPr/>
+        </p:nvSpPr>
+        <p:spPr>
+          <a:xfrm>
+            <a:off x="7240219" y="4632960"/>
+            <a:ext cx="2200046" cy="365760"/>
+          </a:xfrm>
+          <a:prstGeom prst="roundRect">
+            <a:avLst/>
+          </a:prstGeom>
+          <a:solidFill>
+            <a:srgbClr val="E8EEF7"/>
+          </a:solidFill>
+          <a:ln>
+            <a:solidFill>
+              <a:srgbClr val="1F3A5F"/>
+            </a:solidFill>
+          </a:ln>
+        </p:spPr>
+        <p:style>
+          <a:lnRef idx="1">
+            <a:schemeClr val="accent1"/>
+          </a:lnRef>
+          <a:fillRef idx="3">
+            <a:schemeClr val="accent1"/>
+          </a:fillRef>
+          <a:effectRef idx="2">
+            <a:schemeClr val="accent1"/>
+          </a:effectRef>
+          <a:fontRef idx="minor">
+            <a:schemeClr val="lt1"/>
+          </a:fontRef>
+        </p:style>
+        <p:txBody>
+          <a:bodyPr rtlCol="0" anchor="ctr" lIns="45720" rIns="45720"/>
+          <a:lstStyle/>
+          <a:p>
+            <a:pPr algn="ctr"/>
+            <a:r>
+              <a:rPr sz="900">
+                <a:solidFill>
+                  <a:srgbClr val="1F3A5F"/>
+                </a:solidFill>
+              </a:rPr>
+              <a:t>Gram 33: FR Rebel One, Category 3, Tatooine</a:t>
+            </a:r>
+          </a:p>
+        </p:txBody>
+      </p:sp>
+      <p:sp>
+        <p:nvSpPr>
+          <p:cNvPr id="30" name="TextBox 29"/>
+          <p:cNvSpPr txBox="1"/>
+          <p:nvPr/>
+        </p:nvSpPr>
+        <p:spPr>
+          <a:xfrm>
+            <a:off x="7240219" y="5017008"/>
+            <a:ext cx="2200046" cy="1447800"/>
+          </a:xfrm>
+          <a:prstGeom prst="rect">
+            <a:avLst/>
+          </a:prstGeom>
+          <a:noFill/>
+        </p:spPr>
+        <p:txBody>
+          <a:bodyPr wrap="square">
+            <a:spAutoFit/>
+          </a:bodyPr>
+          <a:lstStyle/>
+          <a:p>
+            <a:r>
+              <a:rPr sz="800">
+                <a:hlinkClick r:id="rId47"/>
+              </a:rPr>
+              <a:t>Lofar 1</a:t>
+            </a:r>
+          </a:p>
+          <a:p>
+            <a:r>
+              <a:rPr sz="800">
+                <a:hlinkClick r:id="rId48"/>
+              </a:rPr>
+              <a:t>Lofar 2</a:t>
+            </a:r>
+          </a:p>
+          <a:p>
+            <a:r>
+              <a:rPr sz="800">
+                <a:hlinkClick r:id="rId49"/>
+              </a:rPr>
+              <a:t>Lofar 3</a:t>
+            </a:r>
+          </a:p>
+        </p:txBody>
+      </p:sp>
+      <p:sp>
+        <p:nvSpPr>
+          <p:cNvPr id="31" name="Rounded Rectangle 30">
+            <a:hlinkClick r:id="rId50"/>
+          </p:cNvPr>
+          <p:cNvSpPr/>
+          <p:nvPr/>
+        </p:nvSpPr>
+        <p:spPr>
+          <a:xfrm>
+            <a:off x="9531705" y="4632960"/>
+            <a:ext cx="2200046" cy="365760"/>
+          </a:xfrm>
+          <a:prstGeom prst="roundRect">
+            <a:avLst/>
+          </a:prstGeom>
+          <a:solidFill>
+            <a:srgbClr val="E8EEF7"/>
+          </a:solidFill>
+          <a:ln>
+            <a:solidFill>
+              <a:srgbClr val="1F3A5F"/>
+            </a:solidFill>
+          </a:ln>
+        </p:spPr>
+        <p:style>
+          <a:lnRef idx="1">
+            <a:schemeClr val="accent1"/>
+          </a:lnRef>
+          <a:fillRef idx="3">
+            <a:schemeClr val="accent1"/>
+          </a:fillRef>
+          <a:effectRef idx="2">
+            <a:schemeClr val="accent1"/>
+          </a:effectRef>
+          <a:fontRef idx="minor">
+            <a:schemeClr val="lt1"/>
+          </a:fontRef>
+        </p:style>
+        <p:txBody>
+          <a:bodyPr rtlCol="0" anchor="ctr" lIns="45720" rIns="45720"/>
+          <a:lstStyle/>
+          <a:p>
+            <a:pPr algn="ctr"/>
+            <a:r>
+              <a:rPr sz="900">
+                <a:solidFill>
+                  <a:srgbClr val="1F3A5F"/>
+                </a:solidFill>
+              </a:rPr>
+              <a:t>Gram 36: Rebel One contact bearing 103, codename Tatooine</a:t>
+            </a:r>
+          </a:p>
+        </p:txBody>
+      </p:sp>
+      <p:sp>
+        <p:nvSpPr>
+          <p:cNvPr id="32" name="TextBox 31"/>
+          <p:cNvSpPr txBox="1"/>
+          <p:nvPr/>
+        </p:nvSpPr>
+        <p:spPr>
+          <a:xfrm>
+            <a:off x="9531705" y="5017008"/>
+            <a:ext cx="2200046" cy="1447800"/>
+          </a:xfrm>
+          <a:prstGeom prst="rect">
+            <a:avLst/>
+          </a:prstGeom>
+          <a:noFill/>
+        </p:spPr>
+        <p:txBody>
+          <a:bodyPr wrap="square">
+            <a:spAutoFit/>
+          </a:bodyPr>
+          <a:lstStyle/>
+          <a:p>
+            <a:r>
+              <a:rPr sz="800">
                 <a:hlinkClick r:id="rId51"/>
               </a:rPr>
               <a:t>Lofar 1</a:t>
@@ -6057,6 +6145,92 @@
                 <a:hlinkClick r:id="rId52"/>
               </a:rPr>
               <a:t>Lofar 2</a:t>
+            </a:r>
+          </a:p>
+        </p:txBody>
+      </p:sp>
+    </p:spTree>
+  </p:cSld>
+  <p:clrMapOvr>
+    <a:masterClrMapping/>
+  </p:clrMapOvr>
+</p:sld>
+</file>
+
+<file path=ppt/slides/slide4.xml><?xml version="1.0" encoding="utf-8"?>
+<p:sld xmlns:a="http://schemas.openxmlformats.org/drawingml/2006/main" xmlns:p="http://schemas.openxmlformats.org/presentationml/2006/main" xmlns:r="http://schemas.openxmlformats.org/officeDocument/2006/relationships">
+  <p:cSld>
+    <p:spTree>
+      <p:nvGrpSpPr>
+        <p:cNvPr id="1" name=""/>
+        <p:cNvGrpSpPr/>
+        <p:nvPr/>
+      </p:nvGrpSpPr>
+      <p:grpSpPr/>
+      <p:sp>
+        <p:nvSpPr>
+          <p:cNvPr id="2" name="TextBox 1"/>
+          <p:cNvSpPr txBox="1"/>
+          <p:nvPr/>
+        </p:nvSpPr>
+        <p:spPr>
+          <a:xfrm>
+            <a:off x="914400" y="2377440"/>
+            <a:ext cx="10360152" cy="1280160"/>
+          </a:xfrm>
+          <a:prstGeom prst="rect">
+            <a:avLst/>
+          </a:prstGeom>
+          <a:noFill/>
+        </p:spPr>
+        <p:txBody>
+          <a:bodyPr wrap="square">
+            <a:spAutoFit/>
+          </a:bodyPr>
+          <a:lstStyle/>
+          <a:p>
+            <a:pPr algn="ctr"/>
+            <a:r>
+              <a:rPr sz="4000" b="1">
+                <a:solidFill>
+                  <a:srgbClr val="1F3A5F"/>
+                </a:solidFill>
+              </a:rPr>
+              <a:t>End of Instructor Progress Test 1 Grams</a:t>
+            </a:r>
+          </a:p>
+        </p:txBody>
+      </p:sp>
+      <p:sp>
+        <p:nvSpPr>
+          <p:cNvPr id="3" name="TextBox 2"/>
+          <p:cNvSpPr txBox="1"/>
+          <p:nvPr/>
+        </p:nvSpPr>
+        <p:spPr>
+          <a:xfrm>
+            <a:off x="914400" y="3840480"/>
+            <a:ext cx="10360152" cy="731520"/>
+          </a:xfrm>
+          <a:prstGeom prst="rect">
+            <a:avLst/>
+          </a:prstGeom>
+          <a:noFill/>
+        </p:spPr>
+        <p:txBody>
+          <a:bodyPr wrap="none">
+            <a:spAutoFit/>
+          </a:bodyPr>
+          <a:lstStyle/>
+          <a:p>
+            <a:pPr algn="ctr"/>
+            <a:r>
+              <a:rPr sz="2400">
+                <a:solidFill>
+                  <a:srgbClr val="1F3A5F"/>
+                </a:solidFill>
+              </a:rPr>
+              <a:t>Instructor Version</a:t>
             </a:r>
           </a:p>
         </p:txBody>

--- a/source/Instructor Progress Test 1 Grams/Instructor Progress Test 1 Grams.pptx
+++ b/source/Instructor Progress Test 1 Grams/Instructor Progress Test 1 Grams.pptx
@@ -3278,7 +3278,7 @@
                   <a:srgbClr val="1F3A5F"/>
                 </a:solidFill>
               </a:rPr>
-              <a:t>Gram 1: FR Prometheus, Category 1, Bespin</a:t>
+              <a:t>Gram 3: FR Constitution-class, Category 2, Endor</a:t>
             </a:r>
           </a:p>
         </p:txBody>
@@ -3372,7 +3372,7 @@
                   <a:srgbClr val="1F3A5F"/>
                 </a:solidFill>
               </a:rPr>
-              <a:t>Gram 3: FR Ghost, Category 1, Tantive</a:t>
+              <a:t>Gram 7: FR Defiant, Category 1, Vulcan</a:t>
             </a:r>
           </a:p>
         </p:txBody>
@@ -3458,7 +3458,7 @@
                   <a:srgbClr val="1F3A5F"/>
                 </a:solidFill>
               </a:rPr>
-              <a:t>Gram 4: Enterprise contact bearing 291, codename Hoth</a:t>
+              <a:t>Gram 11: FR Voyager, Category 3, Risa (mark II)</a:t>
             </a:r>
           </a:p>
         </p:txBody>
@@ -3492,12 +3492,28 @@
               <a:t>Lofar 1</a:t>
             </a:r>
           </a:p>
+          <a:p>
+            <a:r>
+              <a:rPr sz="800">
+                <a:hlinkClick r:id="rId9"/>
+              </a:rPr>
+              <a:t>Lofar 2</a:t>
+            </a:r>
+          </a:p>
+          <a:p>
+            <a:r>
+              <a:rPr sz="800">
+                <a:hlinkClick r:id="rId10"/>
+              </a:rPr>
+              <a:t>Lofar 3</a:t>
+            </a:r>
+          </a:p>
         </p:txBody>
       </p:sp>
       <p:sp>
         <p:nvSpPr>
           <p:cNvPr id="9" name="Rounded Rectangle 8">
-            <a:hlinkClick r:id="rId9"/>
+            <a:hlinkClick r:id="rId11"/>
           </p:cNvPr>
           <p:cNvSpPr/>
           <p:nvPr/>
@@ -3544,7 +3560,7 @@
                   <a:srgbClr val="1F3A5F"/>
                 </a:solidFill>
               </a:rPr>
-              <a:t>Gram 5: FR Enterprise, Category 4, Bespin</a:t>
+              <a:t>Gram 1: FR Prometheus, Category 1, Bespin</a:t>
             </a:r>
           </a:p>
         </p:txBody>
@@ -3573,17 +3589,25 @@
           <a:p>
             <a:r>
               <a:rPr sz="800">
-                <a:hlinkClick r:id="rId10"/>
+                <a:hlinkClick r:id="rId12"/>
               </a:rPr>
               <a:t>Lofar 1</a:t>
             </a:r>
           </a:p>
+          <a:p>
+            <a:r>
+              <a:rPr sz="800">
+                <a:hlinkClick r:id="rId13"/>
+              </a:rPr>
+              <a:t>Lofar 2</a:t>
+            </a:r>
+          </a:p>
         </p:txBody>
       </p:sp>
       <p:sp>
         <p:nvSpPr>
           <p:cNvPr id="11" name="Rounded Rectangle 10">
-            <a:hlinkClick r:id="rId11"/>
+            <a:hlinkClick r:id="rId14"/>
           </p:cNvPr>
           <p:cNvSpPr/>
           <p:nvPr/>
@@ -3630,7 +3654,7 @@
                   <a:srgbClr val="1F3A5F"/>
                 </a:solidFill>
               </a:rPr>
-              <a:t>Gram 6: FR Akira-class, Category 4, Hoth</a:t>
+              <a:t>Gram 4: Enterprise contact bearing 291, codename Hoth</a:t>
             </a:r>
           </a:p>
         </p:txBody>
@@ -3659,7 +3683,7 @@
           <a:p>
             <a:r>
               <a:rPr sz="800">
-                <a:hlinkClick r:id="rId12"/>
+                <a:hlinkClick r:id="rId15"/>
               </a:rPr>
               <a:t>Lofar 1</a:t>
             </a:r>
@@ -3669,7 +3693,7 @@
       <p:sp>
         <p:nvSpPr>
           <p:cNvPr id="13" name="Rounded Rectangle 12">
-            <a:hlinkClick r:id="rId13"/>
+            <a:hlinkClick r:id="rId16"/>
           </p:cNvPr>
           <p:cNvSpPr/>
           <p:nvPr/>
@@ -3716,7 +3740,7 @@
                   <a:srgbClr val="1F3A5F"/>
                 </a:solidFill>
               </a:rPr>
-              <a:t>Gram 7: FR Rebel One, Category 1, Naboo</a:t>
+              <a:t>Gram 5: FR Enterprise, Category 4, Bespin</a:t>
             </a:r>
           </a:p>
         </p:txBody>
@@ -3745,25 +3769,17 @@
           <a:p>
             <a:r>
               <a:rPr sz="800">
-                <a:hlinkClick r:id="rId14"/>
+                <a:hlinkClick r:id="rId17"/>
               </a:rPr>
               <a:t>Lofar 1</a:t>
             </a:r>
           </a:p>
-          <a:p>
-            <a:r>
-              <a:rPr sz="800">
-                <a:hlinkClick r:id="rId15"/>
-              </a:rPr>
-              <a:t>Lofar 2</a:t>
-            </a:r>
-          </a:p>
         </p:txBody>
       </p:sp>
       <p:sp>
         <p:nvSpPr>
           <p:cNvPr id="15" name="Rounded Rectangle 14">
-            <a:hlinkClick r:id="rId16"/>
+            <a:hlinkClick r:id="rId18"/>
           </p:cNvPr>
           <p:cNvSpPr/>
           <p:nvPr/>
@@ -3810,7 +3826,7 @@
                   <a:srgbClr val="1F3A5F"/>
                 </a:solidFill>
               </a:rPr>
-              <a:t>Gram 8: FR TIE Bomber, Category 4, Kronos</a:t>
+              <a:t>Gram 6: FR Akira-class, Category 4, Hoth</a:t>
             </a:r>
           </a:p>
         </p:txBody>
@@ -3839,7 +3855,7 @@
           <a:p>
             <a:r>
               <a:rPr sz="800">
-                <a:hlinkClick r:id="rId17"/>
+                <a:hlinkClick r:id="rId19"/>
               </a:rPr>
               <a:t>Lofar 1</a:t>
             </a:r>
@@ -3849,7 +3865,7 @@
       <p:sp>
         <p:nvSpPr>
           <p:cNvPr id="17" name="Rounded Rectangle 16">
-            <a:hlinkClick r:id="rId18"/>
+            <a:hlinkClick r:id="rId20"/>
           </p:cNvPr>
           <p:cNvSpPr/>
           <p:nvPr/>
@@ -3896,7 +3912,7 @@
                   <a:srgbClr val="1F3A5F"/>
                 </a:solidFill>
               </a:rPr>
-              <a:t>Gram 9: FR Star Destroyer, Category 1, Tatooine</a:t>
+              <a:t>Gram 8: FR TIE Bomber, Category 4, Kronos</a:t>
             </a:r>
           </a:p>
         </p:txBody>
@@ -3925,7 +3941,7 @@
           <a:p>
             <a:r>
               <a:rPr sz="800">
-                <a:hlinkClick r:id="rId19"/>
+                <a:hlinkClick r:id="rId21"/>
               </a:rPr>
               <a:t>Lofar 1</a:t>
             </a:r>
@@ -3935,7 +3951,7 @@
       <p:sp>
         <p:nvSpPr>
           <p:cNvPr id="19" name="Rounded Rectangle 18">
-            <a:hlinkClick r:id="rId20"/>
+            <a:hlinkClick r:id="rId22"/>
           </p:cNvPr>
           <p:cNvSpPr/>
           <p:nvPr/>
@@ -3982,7 +3998,7 @@
                   <a:srgbClr val="1F3A5F"/>
                 </a:solidFill>
               </a:rPr>
-              <a:t>Gram 10: FR Stargazer, Category 3, Risa</a:t>
+              <a:t>Gram 9: FR Star Destroyer, Category 1, Tatooine</a:t>
             </a:r>
           </a:p>
         </p:txBody>
@@ -4011,41 +4027,17 @@
           <a:p>
             <a:r>
               <a:rPr sz="800">
-                <a:hlinkClick r:id="rId21"/>
+                <a:hlinkClick r:id="rId23"/>
               </a:rPr>
               <a:t>Lofar 1</a:t>
             </a:r>
           </a:p>
-          <a:p>
-            <a:r>
-              <a:rPr sz="800">
-                <a:hlinkClick r:id="rId22"/>
-              </a:rPr>
-              <a:t>Lofar 2</a:t>
-            </a:r>
-          </a:p>
-          <a:p>
-            <a:r>
-              <a:rPr sz="800">
-                <a:hlinkClick r:id="rId23"/>
-              </a:rPr>
-              <a:t>Lofar 3</a:t>
-            </a:r>
-          </a:p>
-          <a:p>
-            <a:r>
-              <a:rPr sz="800">
-                <a:hlinkClick r:id="rId24"/>
-              </a:rPr>
-              <a:t>Lofar 4</a:t>
-            </a:r>
-          </a:p>
         </p:txBody>
       </p:sp>
       <p:sp>
         <p:nvSpPr>
           <p:cNvPr id="21" name="Rounded Rectangle 20">
-            <a:hlinkClick r:id="rId25"/>
+            <a:hlinkClick r:id="rId24"/>
           </p:cNvPr>
           <p:cNvSpPr/>
           <p:nvPr/>
@@ -4092,7 +4084,7 @@
                   <a:srgbClr val="1F3A5F"/>
                 </a:solidFill>
               </a:rPr>
-              <a:t>Gram 11: FR Imperial-class, Category 2, Caprica</a:t>
+              <a:t>Gram 10: FR Stargazer, Category 3, Risa</a:t>
             </a:r>
           </a:p>
         </p:txBody>
@@ -4121,9 +4113,17 @@
           <a:p>
             <a:r>
               <a:rPr sz="800">
+                <a:hlinkClick r:id="rId25"/>
+              </a:rPr>
+              <a:t>Lofar 1</a:t>
+            </a:r>
+          </a:p>
+          <a:p>
+            <a:r>
+              <a:rPr sz="800">
                 <a:hlinkClick r:id="rId26"/>
               </a:rPr>
-              <a:t>Lofar 1</a:t>
+              <a:t>Lofar 2</a:t>
             </a:r>
           </a:p>
           <a:p>
@@ -4131,7 +4131,15 @@
               <a:rPr sz="800">
                 <a:hlinkClick r:id="rId27"/>
               </a:rPr>
-              <a:t>Lofar 2</a:t>
+              <a:t>Lofar 3</a:t>
+            </a:r>
+          </a:p>
+          <a:p>
+            <a:r>
+              <a:rPr sz="800">
+                <a:hlinkClick r:id="rId28"/>
+              </a:rPr>
+              <a:t>Lofar 4</a:t>
             </a:r>
           </a:p>
         </p:txBody>
@@ -4139,7 +4147,7 @@
       <p:sp>
         <p:nvSpPr>
           <p:cNvPr id="23" name="Rounded Rectangle 22">
-            <a:hlinkClick r:id="rId28"/>
+            <a:hlinkClick r:id="rId29"/>
           </p:cNvPr>
           <p:cNvSpPr/>
           <p:nvPr/>
@@ -4215,7 +4223,7 @@
           <a:p>
             <a:r>
               <a:rPr sz="800">
-                <a:hlinkClick r:id="rId29"/>
+                <a:hlinkClick r:id="rId30"/>
               </a:rPr>
               <a:t>Lofar 1</a:t>
             </a:r>
@@ -4225,7 +4233,7 @@
       <p:sp>
         <p:nvSpPr>
           <p:cNvPr id="25" name="Rounded Rectangle 24">
-            <a:hlinkClick r:id="rId30"/>
+            <a:hlinkClick r:id="rId31"/>
           </p:cNvPr>
           <p:cNvSpPr/>
           <p:nvPr/>
@@ -4301,17 +4309,9 @@
           <a:p>
             <a:r>
               <a:rPr sz="800">
-                <a:hlinkClick r:id="rId31"/>
+                <a:hlinkClick r:id="rId32"/>
               </a:rPr>
               <a:t>Lofar 1</a:t>
-            </a:r>
-          </a:p>
-          <a:p>
-            <a:r>
-              <a:rPr sz="800">
-                <a:hlinkClick r:id="rId32"/>
-              </a:rPr>
-              <a:t>Lofar 2</a:t>
             </a:r>
           </a:p>
           <a:p>
@@ -4319,7 +4319,7 @@
               <a:rPr sz="800">
                 <a:hlinkClick r:id="rId33"/>
               </a:rPr>
-              <a:t>Lofar 3</a:t>
+              <a:t>Lofar 2</a:t>
             </a:r>
           </a:p>
           <a:p>
@@ -4327,6 +4327,14 @@
               <a:rPr sz="800">
                 <a:hlinkClick r:id="rId34"/>
               </a:rPr>
+              <a:t>Lofar 3</a:t>
+            </a:r>
+          </a:p>
+          <a:p>
+            <a:r>
+              <a:rPr sz="800">
+                <a:hlinkClick r:id="rId35"/>
+              </a:rPr>
               <a:t>Lofar 4</a:t>
             </a:r>
           </a:p>
@@ -4335,7 +4343,7 @@
       <p:sp>
         <p:nvSpPr>
           <p:cNvPr id="27" name="Rounded Rectangle 26">
-            <a:hlinkClick r:id="rId35"/>
+            <a:hlinkClick r:id="rId36"/>
           </p:cNvPr>
           <p:cNvSpPr/>
           <p:nvPr/>
@@ -4411,7 +4419,7 @@
           <a:p>
             <a:r>
               <a:rPr sz="800">
-                <a:hlinkClick r:id="rId36"/>
+                <a:hlinkClick r:id="rId37"/>
               </a:rPr>
               <a:t>Lofar 1</a:t>
             </a:r>
@@ -4419,7 +4427,7 @@
           <a:p>
             <a:r>
               <a:rPr sz="800">
-                <a:hlinkClick r:id="rId37"/>
+                <a:hlinkClick r:id="rId38"/>
               </a:rPr>
               <a:t>Lofar 2</a:t>
             </a:r>
@@ -4429,7 +4437,7 @@
       <p:sp>
         <p:nvSpPr>
           <p:cNvPr id="29" name="Rounded Rectangle 28">
-            <a:hlinkClick r:id="rId38"/>
+            <a:hlinkClick r:id="rId39"/>
           </p:cNvPr>
           <p:cNvSpPr/>
           <p:nvPr/>
@@ -4505,17 +4513,9 @@
           <a:p>
             <a:r>
               <a:rPr sz="800">
-                <a:hlinkClick r:id="rId39"/>
+                <a:hlinkClick r:id="rId40"/>
               </a:rPr>
               <a:t>Lofar 1</a:t>
-            </a:r>
-          </a:p>
-          <a:p>
-            <a:r>
-              <a:rPr sz="800">
-                <a:hlinkClick r:id="rId40"/>
-              </a:rPr>
-              <a:t>Lofar 2</a:t>
             </a:r>
           </a:p>
           <a:p>
@@ -4523,7 +4523,7 @@
               <a:rPr sz="800">
                 <a:hlinkClick r:id="rId41"/>
               </a:rPr>
-              <a:t>Lofar 3</a:t>
+              <a:t>Lofar 2</a:t>
             </a:r>
           </a:p>
           <a:p>
@@ -4531,6 +4531,14 @@
               <a:rPr sz="800">
                 <a:hlinkClick r:id="rId42"/>
               </a:rPr>
+              <a:t>Lofar 3</a:t>
+            </a:r>
+          </a:p>
+          <a:p>
+            <a:r>
+              <a:rPr sz="800">
+                <a:hlinkClick r:id="rId43"/>
+              </a:rPr>
               <a:t>Lofar 4</a:t>
             </a:r>
           </a:p>
@@ -4539,7 +4547,7 @@
       <p:sp>
         <p:nvSpPr>
           <p:cNvPr id="31" name="Rounded Rectangle 30">
-            <a:hlinkClick r:id="rId43"/>
+            <a:hlinkClick r:id="rId44"/>
           </p:cNvPr>
           <p:cNvSpPr/>
           <p:nvPr/>
@@ -4615,7 +4623,7 @@
           <a:p>
             <a:r>
               <a:rPr sz="800">
-                <a:hlinkClick r:id="rId44"/>
+                <a:hlinkClick r:id="rId45"/>
               </a:rPr>
               <a:t>Lofar 1</a:t>
             </a:r>
